--- a/submission/cluster2_digital_first_round_20260828/presentation/cluster2_digital_first_round_20260828.pptx
+++ b/submission/cluster2_digital_first_round_20260828/presentation/cluster2_digital_first_round_20260828.pptx
@@ -3179,7 +3179,7 @@
               </a:defRPr>
             </a:pPr>
             <a:r>
-              <a:t>AER의 네 병목을 네 구조로 완화</a:t>
+              <a:t>AER 손실을 24.42배 줄인 구조</a:t>
             </a:r>
           </a:p>
         </p:txBody>
@@ -3272,7 +3272,7 @@
         <p:spPr>
           <a:xfrm>
             <a:off x="1225296" y="2560320"/>
-            <a:ext cx="640080" cy="237744"/>
+            <a:ext cx="2194560" cy="237744"/>
           </a:xfrm>
           <a:prstGeom prst="rect">
             <a:avLst/>
@@ -3294,7 +3294,7 @@
               </a:defRPr>
             </a:pPr>
             <a:r>
-              <a:t>문제</a:t>
+              <a:t>기본 CLUSTER2</a:t>
             </a:r>
           </a:p>
         </p:txBody>
@@ -3330,7 +3330,7 @@
               </a:defRPr>
             </a:pPr>
             <a:r>
-              <a:t>4 bottlenecks</a:t>
+              <a:t>11.52%</a:t>
             </a:r>
           </a:p>
         </p:txBody>
@@ -3447,7 +3447,7 @@
               </a:defRPr>
             </a:pPr>
             <a:r>
-              <a:t>4 RTL IDEAS</a:t>
+              <a:t>STEAL + DEPTH-2</a:t>
             </a:r>
           </a:p>
         </p:txBody>
@@ -3475,7 +3475,7 @@
           <a:lstStyle/>
           <a:p>
             <a:pPr algn="ctr">
-              <a:defRPr sz="2100" b="1">
+              <a:defRPr sz="2000" b="1">
                 <a:solidFill>
                   <a:srgbClr val="F6F9FC"/>
                 </a:solidFill>
@@ -3483,11 +3483,11 @@
               </a:defRPr>
             </a:pPr>
             <a:r>
-              <a:t>FIFO · bitmap</a:t>
+              <a:t>재발화 흡수</a:t>
             </a:r>
             <a:br/>
             <a:r>
-              <a:t>steal · polarity</a:t>
+              <a:t>idle lane 재사용</a:t>
             </a:r>
           </a:p>
         </p:txBody>
@@ -3602,7 +3602,7 @@
               </a:defRPr>
             </a:pPr>
             <a:r>
-              <a:t>최종 RTL</a:t>
+              <a:t>STEAL_BUF</a:t>
             </a:r>
           </a:p>
         </p:txBody>
@@ -3615,8 +3615,8 @@
         </p:nvSpPr>
         <p:spPr>
           <a:xfrm>
-            <a:off x="9802368" y="2852928"/>
-            <a:ext cx="1280160" cy="438912"/>
+            <a:off x="9765792" y="2852928"/>
+            <a:ext cx="1353312" cy="438912"/>
           </a:xfrm>
           <a:prstGeom prst="rect">
             <a:avLst/>
@@ -3630,7 +3630,7 @@
           <a:lstStyle/>
           <a:p>
             <a:pPr algn="ctr">
-              <a:defRPr sz="2700" b="1">
+              <a:defRPr sz="2500" b="1">
                 <a:solidFill>
                   <a:srgbClr val="071627"/>
                 </a:solidFill>
@@ -3638,7 +3638,7 @@
               </a:defRPr>
             </a:pPr>
             <a:r>
-              <a:t>8,503</a:t>
+              <a:t>0.47%</a:t>
             </a:r>
           </a:p>
         </p:txBody>
@@ -3651,8 +3651,8 @@
         </p:nvSpPr>
         <p:spPr>
           <a:xfrm>
-            <a:off x="9838944" y="3364992"/>
-            <a:ext cx="1207008" cy="182880"/>
+            <a:off x="9765792" y="3364992"/>
+            <a:ext cx="1353312" cy="182880"/>
           </a:xfrm>
           <a:prstGeom prst="rect">
             <a:avLst/>
@@ -3666,7 +3666,7 @@
           <a:lstStyle/>
           <a:p>
             <a:pPr algn="ctr">
-              <a:defRPr sz="1000" b="1">
+              <a:defRPr sz="800" b="1">
                 <a:solidFill>
                   <a:srgbClr val="071627"/>
                 </a:solidFill>
@@ -3674,7 +3674,7 @@
               </a:defRPr>
             </a:pPr>
             <a:r>
-              <a:t>무손실</a:t>
+              <a:t>502 / 106,416</a:t>
             </a:r>
           </a:p>
         </p:txBody>
@@ -3710,7 +3710,7 @@
               </a:defRPr>
             </a:pPr>
             <a:r>
-              <a:t>병목 정의  ·  구조 아이디어  ·  개선 수치  ·  물리 구현  ·  CAV 확장</a:t>
+              <a:t>Ryu 6문제  ·  실제 TB  ·  개선 수치  ·  물리 구현  ·  CAV/2차 확장</a:t>
             </a:r>
           </a:p>
         </p:txBody>
@@ -3930,7 +3930,7 @@
               </a:defRPr>
             </a:pPr>
             <a:r>
-              <a:t>결론: 네 병목을 구조적으로 분리해 완화했다</a:t>
+              <a:t>1차 결론과 2차 확장 경로가 수치로 연결된다</a:t>
             </a:r>
           </a:p>
         </p:txBody>
@@ -4059,6 +4059,159 @@
         <p:spPr>
           <a:xfrm>
             <a:off x="713232" y="1298448"/>
+            <a:ext cx="3218688" cy="2057400"/>
+          </a:xfrm>
+          <a:prstGeom prst="roundRect">
+            <a:avLst/>
+          </a:prstGeom>
+          <a:solidFill>
+            <a:srgbClr val="12304C"/>
+          </a:solidFill>
+          <a:ln w="19050">
+            <a:solidFill>
+              <a:srgbClr val="37CD85"/>
+            </a:solidFill>
+          </a:ln>
+        </p:spPr>
+        <p:style>
+          <a:lnRef idx="1">
+            <a:schemeClr val="accent1"/>
+          </a:lnRef>
+          <a:fillRef idx="3">
+            <a:schemeClr val="accent1"/>
+          </a:fillRef>
+          <a:effectRef idx="2">
+            <a:schemeClr val="accent1"/>
+          </a:effectRef>
+          <a:fontRef idx="minor">
+            <a:schemeClr val="lt1"/>
+          </a:fontRef>
+        </p:style>
+        <p:txBody>
+          <a:bodyPr rtlCol="0" anchor="ctr"/>
+          <a:lstStyle/>
+          <a:p>
+            <a:pPr algn="ctr"/>
+          </a:p>
+        </p:txBody>
+      </p:sp>
+      <p:sp>
+        <p:nvSpPr>
+          <p:cNvPr id="10" name="TextBox 9"/>
+          <p:cNvSpPr txBox="1"/>
+          <p:nvPr/>
+        </p:nvSpPr>
+        <p:spPr>
+          <a:xfrm>
+            <a:off x="941832" y="1554480"/>
+            <a:ext cx="2761488" cy="256032"/>
+          </a:xfrm>
+          <a:prstGeom prst="rect">
+            <a:avLst/>
+          </a:prstGeom>
+          <a:noFill/>
+        </p:spPr>
+        <p:txBody>
+          <a:bodyPr wrap="square" anchor="t" lIns="18288" rIns="18288" tIns="9144" bIns="9144">
+            <a:spAutoFit/>
+          </a:bodyPr>
+          <a:lstStyle/>
+          <a:p>
+            <a:pPr algn="ctr">
+              <a:defRPr sz="1300" b="1">
+                <a:solidFill>
+                  <a:srgbClr val="37CD85"/>
+                </a:solidFill>
+                <a:latin typeface="Malgun Gothic"/>
+              </a:defRPr>
+            </a:pPr>
+            <a:r>
+              <a:t>1차 핵심 개선</a:t>
+            </a:r>
+          </a:p>
+        </p:txBody>
+      </p:sp>
+      <p:sp>
+        <p:nvSpPr>
+          <p:cNvPr id="11" name="TextBox 10"/>
+          <p:cNvSpPr txBox="1"/>
+          <p:nvPr/>
+        </p:nvSpPr>
+        <p:spPr>
+          <a:xfrm>
+            <a:off x="932688" y="2011680"/>
+            <a:ext cx="2779776" cy="329184"/>
+          </a:xfrm>
+          <a:prstGeom prst="rect">
+            <a:avLst/>
+          </a:prstGeom>
+          <a:noFill/>
+        </p:spPr>
+        <p:txBody>
+          <a:bodyPr wrap="square" anchor="t" lIns="18288" rIns="18288" tIns="9144" bIns="9144">
+            <a:spAutoFit/>
+          </a:bodyPr>
+          <a:lstStyle/>
+          <a:p>
+            <a:pPr algn="ctr">
+              <a:defRPr sz="2100" b="1">
+                <a:solidFill>
+                  <a:srgbClr val="F6F9FC"/>
+                </a:solidFill>
+                <a:latin typeface="Malgun Gothic"/>
+              </a:defRPr>
+            </a:pPr>
+            <a:r>
+              <a:t>11.52% → 0.47%</a:t>
+            </a:r>
+          </a:p>
+        </p:txBody>
+      </p:sp>
+      <p:sp>
+        <p:nvSpPr>
+          <p:cNvPr id="12" name="TextBox 11"/>
+          <p:cNvSpPr txBox="1"/>
+          <p:nvPr/>
+        </p:nvSpPr>
+        <p:spPr>
+          <a:xfrm>
+            <a:off x="932688" y="2560320"/>
+            <a:ext cx="2779776" cy="347472"/>
+          </a:xfrm>
+          <a:prstGeom prst="rect">
+            <a:avLst/>
+          </a:prstGeom>
+          <a:noFill/>
+        </p:spPr>
+        <p:txBody>
+          <a:bodyPr wrap="square" anchor="t" lIns="18288" rIns="18288" tIns="9144" bIns="9144">
+            <a:spAutoFit/>
+          </a:bodyPr>
+          <a:lstStyle/>
+          <a:p>
+            <a:pPr algn="ctr">
+              <a:defRPr sz="1800" b="1">
+                <a:solidFill>
+                  <a:srgbClr val="37CD85"/>
+                </a:solidFill>
+                <a:latin typeface="Malgun Gothic"/>
+              </a:defRPr>
+            </a:pPr>
+            <a:r>
+              <a:t>손실 24.42배 감소</a:t>
+            </a:r>
+          </a:p>
+        </p:txBody>
+      </p:sp>
+      <p:sp>
+        <p:nvSpPr>
+          <p:cNvPr id="13" name="Rounded Rectangle 12"/>
+          <p:cNvSpPr/>
+          <p:nvPr/>
+        </p:nvSpPr>
+        <p:spPr>
+          <a:xfrm>
+            <a:off x="4315968" y="1298448"/>
             <a:ext cx="3218688" cy="2057400"/>
           </a:xfrm>
           <a:prstGeom prst="roundRect">
@@ -4097,13 +4250,13 @@
       </p:sp>
       <p:sp>
         <p:nvSpPr>
-          <p:cNvPr id="10" name="TextBox 9"/>
-          <p:cNvSpPr txBox="1"/>
-          <p:nvPr/>
-        </p:nvSpPr>
-        <p:spPr>
-          <a:xfrm>
-            <a:off x="941832" y="1554480"/>
+          <p:cNvPr id="14" name="TextBox 13"/>
+          <p:cNvSpPr txBox="1"/>
+          <p:nvPr/>
+        </p:nvSpPr>
+        <p:spPr>
+          <a:xfrm>
+            <a:off x="4544568" y="1554480"/>
             <a:ext cx="2761488" cy="256032"/>
           </a:xfrm>
           <a:prstGeom prst="rect">
@@ -4126,20 +4279,20 @@
               </a:defRPr>
             </a:pPr>
             <a:r>
-              <a:t>네 병목 → 네 해법</a:t>
-            </a:r>
-          </a:p>
-        </p:txBody>
-      </p:sp>
-      <p:sp>
-        <p:nvSpPr>
-          <p:cNvPr id="11" name="TextBox 10"/>
-          <p:cNvSpPr txBox="1"/>
-          <p:nvPr/>
-        </p:nvSpPr>
-        <p:spPr>
-          <a:xfrm>
-            <a:off x="932688" y="2011680"/>
+              <a:t>최종 RTL 증명</a:t>
+            </a:r>
+          </a:p>
+        </p:txBody>
+      </p:sp>
+      <p:sp>
+        <p:nvSpPr>
+          <p:cNvPr id="15" name="TextBox 14"/>
+          <p:cNvSpPr txBox="1"/>
+          <p:nvPr/>
+        </p:nvSpPr>
+        <p:spPr>
+          <a:xfrm>
+            <a:off x="4535424" y="2011680"/>
             <a:ext cx="2779776" cy="329184"/>
           </a:xfrm>
           <a:prstGeom prst="rect">
@@ -4162,20 +4315,20 @@
               </a:defRPr>
             </a:pPr>
             <a:r>
-              <a:t>FIFO · bitmap · steal</a:t>
-            </a:r>
-          </a:p>
-        </p:txBody>
-      </p:sp>
-      <p:sp>
-        <p:nvSpPr>
-          <p:cNvPr id="12" name="TextBox 11"/>
-          <p:cNvSpPr txBox="1"/>
-          <p:nvPr/>
-        </p:nvSpPr>
-        <p:spPr>
-          <a:xfrm>
-            <a:off x="932688" y="2560320"/>
+              <a:t>8,503 / 8,503 보존</a:t>
+            </a:r>
+          </a:p>
+        </p:txBody>
+      </p:sp>
+      <p:sp>
+        <p:nvSpPr>
+          <p:cNvPr id="16" name="TextBox 15"/>
+          <p:cNvSpPr txBox="1"/>
+          <p:nvPr/>
+        </p:nvSpPr>
+        <p:spPr>
+          <a:xfrm>
+            <a:off x="4535424" y="2560320"/>
             <a:ext cx="2779776" cy="347472"/>
           </a:xfrm>
           <a:prstGeom prst="rect">
@@ -4193,159 +4346,6 @@
               <a:defRPr sz="1800" b="1">
                 <a:solidFill>
                   <a:srgbClr val="2AD3CD"/>
-                </a:solidFill>
-                <a:latin typeface="Malgun Gothic"/>
-              </a:defRPr>
-            </a:pPr>
-            <a:r>
-              <a:t>polarity lockstep</a:t>
-            </a:r>
-          </a:p>
-        </p:txBody>
-      </p:sp>
-      <p:sp>
-        <p:nvSpPr>
-          <p:cNvPr id="13" name="Rounded Rectangle 12"/>
-          <p:cNvSpPr/>
-          <p:nvPr/>
-        </p:nvSpPr>
-        <p:spPr>
-          <a:xfrm>
-            <a:off x="4315968" y="1298448"/>
-            <a:ext cx="3218688" cy="2057400"/>
-          </a:xfrm>
-          <a:prstGeom prst="roundRect">
-            <a:avLst/>
-          </a:prstGeom>
-          <a:solidFill>
-            <a:srgbClr val="12304C"/>
-          </a:solidFill>
-          <a:ln w="19050">
-            <a:solidFill>
-              <a:srgbClr val="37CD85"/>
-            </a:solidFill>
-          </a:ln>
-        </p:spPr>
-        <p:style>
-          <a:lnRef idx="1">
-            <a:schemeClr val="accent1"/>
-          </a:lnRef>
-          <a:fillRef idx="3">
-            <a:schemeClr val="accent1"/>
-          </a:fillRef>
-          <a:effectRef idx="2">
-            <a:schemeClr val="accent1"/>
-          </a:effectRef>
-          <a:fontRef idx="minor">
-            <a:schemeClr val="lt1"/>
-          </a:fontRef>
-        </p:style>
-        <p:txBody>
-          <a:bodyPr rtlCol="0" anchor="ctr"/>
-          <a:lstStyle/>
-          <a:p>
-            <a:pPr algn="ctr"/>
-          </a:p>
-        </p:txBody>
-      </p:sp>
-      <p:sp>
-        <p:nvSpPr>
-          <p:cNvPr id="14" name="TextBox 13"/>
-          <p:cNvSpPr txBox="1"/>
-          <p:nvPr/>
-        </p:nvSpPr>
-        <p:spPr>
-          <a:xfrm>
-            <a:off x="4544568" y="1554480"/>
-            <a:ext cx="2761488" cy="256032"/>
-          </a:xfrm>
-          <a:prstGeom prst="rect">
-            <a:avLst/>
-          </a:prstGeom>
-          <a:noFill/>
-        </p:spPr>
-        <p:txBody>
-          <a:bodyPr wrap="square" anchor="t" lIns="18288" rIns="18288" tIns="9144" bIns="9144">
-            <a:spAutoFit/>
-          </a:bodyPr>
-          <a:lstStyle/>
-          <a:p>
-            <a:pPr algn="ctr">
-              <a:defRPr sz="1300" b="1">
-                <a:solidFill>
-                  <a:srgbClr val="37CD85"/>
-                </a:solidFill>
-                <a:latin typeface="Malgun Gothic"/>
-              </a:defRPr>
-            </a:pPr>
-            <a:r>
-              <a:t>최종 RTL 증명</a:t>
-            </a:r>
-          </a:p>
-        </p:txBody>
-      </p:sp>
-      <p:sp>
-        <p:nvSpPr>
-          <p:cNvPr id="15" name="TextBox 14"/>
-          <p:cNvSpPr txBox="1"/>
-          <p:nvPr/>
-        </p:nvSpPr>
-        <p:spPr>
-          <a:xfrm>
-            <a:off x="4535424" y="2011680"/>
-            <a:ext cx="2779776" cy="329184"/>
-          </a:xfrm>
-          <a:prstGeom prst="rect">
-            <a:avLst/>
-          </a:prstGeom>
-          <a:noFill/>
-        </p:spPr>
-        <p:txBody>
-          <a:bodyPr wrap="square" anchor="t" lIns="18288" rIns="18288" tIns="9144" bIns="9144">
-            <a:spAutoFit/>
-          </a:bodyPr>
-          <a:lstStyle/>
-          <a:p>
-            <a:pPr algn="ctr">
-              <a:defRPr sz="2100" b="1">
-                <a:solidFill>
-                  <a:srgbClr val="F6F9FC"/>
-                </a:solidFill>
-                <a:latin typeface="Malgun Gothic"/>
-              </a:defRPr>
-            </a:pPr>
-            <a:r>
-              <a:t>8,503 / 8,503 보존</a:t>
-            </a:r>
-          </a:p>
-        </p:txBody>
-      </p:sp>
-      <p:sp>
-        <p:nvSpPr>
-          <p:cNvPr id="16" name="TextBox 15"/>
-          <p:cNvSpPr txBox="1"/>
-          <p:nvPr/>
-        </p:nvSpPr>
-        <p:spPr>
-          <a:xfrm>
-            <a:off x="4535424" y="2560320"/>
-            <a:ext cx="2779776" cy="347472"/>
-          </a:xfrm>
-          <a:prstGeom prst="rect">
-            <a:avLst/>
-          </a:prstGeom>
-          <a:noFill/>
-        </p:spPr>
-        <p:txBody>
-          <a:bodyPr wrap="square" anchor="t" lIns="18288" rIns="18288" tIns="9144" bIns="9144">
-            <a:spAutoFit/>
-          </a:bodyPr>
-          <a:lstStyle/>
-          <a:p>
-            <a:pPr algn="ctr">
-              <a:defRPr sz="1800" b="1">
-                <a:solidFill>
-                  <a:srgbClr val="37CD85"/>
                 </a:solidFill>
                 <a:latin typeface="Malgun Gothic"/>
               </a:defRPr>
@@ -4432,7 +4432,7 @@
               </a:defRPr>
             </a:pPr>
             <a:r>
-              <a:t>별도 확장 경로</a:t>
+              <a:t>CAV 확장 근거</a:t>
             </a:r>
           </a:p>
         </p:txBody>
@@ -4517,8 +4517,8 @@
         </p:nvSpPr>
         <p:spPr>
           <a:xfrm>
-            <a:off x="713232" y="3913632"/>
-            <a:ext cx="10424160" cy="1005840"/>
+            <a:off x="713232" y="3822191"/>
+            <a:ext cx="10424160" cy="1188720"/>
           </a:xfrm>
           <a:prstGeom prst="roundRect">
             <a:avLst/>
@@ -4560,22 +4560,22 @@
         </p:nvSpPr>
         <p:spPr>
           <a:xfrm>
-            <a:off x="987552" y="4206240"/>
-            <a:ext cx="960120" cy="219456"/>
-          </a:xfrm>
-          <a:prstGeom prst="rect">
-            <a:avLst/>
-          </a:prstGeom>
-          <a:noFill/>
-        </p:spPr>
-        <p:txBody>
-          <a:bodyPr wrap="square" anchor="t" lIns="18288" rIns="18288" tIns="9144" bIns="9144">
-            <a:spAutoFit/>
-          </a:bodyPr>
-          <a:lstStyle/>
-          <a:p>
-            <a:pPr algn="l">
-              <a:defRPr sz="1200" b="1">
+            <a:off x="960120" y="4069080"/>
+            <a:ext cx="658368" cy="237744"/>
+          </a:xfrm>
+          <a:prstGeom prst="rect">
+            <a:avLst/>
+          </a:prstGeom>
+          <a:noFill/>
+        </p:spPr>
+        <p:txBody>
+          <a:bodyPr wrap="square" anchor="t" lIns="18288" rIns="18288" tIns="9144" bIns="9144">
+            <a:spAutoFit/>
+          </a:bodyPr>
+          <a:lstStyle/>
+          <a:p>
+            <a:pPr algn="ctr">
+              <a:defRPr sz="1300" b="1">
                 <a:solidFill>
                   <a:srgbClr val="FFB746"/>
                 </a:solidFill>
@@ -4583,7 +4583,7 @@
               </a:defRPr>
             </a:pPr>
             <a:r>
-              <a:t>NEXT</a:t>
+              <a:t>2차</a:t>
             </a:r>
           </a:p>
         </p:txBody>
@@ -4596,8 +4596,8 @@
         </p:nvSpPr>
         <p:spPr>
           <a:xfrm>
-            <a:off x="1965960" y="4114800"/>
-            <a:ext cx="8732520" cy="347472"/>
+            <a:off x="1664208" y="4005072"/>
+            <a:ext cx="2816352" cy="256032"/>
           </a:xfrm>
           <a:prstGeom prst="rect">
             <a:avLst/>
@@ -4611,7 +4611,7 @@
           <a:lstStyle/>
           <a:p>
             <a:pPr algn="ctr">
-              <a:defRPr sz="1800" b="1">
+              <a:defRPr sz="1600" b="1">
                 <a:solidFill>
                   <a:srgbClr val="F6F9FC"/>
                 </a:solidFill>
@@ -4619,14 +4619,194 @@
               </a:defRPr>
             </a:pPr>
             <a:r>
-              <a:t>final-trace 직접 비교  ·  CAV RTL  ·  activity power  ·  signoff</a:t>
-            </a:r>
-          </a:p>
-        </p:txBody>
-      </p:sp>
-      <p:sp>
-        <p:nvSpPr>
-          <p:cNvPr id="24" name="Rounded Rectangle 23"/>
+              <a:t>steal_buf + repeat-flag</a:t>
+            </a:r>
+          </a:p>
+        </p:txBody>
+      </p:sp>
+      <p:sp>
+        <p:nvSpPr>
+          <p:cNvPr id="24" name="TextBox 23"/>
+          <p:cNvSpPr txBox="1"/>
+          <p:nvPr/>
+        </p:nvSpPr>
+        <p:spPr>
+          <a:xfrm>
+            <a:off x="1664208" y="4407408"/>
+            <a:ext cx="2816352" cy="201168"/>
+          </a:xfrm>
+          <a:prstGeom prst="rect">
+            <a:avLst/>
+          </a:prstGeom>
+          <a:noFill/>
+        </p:spPr>
+        <p:txBody>
+          <a:bodyPr wrap="square" anchor="t" lIns="18288" rIns="18288" tIns="9144" bIns="9144">
+            <a:spAutoFit/>
+          </a:bodyPr>
+          <a:lstStyle/>
+          <a:p>
+            <a:pPr algn="ctr">
+              <a:defRPr sz="1000" b="1">
+                <a:solidFill>
+                  <a:srgbClr val="37CD85"/>
+                </a:solidFill>
+                <a:latin typeface="Malgun Gothic"/>
+              </a:defRPr>
+            </a:pPr>
+            <a:r>
+              <a:t>검증 후보: link bits −15.61%</a:t>
+            </a:r>
+          </a:p>
+        </p:txBody>
+      </p:sp>
+      <p:sp>
+        <p:nvSpPr>
+          <p:cNvPr id="25" name="TextBox 24"/>
+          <p:cNvSpPr txBox="1"/>
+          <p:nvPr/>
+        </p:nvSpPr>
+        <p:spPr>
+          <a:xfrm>
+            <a:off x="4617720" y="4005072"/>
+            <a:ext cx="2944368" cy="256032"/>
+          </a:xfrm>
+          <a:prstGeom prst="rect">
+            <a:avLst/>
+          </a:prstGeom>
+          <a:noFill/>
+        </p:spPr>
+        <p:txBody>
+          <a:bodyPr wrap="square" anchor="t" lIns="18288" rIns="18288" tIns="9144" bIns="9144">
+            <a:spAutoFit/>
+          </a:bodyPr>
+          <a:lstStyle/>
+          <a:p>
+            <a:pPr algn="ctr">
+              <a:defRPr sz="1500" b="1">
+                <a:solidFill>
+                  <a:srgbClr val="F6F9FC"/>
+                </a:solidFill>
+                <a:latin typeface="Malgun Gothic"/>
+              </a:defRPr>
+            </a:pPr>
+            <a:r>
+              <a:t>polarity → CAV full replay / RTL</a:t>
+            </a:r>
+          </a:p>
+        </p:txBody>
+      </p:sp>
+      <p:sp>
+        <p:nvSpPr>
+          <p:cNvPr id="26" name="TextBox 25"/>
+          <p:cNvSpPr txBox="1"/>
+          <p:nvPr/>
+        </p:nvSpPr>
+        <p:spPr>
+          <a:xfrm>
+            <a:off x="4617720" y="4407408"/>
+            <a:ext cx="2944368" cy="201168"/>
+          </a:xfrm>
+          <a:prstGeom prst="rect">
+            <a:avLst/>
+          </a:prstGeom>
+          <a:noFill/>
+        </p:spPr>
+        <p:txBody>
+          <a:bodyPr wrap="square" anchor="t" lIns="18288" rIns="18288" tIns="9144" bIns="9144">
+            <a:spAutoFit/>
+          </a:bodyPr>
+          <a:lstStyle/>
+          <a:p>
+            <a:pPr algn="ctr">
+              <a:defRPr sz="1000" b="1">
+                <a:solidFill>
+                  <a:srgbClr val="B27EFF"/>
+                </a:solidFill>
+                <a:latin typeface="Malgun Gothic"/>
+              </a:defRPr>
+            </a:pPr>
+            <a:r>
+              <a:t>wire · backpressure · world path</a:t>
+            </a:r>
+          </a:p>
+        </p:txBody>
+      </p:sp>
+      <p:sp>
+        <p:nvSpPr>
+          <p:cNvPr id="27" name="TextBox 26"/>
+          <p:cNvSpPr txBox="1"/>
+          <p:nvPr/>
+        </p:nvSpPr>
+        <p:spPr>
+          <a:xfrm>
+            <a:off x="7744968" y="4005072"/>
+            <a:ext cx="2907792" cy="256032"/>
+          </a:xfrm>
+          <a:prstGeom prst="rect">
+            <a:avLst/>
+          </a:prstGeom>
+          <a:noFill/>
+        </p:spPr>
+        <p:txBody>
+          <a:bodyPr wrap="square" anchor="t" lIns="18288" rIns="18288" tIns="9144" bIns="9144">
+            <a:spAutoFit/>
+          </a:bodyPr>
+          <a:lstStyle/>
+          <a:p>
+            <a:pPr algn="ctr">
+              <a:defRPr sz="1500" b="1">
+                <a:solidFill>
+                  <a:srgbClr val="F6F9FC"/>
+                </a:solidFill>
+                <a:latin typeface="Malgun Gothic"/>
+              </a:defRPr>
+            </a:pPr>
+            <a:r>
+              <a:t>timestamp · activity power</a:t>
+            </a:r>
+          </a:p>
+        </p:txBody>
+      </p:sp>
+      <p:sp>
+        <p:nvSpPr>
+          <p:cNvPr id="28" name="TextBox 27"/>
+          <p:cNvSpPr txBox="1"/>
+          <p:nvPr/>
+        </p:nvSpPr>
+        <p:spPr>
+          <a:xfrm>
+            <a:off x="7744968" y="4407408"/>
+            <a:ext cx="2907792" cy="201168"/>
+          </a:xfrm>
+          <a:prstGeom prst="rect">
+            <a:avLst/>
+          </a:prstGeom>
+          <a:noFill/>
+        </p:spPr>
+        <p:txBody>
+          <a:bodyPr wrap="square" anchor="t" lIns="18288" rIns="18288" tIns="9144" bIns="9144">
+            <a:spAutoFit/>
+          </a:bodyPr>
+          <a:lstStyle/>
+          <a:p>
+            <a:pPr algn="ctr">
+              <a:defRPr sz="1000" b="1">
+                <a:solidFill>
+                  <a:srgbClr val="FF6376"/>
+                </a:solidFill>
+                <a:latin typeface="Malgun Gothic"/>
+              </a:defRPr>
+            </a:pPr>
+            <a:r>
+              <a:t>jitter 해법 · VCD/SAIF · exact Fmax</a:t>
+            </a:r>
+          </a:p>
+        </p:txBody>
+      </p:sp>
+      <p:sp>
+        <p:nvSpPr>
+          <p:cNvPr id="29" name="Rounded Rectangle 28"/>
           <p:cNvSpPr/>
           <p:nvPr/>
         </p:nvSpPr>
@@ -4669,7 +4849,7 @@
       </p:sp>
       <p:sp>
         <p:nvSpPr>
-          <p:cNvPr id="25" name="TextBox 24"/>
+          <p:cNvPr id="30" name="TextBox 29"/>
           <p:cNvSpPr txBox="1"/>
           <p:nvPr/>
         </p:nvSpPr>
@@ -4692,20 +4872,20 @@
             <a:pPr algn="ctr">
               <a:defRPr sz="1600" b="1">
                 <a:solidFill>
-                  <a:srgbClr val="37CD85"/>
-                </a:solidFill>
-                <a:latin typeface="Malgun Gothic"/>
-              </a:defRPr>
-            </a:pPr>
-            <a:r>
-              <a:t>GO: polarity RTL·TB·PPA evidence 제출  |  HOLD: exact Fmax·CAV RTL·signoff</a:t>
-            </a:r>
-          </a:p>
-        </p:txBody>
-      </p:sp>
-      <p:sp>
-        <p:nvSpPr>
-          <p:cNvPr id="26" name="Rectangle 25"/>
+                  <a:srgbClr val="FFB746"/>
+                </a:solidFill>
+                <a:latin typeface="Malgun Gothic"/>
+              </a:defRPr>
+            </a:pPr>
+            <a:r>
+              <a:t>row-trim −14.29%는 기본 Cluster2 전용 — steal_buf에는 적용 불가</a:t>
+            </a:r>
+          </a:p>
+        </p:txBody>
+      </p:sp>
+      <p:sp>
+        <p:nvSpPr>
+          <p:cNvPr id="31" name="Rectangle 30"/>
           <p:cNvSpPr/>
           <p:nvPr/>
         </p:nvSpPr>
@@ -4748,7 +4928,7 @@
       </p:sp>
       <p:sp>
         <p:nvSpPr>
-          <p:cNvPr id="27" name="Rounded Rectangle 26"/>
+          <p:cNvPr id="32" name="Rounded Rectangle 31"/>
           <p:cNvSpPr/>
           <p:nvPr/>
         </p:nvSpPr>
@@ -4791,7 +4971,7 @@
       </p:sp>
       <p:sp>
         <p:nvSpPr>
-          <p:cNvPr id="28" name="TextBox 27"/>
+          <p:cNvPr id="33" name="TextBox 32"/>
           <p:cNvSpPr txBox="1"/>
           <p:nvPr/>
         </p:nvSpPr>
@@ -4827,7 +5007,7 @@
       </p:sp>
       <p:sp>
         <p:nvSpPr>
-          <p:cNvPr id="29" name="TextBox 28"/>
+          <p:cNvPr id="34" name="TextBox 33"/>
           <p:cNvSpPr txBox="1"/>
           <p:nvPr/>
         </p:nvSpPr>
@@ -4856,14 +5036,14 @@
               </a:defRPr>
             </a:pPr>
             <a:r>
-              <a:t>결론: 네 병목을 구조적으로 분리해 완화했다</a:t>
-            </a:r>
-          </a:p>
-        </p:txBody>
-      </p:sp>
-      <p:sp>
-        <p:nvSpPr>
-          <p:cNvPr id="30" name="Rectangle 29"/>
+              <a:t>1차 결론과 2차 확장 경로가 수치로 연결된다</a:t>
+            </a:r>
+          </a:p>
+        </p:txBody>
+      </p:sp>
+      <p:sp>
+        <p:nvSpPr>
+          <p:cNvPr id="35" name="Rectangle 34"/>
           <p:cNvSpPr/>
           <p:nvPr/>
         </p:nvSpPr>
@@ -5047,7 +5227,7 @@
               </a:defRPr>
             </a:pPr>
             <a:r>
-              <a:t>01  병목</a:t>
+              <a:t>01  문제</a:t>
             </a:r>
           </a:p>
         </p:txBody>
@@ -5083,7 +5263,7 @@
               </a:defRPr>
             </a:pPr>
             <a:r>
-              <a:t>우리 AER이 겨냥한 병목은 네 가지다</a:t>
+              <a:t>Ryu의 전통 AER 6문제에 대한 우리의 대응</a:t>
             </a:r>
           </a:p>
         </p:txBody>
@@ -5162,7 +5342,7 @@
               </a:defRPr>
             </a:pPr>
             <a:r>
-              <a:t>Source: final polarity RTL contract and bottleneck audit</a:t>
+              <a:t>Source: Ryu CVPRW 2019 slides · Ganghee sections 67, 86–89</a:t>
             </a:r>
           </a:p>
         </p:txBody>
@@ -5211,8 +5391,620 @@
         </p:nvSpPr>
         <p:spPr>
           <a:xfrm>
-            <a:off x="713232" y="1170432"/>
-            <a:ext cx="5230368" cy="1572768"/>
+            <a:off x="658368" y="1097280"/>
+            <a:ext cx="3310128" cy="1325880"/>
+          </a:xfrm>
+          <a:prstGeom prst="roundRect">
+            <a:avLst/>
+          </a:prstGeom>
+          <a:solidFill>
+            <a:srgbClr val="12304C"/>
+          </a:solidFill>
+          <a:ln w="19050">
+            <a:solidFill>
+              <a:srgbClr val="FFB746"/>
+            </a:solidFill>
+          </a:ln>
+        </p:spPr>
+        <p:style>
+          <a:lnRef idx="1">
+            <a:schemeClr val="accent1"/>
+          </a:lnRef>
+          <a:fillRef idx="3">
+            <a:schemeClr val="accent1"/>
+          </a:fillRef>
+          <a:effectRef idx="2">
+            <a:schemeClr val="accent1"/>
+          </a:effectRef>
+          <a:fontRef idx="minor">
+            <a:schemeClr val="lt1"/>
+          </a:fontRef>
+        </p:style>
+        <p:txBody>
+          <a:bodyPr rtlCol="0" anchor="ctr"/>
+          <a:lstStyle/>
+          <a:p>
+            <a:pPr algn="ctr"/>
+          </a:p>
+        </p:txBody>
+      </p:sp>
+      <p:sp>
+        <p:nvSpPr>
+          <p:cNvPr id="10" name="TextBox 9"/>
+          <p:cNvSpPr txBox="1"/>
+          <p:nvPr/>
+        </p:nvSpPr>
+        <p:spPr>
+          <a:xfrm>
+            <a:off x="841247" y="1252728"/>
+            <a:ext cx="2944368" cy="256032"/>
+          </a:xfrm>
+          <a:prstGeom prst="rect">
+            <a:avLst/>
+          </a:prstGeom>
+          <a:noFill/>
+        </p:spPr>
+        <p:txBody>
+          <a:bodyPr wrap="square" anchor="t" lIns="18288" rIns="18288" tIns="9144" bIns="9144">
+            <a:spAutoFit/>
+          </a:bodyPr>
+          <a:lstStyle/>
+          <a:p>
+            <a:pPr algn="l">
+              <a:defRPr sz="1400" b="1">
+                <a:solidFill>
+                  <a:srgbClr val="F6F9FC"/>
+                </a:solidFill>
+                <a:latin typeface="Malgun Gothic"/>
+              </a:defRPr>
+            </a:pPr>
+            <a:r>
+              <a:t>① 주소 오버헤드</a:t>
+            </a:r>
+          </a:p>
+        </p:txBody>
+      </p:sp>
+      <p:sp>
+        <p:nvSpPr>
+          <p:cNvPr id="11" name="TextBox 10"/>
+          <p:cNvSpPr txBox="1"/>
+          <p:nvPr/>
+        </p:nvSpPr>
+        <p:spPr>
+          <a:xfrm>
+            <a:off x="841247" y="1609344"/>
+            <a:ext cx="2944368" cy="228600"/>
+          </a:xfrm>
+          <a:prstGeom prst="rect">
+            <a:avLst/>
+          </a:prstGeom>
+          <a:noFill/>
+        </p:spPr>
+        <p:txBody>
+          <a:bodyPr wrap="square" anchor="t" lIns="18288" rIns="18288" tIns="9144" bIns="9144">
+            <a:spAutoFit/>
+          </a:bodyPr>
+          <a:lstStyle/>
+          <a:p>
+            <a:pPr algn="l">
+              <a:defRPr sz="1200" b="1">
+                <a:solidFill>
+                  <a:srgbClr val="FFB746"/>
+                </a:solidFill>
+                <a:latin typeface="Malgun Gothic"/>
+              </a:defRPr>
+            </a:pPr>
+            <a:r>
+              <a:t>PARTIAL</a:t>
+            </a:r>
+          </a:p>
+        </p:txBody>
+      </p:sp>
+      <p:sp>
+        <p:nvSpPr>
+          <p:cNvPr id="12" name="TextBox 11"/>
+          <p:cNvSpPr txBox="1"/>
+          <p:nvPr/>
+        </p:nvSpPr>
+        <p:spPr>
+          <a:xfrm>
+            <a:off x="841247" y="1975104"/>
+            <a:ext cx="2944368" cy="219456"/>
+          </a:xfrm>
+          <a:prstGeom prst="rect">
+            <a:avLst/>
+          </a:prstGeom>
+          <a:noFill/>
+        </p:spPr>
+        <p:txBody>
+          <a:bodyPr wrap="square" anchor="t" lIns="18288" rIns="18288" tIns="9144" bIns="9144">
+            <a:spAutoFit/>
+          </a:bodyPr>
+          <a:lstStyle/>
+          <a:p>
+            <a:pPr algn="l">
+              <a:defRPr sz="1000" b="0">
+                <a:solidFill>
+                  <a:srgbClr val="ACC2D6"/>
+                </a:solidFill>
+                <a:latin typeface="Malgun Gothic"/>
+              </a:defRPr>
+            </a:pPr>
+            <a:r>
+              <a:t>row bitmap · 2차 repeat −15.61%</a:t>
+            </a:r>
+          </a:p>
+        </p:txBody>
+      </p:sp>
+      <p:sp>
+        <p:nvSpPr>
+          <p:cNvPr id="13" name="Rounded Rectangle 12"/>
+          <p:cNvSpPr/>
+          <p:nvPr/>
+        </p:nvSpPr>
+        <p:spPr>
+          <a:xfrm>
+            <a:off x="4315968" y="1097280"/>
+            <a:ext cx="3310128" cy="1325880"/>
+          </a:xfrm>
+          <a:prstGeom prst="roundRect">
+            <a:avLst/>
+          </a:prstGeom>
+          <a:solidFill>
+            <a:srgbClr val="12304C"/>
+          </a:solidFill>
+          <a:ln w="19050">
+            <a:solidFill>
+              <a:srgbClr val="37CD85"/>
+            </a:solidFill>
+          </a:ln>
+        </p:spPr>
+        <p:style>
+          <a:lnRef idx="1">
+            <a:schemeClr val="accent1"/>
+          </a:lnRef>
+          <a:fillRef idx="3">
+            <a:schemeClr val="accent1"/>
+          </a:fillRef>
+          <a:effectRef idx="2">
+            <a:schemeClr val="accent1"/>
+          </a:effectRef>
+          <a:fontRef idx="minor">
+            <a:schemeClr val="lt1"/>
+          </a:fontRef>
+        </p:style>
+        <p:txBody>
+          <a:bodyPr rtlCol="0" anchor="ctr"/>
+          <a:lstStyle/>
+          <a:p>
+            <a:pPr algn="ctr"/>
+          </a:p>
+        </p:txBody>
+      </p:sp>
+      <p:sp>
+        <p:nvSpPr>
+          <p:cNvPr id="14" name="TextBox 13"/>
+          <p:cNvSpPr txBox="1"/>
+          <p:nvPr/>
+        </p:nvSpPr>
+        <p:spPr>
+          <a:xfrm>
+            <a:off x="4498848" y="1252728"/>
+            <a:ext cx="2944368" cy="256032"/>
+          </a:xfrm>
+          <a:prstGeom prst="rect">
+            <a:avLst/>
+          </a:prstGeom>
+          <a:noFill/>
+        </p:spPr>
+        <p:txBody>
+          <a:bodyPr wrap="square" anchor="t" lIns="18288" rIns="18288" tIns="9144" bIns="9144">
+            <a:spAutoFit/>
+          </a:bodyPr>
+          <a:lstStyle/>
+          <a:p>
+            <a:pPr algn="l">
+              <a:defRPr sz="1400" b="1">
+                <a:solidFill>
+                  <a:srgbClr val="F6F9FC"/>
+                </a:solidFill>
+                <a:latin typeface="Malgun Gothic"/>
+              </a:defRPr>
+            </a:pPr>
+            <a:r>
+              <a:t>② 공유채널 대역폭</a:t>
+            </a:r>
+          </a:p>
+        </p:txBody>
+      </p:sp>
+      <p:sp>
+        <p:nvSpPr>
+          <p:cNvPr id="15" name="TextBox 14"/>
+          <p:cNvSpPr txBox="1"/>
+          <p:nvPr/>
+        </p:nvSpPr>
+        <p:spPr>
+          <a:xfrm>
+            <a:off x="4498848" y="1609344"/>
+            <a:ext cx="2944368" cy="228600"/>
+          </a:xfrm>
+          <a:prstGeom prst="rect">
+            <a:avLst/>
+          </a:prstGeom>
+          <a:noFill/>
+        </p:spPr>
+        <p:txBody>
+          <a:bodyPr wrap="square" anchor="t" lIns="18288" rIns="18288" tIns="9144" bIns="9144">
+            <a:spAutoFit/>
+          </a:bodyPr>
+          <a:lstStyle/>
+          <a:p>
+            <a:pPr algn="l">
+              <a:defRPr sz="1200" b="1">
+                <a:solidFill>
+                  <a:srgbClr val="37CD85"/>
+                </a:solidFill>
+                <a:latin typeface="Malgun Gothic"/>
+              </a:defRPr>
+            </a:pPr>
+            <a:r>
+              <a:t>SOLVED @ N=16</a:t>
+            </a:r>
+          </a:p>
+        </p:txBody>
+      </p:sp>
+      <p:sp>
+        <p:nvSpPr>
+          <p:cNvPr id="16" name="TextBox 15"/>
+          <p:cNvSpPr txBox="1"/>
+          <p:nvPr/>
+        </p:nvSpPr>
+        <p:spPr>
+          <a:xfrm>
+            <a:off x="4498848" y="1975104"/>
+            <a:ext cx="2944368" cy="219456"/>
+          </a:xfrm>
+          <a:prstGeom prst="rect">
+            <a:avLst/>
+          </a:prstGeom>
+          <a:noFill/>
+        </p:spPr>
+        <p:txBody>
+          <a:bodyPr wrap="square" anchor="t" lIns="18288" rIns="18288" tIns="9144" bIns="9144">
+            <a:spAutoFit/>
+          </a:bodyPr>
+          <a:lstStyle/>
+          <a:p>
+            <a:pPr algn="l">
+              <a:defRPr sz="1000" b="0">
+                <a:solidFill>
+                  <a:srgbClr val="ACC2D6"/>
+                </a:solidFill>
+                <a:latin typeface="Malgun Gothic"/>
+              </a:defRPr>
+            </a:pPr>
+            <a:r>
+              <a:t>2 lanes · 최대 8 events/cycle</a:t>
+            </a:r>
+          </a:p>
+        </p:txBody>
+      </p:sp>
+      <p:sp>
+        <p:nvSpPr>
+          <p:cNvPr id="17" name="Rounded Rectangle 16"/>
+          <p:cNvSpPr/>
+          <p:nvPr/>
+        </p:nvSpPr>
+        <p:spPr>
+          <a:xfrm>
+            <a:off x="7973568" y="1097280"/>
+            <a:ext cx="3310128" cy="1325880"/>
+          </a:xfrm>
+          <a:prstGeom prst="roundRect">
+            <a:avLst/>
+          </a:prstGeom>
+          <a:solidFill>
+            <a:srgbClr val="12304C"/>
+          </a:solidFill>
+          <a:ln w="19050">
+            <a:solidFill>
+              <a:srgbClr val="2AD3CD"/>
+            </a:solidFill>
+          </a:ln>
+        </p:spPr>
+        <p:style>
+          <a:lnRef idx="1">
+            <a:schemeClr val="accent1"/>
+          </a:lnRef>
+          <a:fillRef idx="3">
+            <a:schemeClr val="accent1"/>
+          </a:fillRef>
+          <a:effectRef idx="2">
+            <a:schemeClr val="accent1"/>
+          </a:effectRef>
+          <a:fontRef idx="minor">
+            <a:schemeClr val="lt1"/>
+          </a:fontRef>
+        </p:style>
+        <p:txBody>
+          <a:bodyPr rtlCol="0" anchor="ctr"/>
+          <a:lstStyle/>
+          <a:p>
+            <a:pPr algn="ctr"/>
+          </a:p>
+        </p:txBody>
+      </p:sp>
+      <p:sp>
+        <p:nvSpPr>
+          <p:cNvPr id="18" name="TextBox 17"/>
+          <p:cNvSpPr txBox="1"/>
+          <p:nvPr/>
+        </p:nvSpPr>
+        <p:spPr>
+          <a:xfrm>
+            <a:off x="8156448" y="1252728"/>
+            <a:ext cx="2944368" cy="256032"/>
+          </a:xfrm>
+          <a:prstGeom prst="rect">
+            <a:avLst/>
+          </a:prstGeom>
+          <a:noFill/>
+        </p:spPr>
+        <p:txBody>
+          <a:bodyPr wrap="square" anchor="t" lIns="18288" rIns="18288" tIns="9144" bIns="9144">
+            <a:spAutoFit/>
+          </a:bodyPr>
+          <a:lstStyle/>
+          <a:p>
+            <a:pPr algn="l">
+              <a:defRPr sz="1400" b="1">
+                <a:solidFill>
+                  <a:srgbClr val="F6F9FC"/>
+                </a:solidFill>
+                <a:latin typeface="Malgun Gothic"/>
+              </a:defRPr>
+            </a:pPr>
+            <a:r>
+              <a:t>③ 중재 지연</a:t>
+            </a:r>
+          </a:p>
+        </p:txBody>
+      </p:sp>
+      <p:sp>
+        <p:nvSpPr>
+          <p:cNvPr id="19" name="TextBox 18"/>
+          <p:cNvSpPr txBox="1"/>
+          <p:nvPr/>
+        </p:nvSpPr>
+        <p:spPr>
+          <a:xfrm>
+            <a:off x="8156448" y="1609344"/>
+            <a:ext cx="2944368" cy="228600"/>
+          </a:xfrm>
+          <a:prstGeom prst="rect">
+            <a:avLst/>
+          </a:prstGeom>
+          <a:noFill/>
+        </p:spPr>
+        <p:txBody>
+          <a:bodyPr wrap="square" anchor="t" lIns="18288" rIns="18288" tIns="9144" bIns="9144">
+            <a:spAutoFit/>
+          </a:bodyPr>
+          <a:lstStyle/>
+          <a:p>
+            <a:pPr algn="l">
+              <a:defRPr sz="1200" b="1">
+                <a:solidFill>
+                  <a:srgbClr val="2AD3CD"/>
+                </a:solidFill>
+                <a:latin typeface="Malgun Gothic"/>
+              </a:defRPr>
+            </a:pPr>
+            <a:r>
+              <a:t>REDUCED</a:t>
+            </a:r>
+          </a:p>
+        </p:txBody>
+      </p:sp>
+      <p:sp>
+        <p:nvSpPr>
+          <p:cNvPr id="20" name="TextBox 19"/>
+          <p:cNvSpPr txBox="1"/>
+          <p:nvPr/>
+        </p:nvSpPr>
+        <p:spPr>
+          <a:xfrm>
+            <a:off x="8156448" y="1975104"/>
+            <a:ext cx="2944368" cy="219456"/>
+          </a:xfrm>
+          <a:prstGeom prst="rect">
+            <a:avLst/>
+          </a:prstGeom>
+          <a:noFill/>
+        </p:spPr>
+        <p:txBody>
+          <a:bodyPr wrap="square" anchor="t" lIns="18288" rIns="18288" tIns="9144" bIns="9144">
+            <a:spAutoFit/>
+          </a:bodyPr>
+          <a:lstStyle/>
+          <a:p>
+            <a:pPr algn="l">
+              <a:defRPr sz="1000" b="0">
+                <a:solidFill>
+                  <a:srgbClr val="ACC2D6"/>
+                </a:solidFill>
+                <a:latin typeface="Malgun Gothic"/>
+              </a:defRPr>
+            </a:pPr>
+            <a:r>
+              <a:t>row batch + 병렬 retire</a:t>
+            </a:r>
+          </a:p>
+        </p:txBody>
+      </p:sp>
+      <p:sp>
+        <p:nvSpPr>
+          <p:cNvPr id="21" name="Rounded Rectangle 20"/>
+          <p:cNvSpPr/>
+          <p:nvPr/>
+        </p:nvSpPr>
+        <p:spPr>
+          <a:xfrm>
+            <a:off x="658368" y="2907792"/>
+            <a:ext cx="3310128" cy="1325880"/>
+          </a:xfrm>
+          <a:prstGeom prst="roundRect">
+            <a:avLst/>
+          </a:prstGeom>
+          <a:solidFill>
+            <a:srgbClr val="12304C"/>
+          </a:solidFill>
+          <a:ln w="19050">
+            <a:solidFill>
+              <a:srgbClr val="37CD85"/>
+            </a:solidFill>
+          </a:ln>
+        </p:spPr>
+        <p:style>
+          <a:lnRef idx="1">
+            <a:schemeClr val="accent1"/>
+          </a:lnRef>
+          <a:fillRef idx="3">
+            <a:schemeClr val="accent1"/>
+          </a:fillRef>
+          <a:effectRef idx="2">
+            <a:schemeClr val="accent1"/>
+          </a:effectRef>
+          <a:fontRef idx="minor">
+            <a:schemeClr val="lt1"/>
+          </a:fontRef>
+        </p:style>
+        <p:txBody>
+          <a:bodyPr rtlCol="0" anchor="ctr"/>
+          <a:lstStyle/>
+          <a:p>
+            <a:pPr algn="ctr"/>
+          </a:p>
+        </p:txBody>
+      </p:sp>
+      <p:sp>
+        <p:nvSpPr>
+          <p:cNvPr id="22" name="TextBox 21"/>
+          <p:cNvSpPr txBox="1"/>
+          <p:nvPr/>
+        </p:nvSpPr>
+        <p:spPr>
+          <a:xfrm>
+            <a:off x="841247" y="3063240"/>
+            <a:ext cx="2944368" cy="256032"/>
+          </a:xfrm>
+          <a:prstGeom prst="rect">
+            <a:avLst/>
+          </a:prstGeom>
+          <a:noFill/>
+        </p:spPr>
+        <p:txBody>
+          <a:bodyPr wrap="square" anchor="t" lIns="18288" rIns="18288" tIns="9144" bIns="9144">
+            <a:spAutoFit/>
+          </a:bodyPr>
+          <a:lstStyle/>
+          <a:p>
+            <a:pPr algn="l">
+              <a:defRPr sz="1400" b="1">
+                <a:solidFill>
+                  <a:srgbClr val="F6F9FC"/>
+                </a:solidFill>
+                <a:latin typeface="Malgun Gothic"/>
+              </a:defRPr>
+            </a:pPr>
+            <a:r>
+              <a:t>④ 중재 불공정</a:t>
+            </a:r>
+          </a:p>
+        </p:txBody>
+      </p:sp>
+      <p:sp>
+        <p:nvSpPr>
+          <p:cNvPr id="23" name="TextBox 22"/>
+          <p:cNvSpPr txBox="1"/>
+          <p:nvPr/>
+        </p:nvSpPr>
+        <p:spPr>
+          <a:xfrm>
+            <a:off x="841247" y="3419856"/>
+            <a:ext cx="2944368" cy="228600"/>
+          </a:xfrm>
+          <a:prstGeom prst="rect">
+            <a:avLst/>
+          </a:prstGeom>
+          <a:noFill/>
+        </p:spPr>
+        <p:txBody>
+          <a:bodyPr wrap="square" anchor="t" lIns="18288" rIns="18288" tIns="9144" bIns="9144">
+            <a:spAutoFit/>
+          </a:bodyPr>
+          <a:lstStyle/>
+          <a:p>
+            <a:pPr algn="l">
+              <a:defRPr sz="1200" b="1">
+                <a:solidFill>
+                  <a:srgbClr val="37CD85"/>
+                </a:solidFill>
+                <a:latin typeface="Malgun Gothic"/>
+              </a:defRPr>
+            </a:pPr>
+            <a:r>
+              <a:t>REDUCED</a:t>
+            </a:r>
+          </a:p>
+        </p:txBody>
+      </p:sp>
+      <p:sp>
+        <p:nvSpPr>
+          <p:cNvPr id="24" name="TextBox 23"/>
+          <p:cNvSpPr txBox="1"/>
+          <p:nvPr/>
+        </p:nvSpPr>
+        <p:spPr>
+          <a:xfrm>
+            <a:off x="841247" y="3785616"/>
+            <a:ext cx="2944368" cy="219456"/>
+          </a:xfrm>
+          <a:prstGeom prst="rect">
+            <a:avLst/>
+          </a:prstGeom>
+          <a:noFill/>
+        </p:spPr>
+        <p:txBody>
+          <a:bodyPr wrap="square" anchor="t" lIns="18288" rIns="18288" tIns="9144" bIns="9144">
+            <a:spAutoFit/>
+          </a:bodyPr>
+          <a:lstStyle/>
+          <a:p>
+            <a:pPr algn="l">
+              <a:defRPr sz="1000" b="0">
+                <a:solidFill>
+                  <a:srgbClr val="ACC2D6"/>
+                </a:solidFill>
+                <a:latin typeface="Malgun Gothic"/>
+              </a:defRPr>
+            </a:pPr>
+            <a:r>
+              <a:t>분리 arbiter + conditional steal</a:t>
+            </a:r>
+          </a:p>
+        </p:txBody>
+      </p:sp>
+      <p:sp>
+        <p:nvSpPr>
+          <p:cNvPr id="25" name="Rounded Rectangle 24"/>
+          <p:cNvSpPr/>
+          <p:nvPr/>
+        </p:nvSpPr>
+        <p:spPr>
+          <a:xfrm>
+            <a:off x="4315968" y="2907792"/>
+            <a:ext cx="3310128" cy="1325880"/>
           </a:xfrm>
           <a:prstGeom prst="roundRect">
             <a:avLst/>
@@ -5250,14 +6042,14 @@
       </p:sp>
       <p:sp>
         <p:nvSpPr>
-          <p:cNvPr id="10" name="TextBox 9"/>
-          <p:cNvSpPr txBox="1"/>
-          <p:nvPr/>
-        </p:nvSpPr>
-        <p:spPr>
-          <a:xfrm>
-            <a:off x="950976" y="1353312"/>
-            <a:ext cx="4736592" cy="274320"/>
+          <p:cNvPr id="26" name="TextBox 25"/>
+          <p:cNvSpPr txBox="1"/>
+          <p:nvPr/>
+        </p:nvSpPr>
+        <p:spPr>
+          <a:xfrm>
+            <a:off x="4498848" y="3063240"/>
+            <a:ext cx="2944368" cy="256032"/>
           </a:xfrm>
           <a:prstGeom prst="rect">
             <a:avLst/>
@@ -5271,7 +6063,43 @@
           <a:lstStyle/>
           <a:p>
             <a:pPr algn="l">
-              <a:defRPr sz="1600" b="1">
+              <a:defRPr sz="1400" b="1">
+                <a:solidFill>
+                  <a:srgbClr val="F6F9FC"/>
+                </a:solidFill>
+                <a:latin typeface="Malgun Gothic"/>
+              </a:defRPr>
+            </a:pPr>
+            <a:r>
+              <a:t>⑤ timestamp 왜곡</a:t>
+            </a:r>
+          </a:p>
+        </p:txBody>
+      </p:sp>
+      <p:sp>
+        <p:nvSpPr>
+          <p:cNvPr id="27" name="TextBox 26"/>
+          <p:cNvSpPr txBox="1"/>
+          <p:nvPr/>
+        </p:nvSpPr>
+        <p:spPr>
+          <a:xfrm>
+            <a:off x="4498848" y="3419856"/>
+            <a:ext cx="2944368" cy="228600"/>
+          </a:xfrm>
+          <a:prstGeom prst="rect">
+            <a:avLst/>
+          </a:prstGeom>
+          <a:noFill/>
+        </p:spPr>
+        <p:txBody>
+          <a:bodyPr wrap="square" anchor="t" lIns="18288" rIns="18288" tIns="9144" bIns="9144">
+            <a:spAutoFit/>
+          </a:bodyPr>
+          <a:lstStyle/>
+          <a:p>
+            <a:pPr algn="l">
+              <a:defRPr sz="1200" b="1">
                 <a:solidFill>
                   <a:srgbClr val="FF6376"/>
                 </a:solidFill>
@@ -5279,21 +6107,21 @@
               </a:defRPr>
             </a:pPr>
             <a:r>
-              <a:t>① 출력 직렬화</a:t>
-            </a:r>
-          </a:p>
-        </p:txBody>
-      </p:sp>
-      <p:sp>
-        <p:nvSpPr>
-          <p:cNvPr id="11" name="TextBox 10"/>
-          <p:cNvSpPr txBox="1"/>
-          <p:nvPr/>
-        </p:nvSpPr>
-        <p:spPr>
-          <a:xfrm>
-            <a:off x="950976" y="1773936"/>
-            <a:ext cx="4736592" cy="274320"/>
+              <a:t>HOLD</a:t>
+            </a:r>
+          </a:p>
+        </p:txBody>
+      </p:sp>
+      <p:sp>
+        <p:nvSpPr>
+          <p:cNvPr id="28" name="TextBox 27"/>
+          <p:cNvSpPr txBox="1"/>
+          <p:nvPr/>
+        </p:nvSpPr>
+        <p:spPr>
+          <a:xfrm>
+            <a:off x="4498848" y="3785616"/>
+            <a:ext cx="2944368" cy="219456"/>
           </a:xfrm>
           <a:prstGeom prst="rect">
             <a:avLst/>
@@ -5307,43 +6135,7 @@
           <a:lstStyle/>
           <a:p>
             <a:pPr algn="l">
-              <a:defRPr sz="1700" b="1">
-                <a:solidFill>
-                  <a:srgbClr val="F6F9FC"/>
-                </a:solidFill>
-                <a:latin typeface="Malgun Gothic"/>
-              </a:defRPr>
-            </a:pPr>
-            <a:r>
-              <a:t>여러 source가 동시에 발생</a:t>
-            </a:r>
-          </a:p>
-        </p:txBody>
-      </p:sp>
-      <p:sp>
-        <p:nvSpPr>
-          <p:cNvPr id="12" name="TextBox 11"/>
-          <p:cNvSpPr txBox="1"/>
-          <p:nvPr/>
-        </p:nvSpPr>
-        <p:spPr>
-          <a:xfrm>
-            <a:off x="950976" y="2267712"/>
-            <a:ext cx="4736592" cy="228600"/>
-          </a:xfrm>
-          <a:prstGeom prst="rect">
-            <a:avLst/>
-          </a:prstGeom>
-          <a:noFill/>
-        </p:spPr>
-        <p:txBody>
-          <a:bodyPr wrap="square" anchor="t" lIns="18288" rIns="18288" tIns="9144" bIns="9144">
-            <a:spAutoFit/>
-          </a:bodyPr>
-          <a:lstStyle/>
-          <a:p>
-            <a:pPr algn="l">
-              <a:defRPr sz="1200" b="0">
+              <a:defRPr sz="1000" b="0">
                 <a:solidFill>
                   <a:srgbClr val="ACC2D6"/>
                 </a:solidFill>
@@ -5351,174 +6143,21 @@
               </a:defRPr>
             </a:pPr>
             <a:r>
-              <a:t>한 cycle에 1 event만 retire</a:t>
-            </a:r>
-          </a:p>
-        </p:txBody>
-      </p:sp>
-      <p:sp>
-        <p:nvSpPr>
-          <p:cNvPr id="13" name="Rounded Rectangle 12"/>
+              <a:t>고부하 jitter 해법 미완료</a:t>
+            </a:r>
+          </a:p>
+        </p:txBody>
+      </p:sp>
+      <p:sp>
+        <p:nvSpPr>
+          <p:cNvPr id="29" name="Rounded Rectangle 28"/>
           <p:cNvSpPr/>
           <p:nvPr/>
         </p:nvSpPr>
         <p:spPr>
           <a:xfrm>
-            <a:off x="6236208" y="1170432"/>
-            <a:ext cx="5230368" cy="1572768"/>
-          </a:xfrm>
-          <a:prstGeom prst="roundRect">
-            <a:avLst/>
-          </a:prstGeom>
-          <a:solidFill>
-            <a:srgbClr val="12304C"/>
-          </a:solidFill>
-          <a:ln w="19050">
-            <a:solidFill>
-              <a:srgbClr val="FFB746"/>
-            </a:solidFill>
-          </a:ln>
-        </p:spPr>
-        <p:style>
-          <a:lnRef idx="1">
-            <a:schemeClr val="accent1"/>
-          </a:lnRef>
-          <a:fillRef idx="3">
-            <a:schemeClr val="accent1"/>
-          </a:fillRef>
-          <a:effectRef idx="2">
-            <a:schemeClr val="accent1"/>
-          </a:effectRef>
-          <a:fontRef idx="minor">
-            <a:schemeClr val="lt1"/>
-          </a:fontRef>
-        </p:style>
-        <p:txBody>
-          <a:bodyPr rtlCol="0" anchor="ctr"/>
-          <a:lstStyle/>
-          <a:p>
-            <a:pPr algn="ctr"/>
-          </a:p>
-        </p:txBody>
-      </p:sp>
-      <p:sp>
-        <p:nvSpPr>
-          <p:cNvPr id="14" name="TextBox 13"/>
-          <p:cNvSpPr txBox="1"/>
-          <p:nvPr/>
-        </p:nvSpPr>
-        <p:spPr>
-          <a:xfrm>
-            <a:off x="6473952" y="1353312"/>
-            <a:ext cx="4736592" cy="274320"/>
-          </a:xfrm>
-          <a:prstGeom prst="rect">
-            <a:avLst/>
-          </a:prstGeom>
-          <a:noFill/>
-        </p:spPr>
-        <p:txBody>
-          <a:bodyPr wrap="square" anchor="t" lIns="18288" rIns="18288" tIns="9144" bIns="9144">
-            <a:spAutoFit/>
-          </a:bodyPr>
-          <a:lstStyle/>
-          <a:p>
-            <a:pPr algn="l">
-              <a:defRPr sz="1600" b="1">
-                <a:solidFill>
-                  <a:srgbClr val="FFB746"/>
-                </a:solidFill>
-                <a:latin typeface="Malgun Gothic"/>
-              </a:defRPr>
-            </a:pPr>
-            <a:r>
-              <a:t>② SOURCE 재발생</a:t>
-            </a:r>
-          </a:p>
-        </p:txBody>
-      </p:sp>
-      <p:sp>
-        <p:nvSpPr>
-          <p:cNvPr id="15" name="TextBox 14"/>
-          <p:cNvSpPr txBox="1"/>
-          <p:nvPr/>
-        </p:nvSpPr>
-        <p:spPr>
-          <a:xfrm>
-            <a:off x="6473952" y="1773936"/>
-            <a:ext cx="4736592" cy="274320"/>
-          </a:xfrm>
-          <a:prstGeom prst="rect">
-            <a:avLst/>
-          </a:prstGeom>
-          <a:noFill/>
-        </p:spPr>
-        <p:txBody>
-          <a:bodyPr wrap="square" anchor="t" lIns="18288" rIns="18288" tIns="9144" bIns="9144">
-            <a:spAutoFit/>
-          </a:bodyPr>
-          <a:lstStyle/>
-          <a:p>
-            <a:pPr algn="l">
-              <a:defRPr sz="1700" b="1">
-                <a:solidFill>
-                  <a:srgbClr val="F6F9FC"/>
-                </a:solidFill>
-                <a:latin typeface="Malgun Gothic"/>
-              </a:defRPr>
-            </a:pPr>
-            <a:r>
-              <a:t>grant 전에 같은 source 재발생</a:t>
-            </a:r>
-          </a:p>
-        </p:txBody>
-      </p:sp>
-      <p:sp>
-        <p:nvSpPr>
-          <p:cNvPr id="16" name="TextBox 15"/>
-          <p:cNvSpPr txBox="1"/>
-          <p:nvPr/>
-        </p:nvSpPr>
-        <p:spPr>
-          <a:xfrm>
-            <a:off x="6473952" y="2267712"/>
-            <a:ext cx="4736592" cy="228600"/>
-          </a:xfrm>
-          <a:prstGeom prst="rect">
-            <a:avLst/>
-          </a:prstGeom>
-          <a:noFill/>
-        </p:spPr>
-        <p:txBody>
-          <a:bodyPr wrap="square" anchor="t" lIns="18288" rIns="18288" tIns="9144" bIns="9144">
-            <a:spAutoFit/>
-          </a:bodyPr>
-          <a:lstStyle/>
-          <a:p>
-            <a:pPr algn="l">
-              <a:defRPr sz="1200" b="0">
-                <a:solidFill>
-                  <a:srgbClr val="ACC2D6"/>
-                </a:solidFill>
-                <a:latin typeface="Malgun Gothic"/>
-              </a:defRPr>
-            </a:pPr>
-            <a:r>
-              <a:t>local full → overrun</a:t>
-            </a:r>
-          </a:p>
-        </p:txBody>
-      </p:sp>
-      <p:sp>
-        <p:nvSpPr>
-          <p:cNvPr id="17" name="Rounded Rectangle 16"/>
-          <p:cNvSpPr/>
-          <p:nvPr/>
-        </p:nvSpPr>
-        <p:spPr>
-          <a:xfrm>
-            <a:off x="713232" y="3310128"/>
-            <a:ext cx="5230368" cy="1572768"/>
+            <a:off x="7973568" y="2907792"/>
+            <a:ext cx="3310128" cy="1325880"/>
           </a:xfrm>
           <a:prstGeom prst="roundRect">
             <a:avLst/>
@@ -5556,14 +6195,14 @@
       </p:sp>
       <p:sp>
         <p:nvSpPr>
-          <p:cNvPr id="18" name="TextBox 17"/>
-          <p:cNvSpPr txBox="1"/>
-          <p:nvPr/>
-        </p:nvSpPr>
-        <p:spPr>
-          <a:xfrm>
-            <a:off x="950976" y="3493008"/>
-            <a:ext cx="4736592" cy="274320"/>
+          <p:cNvPr id="30" name="TextBox 29"/>
+          <p:cNvSpPr txBox="1"/>
+          <p:nvPr/>
+        </p:nvSpPr>
+        <p:spPr>
+          <a:xfrm>
+            <a:off x="8156448" y="3063240"/>
+            <a:ext cx="2944368" cy="256032"/>
           </a:xfrm>
           <a:prstGeom prst="rect">
             <a:avLst/>
@@ -5577,7 +6216,43 @@
           <a:lstStyle/>
           <a:p>
             <a:pPr algn="l">
-              <a:defRPr sz="1600" b="1">
+              <a:defRPr sz="1400" b="1">
+                <a:solidFill>
+                  <a:srgbClr val="F6F9FC"/>
+                </a:solidFill>
+                <a:latin typeface="Malgun Gothic"/>
+              </a:defRPr>
+            </a:pPr>
+            <a:r>
+              <a:t>⑥ motion artifact</a:t>
+            </a:r>
+          </a:p>
+        </p:txBody>
+      </p:sp>
+      <p:sp>
+        <p:nvSpPr>
+          <p:cNvPr id="31" name="TextBox 30"/>
+          <p:cNvSpPr txBox="1"/>
+          <p:nvPr/>
+        </p:nvSpPr>
+        <p:spPr>
+          <a:xfrm>
+            <a:off x="8156448" y="3419856"/>
+            <a:ext cx="2944368" cy="228600"/>
+          </a:xfrm>
+          <a:prstGeom prst="rect">
+            <a:avLst/>
+          </a:prstGeom>
+          <a:noFill/>
+        </p:spPr>
+        <p:txBody>
+          <a:bodyPr wrap="square" anchor="t" lIns="18288" rIns="18288" tIns="9144" bIns="9144">
+            <a:spAutoFit/>
+          </a:bodyPr>
+          <a:lstStyle/>
+          <a:p>
+            <a:pPr algn="l">
+              <a:defRPr sz="1200" b="1">
                 <a:solidFill>
                   <a:srgbClr val="B27EFF"/>
                 </a:solidFill>
@@ -5585,21 +6260,21 @@
               </a:defRPr>
             </a:pPr>
             <a:r>
-              <a:t>③ TRAFFIC 불균형</a:t>
-            </a:r>
-          </a:p>
-        </p:txBody>
-      </p:sp>
-      <p:sp>
-        <p:nvSpPr>
-          <p:cNvPr id="19" name="TextBox 18"/>
-          <p:cNvSpPr txBox="1"/>
-          <p:nvPr/>
-        </p:nvSpPr>
-        <p:spPr>
-          <a:xfrm>
-            <a:off x="950976" y="3913632"/>
-            <a:ext cx="4736592" cy="274320"/>
+              <a:t>PARTIAL</a:t>
+            </a:r>
+          </a:p>
+        </p:txBody>
+      </p:sp>
+      <p:sp>
+        <p:nvSpPr>
+          <p:cNvPr id="32" name="TextBox 31"/>
+          <p:cNvSpPr txBox="1"/>
+          <p:nvPr/>
+        </p:nvSpPr>
+        <p:spPr>
+          <a:xfrm>
+            <a:off x="8156448" y="3785616"/>
+            <a:ext cx="2944368" cy="219456"/>
           </a:xfrm>
           <a:prstGeom prst="rect">
             <a:avLst/>
@@ -5613,43 +6288,7 @@
           <a:lstStyle/>
           <a:p>
             <a:pPr algn="l">
-              <a:defRPr sz="1700" b="1">
-                <a:solidFill>
-                  <a:srgbClr val="F6F9FC"/>
-                </a:solidFill>
-                <a:latin typeface="Malgun Gothic"/>
-              </a:defRPr>
-            </a:pPr>
-            <a:r>
-              <a:t>center 또는 peripheral에 집중</a:t>
-            </a:r>
-          </a:p>
-        </p:txBody>
-      </p:sp>
-      <p:sp>
-        <p:nvSpPr>
-          <p:cNvPr id="20" name="TextBox 19"/>
-          <p:cNvSpPr txBox="1"/>
-          <p:nvPr/>
-        </p:nvSpPr>
-        <p:spPr>
-          <a:xfrm>
-            <a:off x="950976" y="4407408"/>
-            <a:ext cx="4736592" cy="228600"/>
-          </a:xfrm>
-          <a:prstGeom prst="rect">
-            <a:avLst/>
-          </a:prstGeom>
-          <a:noFill/>
-        </p:spPr>
-        <p:txBody>
-          <a:bodyPr wrap="square" anchor="t" lIns="18288" rIns="18288" tIns="9144" bIns="9144">
-            <a:spAutoFit/>
-          </a:bodyPr>
-          <a:lstStyle/>
-          <a:p>
-            <a:pPr algn="l">
-              <a:defRPr sz="1200" b="0">
+              <a:defRPr sz="1000" b="0">
                 <a:solidFill>
                   <a:srgbClr val="ACC2D6"/>
                 </a:solidFill>
@@ -5657,167 +6296,14 @@
               </a:defRPr>
             </a:pPr>
             <a:r>
-              <a:t>고정 lane이 놀며 처리력 낭비</a:t>
-            </a:r>
-          </a:p>
-        </p:txBody>
-      </p:sp>
-      <p:sp>
-        <p:nvSpPr>
-          <p:cNvPr id="21" name="Rounded Rectangle 20"/>
-          <p:cNvSpPr/>
-          <p:nvPr/>
-        </p:nvSpPr>
-        <p:spPr>
-          <a:xfrm>
-            <a:off x="6236208" y="3310128"/>
-            <a:ext cx="5230368" cy="1572768"/>
-          </a:xfrm>
-          <a:prstGeom prst="roundRect">
-            <a:avLst/>
-          </a:prstGeom>
-          <a:solidFill>
-            <a:srgbClr val="12304C"/>
-          </a:solidFill>
-          <a:ln w="19050">
-            <a:solidFill>
-              <a:srgbClr val="4793FF"/>
-            </a:solidFill>
-          </a:ln>
-        </p:spPr>
-        <p:style>
-          <a:lnRef idx="1">
-            <a:schemeClr val="accent1"/>
-          </a:lnRef>
-          <a:fillRef idx="3">
-            <a:schemeClr val="accent1"/>
-          </a:fillRef>
-          <a:effectRef idx="2">
-            <a:schemeClr val="accent1"/>
-          </a:effectRef>
-          <a:fontRef idx="minor">
-            <a:schemeClr val="lt1"/>
-          </a:fontRef>
-        </p:style>
-        <p:txBody>
-          <a:bodyPr rtlCol="0" anchor="ctr"/>
-          <a:lstStyle/>
-          <a:p>
-            <a:pPr algn="ctr"/>
-          </a:p>
-        </p:txBody>
-      </p:sp>
-      <p:sp>
-        <p:nvSpPr>
-          <p:cNvPr id="22" name="TextBox 21"/>
-          <p:cNvSpPr txBox="1"/>
-          <p:nvPr/>
-        </p:nvSpPr>
-        <p:spPr>
-          <a:xfrm>
-            <a:off x="6473952" y="3493008"/>
-            <a:ext cx="4736592" cy="274320"/>
-          </a:xfrm>
-          <a:prstGeom prst="rect">
-            <a:avLst/>
-          </a:prstGeom>
-          <a:noFill/>
-        </p:spPr>
-        <p:txBody>
-          <a:bodyPr wrap="square" anchor="t" lIns="18288" rIns="18288" tIns="9144" bIns="9144">
-            <a:spAutoFit/>
-          </a:bodyPr>
-          <a:lstStyle/>
-          <a:p>
-            <a:pPr algn="l">
-              <a:defRPr sz="1600" b="1">
-                <a:solidFill>
-                  <a:srgbClr val="4793FF"/>
-                </a:solidFill>
-                <a:latin typeface="Malgun Gothic"/>
-              </a:defRPr>
-            </a:pPr>
-            <a:r>
-              <a:t>④ POLARITY 정렬</a:t>
-            </a:r>
-          </a:p>
-        </p:txBody>
-      </p:sp>
-      <p:sp>
-        <p:nvSpPr>
-          <p:cNvPr id="23" name="TextBox 22"/>
-          <p:cNvSpPr txBox="1"/>
-          <p:nvPr/>
-        </p:nvSpPr>
-        <p:spPr>
-          <a:xfrm>
-            <a:off x="6473952" y="3913632"/>
-            <a:ext cx="4736592" cy="274320"/>
-          </a:xfrm>
-          <a:prstGeom prst="rect">
-            <a:avLst/>
-          </a:prstGeom>
-          <a:noFill/>
-        </p:spPr>
-        <p:txBody>
-          <a:bodyPr wrap="square" anchor="t" lIns="18288" rIns="18288" tIns="9144" bIns="9144">
-            <a:spAutoFit/>
-          </a:bodyPr>
-          <a:lstStyle/>
-          <a:p>
-            <a:pPr algn="l">
-              <a:defRPr sz="1700" b="1">
-                <a:solidFill>
-                  <a:srgbClr val="F6F9FC"/>
-                </a:solidFill>
-                <a:latin typeface="Malgun Gothic"/>
-              </a:defRPr>
-            </a:pPr>
-            <a:r>
-              <a:t>주소와 polarity의 저장·pop 분리</a:t>
-            </a:r>
-          </a:p>
-        </p:txBody>
-      </p:sp>
-      <p:sp>
-        <p:nvSpPr>
-          <p:cNvPr id="24" name="TextBox 23"/>
-          <p:cNvSpPr txBox="1"/>
-          <p:nvPr/>
-        </p:nvSpPr>
-        <p:spPr>
-          <a:xfrm>
-            <a:off x="6473952" y="4407408"/>
-            <a:ext cx="4736592" cy="228600"/>
-          </a:xfrm>
-          <a:prstGeom prst="rect">
-            <a:avLst/>
-          </a:prstGeom>
-          <a:noFill/>
-        </p:spPr>
-        <p:txBody>
-          <a:bodyPr wrap="square" anchor="t" lIns="18288" rIns="18288" tIns="9144" bIns="9144">
-            <a:spAutoFit/>
-          </a:bodyPr>
-          <a:lstStyle/>
-          <a:p>
-            <a:pPr algn="l">
-              <a:defRPr sz="1200" b="0">
-                <a:solidFill>
-                  <a:srgbClr val="ACC2D6"/>
-                </a:solidFill>
-                <a:latin typeface="Malgun Gothic"/>
-              </a:defRPr>
-            </a:pPr>
-            <a:r>
-              <a:t>event 의미 mismatch 위험</a:t>
-            </a:r>
-          </a:p>
-        </p:txBody>
-      </p:sp>
-      <p:sp>
-        <p:nvSpPr>
-          <p:cNvPr id="25" name="Rounded Rectangle 24"/>
+              <a:t>동시 row/lane spread 0 · 고부하 HOLD</a:t>
+            </a:r>
+          </a:p>
+        </p:txBody>
+      </p:sp>
+      <p:sp>
+        <p:nvSpPr>
+          <p:cNvPr id="33" name="Rounded Rectangle 32"/>
           <p:cNvSpPr/>
           <p:nvPr/>
         </p:nvSpPr>
@@ -5860,7 +6346,7 @@
       </p:sp>
       <p:sp>
         <p:nvSpPr>
-          <p:cNvPr id="26" name="TextBox 25"/>
+          <p:cNvPr id="34" name="TextBox 33"/>
           <p:cNvSpPr txBox="1"/>
           <p:nvPr/>
         </p:nvSpPr>
@@ -5889,14 +6375,14 @@
               </a:defRPr>
             </a:pPr>
             <a:r>
-              <a:t>대역폭 · buffer · 자원 활용 · metadata 정렬이 서로 다른 병목으로 연결된다</a:t>
-            </a:r>
-          </a:p>
-        </p:txBody>
-      </p:sp>
-      <p:sp>
-        <p:nvSpPr>
-          <p:cNvPr id="27" name="Rectangle 26"/>
+              <a:t>해결된 축과 남은 축을 분리한다 — timestamp/motion을 해결 완료로 과장하지 않는다</a:t>
+            </a:r>
+          </a:p>
+        </p:txBody>
+      </p:sp>
+      <p:sp>
+        <p:nvSpPr>
+          <p:cNvPr id="35" name="Rectangle 34"/>
           <p:cNvSpPr/>
           <p:nvPr/>
         </p:nvSpPr>
@@ -5939,7 +6425,7 @@
       </p:sp>
       <p:sp>
         <p:nvSpPr>
-          <p:cNvPr id="28" name="Rounded Rectangle 27"/>
+          <p:cNvPr id="36" name="Rounded Rectangle 35"/>
           <p:cNvSpPr/>
           <p:nvPr/>
         </p:nvSpPr>
@@ -5982,7 +6468,7 @@
       </p:sp>
       <p:sp>
         <p:nvSpPr>
-          <p:cNvPr id="29" name="TextBox 28"/>
+          <p:cNvPr id="37" name="TextBox 36"/>
           <p:cNvSpPr txBox="1"/>
           <p:nvPr/>
         </p:nvSpPr>
@@ -6011,14 +6497,14 @@
               </a:defRPr>
             </a:pPr>
             <a:r>
-              <a:t>01  병목</a:t>
-            </a:r>
-          </a:p>
-        </p:txBody>
-      </p:sp>
-      <p:sp>
-        <p:nvSpPr>
-          <p:cNvPr id="30" name="TextBox 29"/>
+              <a:t>01  문제</a:t>
+            </a:r>
+          </a:p>
+        </p:txBody>
+      </p:sp>
+      <p:sp>
+        <p:nvSpPr>
+          <p:cNvPr id="38" name="TextBox 37"/>
           <p:cNvSpPr txBox="1"/>
           <p:nvPr/>
         </p:nvSpPr>
@@ -6047,14 +6533,14 @@
               </a:defRPr>
             </a:pPr>
             <a:r>
-              <a:t>우리 AER이 겨냥한 병목은 네 가지다</a:t>
-            </a:r>
-          </a:p>
-        </p:txBody>
-      </p:sp>
-      <p:sp>
-        <p:nvSpPr>
-          <p:cNvPr id="31" name="Rectangle 30"/>
+              <a:t>Ryu의 전통 AER 6문제에 대한 우리의 대응</a:t>
+            </a:r>
+          </a:p>
+        </p:txBody>
+      </p:sp>
+      <p:sp>
+        <p:nvSpPr>
+          <p:cNvPr id="39" name="Rectangle 38"/>
           <p:cNvSpPr/>
           <p:nvPr/>
         </p:nvSpPr>
@@ -6238,7 +6724,7 @@
               </a:defRPr>
             </a:pPr>
             <a:r>
-              <a:t>01  병목</a:t>
+              <a:t>02  핵심</a:t>
             </a:r>
           </a:p>
         </p:txBody>
@@ -6274,7 +6760,7 @@
               </a:defRPr>
             </a:pPr>
             <a:r>
-              <a:t>① 출력 직렬화가 ② source-local overrun으로 이어진다</a:t>
+              <a:t>기본 Cluster2의 빈틈을 steal_buf가 직접 메운다</a:t>
             </a:r>
           </a:p>
         </p:txBody>
@@ -6353,7 +6839,7 @@
               </a:defRPr>
             </a:pPr>
             <a:r>
-              <a:t>Source: recovered scalar Fovea Xcelium full50 diagnostics</a:t>
+              <a:t>Source: official full50 Xcelium comparison · Ganghee sections 65–66</a:t>
             </a:r>
           </a:p>
         </p:txBody>
@@ -6396,60 +6882,24 @@
       </p:sp>
       <p:sp>
         <p:nvSpPr>
-          <p:cNvPr id="9" name="TextBox 8"/>
-          <p:cNvSpPr txBox="1"/>
-          <p:nvPr/>
-        </p:nvSpPr>
-        <p:spPr>
-          <a:xfrm>
-            <a:off x="731520" y="1143000"/>
-            <a:ext cx="2011680" cy="256032"/>
-          </a:xfrm>
-          <a:prstGeom prst="rect">
-            <a:avLst/>
-          </a:prstGeom>
-          <a:noFill/>
-        </p:spPr>
-        <p:txBody>
-          <a:bodyPr wrap="square" anchor="t" lIns="18288" rIns="18288" tIns="9144" bIns="9144">
-            <a:spAutoFit/>
-          </a:bodyPr>
-          <a:lstStyle/>
-          <a:p>
-            <a:pPr algn="ctr">
-              <a:defRPr sz="1400" b="1">
-                <a:solidFill>
-                  <a:srgbClr val="4793FF"/>
-                </a:solidFill>
-                <a:latin typeface="Malgun Gothic"/>
-              </a:defRPr>
-            </a:pPr>
-            <a:r>
-              <a:t>동시 입력</a:t>
-            </a:r>
-          </a:p>
-        </p:txBody>
-      </p:sp>
-      <p:sp>
-        <p:nvSpPr>
-          <p:cNvPr id="10" name="Rounded Rectangle 9"/>
+          <p:cNvPr id="9" name="Rounded Rectangle 8"/>
           <p:cNvSpPr/>
           <p:nvPr/>
         </p:nvSpPr>
         <p:spPr>
           <a:xfrm>
-            <a:off x="841248" y="1581912"/>
-            <a:ext cx="310896" cy="310896"/>
+            <a:off x="713232" y="1143000"/>
+            <a:ext cx="4800600" cy="3611880"/>
           </a:xfrm>
           <a:prstGeom prst="roundRect">
             <a:avLst/>
           </a:prstGeom>
           <a:solidFill>
-            <a:srgbClr val="193E5C"/>
+            <a:srgbClr val="12304C"/>
           </a:solidFill>
           <a:ln w="19050">
             <a:solidFill>
-              <a:srgbClr val="4793FF"/>
+              <a:srgbClr val="FFB746"/>
             </a:solidFill>
           </a:ln>
         </p:spPr>
@@ -6477,24 +6927,240 @@
       </p:sp>
       <p:sp>
         <p:nvSpPr>
-          <p:cNvPr id="11" name="Rounded Rectangle 10"/>
+          <p:cNvPr id="10" name="TextBox 9"/>
+          <p:cNvSpPr txBox="1"/>
+          <p:nvPr/>
+        </p:nvSpPr>
+        <p:spPr>
+          <a:xfrm>
+            <a:off x="987552" y="1444752"/>
+            <a:ext cx="4251960" cy="274320"/>
+          </a:xfrm>
+          <a:prstGeom prst="rect">
+            <a:avLst/>
+          </a:prstGeom>
+          <a:noFill/>
+        </p:spPr>
+        <p:txBody>
+          <a:bodyPr wrap="square" anchor="t" lIns="18288" rIns="18288" tIns="9144" bIns="9144">
+            <a:spAutoFit/>
+          </a:bodyPr>
+          <a:lstStyle/>
+          <a:p>
+            <a:pPr algn="ctr">
+              <a:defRPr sz="1600" b="1">
+                <a:solidFill>
+                  <a:srgbClr val="FFB746"/>
+                </a:solidFill>
+                <a:latin typeface="Malgun Gothic"/>
+              </a:defRPr>
+            </a:pPr>
+            <a:r>
+              <a:t>BASIC CLUSTER2</a:t>
+            </a:r>
+          </a:p>
+        </p:txBody>
+      </p:sp>
+      <p:sp>
+        <p:nvSpPr>
+          <p:cNvPr id="11" name="TextBox 10"/>
+          <p:cNvSpPr txBox="1"/>
+          <p:nvPr/>
+        </p:nvSpPr>
+        <p:spPr>
+          <a:xfrm>
+            <a:off x="987552" y="1984248"/>
+            <a:ext cx="4251960" cy="347472"/>
+          </a:xfrm>
+          <a:prstGeom prst="rect">
+            <a:avLst/>
+          </a:prstGeom>
+          <a:noFill/>
+        </p:spPr>
+        <p:txBody>
+          <a:bodyPr wrap="square" anchor="t" lIns="18288" rIns="18288" tIns="9144" bIns="9144">
+            <a:spAutoFit/>
+          </a:bodyPr>
+          <a:lstStyle/>
+          <a:p>
+            <a:pPr algn="ctr">
+              <a:defRPr sz="2300" b="1">
+                <a:solidFill>
+                  <a:srgbClr val="F6F9FC"/>
+                </a:solidFill>
+                <a:latin typeface="Malgun Gothic"/>
+              </a:defRPr>
+            </a:pPr>
+            <a:r>
+              <a:t>source당 pending 1개</a:t>
+            </a:r>
+          </a:p>
+        </p:txBody>
+      </p:sp>
+      <p:sp>
+        <p:nvSpPr>
+          <p:cNvPr id="12" name="TextBox 11"/>
+          <p:cNvSpPr txBox="1"/>
+          <p:nvPr/>
+        </p:nvSpPr>
+        <p:spPr>
+          <a:xfrm>
+            <a:off x="987552" y="2633472"/>
+            <a:ext cx="4251960" cy="256032"/>
+          </a:xfrm>
+          <a:prstGeom prst="rect">
+            <a:avLst/>
+          </a:prstGeom>
+          <a:noFill/>
+        </p:spPr>
+        <p:txBody>
+          <a:bodyPr wrap="square" anchor="t" lIns="18288" rIns="18288" tIns="9144" bIns="9144">
+            <a:spAutoFit/>
+          </a:bodyPr>
+          <a:lstStyle/>
+          <a:p>
+            <a:pPr algn="ctr">
+              <a:defRPr sz="1400" b="0">
+                <a:solidFill>
+                  <a:srgbClr val="ACC2D6"/>
+                </a:solidFill>
+                <a:latin typeface="Malgun Gothic"/>
+              </a:defRPr>
+            </a:pPr>
+            <a:r>
+              <a:t>재발화가 grant보다 빠르면</a:t>
+            </a:r>
+          </a:p>
+        </p:txBody>
+      </p:sp>
+      <p:sp>
+        <p:nvSpPr>
+          <p:cNvPr id="13" name="TextBox 12"/>
+          <p:cNvSpPr txBox="1"/>
+          <p:nvPr/>
+        </p:nvSpPr>
+        <p:spPr>
+          <a:xfrm>
+            <a:off x="987552" y="3054096"/>
+            <a:ext cx="4251960" cy="347472"/>
+          </a:xfrm>
+          <a:prstGeom prst="rect">
+            <a:avLst/>
+          </a:prstGeom>
+          <a:noFill/>
+        </p:spPr>
+        <p:txBody>
+          <a:bodyPr wrap="square" anchor="t" lIns="18288" rIns="18288" tIns="9144" bIns="9144">
+            <a:spAutoFit/>
+          </a:bodyPr>
+          <a:lstStyle/>
+          <a:p>
+            <a:pPr algn="ctr">
+              <a:defRPr sz="2000" b="1">
+                <a:solidFill>
+                  <a:srgbClr val="FF6376"/>
+                </a:solidFill>
+                <a:latin typeface="Malgun Gothic"/>
+              </a:defRPr>
+            </a:pPr>
+            <a:r>
+              <a:t>LOCAL FULL → OVERRUN</a:t>
+            </a:r>
+          </a:p>
+        </p:txBody>
+      </p:sp>
+      <p:sp>
+        <p:nvSpPr>
+          <p:cNvPr id="14" name="TextBox 13"/>
+          <p:cNvSpPr txBox="1"/>
+          <p:nvPr/>
+        </p:nvSpPr>
+        <p:spPr>
+          <a:xfrm>
+            <a:off x="987552" y="3886200"/>
+            <a:ext cx="4251960" cy="384048"/>
+          </a:xfrm>
+          <a:prstGeom prst="rect">
+            <a:avLst/>
+          </a:prstGeom>
+          <a:noFill/>
+        </p:spPr>
+        <p:txBody>
+          <a:bodyPr wrap="square" anchor="t" lIns="18288" rIns="18288" tIns="9144" bIns="9144">
+            <a:spAutoFit/>
+          </a:bodyPr>
+          <a:lstStyle/>
+          <a:p>
+            <a:pPr algn="ctr">
+              <a:defRPr sz="2500" b="1">
+                <a:solidFill>
+                  <a:srgbClr val="FF6376"/>
+                </a:solidFill>
+                <a:latin typeface="Malgun Gothic"/>
+              </a:defRPr>
+            </a:pPr>
+            <a:r>
+              <a:t>11.52%  ·  12,259 loss</a:t>
+            </a:r>
+          </a:p>
+        </p:txBody>
+      </p:sp>
+      <p:sp>
+        <p:nvSpPr>
+          <p:cNvPr id="15" name="TextBox 14"/>
+          <p:cNvSpPr txBox="1"/>
+          <p:nvPr/>
+        </p:nvSpPr>
+        <p:spPr>
+          <a:xfrm>
+            <a:off x="5669280" y="2606040"/>
+            <a:ext cx="658368" cy="411480"/>
+          </a:xfrm>
+          <a:prstGeom prst="rect">
+            <a:avLst/>
+          </a:prstGeom>
+          <a:noFill/>
+        </p:spPr>
+        <p:txBody>
+          <a:bodyPr wrap="square" anchor="t" lIns="18288" rIns="18288" tIns="9144" bIns="9144">
+            <a:spAutoFit/>
+          </a:bodyPr>
+          <a:lstStyle/>
+          <a:p>
+            <a:pPr algn="ctr">
+              <a:defRPr sz="3800" b="1">
+                <a:solidFill>
+                  <a:srgbClr val="2AD3CD"/>
+                </a:solidFill>
+                <a:latin typeface="Malgun Gothic"/>
+              </a:defRPr>
+            </a:pPr>
+            <a:r>
+              <a:t>→</a:t>
+            </a:r>
+          </a:p>
+        </p:txBody>
+      </p:sp>
+      <p:sp>
+        <p:nvSpPr>
+          <p:cNvPr id="16" name="Rounded Rectangle 15"/>
           <p:cNvSpPr/>
           <p:nvPr/>
         </p:nvSpPr>
         <p:spPr>
           <a:xfrm>
-            <a:off x="1280160" y="1581912"/>
-            <a:ext cx="310896" cy="310896"/>
+            <a:off x="6492240" y="1143000"/>
+            <a:ext cx="4800600" cy="3611880"/>
           </a:xfrm>
           <a:prstGeom prst="roundRect">
             <a:avLst/>
           </a:prstGeom>
           <a:solidFill>
-            <a:srgbClr val="193E5C"/>
+            <a:srgbClr val="12304C"/>
           </a:solidFill>
           <a:ln w="19050">
             <a:solidFill>
-              <a:srgbClr val="4793FF"/>
+              <a:srgbClr val="37CD85"/>
             </a:solidFill>
           </a:ln>
         </p:spPr>
@@ -6522,500 +7188,194 @@
       </p:sp>
       <p:sp>
         <p:nvSpPr>
-          <p:cNvPr id="12" name="Rounded Rectangle 11"/>
+          <p:cNvPr id="17" name="TextBox 16"/>
+          <p:cNvSpPr txBox="1"/>
+          <p:nvPr/>
+        </p:nvSpPr>
+        <p:spPr>
+          <a:xfrm>
+            <a:off x="6766560" y="1444752"/>
+            <a:ext cx="4251960" cy="274320"/>
+          </a:xfrm>
+          <a:prstGeom prst="rect">
+            <a:avLst/>
+          </a:prstGeom>
+          <a:noFill/>
+        </p:spPr>
+        <p:txBody>
+          <a:bodyPr wrap="square" anchor="t" lIns="18288" rIns="18288" tIns="9144" bIns="9144">
+            <a:spAutoFit/>
+          </a:bodyPr>
+          <a:lstStyle/>
+          <a:p>
+            <a:pPr algn="ctr">
+              <a:defRPr sz="1600" b="1">
+                <a:solidFill>
+                  <a:srgbClr val="37CD85"/>
+                </a:solidFill>
+                <a:latin typeface="Malgun Gothic"/>
+              </a:defRPr>
+            </a:pPr>
+            <a:r>
+              <a:t>CLUSTER2 STEAL_BUF</a:t>
+            </a:r>
+          </a:p>
+        </p:txBody>
+      </p:sp>
+      <p:sp>
+        <p:nvSpPr>
+          <p:cNvPr id="18" name="TextBox 17"/>
+          <p:cNvSpPr txBox="1"/>
+          <p:nvPr/>
+        </p:nvSpPr>
+        <p:spPr>
+          <a:xfrm>
+            <a:off x="6766560" y="1984248"/>
+            <a:ext cx="4251960" cy="347472"/>
+          </a:xfrm>
+          <a:prstGeom prst="rect">
+            <a:avLst/>
+          </a:prstGeom>
+          <a:noFill/>
+        </p:spPr>
+        <p:txBody>
+          <a:bodyPr wrap="square" anchor="t" lIns="18288" rIns="18288" tIns="9144" bIns="9144">
+            <a:spAutoFit/>
+          </a:bodyPr>
+          <a:lstStyle/>
+          <a:p>
+            <a:pPr algn="ctr">
+              <a:defRPr sz="2300" b="1">
+                <a:solidFill>
+                  <a:srgbClr val="F6F9FC"/>
+                </a:solidFill>
+                <a:latin typeface="Malgun Gothic"/>
+              </a:defRPr>
+            </a:pPr>
+            <a:r>
+              <a:t>source별 depth-2 FIFO</a:t>
+            </a:r>
+          </a:p>
+        </p:txBody>
+      </p:sp>
+      <p:sp>
+        <p:nvSpPr>
+          <p:cNvPr id="19" name="TextBox 18"/>
+          <p:cNvSpPr txBox="1"/>
+          <p:nvPr/>
+        </p:nvSpPr>
+        <p:spPr>
+          <a:xfrm>
+            <a:off x="6766560" y="2633472"/>
+            <a:ext cx="4251960" cy="256032"/>
+          </a:xfrm>
+          <a:prstGeom prst="rect">
+            <a:avLst/>
+          </a:prstGeom>
+          <a:noFill/>
+        </p:spPr>
+        <p:txBody>
+          <a:bodyPr wrap="square" anchor="t" lIns="18288" rIns="18288" tIns="9144" bIns="9144">
+            <a:spAutoFit/>
+          </a:bodyPr>
+          <a:lstStyle/>
+          <a:p>
+            <a:pPr algn="ctr">
+              <a:defRPr sz="1400" b="0">
+                <a:solidFill>
+                  <a:srgbClr val="ACC2D6"/>
+                </a:solidFill>
+                <a:latin typeface="Malgun Gothic"/>
+              </a:defRPr>
+            </a:pPr>
+            <a:r>
+              <a:t>두 번째 event 흡수 + idle lane steal</a:t>
+            </a:r>
+          </a:p>
+        </p:txBody>
+      </p:sp>
+      <p:sp>
+        <p:nvSpPr>
+          <p:cNvPr id="20" name="TextBox 19"/>
+          <p:cNvSpPr txBox="1"/>
+          <p:nvPr/>
+        </p:nvSpPr>
+        <p:spPr>
+          <a:xfrm>
+            <a:off x="6766560" y="3054096"/>
+            <a:ext cx="4251960" cy="347472"/>
+          </a:xfrm>
+          <a:prstGeom prst="rect">
+            <a:avLst/>
+          </a:prstGeom>
+          <a:noFill/>
+        </p:spPr>
+        <p:txBody>
+          <a:bodyPr wrap="square" anchor="t" lIns="18288" rIns="18288" tIns="9144" bIns="9144">
+            <a:spAutoFit/>
+          </a:bodyPr>
+          <a:lstStyle/>
+          <a:p>
+            <a:pPr algn="ctr">
+              <a:defRPr sz="1800" b="1">
+                <a:solidFill>
+                  <a:srgbClr val="2AD3CD"/>
+                </a:solidFill>
+                <a:latin typeface="Malgun Gothic"/>
+              </a:defRPr>
+            </a:pPr>
+            <a:r>
+              <a:t>RETRIGGER + IMBALANCE 대응</a:t>
+            </a:r>
+          </a:p>
+        </p:txBody>
+      </p:sp>
+      <p:sp>
+        <p:nvSpPr>
+          <p:cNvPr id="21" name="TextBox 20"/>
+          <p:cNvSpPr txBox="1"/>
+          <p:nvPr/>
+        </p:nvSpPr>
+        <p:spPr>
+          <a:xfrm>
+            <a:off x="6766560" y="3886200"/>
+            <a:ext cx="4251960" cy="384048"/>
+          </a:xfrm>
+          <a:prstGeom prst="rect">
+            <a:avLst/>
+          </a:prstGeom>
+          <a:noFill/>
+        </p:spPr>
+        <p:txBody>
+          <a:bodyPr wrap="square" anchor="t" lIns="18288" rIns="18288" tIns="9144" bIns="9144">
+            <a:spAutoFit/>
+          </a:bodyPr>
+          <a:lstStyle/>
+          <a:p>
+            <a:pPr algn="ctr">
+              <a:defRPr sz="2500" b="1">
+                <a:solidFill>
+                  <a:srgbClr val="37CD85"/>
+                </a:solidFill>
+                <a:latin typeface="Malgun Gothic"/>
+              </a:defRPr>
+            </a:pPr>
+            <a:r>
+              <a:t>0.47%  ·  502 loss</a:t>
+            </a:r>
+          </a:p>
+        </p:txBody>
+      </p:sp>
+      <p:sp>
+        <p:nvSpPr>
+          <p:cNvPr id="22" name="Rounded Rectangle 21"/>
           <p:cNvSpPr/>
           <p:nvPr/>
         </p:nvSpPr>
         <p:spPr>
           <a:xfrm>
-            <a:off x="1719072" y="1581912"/>
-            <a:ext cx="310896" cy="310896"/>
-          </a:xfrm>
-          <a:prstGeom prst="roundRect">
-            <a:avLst/>
-          </a:prstGeom>
-          <a:solidFill>
-            <a:srgbClr val="193E5C"/>
-          </a:solidFill>
-          <a:ln w="19050">
-            <a:solidFill>
-              <a:srgbClr val="4793FF"/>
-            </a:solidFill>
-          </a:ln>
-        </p:spPr>
-        <p:style>
-          <a:lnRef idx="1">
-            <a:schemeClr val="accent1"/>
-          </a:lnRef>
-          <a:fillRef idx="3">
-            <a:schemeClr val="accent1"/>
-          </a:fillRef>
-          <a:effectRef idx="2">
-            <a:schemeClr val="accent1"/>
-          </a:effectRef>
-          <a:fontRef idx="minor">
-            <a:schemeClr val="lt1"/>
-          </a:fontRef>
-        </p:style>
-        <p:txBody>
-          <a:bodyPr rtlCol="0" anchor="ctr"/>
-          <a:lstStyle/>
-          <a:p>
-            <a:pPr algn="ctr"/>
-          </a:p>
-        </p:txBody>
-      </p:sp>
-      <p:sp>
-        <p:nvSpPr>
-          <p:cNvPr id="13" name="Rounded Rectangle 12"/>
-          <p:cNvSpPr/>
-          <p:nvPr/>
-        </p:nvSpPr>
-        <p:spPr>
-          <a:xfrm>
-            <a:off x="2157984" y="1581912"/>
-            <a:ext cx="310896" cy="310896"/>
-          </a:xfrm>
-          <a:prstGeom prst="roundRect">
-            <a:avLst/>
-          </a:prstGeom>
-          <a:solidFill>
-            <a:srgbClr val="193E5C"/>
-          </a:solidFill>
-          <a:ln w="19050">
-            <a:solidFill>
-              <a:srgbClr val="4793FF"/>
-            </a:solidFill>
-          </a:ln>
-        </p:spPr>
-        <p:style>
-          <a:lnRef idx="1">
-            <a:schemeClr val="accent1"/>
-          </a:lnRef>
-          <a:fillRef idx="3">
-            <a:schemeClr val="accent1"/>
-          </a:fillRef>
-          <a:effectRef idx="2">
-            <a:schemeClr val="accent1"/>
-          </a:effectRef>
-          <a:fontRef idx="minor">
-            <a:schemeClr val="lt1"/>
-          </a:fontRef>
-        </p:style>
-        <p:txBody>
-          <a:bodyPr rtlCol="0" anchor="ctr"/>
-          <a:lstStyle/>
-          <a:p>
-            <a:pPr algn="ctr"/>
-          </a:p>
-        </p:txBody>
-      </p:sp>
-      <p:sp>
-        <p:nvSpPr>
-          <p:cNvPr id="14" name="Rounded Rectangle 13"/>
-          <p:cNvSpPr/>
-          <p:nvPr/>
-        </p:nvSpPr>
-        <p:spPr>
-          <a:xfrm>
-            <a:off x="841248" y="2020824"/>
-            <a:ext cx="310896" cy="310896"/>
-          </a:xfrm>
-          <a:prstGeom prst="roundRect">
-            <a:avLst/>
-          </a:prstGeom>
-          <a:solidFill>
-            <a:srgbClr val="193E5C"/>
-          </a:solidFill>
-          <a:ln w="19050">
-            <a:solidFill>
-              <a:srgbClr val="4793FF"/>
-            </a:solidFill>
-          </a:ln>
-        </p:spPr>
-        <p:style>
-          <a:lnRef idx="1">
-            <a:schemeClr val="accent1"/>
-          </a:lnRef>
-          <a:fillRef idx="3">
-            <a:schemeClr val="accent1"/>
-          </a:fillRef>
-          <a:effectRef idx="2">
-            <a:schemeClr val="accent1"/>
-          </a:effectRef>
-          <a:fontRef idx="minor">
-            <a:schemeClr val="lt1"/>
-          </a:fontRef>
-        </p:style>
-        <p:txBody>
-          <a:bodyPr rtlCol="0" anchor="ctr"/>
-          <a:lstStyle/>
-          <a:p>
-            <a:pPr algn="ctr"/>
-          </a:p>
-        </p:txBody>
-      </p:sp>
-      <p:sp>
-        <p:nvSpPr>
-          <p:cNvPr id="15" name="Rounded Rectangle 14"/>
-          <p:cNvSpPr/>
-          <p:nvPr/>
-        </p:nvSpPr>
-        <p:spPr>
-          <a:xfrm>
-            <a:off x="1280160" y="2020824"/>
-            <a:ext cx="310896" cy="310896"/>
-          </a:xfrm>
-          <a:prstGeom prst="roundRect">
-            <a:avLst/>
-          </a:prstGeom>
-          <a:solidFill>
-            <a:srgbClr val="193E5C"/>
-          </a:solidFill>
-          <a:ln w="19050">
-            <a:solidFill>
-              <a:srgbClr val="4793FF"/>
-            </a:solidFill>
-          </a:ln>
-        </p:spPr>
-        <p:style>
-          <a:lnRef idx="1">
-            <a:schemeClr val="accent1"/>
-          </a:lnRef>
-          <a:fillRef idx="3">
-            <a:schemeClr val="accent1"/>
-          </a:fillRef>
-          <a:effectRef idx="2">
-            <a:schemeClr val="accent1"/>
-          </a:effectRef>
-          <a:fontRef idx="minor">
-            <a:schemeClr val="lt1"/>
-          </a:fontRef>
-        </p:style>
-        <p:txBody>
-          <a:bodyPr rtlCol="0" anchor="ctr"/>
-          <a:lstStyle/>
-          <a:p>
-            <a:pPr algn="ctr"/>
-          </a:p>
-        </p:txBody>
-      </p:sp>
-      <p:sp>
-        <p:nvSpPr>
-          <p:cNvPr id="16" name="Rounded Rectangle 15"/>
-          <p:cNvSpPr/>
-          <p:nvPr/>
-        </p:nvSpPr>
-        <p:spPr>
-          <a:xfrm>
-            <a:off x="1719072" y="2020824"/>
-            <a:ext cx="310896" cy="310896"/>
-          </a:xfrm>
-          <a:prstGeom prst="roundRect">
-            <a:avLst/>
-          </a:prstGeom>
-          <a:solidFill>
-            <a:srgbClr val="193E5C"/>
-          </a:solidFill>
-          <a:ln w="19050">
-            <a:solidFill>
-              <a:srgbClr val="4793FF"/>
-            </a:solidFill>
-          </a:ln>
-        </p:spPr>
-        <p:style>
-          <a:lnRef idx="1">
-            <a:schemeClr val="accent1"/>
-          </a:lnRef>
-          <a:fillRef idx="3">
-            <a:schemeClr val="accent1"/>
-          </a:fillRef>
-          <a:effectRef idx="2">
-            <a:schemeClr val="accent1"/>
-          </a:effectRef>
-          <a:fontRef idx="minor">
-            <a:schemeClr val="lt1"/>
-          </a:fontRef>
-        </p:style>
-        <p:txBody>
-          <a:bodyPr rtlCol="0" anchor="ctr"/>
-          <a:lstStyle/>
-          <a:p>
-            <a:pPr algn="ctr"/>
-          </a:p>
-        </p:txBody>
-      </p:sp>
-      <p:sp>
-        <p:nvSpPr>
-          <p:cNvPr id="17" name="Rounded Rectangle 16"/>
-          <p:cNvSpPr/>
-          <p:nvPr/>
-        </p:nvSpPr>
-        <p:spPr>
-          <a:xfrm>
-            <a:off x="2157984" y="2020824"/>
-            <a:ext cx="310896" cy="310896"/>
-          </a:xfrm>
-          <a:prstGeom prst="roundRect">
-            <a:avLst/>
-          </a:prstGeom>
-          <a:solidFill>
-            <a:srgbClr val="193E5C"/>
-          </a:solidFill>
-          <a:ln w="19050">
-            <a:solidFill>
-              <a:srgbClr val="4793FF"/>
-            </a:solidFill>
-          </a:ln>
-        </p:spPr>
-        <p:style>
-          <a:lnRef idx="1">
-            <a:schemeClr val="accent1"/>
-          </a:lnRef>
-          <a:fillRef idx="3">
-            <a:schemeClr val="accent1"/>
-          </a:fillRef>
-          <a:effectRef idx="2">
-            <a:schemeClr val="accent1"/>
-          </a:effectRef>
-          <a:fontRef idx="minor">
-            <a:schemeClr val="lt1"/>
-          </a:fontRef>
-        </p:style>
-        <p:txBody>
-          <a:bodyPr rtlCol="0" anchor="ctr"/>
-          <a:lstStyle/>
-          <a:p>
-            <a:pPr algn="ctr"/>
-          </a:p>
-        </p:txBody>
-      </p:sp>
-      <p:sp>
-        <p:nvSpPr>
-          <p:cNvPr id="18" name="Rounded Rectangle 17"/>
-          <p:cNvSpPr/>
-          <p:nvPr/>
-        </p:nvSpPr>
-        <p:spPr>
-          <a:xfrm>
-            <a:off x="841248" y="2459736"/>
-            <a:ext cx="310896" cy="310896"/>
-          </a:xfrm>
-          <a:prstGeom prst="roundRect">
-            <a:avLst/>
-          </a:prstGeom>
-          <a:solidFill>
-            <a:srgbClr val="193E5C"/>
-          </a:solidFill>
-          <a:ln w="19050">
-            <a:solidFill>
-              <a:srgbClr val="4793FF"/>
-            </a:solidFill>
-          </a:ln>
-        </p:spPr>
-        <p:style>
-          <a:lnRef idx="1">
-            <a:schemeClr val="accent1"/>
-          </a:lnRef>
-          <a:fillRef idx="3">
-            <a:schemeClr val="accent1"/>
-          </a:fillRef>
-          <a:effectRef idx="2">
-            <a:schemeClr val="accent1"/>
-          </a:effectRef>
-          <a:fontRef idx="minor">
-            <a:schemeClr val="lt1"/>
-          </a:fontRef>
-        </p:style>
-        <p:txBody>
-          <a:bodyPr rtlCol="0" anchor="ctr"/>
-          <a:lstStyle/>
-          <a:p>
-            <a:pPr algn="ctr"/>
-          </a:p>
-        </p:txBody>
-      </p:sp>
-      <p:sp>
-        <p:nvSpPr>
-          <p:cNvPr id="19" name="Rounded Rectangle 18"/>
-          <p:cNvSpPr/>
-          <p:nvPr/>
-        </p:nvSpPr>
-        <p:spPr>
-          <a:xfrm>
-            <a:off x="1280160" y="2459736"/>
-            <a:ext cx="310896" cy="310896"/>
-          </a:xfrm>
-          <a:prstGeom prst="roundRect">
-            <a:avLst/>
-          </a:prstGeom>
-          <a:solidFill>
-            <a:srgbClr val="193E5C"/>
-          </a:solidFill>
-          <a:ln w="19050">
-            <a:solidFill>
-              <a:srgbClr val="4793FF"/>
-            </a:solidFill>
-          </a:ln>
-        </p:spPr>
-        <p:style>
-          <a:lnRef idx="1">
-            <a:schemeClr val="accent1"/>
-          </a:lnRef>
-          <a:fillRef idx="3">
-            <a:schemeClr val="accent1"/>
-          </a:fillRef>
-          <a:effectRef idx="2">
-            <a:schemeClr val="accent1"/>
-          </a:effectRef>
-          <a:fontRef idx="minor">
-            <a:schemeClr val="lt1"/>
-          </a:fontRef>
-        </p:style>
-        <p:txBody>
-          <a:bodyPr rtlCol="0" anchor="ctr"/>
-          <a:lstStyle/>
-          <a:p>
-            <a:pPr algn="ctr"/>
-          </a:p>
-        </p:txBody>
-      </p:sp>
-      <p:sp>
-        <p:nvSpPr>
-          <p:cNvPr id="20" name="Rounded Rectangle 19"/>
-          <p:cNvSpPr/>
-          <p:nvPr/>
-        </p:nvSpPr>
-        <p:spPr>
-          <a:xfrm>
-            <a:off x="1719072" y="2459736"/>
-            <a:ext cx="310896" cy="310896"/>
-          </a:xfrm>
-          <a:prstGeom prst="roundRect">
-            <a:avLst/>
-          </a:prstGeom>
-          <a:solidFill>
-            <a:srgbClr val="193E5C"/>
-          </a:solidFill>
-          <a:ln w="19050">
-            <a:solidFill>
-              <a:srgbClr val="4793FF"/>
-            </a:solidFill>
-          </a:ln>
-        </p:spPr>
-        <p:style>
-          <a:lnRef idx="1">
-            <a:schemeClr val="accent1"/>
-          </a:lnRef>
-          <a:fillRef idx="3">
-            <a:schemeClr val="accent1"/>
-          </a:fillRef>
-          <a:effectRef idx="2">
-            <a:schemeClr val="accent1"/>
-          </a:effectRef>
-          <a:fontRef idx="minor">
-            <a:schemeClr val="lt1"/>
-          </a:fontRef>
-        </p:style>
-        <p:txBody>
-          <a:bodyPr rtlCol="0" anchor="ctr"/>
-          <a:lstStyle/>
-          <a:p>
-            <a:pPr algn="ctr"/>
-          </a:p>
-        </p:txBody>
-      </p:sp>
-      <p:sp>
-        <p:nvSpPr>
-          <p:cNvPr id="21" name="Rounded Rectangle 20"/>
-          <p:cNvSpPr/>
-          <p:nvPr/>
-        </p:nvSpPr>
-        <p:spPr>
-          <a:xfrm>
-            <a:off x="2157984" y="2459736"/>
-            <a:ext cx="310896" cy="310896"/>
-          </a:xfrm>
-          <a:prstGeom prst="roundRect">
-            <a:avLst/>
-          </a:prstGeom>
-          <a:solidFill>
-            <a:srgbClr val="193E5C"/>
-          </a:solidFill>
-          <a:ln w="19050">
-            <a:solidFill>
-              <a:srgbClr val="4793FF"/>
-            </a:solidFill>
-          </a:ln>
-        </p:spPr>
-        <p:style>
-          <a:lnRef idx="1">
-            <a:schemeClr val="accent1"/>
-          </a:lnRef>
-          <a:fillRef idx="3">
-            <a:schemeClr val="accent1"/>
-          </a:fillRef>
-          <a:effectRef idx="2">
-            <a:schemeClr val="accent1"/>
-          </a:effectRef>
-          <a:fontRef idx="minor">
-            <a:schemeClr val="lt1"/>
-          </a:fontRef>
-        </p:style>
-        <p:txBody>
-          <a:bodyPr rtlCol="0" anchor="ctr"/>
-          <a:lstStyle/>
-          <a:p>
-            <a:pPr algn="ctr"/>
-          </a:p>
-        </p:txBody>
-      </p:sp>
-      <p:sp>
-        <p:nvSpPr>
-          <p:cNvPr id="22" name="TextBox 21"/>
-          <p:cNvSpPr txBox="1"/>
-          <p:nvPr/>
-        </p:nvSpPr>
-        <p:spPr>
-          <a:xfrm>
-            <a:off x="2834640" y="1993392"/>
-            <a:ext cx="640080" cy="411480"/>
-          </a:xfrm>
-          <a:prstGeom prst="rect">
-            <a:avLst/>
-          </a:prstGeom>
-          <a:noFill/>
-        </p:spPr>
-        <p:txBody>
-          <a:bodyPr wrap="square" anchor="t" lIns="18288" rIns="18288" tIns="9144" bIns="9144">
-            <a:spAutoFit/>
-          </a:bodyPr>
-          <a:lstStyle/>
-          <a:p>
-            <a:pPr algn="ctr">
-              <a:defRPr sz="3400" b="1">
-                <a:solidFill>
-                  <a:srgbClr val="FFB746"/>
-                </a:solidFill>
-                <a:latin typeface="Malgun Gothic"/>
-              </a:defRPr>
-            </a:pPr>
-            <a:r>
-              <a:t>→</a:t>
-            </a:r>
-          </a:p>
-        </p:txBody>
-      </p:sp>
-      <p:sp>
-        <p:nvSpPr>
-          <p:cNvPr id="23" name="Rounded Rectangle 22"/>
-          <p:cNvSpPr/>
-          <p:nvPr/>
-        </p:nvSpPr>
-        <p:spPr>
-          <a:xfrm>
-            <a:off x="3675887" y="1325880"/>
-            <a:ext cx="2834640" cy="1874519"/>
+            <a:off x="713232" y="5669280"/>
+            <a:ext cx="10771632" cy="566928"/>
           </a:xfrm>
           <a:prstGeom prst="roundRect">
             <a:avLst/>
@@ -7051,732 +7411,7 @@
       </p:sp>
       <p:sp>
         <p:nvSpPr>
-          <p:cNvPr id="24" name="TextBox 23"/>
-          <p:cNvSpPr txBox="1"/>
-          <p:nvPr/>
-        </p:nvSpPr>
-        <p:spPr>
-          <a:xfrm>
-            <a:off x="3931920" y="1627632"/>
-            <a:ext cx="2331720" cy="292608"/>
-          </a:xfrm>
-          <a:prstGeom prst="rect">
-            <a:avLst/>
-          </a:prstGeom>
-          <a:noFill/>
-        </p:spPr>
-        <p:txBody>
-          <a:bodyPr wrap="square" anchor="t" lIns="18288" rIns="18288" tIns="9144" bIns="9144">
-            <a:spAutoFit/>
-          </a:bodyPr>
-          <a:lstStyle/>
-          <a:p>
-            <a:pPr algn="ctr">
-              <a:defRPr sz="1800" b="1">
-                <a:solidFill>
-                  <a:srgbClr val="F6F9FC"/>
-                </a:solidFill>
-                <a:latin typeface="Malgun Gothic"/>
-              </a:defRPr>
-            </a:pPr>
-            <a:r>
-              <a:t>공유 arbitration</a:t>
-            </a:r>
-          </a:p>
-        </p:txBody>
-      </p:sp>
-      <p:sp>
-        <p:nvSpPr>
-          <p:cNvPr id="25" name="TextBox 24"/>
-          <p:cNvSpPr txBox="1"/>
-          <p:nvPr/>
-        </p:nvSpPr>
-        <p:spPr>
-          <a:xfrm>
-            <a:off x="4069080" y="2103120"/>
-            <a:ext cx="2057400" cy="658368"/>
-          </a:xfrm>
-          <a:prstGeom prst="rect">
-            <a:avLst/>
-          </a:prstGeom>
-          <a:noFill/>
-        </p:spPr>
-        <p:txBody>
-          <a:bodyPr wrap="square" anchor="t" lIns="18288" rIns="18288" tIns="9144" bIns="9144">
-            <a:spAutoFit/>
-          </a:bodyPr>
-          <a:lstStyle/>
-          <a:p>
-            <a:pPr algn="ctr">
-              <a:defRPr sz="1500" b="0">
-                <a:solidFill>
-                  <a:srgbClr val="ACC2D6"/>
-                </a:solidFill>
-                <a:latin typeface="Malgun Gothic"/>
-              </a:defRPr>
-            </a:pPr>
-            <a:r>
-              <a:t>여러 event가</a:t>
-            </a:r>
-            <a:br/>
-            <a:r>
-              <a:t>하나의 출력 순서를 기다림</a:t>
-            </a:r>
-          </a:p>
-        </p:txBody>
-      </p:sp>
-      <p:sp>
-        <p:nvSpPr>
-          <p:cNvPr id="26" name="TextBox 25"/>
-          <p:cNvSpPr txBox="1"/>
-          <p:nvPr/>
-        </p:nvSpPr>
-        <p:spPr>
-          <a:xfrm>
-            <a:off x="6748272" y="1993392"/>
-            <a:ext cx="640080" cy="411480"/>
-          </a:xfrm>
-          <a:prstGeom prst="rect">
-            <a:avLst/>
-          </a:prstGeom>
-          <a:noFill/>
-        </p:spPr>
-        <p:txBody>
-          <a:bodyPr wrap="square" anchor="t" lIns="18288" rIns="18288" tIns="9144" bIns="9144">
-            <a:spAutoFit/>
-          </a:bodyPr>
-          <a:lstStyle/>
-          <a:p>
-            <a:pPr algn="ctr">
-              <a:defRPr sz="3400" b="1">
-                <a:solidFill>
-                  <a:srgbClr val="FF6376"/>
-                </a:solidFill>
-                <a:latin typeface="Malgun Gothic"/>
-              </a:defRPr>
-            </a:pPr>
-            <a:r>
-              <a:t>→</a:t>
-            </a:r>
-          </a:p>
-        </p:txBody>
-      </p:sp>
-      <p:sp>
-        <p:nvSpPr>
-          <p:cNvPr id="27" name="Rounded Rectangle 26"/>
-          <p:cNvSpPr/>
-          <p:nvPr/>
-        </p:nvSpPr>
-        <p:spPr>
-          <a:xfrm>
-            <a:off x="7571231" y="1325880"/>
-            <a:ext cx="3611880" cy="1874519"/>
-          </a:xfrm>
-          <a:prstGeom prst="roundRect">
-            <a:avLst/>
-          </a:prstGeom>
-          <a:solidFill>
-            <a:srgbClr val="12304C"/>
-          </a:solidFill>
-          <a:ln w="19050">
-            <a:solidFill>
-              <a:srgbClr val="FF6376"/>
-            </a:solidFill>
-          </a:ln>
-        </p:spPr>
-        <p:style>
-          <a:lnRef idx="1">
-            <a:schemeClr val="accent1"/>
-          </a:lnRef>
-          <a:fillRef idx="3">
-            <a:schemeClr val="accent1"/>
-          </a:fillRef>
-          <a:effectRef idx="2">
-            <a:schemeClr val="accent1"/>
-          </a:effectRef>
-          <a:fontRef idx="minor">
-            <a:schemeClr val="lt1"/>
-          </a:fontRef>
-        </p:style>
-        <p:txBody>
-          <a:bodyPr rtlCol="0" anchor="ctr"/>
-          <a:lstStyle/>
-          <a:p>
-            <a:pPr algn="ctr"/>
-          </a:p>
-        </p:txBody>
-      </p:sp>
-      <p:sp>
-        <p:nvSpPr>
-          <p:cNvPr id="28" name="TextBox 27"/>
-          <p:cNvSpPr txBox="1"/>
-          <p:nvPr/>
-        </p:nvSpPr>
-        <p:spPr>
-          <a:xfrm>
-            <a:off x="7882127" y="1664208"/>
-            <a:ext cx="2971800" cy="384048"/>
-          </a:xfrm>
-          <a:prstGeom prst="rect">
-            <a:avLst/>
-          </a:prstGeom>
-          <a:noFill/>
-        </p:spPr>
-        <p:txBody>
-          <a:bodyPr wrap="square" anchor="t" lIns="18288" rIns="18288" tIns="9144" bIns="9144">
-            <a:spAutoFit/>
-          </a:bodyPr>
-          <a:lstStyle/>
-          <a:p>
-            <a:pPr algn="ctr">
-              <a:defRPr sz="2400" b="1">
-                <a:solidFill>
-                  <a:srgbClr val="FF6376"/>
-                </a:solidFill>
-                <a:latin typeface="Malgun Gothic"/>
-              </a:defRPr>
-            </a:pPr>
-            <a:r>
-              <a:t>1 EVENT / CYCLE</a:t>
-            </a:r>
-          </a:p>
-        </p:txBody>
-      </p:sp>
-      <p:sp>
-        <p:nvSpPr>
-          <p:cNvPr id="29" name="TextBox 28"/>
-          <p:cNvSpPr txBox="1"/>
-          <p:nvPr/>
-        </p:nvSpPr>
-        <p:spPr>
-          <a:xfrm>
-            <a:off x="7818120" y="2331720"/>
-            <a:ext cx="3108960" cy="347472"/>
-          </a:xfrm>
-          <a:prstGeom prst="rect">
-            <a:avLst/>
-          </a:prstGeom>
-          <a:noFill/>
-        </p:spPr>
-        <p:txBody>
-          <a:bodyPr wrap="square" anchor="t" lIns="18288" rIns="18288" tIns="9144" bIns="9144">
-            <a:spAutoFit/>
-          </a:bodyPr>
-          <a:lstStyle/>
-          <a:p>
-            <a:pPr algn="ctr">
-              <a:defRPr sz="1500" b="1">
-                <a:solidFill>
-                  <a:srgbClr val="F6F9FC"/>
-                </a:solidFill>
-                <a:latin typeface="Malgun Gothic"/>
-              </a:defRPr>
-            </a:pPr>
-            <a:r>
-              <a:t>대기 누적  →  source-local overrun</a:t>
-            </a:r>
-          </a:p>
-        </p:txBody>
-      </p:sp>
-      <p:sp>
-        <p:nvSpPr>
-          <p:cNvPr id="30" name="Rounded Rectangle 29"/>
-          <p:cNvSpPr/>
-          <p:nvPr/>
-        </p:nvSpPr>
-        <p:spPr>
-          <a:xfrm>
-            <a:off x="749808" y="3730752"/>
-            <a:ext cx="3218688" cy="1234440"/>
-          </a:xfrm>
-          <a:prstGeom prst="roundRect">
-            <a:avLst/>
-          </a:prstGeom>
-          <a:solidFill>
-            <a:srgbClr val="12304C"/>
-          </a:solidFill>
-          <a:ln>
-            <a:noFill/>
-          </a:ln>
-        </p:spPr>
-        <p:style>
-          <a:lnRef idx="1">
-            <a:schemeClr val="accent1"/>
-          </a:lnRef>
-          <a:fillRef idx="3">
-            <a:schemeClr val="accent1"/>
-          </a:fillRef>
-          <a:effectRef idx="2">
-            <a:schemeClr val="accent1"/>
-          </a:effectRef>
-          <a:fontRef idx="minor">
-            <a:schemeClr val="lt1"/>
-          </a:fontRef>
-        </p:style>
-        <p:txBody>
-          <a:bodyPr rtlCol="0" anchor="ctr"/>
-          <a:lstStyle/>
-          <a:p>
-            <a:pPr algn="ctr"/>
-          </a:p>
-        </p:txBody>
-      </p:sp>
-      <p:sp>
-        <p:nvSpPr>
-          <p:cNvPr id="31" name="TextBox 30"/>
-          <p:cNvSpPr txBox="1"/>
-          <p:nvPr/>
-        </p:nvSpPr>
-        <p:spPr>
-          <a:xfrm>
-            <a:off x="914400" y="3858768"/>
-            <a:ext cx="2889504" cy="201168"/>
-          </a:xfrm>
-          <a:prstGeom prst="rect">
-            <a:avLst/>
-          </a:prstGeom>
-          <a:noFill/>
-        </p:spPr>
-        <p:txBody>
-          <a:bodyPr wrap="square" anchor="t" lIns="18288" rIns="18288" tIns="9144" bIns="9144">
-            <a:spAutoFit/>
-          </a:bodyPr>
-          <a:lstStyle/>
-          <a:p>
-            <a:pPr algn="l">
-              <a:defRPr sz="1000" b="1">
-                <a:solidFill>
-                  <a:srgbClr val="ACC2D6"/>
-                </a:solidFill>
-                <a:latin typeface="Malgun Gothic"/>
-              </a:defRPr>
-            </a:pPr>
-            <a:r>
-              <a:t>ACCEPTED</a:t>
-            </a:r>
-          </a:p>
-        </p:txBody>
-      </p:sp>
-      <p:sp>
-        <p:nvSpPr>
-          <p:cNvPr id="32" name="TextBox 31"/>
-          <p:cNvSpPr txBox="1"/>
-          <p:nvPr/>
-        </p:nvSpPr>
-        <p:spPr>
-          <a:xfrm>
-            <a:off x="914400" y="4169664"/>
-            <a:ext cx="2889504" cy="475488"/>
-          </a:xfrm>
-          <a:prstGeom prst="rect">
-            <a:avLst/>
-          </a:prstGeom>
-          <a:noFill/>
-        </p:spPr>
-        <p:txBody>
-          <a:bodyPr wrap="square" anchor="ctr" lIns="18288" rIns="18288" tIns="9144" bIns="9144">
-            <a:spAutoFit/>
-          </a:bodyPr>
-          <a:lstStyle/>
-          <a:p>
-            <a:pPr algn="l">
-              <a:defRPr sz="2400" b="1">
-                <a:solidFill>
-                  <a:srgbClr val="FFB746"/>
-                </a:solidFill>
-                <a:latin typeface="Malgun Gothic"/>
-              </a:defRPr>
-            </a:pPr>
-            <a:r>
-              <a:t>78,229 / 106,416</a:t>
-            </a:r>
-          </a:p>
-        </p:txBody>
-      </p:sp>
-      <p:sp>
-        <p:nvSpPr>
-          <p:cNvPr id="33" name="TextBox 32"/>
-          <p:cNvSpPr txBox="1"/>
-          <p:nvPr/>
-        </p:nvSpPr>
-        <p:spPr>
-          <a:xfrm>
-            <a:off x="914400" y="4645152"/>
-            <a:ext cx="2889504" cy="182880"/>
-          </a:xfrm>
-          <a:prstGeom prst="rect">
-            <a:avLst/>
-          </a:prstGeom>
-          <a:noFill/>
-        </p:spPr>
-        <p:txBody>
-          <a:bodyPr wrap="square" anchor="t" lIns="18288" rIns="18288" tIns="9144" bIns="9144">
-            <a:spAutoFit/>
-          </a:bodyPr>
-          <a:lstStyle/>
-          <a:p>
-            <a:pPr algn="l">
-              <a:defRPr sz="900" b="0">
-                <a:solidFill>
-                  <a:srgbClr val="ACC2D6"/>
-                </a:solidFill>
-                <a:latin typeface="Malgun Gothic"/>
-              </a:defRPr>
-            </a:pPr>
-            <a:r>
-              <a:t>73.51%</a:t>
-            </a:r>
-          </a:p>
-        </p:txBody>
-      </p:sp>
-      <p:sp>
-        <p:nvSpPr>
-          <p:cNvPr id="34" name="Rounded Rectangle 33"/>
-          <p:cNvSpPr/>
-          <p:nvPr/>
-        </p:nvSpPr>
-        <p:spPr>
-          <a:xfrm>
-            <a:off x="4453128" y="3730752"/>
-            <a:ext cx="2743200" cy="1234440"/>
-          </a:xfrm>
-          <a:prstGeom prst="roundRect">
-            <a:avLst/>
-          </a:prstGeom>
-          <a:solidFill>
-            <a:srgbClr val="12304C"/>
-          </a:solidFill>
-          <a:ln>
-            <a:noFill/>
-          </a:ln>
-        </p:spPr>
-        <p:style>
-          <a:lnRef idx="1">
-            <a:schemeClr val="accent1"/>
-          </a:lnRef>
-          <a:fillRef idx="3">
-            <a:schemeClr val="accent1"/>
-          </a:fillRef>
-          <a:effectRef idx="2">
-            <a:schemeClr val="accent1"/>
-          </a:effectRef>
-          <a:fontRef idx="minor">
-            <a:schemeClr val="lt1"/>
-          </a:fontRef>
-        </p:style>
-        <p:txBody>
-          <a:bodyPr rtlCol="0" anchor="ctr"/>
-          <a:lstStyle/>
-          <a:p>
-            <a:pPr algn="ctr"/>
-          </a:p>
-        </p:txBody>
-      </p:sp>
-      <p:sp>
-        <p:nvSpPr>
-          <p:cNvPr id="35" name="TextBox 34"/>
-          <p:cNvSpPr txBox="1"/>
-          <p:nvPr/>
-        </p:nvSpPr>
-        <p:spPr>
-          <a:xfrm>
-            <a:off x="4617720" y="3858768"/>
-            <a:ext cx="2414016" cy="201168"/>
-          </a:xfrm>
-          <a:prstGeom prst="rect">
-            <a:avLst/>
-          </a:prstGeom>
-          <a:noFill/>
-        </p:spPr>
-        <p:txBody>
-          <a:bodyPr wrap="square" anchor="t" lIns="18288" rIns="18288" tIns="9144" bIns="9144">
-            <a:spAutoFit/>
-          </a:bodyPr>
-          <a:lstStyle/>
-          <a:p>
-            <a:pPr algn="l">
-              <a:defRPr sz="1000" b="1">
-                <a:solidFill>
-                  <a:srgbClr val="ACC2D6"/>
-                </a:solidFill>
-                <a:latin typeface="Malgun Gothic"/>
-              </a:defRPr>
-            </a:pPr>
-            <a:r>
-              <a:t>OVERRUN</a:t>
-            </a:r>
-          </a:p>
-        </p:txBody>
-      </p:sp>
-      <p:sp>
-        <p:nvSpPr>
-          <p:cNvPr id="36" name="TextBox 35"/>
-          <p:cNvSpPr txBox="1"/>
-          <p:nvPr/>
-        </p:nvSpPr>
-        <p:spPr>
-          <a:xfrm>
-            <a:off x="4617720" y="4169664"/>
-            <a:ext cx="2414016" cy="475488"/>
-          </a:xfrm>
-          <a:prstGeom prst="rect">
-            <a:avLst/>
-          </a:prstGeom>
-          <a:noFill/>
-        </p:spPr>
-        <p:txBody>
-          <a:bodyPr wrap="square" anchor="ctr" lIns="18288" rIns="18288" tIns="9144" bIns="9144">
-            <a:spAutoFit/>
-          </a:bodyPr>
-          <a:lstStyle/>
-          <a:p>
-            <a:pPr algn="l">
-              <a:defRPr sz="2800" b="1">
-                <a:solidFill>
-                  <a:srgbClr val="FF6376"/>
-                </a:solidFill>
-                <a:latin typeface="Malgun Gothic"/>
-              </a:defRPr>
-            </a:pPr>
-            <a:r>
-              <a:t>28,187</a:t>
-            </a:r>
-          </a:p>
-        </p:txBody>
-      </p:sp>
-      <p:sp>
-        <p:nvSpPr>
-          <p:cNvPr id="37" name="TextBox 36"/>
-          <p:cNvSpPr txBox="1"/>
-          <p:nvPr/>
-        </p:nvSpPr>
-        <p:spPr>
-          <a:xfrm>
-            <a:off x="4617720" y="4645152"/>
-            <a:ext cx="2414016" cy="182880"/>
-          </a:xfrm>
-          <a:prstGeom prst="rect">
-            <a:avLst/>
-          </a:prstGeom>
-          <a:noFill/>
-        </p:spPr>
-        <p:txBody>
-          <a:bodyPr wrap="square" anchor="t" lIns="18288" rIns="18288" tIns="9144" bIns="9144">
-            <a:spAutoFit/>
-          </a:bodyPr>
-          <a:lstStyle/>
-          <a:p>
-            <a:pPr algn="l">
-              <a:defRPr sz="900" b="0">
-                <a:solidFill>
-                  <a:srgbClr val="ACC2D6"/>
-                </a:solidFill>
-                <a:latin typeface="Malgun Gothic"/>
-              </a:defRPr>
-            </a:pPr>
-            <a:r>
-              <a:t>full50 baseline</a:t>
-            </a:r>
-          </a:p>
-        </p:txBody>
-      </p:sp>
-      <p:sp>
-        <p:nvSpPr>
-          <p:cNvPr id="38" name="Rounded Rectangle 37"/>
-          <p:cNvSpPr/>
-          <p:nvPr/>
-        </p:nvSpPr>
-        <p:spPr>
-          <a:xfrm>
-            <a:off x="7680960" y="3730752"/>
-            <a:ext cx="3493008" cy="1234440"/>
-          </a:xfrm>
-          <a:prstGeom prst="roundRect">
-            <a:avLst/>
-          </a:prstGeom>
-          <a:solidFill>
-            <a:srgbClr val="12304C"/>
-          </a:solidFill>
-          <a:ln>
-            <a:noFill/>
-          </a:ln>
-        </p:spPr>
-        <p:style>
-          <a:lnRef idx="1">
-            <a:schemeClr val="accent1"/>
-          </a:lnRef>
-          <a:fillRef idx="3">
-            <a:schemeClr val="accent1"/>
-          </a:fillRef>
-          <a:effectRef idx="2">
-            <a:schemeClr val="accent1"/>
-          </a:effectRef>
-          <a:fontRef idx="minor">
-            <a:schemeClr val="lt1"/>
-          </a:fontRef>
-        </p:style>
-        <p:txBody>
-          <a:bodyPr rtlCol="0" anchor="ctr"/>
-          <a:lstStyle/>
-          <a:p>
-            <a:pPr algn="ctr"/>
-          </a:p>
-        </p:txBody>
-      </p:sp>
-      <p:sp>
-        <p:nvSpPr>
-          <p:cNvPr id="39" name="TextBox 38"/>
-          <p:cNvSpPr txBox="1"/>
-          <p:nvPr/>
-        </p:nvSpPr>
-        <p:spPr>
-          <a:xfrm>
-            <a:off x="7845552" y="3858768"/>
-            <a:ext cx="3163824" cy="201168"/>
-          </a:xfrm>
-          <a:prstGeom prst="rect">
-            <a:avLst/>
-          </a:prstGeom>
-          <a:noFill/>
-        </p:spPr>
-        <p:txBody>
-          <a:bodyPr wrap="square" anchor="t" lIns="18288" rIns="18288" tIns="9144" bIns="9144">
-            <a:spAutoFit/>
-          </a:bodyPr>
-          <a:lstStyle/>
-          <a:p>
-            <a:pPr algn="l">
-              <a:defRPr sz="1000" b="1">
-                <a:solidFill>
-                  <a:srgbClr val="ACC2D6"/>
-                </a:solidFill>
-                <a:latin typeface="Malgun Gothic"/>
-              </a:defRPr>
-            </a:pPr>
-            <a:r>
-              <a:t>THROUGHPUT</a:t>
-            </a:r>
-          </a:p>
-        </p:txBody>
-      </p:sp>
-      <p:sp>
-        <p:nvSpPr>
-          <p:cNvPr id="40" name="TextBox 39"/>
-          <p:cNvSpPr txBox="1"/>
-          <p:nvPr/>
-        </p:nvSpPr>
-        <p:spPr>
-          <a:xfrm>
-            <a:off x="7845552" y="4169664"/>
-            <a:ext cx="3163824" cy="475488"/>
-          </a:xfrm>
-          <a:prstGeom prst="rect">
-            <a:avLst/>
-          </a:prstGeom>
-          <a:noFill/>
-        </p:spPr>
-        <p:txBody>
-          <a:bodyPr wrap="square" anchor="ctr" lIns="18288" rIns="18288" tIns="9144" bIns="9144">
-            <a:spAutoFit/>
-          </a:bodyPr>
-          <a:lstStyle/>
-          <a:p>
-            <a:pPr algn="l">
-              <a:defRPr sz="2700" b="1">
-                <a:solidFill>
-                  <a:srgbClr val="FF6376"/>
-                </a:solidFill>
-                <a:latin typeface="Malgun Gothic"/>
-              </a:defRPr>
-            </a:pPr>
-            <a:r>
-              <a:t>0.673901 EPC</a:t>
-            </a:r>
-          </a:p>
-        </p:txBody>
-      </p:sp>
-      <p:sp>
-        <p:nvSpPr>
-          <p:cNvPr id="41" name="TextBox 40"/>
-          <p:cNvSpPr txBox="1"/>
-          <p:nvPr/>
-        </p:nvSpPr>
-        <p:spPr>
-          <a:xfrm>
-            <a:off x="7845552" y="4645152"/>
-            <a:ext cx="3163824" cy="182880"/>
-          </a:xfrm>
-          <a:prstGeom prst="rect">
-            <a:avLst/>
-          </a:prstGeom>
-          <a:noFill/>
-        </p:spPr>
-        <p:txBody>
-          <a:bodyPr wrap="square" anchor="t" lIns="18288" rIns="18288" tIns="9144" bIns="9144">
-            <a:spAutoFit/>
-          </a:bodyPr>
-          <a:lstStyle/>
-          <a:p>
-            <a:pPr algn="l">
-              <a:defRPr sz="900" b="0">
-                <a:solidFill>
-                  <a:srgbClr val="ACC2D6"/>
-                </a:solidFill>
-                <a:latin typeface="Malgun Gothic"/>
-              </a:defRPr>
-            </a:pPr>
-            <a:r>
-              <a:t>fixed-window</a:t>
-            </a:r>
-          </a:p>
-        </p:txBody>
-      </p:sp>
-      <p:sp>
-        <p:nvSpPr>
-          <p:cNvPr id="42" name="Rounded Rectangle 41"/>
-          <p:cNvSpPr/>
-          <p:nvPr/>
-        </p:nvSpPr>
-        <p:spPr>
-          <a:xfrm>
-            <a:off x="713232" y="5669280"/>
-            <a:ext cx="10771632" cy="566928"/>
-          </a:xfrm>
-          <a:prstGeom prst="roundRect">
-            <a:avLst/>
-          </a:prstGeom>
-          <a:solidFill>
-            <a:srgbClr val="12304C"/>
-          </a:solidFill>
-          <a:ln>
-            <a:noFill/>
-          </a:ln>
-        </p:spPr>
-        <p:style>
-          <a:lnRef idx="1">
-            <a:schemeClr val="accent1"/>
-          </a:lnRef>
-          <a:fillRef idx="3">
-            <a:schemeClr val="accent1"/>
-          </a:fillRef>
-          <a:effectRef idx="2">
-            <a:schemeClr val="accent1"/>
-          </a:effectRef>
-          <a:fontRef idx="minor">
-            <a:schemeClr val="lt1"/>
-          </a:fontRef>
-        </p:style>
-        <p:txBody>
-          <a:bodyPr rtlCol="0" anchor="ctr"/>
-          <a:lstStyle/>
-          <a:p>
-            <a:pPr algn="ctr"/>
-          </a:p>
-        </p:txBody>
-      </p:sp>
-      <p:sp>
-        <p:nvSpPr>
-          <p:cNvPr id="43" name="TextBox 42"/>
+          <p:cNvPr id="23" name="TextBox 22"/>
           <p:cNvSpPr txBox="1"/>
           <p:nvPr/>
         </p:nvSpPr>
@@ -7799,20 +7434,20 @@
             <a:pPr algn="ctr">
               <a:defRPr sz="1600" b="1">
                 <a:solidFill>
-                  <a:srgbClr val="FFB746"/>
-                </a:solidFill>
-                <a:latin typeface="Malgun Gothic"/>
-              </a:defRPr>
-            </a:pPr>
-            <a:r>
-              <a:t>발생률이 서비스율을 넘는 순간, scalar 출력이 손실의 원인이 된다</a:t>
-            </a:r>
-          </a:p>
-        </p:txBody>
-      </p:sp>
-      <p:sp>
-        <p:nvSpPr>
-          <p:cNvPr id="44" name="Rectangle 43"/>
+                  <a:srgbClr val="37CD85"/>
+                </a:solidFill>
+                <a:latin typeface="Malgun Gothic"/>
+              </a:defRPr>
+            </a:pPr>
+            <a:r>
+              <a:t>동일 106,416 events · 손실 12,259 → 502 · 24.42배 감소(−95.9%)</a:t>
+            </a:r>
+          </a:p>
+        </p:txBody>
+      </p:sp>
+      <p:sp>
+        <p:nvSpPr>
+          <p:cNvPr id="24" name="Rectangle 23"/>
           <p:cNvSpPr/>
           <p:nvPr/>
         </p:nvSpPr>
@@ -7855,7 +7490,7 @@
       </p:sp>
       <p:sp>
         <p:nvSpPr>
-          <p:cNvPr id="45" name="Rounded Rectangle 44"/>
+          <p:cNvPr id="25" name="Rounded Rectangle 24"/>
           <p:cNvSpPr/>
           <p:nvPr/>
         </p:nvSpPr>
@@ -7898,7 +7533,7 @@
       </p:sp>
       <p:sp>
         <p:nvSpPr>
-          <p:cNvPr id="46" name="TextBox 45"/>
+          <p:cNvPr id="26" name="TextBox 25"/>
           <p:cNvSpPr txBox="1"/>
           <p:nvPr/>
         </p:nvSpPr>
@@ -7927,14 +7562,14 @@
               </a:defRPr>
             </a:pPr>
             <a:r>
-              <a:t>01  병목</a:t>
-            </a:r>
-          </a:p>
-        </p:txBody>
-      </p:sp>
-      <p:sp>
-        <p:nvSpPr>
-          <p:cNvPr id="47" name="TextBox 46"/>
+              <a:t>02  핵심</a:t>
+            </a:r>
+          </a:p>
+        </p:txBody>
+      </p:sp>
+      <p:sp>
+        <p:nvSpPr>
+          <p:cNvPr id="27" name="TextBox 26"/>
           <p:cNvSpPr txBox="1"/>
           <p:nvPr/>
         </p:nvSpPr>
@@ -7963,14 +7598,14 @@
               </a:defRPr>
             </a:pPr>
             <a:r>
-              <a:t>① 출력 직렬화가 ② source-local overrun으로 이어진다</a:t>
-            </a:r>
-          </a:p>
-        </p:txBody>
-      </p:sp>
-      <p:sp>
-        <p:nvSpPr>
-          <p:cNvPr id="48" name="Rectangle 47"/>
+              <a:t>기본 Cluster2의 빈틈을 steal_buf가 직접 메운다</a:t>
+            </a:r>
+          </a:p>
+        </p:txBody>
+      </p:sp>
+      <p:sp>
+        <p:nvSpPr>
+          <p:cNvPr id="28" name="Rectangle 27"/>
           <p:cNvSpPr/>
           <p:nvPr/>
         </p:nvSpPr>
@@ -12161,7 +11796,7 @@
               </a:defRPr>
             </a:pPr>
             <a:r>
-              <a:t>03  결과</a:t>
+              <a:t>03  정량</a:t>
             </a:r>
           </a:p>
         </p:txBody>
@@ -12197,7 +11832,7 @@
               </a:defRPr>
             </a:pPr>
             <a:r>
-              <a:t>대역폭·overflow 병목은 수치로 개선됐다</a:t>
+              <a:t>공식 50-workload에서 steal_buf가 손실을 거의 제거</a:t>
             </a:r>
           </a:p>
         </p:txBody>
@@ -12276,7 +11911,7 @@
               </a:defRPr>
             </a:pPr>
             <a:r>
-              <a:t>Source: recovered Xcelium full50 · scalar Fovea vs original Cluster2 architecture family</a:t>
+              <a:t>Source: Xcelium 23.09-s013 · 50/50 PHANTOM_DEBUG_PASS</a:t>
             </a:r>
           </a:p>
         </p:txBody>
@@ -12319,50 +11954,14 @@
       </p:sp>
       <p:sp>
         <p:nvSpPr>
-          <p:cNvPr id="9" name="TextBox 8"/>
-          <p:cNvSpPr txBox="1"/>
-          <p:nvPr/>
-        </p:nvSpPr>
-        <p:spPr>
-          <a:xfrm>
-            <a:off x="713232" y="1389888"/>
-            <a:ext cx="1353312" cy="274320"/>
-          </a:xfrm>
-          <a:prstGeom prst="rect">
-            <a:avLst/>
-          </a:prstGeom>
-          <a:noFill/>
-        </p:spPr>
-        <p:txBody>
-          <a:bodyPr wrap="square" anchor="t" lIns="18288" rIns="18288" tIns="9144" bIns="9144">
-            <a:spAutoFit/>
-          </a:bodyPr>
-          <a:lstStyle/>
-          <a:p>
-            <a:pPr algn="l">
-              <a:defRPr sz="1400" b="1">
-                <a:solidFill>
-                  <a:srgbClr val="ACC2D6"/>
-                </a:solidFill>
-                <a:latin typeface="Malgun Gothic"/>
-              </a:defRPr>
-            </a:pPr>
-            <a:r>
-              <a:t>ACCEPTED</a:t>
-            </a:r>
-          </a:p>
-        </p:txBody>
-      </p:sp>
-      <p:sp>
-        <p:nvSpPr>
-          <p:cNvPr id="10" name="Rounded Rectangle 9"/>
+          <p:cNvPr id="9" name="Rounded Rectangle 8"/>
           <p:cNvSpPr/>
           <p:nvPr/>
         </p:nvSpPr>
         <p:spPr>
           <a:xfrm>
-            <a:off x="2212848" y="1143000"/>
-            <a:ext cx="2770632" cy="896112"/>
+            <a:off x="658368" y="1280160"/>
+            <a:ext cx="2487168" cy="2423160"/>
           </a:xfrm>
           <a:prstGeom prst="roundRect">
             <a:avLst/>
@@ -12370,8 +11969,10 @@
           <a:solidFill>
             <a:srgbClr val="12304C"/>
           </a:solidFill>
-          <a:ln>
-            <a:noFill/>
+          <a:ln w="19050">
+            <a:solidFill>
+              <a:srgbClr val="FF6376"/>
+            </a:solidFill>
           </a:ln>
         </p:spPr>
         <p:style>
@@ -12398,36 +11999,72 @@
       </p:sp>
       <p:sp>
         <p:nvSpPr>
+          <p:cNvPr id="10" name="TextBox 9"/>
+          <p:cNvSpPr txBox="1"/>
+          <p:nvPr/>
+        </p:nvSpPr>
+        <p:spPr>
+          <a:xfrm>
+            <a:off x="841247" y="1554480"/>
+            <a:ext cx="2121408" cy="237744"/>
+          </a:xfrm>
+          <a:prstGeom prst="rect">
+            <a:avLst/>
+          </a:prstGeom>
+          <a:noFill/>
+        </p:spPr>
+        <p:txBody>
+          <a:bodyPr wrap="square" anchor="t" lIns="18288" rIns="18288" tIns="9144" bIns="9144">
+            <a:spAutoFit/>
+          </a:bodyPr>
+          <a:lstStyle/>
+          <a:p>
+            <a:pPr algn="ctr">
+              <a:defRPr sz="1300" b="1">
+                <a:solidFill>
+                  <a:srgbClr val="FF6376"/>
+                </a:solidFill>
+                <a:latin typeface="Malgun Gothic"/>
+              </a:defRPr>
+            </a:pPr>
+            <a:r>
+              <a:t>FOVEA</a:t>
+            </a:r>
+          </a:p>
+        </p:txBody>
+      </p:sp>
+      <p:sp>
+        <p:nvSpPr>
           <p:cNvPr id="11" name="TextBox 10"/>
           <p:cNvSpPr txBox="1"/>
           <p:nvPr/>
         </p:nvSpPr>
         <p:spPr>
           <a:xfrm>
-            <a:off x="2395728" y="1271016"/>
-            <a:ext cx="713232" cy="164592"/>
-          </a:xfrm>
-          <a:prstGeom prst="rect">
-            <a:avLst/>
-          </a:prstGeom>
-          <a:noFill/>
-        </p:spPr>
-        <p:txBody>
-          <a:bodyPr wrap="square" anchor="t" lIns="18288" rIns="18288" tIns="9144" bIns="9144">
-            <a:spAutoFit/>
-          </a:bodyPr>
-          <a:lstStyle/>
-          <a:p>
-            <a:pPr algn="l">
-              <a:defRPr sz="900" b="1">
-                <a:solidFill>
-                  <a:srgbClr val="ACC2D6"/>
-                </a:solidFill>
-                <a:latin typeface="Malgun Gothic"/>
-              </a:defRPr>
-            </a:pPr>
-            <a:r>
-              <a:t>SCALAR</a:t>
+            <a:off x="841247" y="2029968"/>
+            <a:ext cx="2121408" cy="493776"/>
+          </a:xfrm>
+          <a:prstGeom prst="rect">
+            <a:avLst/>
+          </a:prstGeom>
+          <a:noFill/>
+        </p:spPr>
+        <p:txBody>
+          <a:bodyPr wrap="square" anchor="t" lIns="18288" rIns="18288" tIns="9144" bIns="9144">
+            <a:spAutoFit/>
+          </a:bodyPr>
+          <a:lstStyle/>
+          <a:p>
+            <a:pPr algn="ctr">
+              <a:defRPr sz="3100" b="1">
+                <a:solidFill>
+                  <a:srgbClr val="FF6376"/>
+                </a:solidFill>
+                <a:latin typeface="Malgun Gothic"/>
+              </a:defRPr>
+            </a:pPr>
+            <a:r>
+              <a:t>26.49%</a:t>
             </a:r>
           </a:p>
         </p:txBody>
@@ -12440,58 +12077,58 @@
         </p:nvSpPr>
         <p:spPr>
           <a:xfrm>
-            <a:off x="2395728" y="1527048"/>
-            <a:ext cx="2322576" cy="310896"/>
-          </a:xfrm>
-          <a:prstGeom prst="rect">
-            <a:avLst/>
-          </a:prstGeom>
-          <a:noFill/>
-        </p:spPr>
-        <p:txBody>
-          <a:bodyPr wrap="square" anchor="t" lIns="18288" rIns="18288" tIns="9144" bIns="9144">
-            <a:spAutoFit/>
-          </a:bodyPr>
-          <a:lstStyle/>
-          <a:p>
-            <a:pPr algn="l">
+            <a:off x="841247" y="2788920"/>
+            <a:ext cx="2121408" cy="274320"/>
+          </a:xfrm>
+          <a:prstGeom prst="rect">
+            <a:avLst/>
+          </a:prstGeom>
+          <a:noFill/>
+        </p:spPr>
+        <p:txBody>
+          <a:bodyPr wrap="square" anchor="t" lIns="18288" rIns="18288" tIns="9144" bIns="9144">
+            <a:spAutoFit/>
+          </a:bodyPr>
+          <a:lstStyle/>
+          <a:p>
+            <a:pPr algn="ctr">
+              <a:defRPr sz="1500" b="1">
+                <a:solidFill>
+                  <a:srgbClr val="F6F9FC"/>
+                </a:solidFill>
+                <a:latin typeface="Malgun Gothic"/>
+              </a:defRPr>
+            </a:pPr>
+            <a:r>
+              <a:t>loss 28,187</a:t>
+            </a:r>
+          </a:p>
+        </p:txBody>
+      </p:sp>
+      <p:sp>
+        <p:nvSpPr>
+          <p:cNvPr id="13" name="TextBox 12"/>
+          <p:cNvSpPr txBox="1"/>
+          <p:nvPr/>
+        </p:nvSpPr>
+        <p:spPr>
+          <a:xfrm>
+            <a:off x="3145536" y="2194560"/>
+            <a:ext cx="347472" cy="411480"/>
+          </a:xfrm>
+          <a:prstGeom prst="rect">
+            <a:avLst/>
+          </a:prstGeom>
+          <a:noFill/>
+        </p:spPr>
+        <p:txBody>
+          <a:bodyPr wrap="square" anchor="t" lIns="18288" rIns="18288" tIns="9144" bIns="9144">
+            <a:spAutoFit/>
+          </a:bodyPr>
+          <a:lstStyle/>
+          <a:p>
+            <a:pPr algn="ctr">
               <a:defRPr sz="2200" b="1">
-                <a:solidFill>
-                  <a:srgbClr val="FFB746"/>
-                </a:solidFill>
-                <a:latin typeface="Malgun Gothic"/>
-              </a:defRPr>
-            </a:pPr>
-            <a:r>
-              <a:t>78,229</a:t>
-            </a:r>
-          </a:p>
-        </p:txBody>
-      </p:sp>
-      <p:sp>
-        <p:nvSpPr>
-          <p:cNvPr id="13" name="TextBox 12"/>
-          <p:cNvSpPr txBox="1"/>
-          <p:nvPr/>
-        </p:nvSpPr>
-        <p:spPr>
-          <a:xfrm>
-            <a:off x="5184648" y="1362456"/>
-            <a:ext cx="566928" cy="411480"/>
-          </a:xfrm>
-          <a:prstGeom prst="rect">
-            <a:avLst/>
-          </a:prstGeom>
-          <a:noFill/>
-        </p:spPr>
-        <p:txBody>
-          <a:bodyPr wrap="square" anchor="t" lIns="18288" rIns="18288" tIns="9144" bIns="9144">
-            <a:spAutoFit/>
-          </a:bodyPr>
-          <a:lstStyle/>
-          <a:p>
-            <a:pPr algn="ctr">
-              <a:defRPr sz="3000" b="1">
                 <a:solidFill>
                   <a:srgbClr val="2AD3CD"/>
                 </a:solidFill>
@@ -12512,8 +12149,386 @@
         </p:nvSpPr>
         <p:spPr>
           <a:xfrm>
-            <a:off x="5934456" y="1143000"/>
-            <a:ext cx="2770632" cy="896112"/>
+            <a:off x="3493008" y="1280160"/>
+            <a:ext cx="2487168" cy="2423160"/>
+          </a:xfrm>
+          <a:prstGeom prst="roundRect">
+            <a:avLst/>
+          </a:prstGeom>
+          <a:solidFill>
+            <a:srgbClr val="12304C"/>
+          </a:solidFill>
+          <a:ln w="19050">
+            <a:solidFill>
+              <a:srgbClr val="FFB746"/>
+            </a:solidFill>
+          </a:ln>
+        </p:spPr>
+        <p:style>
+          <a:lnRef idx="1">
+            <a:schemeClr val="accent1"/>
+          </a:lnRef>
+          <a:fillRef idx="3">
+            <a:schemeClr val="accent1"/>
+          </a:fillRef>
+          <a:effectRef idx="2">
+            <a:schemeClr val="accent1"/>
+          </a:effectRef>
+          <a:fontRef idx="minor">
+            <a:schemeClr val="lt1"/>
+          </a:fontRef>
+        </p:style>
+        <p:txBody>
+          <a:bodyPr rtlCol="0" anchor="ctr"/>
+          <a:lstStyle/>
+          <a:p>
+            <a:pPr algn="ctr"/>
+          </a:p>
+        </p:txBody>
+      </p:sp>
+      <p:sp>
+        <p:nvSpPr>
+          <p:cNvPr id="15" name="TextBox 14"/>
+          <p:cNvSpPr txBox="1"/>
+          <p:nvPr/>
+        </p:nvSpPr>
+        <p:spPr>
+          <a:xfrm>
+            <a:off x="3675888" y="1554480"/>
+            <a:ext cx="2121408" cy="237744"/>
+          </a:xfrm>
+          <a:prstGeom prst="rect">
+            <a:avLst/>
+          </a:prstGeom>
+          <a:noFill/>
+        </p:spPr>
+        <p:txBody>
+          <a:bodyPr wrap="square" anchor="t" lIns="18288" rIns="18288" tIns="9144" bIns="9144">
+            <a:spAutoFit/>
+          </a:bodyPr>
+          <a:lstStyle/>
+          <a:p>
+            <a:pPr algn="ctr">
+              <a:defRPr sz="1300" b="1">
+                <a:solidFill>
+                  <a:srgbClr val="FFB746"/>
+                </a:solidFill>
+                <a:latin typeface="Malgun Gothic"/>
+              </a:defRPr>
+            </a:pPr>
+            <a:r>
+              <a:t>CLUSTER2</a:t>
+            </a:r>
+          </a:p>
+        </p:txBody>
+      </p:sp>
+      <p:sp>
+        <p:nvSpPr>
+          <p:cNvPr id="16" name="TextBox 15"/>
+          <p:cNvSpPr txBox="1"/>
+          <p:nvPr/>
+        </p:nvSpPr>
+        <p:spPr>
+          <a:xfrm>
+            <a:off x="3675888" y="2029968"/>
+            <a:ext cx="2121408" cy="493776"/>
+          </a:xfrm>
+          <a:prstGeom prst="rect">
+            <a:avLst/>
+          </a:prstGeom>
+          <a:noFill/>
+        </p:spPr>
+        <p:txBody>
+          <a:bodyPr wrap="square" anchor="t" lIns="18288" rIns="18288" tIns="9144" bIns="9144">
+            <a:spAutoFit/>
+          </a:bodyPr>
+          <a:lstStyle/>
+          <a:p>
+            <a:pPr algn="ctr">
+              <a:defRPr sz="3100" b="1">
+                <a:solidFill>
+                  <a:srgbClr val="FFB746"/>
+                </a:solidFill>
+                <a:latin typeface="Malgun Gothic"/>
+              </a:defRPr>
+            </a:pPr>
+            <a:r>
+              <a:t>11.52%</a:t>
+            </a:r>
+          </a:p>
+        </p:txBody>
+      </p:sp>
+      <p:sp>
+        <p:nvSpPr>
+          <p:cNvPr id="17" name="TextBox 16"/>
+          <p:cNvSpPr txBox="1"/>
+          <p:nvPr/>
+        </p:nvSpPr>
+        <p:spPr>
+          <a:xfrm>
+            <a:off x="3675888" y="2788920"/>
+            <a:ext cx="2121408" cy="274320"/>
+          </a:xfrm>
+          <a:prstGeom prst="rect">
+            <a:avLst/>
+          </a:prstGeom>
+          <a:noFill/>
+        </p:spPr>
+        <p:txBody>
+          <a:bodyPr wrap="square" anchor="t" lIns="18288" rIns="18288" tIns="9144" bIns="9144">
+            <a:spAutoFit/>
+          </a:bodyPr>
+          <a:lstStyle/>
+          <a:p>
+            <a:pPr algn="ctr">
+              <a:defRPr sz="1500" b="1">
+                <a:solidFill>
+                  <a:srgbClr val="F6F9FC"/>
+                </a:solidFill>
+                <a:latin typeface="Malgun Gothic"/>
+              </a:defRPr>
+            </a:pPr>
+            <a:r>
+              <a:t>loss 12,259</a:t>
+            </a:r>
+          </a:p>
+        </p:txBody>
+      </p:sp>
+      <p:sp>
+        <p:nvSpPr>
+          <p:cNvPr id="18" name="TextBox 17"/>
+          <p:cNvSpPr txBox="1"/>
+          <p:nvPr/>
+        </p:nvSpPr>
+        <p:spPr>
+          <a:xfrm>
+            <a:off x="5980176" y="2194560"/>
+            <a:ext cx="347472" cy="411480"/>
+          </a:xfrm>
+          <a:prstGeom prst="rect">
+            <a:avLst/>
+          </a:prstGeom>
+          <a:noFill/>
+        </p:spPr>
+        <p:txBody>
+          <a:bodyPr wrap="square" anchor="t" lIns="18288" rIns="18288" tIns="9144" bIns="9144">
+            <a:spAutoFit/>
+          </a:bodyPr>
+          <a:lstStyle/>
+          <a:p>
+            <a:pPr algn="ctr">
+              <a:defRPr sz="2200" b="1">
+                <a:solidFill>
+                  <a:srgbClr val="2AD3CD"/>
+                </a:solidFill>
+                <a:latin typeface="Malgun Gothic"/>
+              </a:defRPr>
+            </a:pPr>
+            <a:r>
+              <a:t>→</a:t>
+            </a:r>
+          </a:p>
+        </p:txBody>
+      </p:sp>
+      <p:sp>
+        <p:nvSpPr>
+          <p:cNvPr id="19" name="Rounded Rectangle 18"/>
+          <p:cNvSpPr/>
+          <p:nvPr/>
+        </p:nvSpPr>
+        <p:spPr>
+          <a:xfrm>
+            <a:off x="6327648" y="1280160"/>
+            <a:ext cx="2487168" cy="2423160"/>
+          </a:xfrm>
+          <a:prstGeom prst="roundRect">
+            <a:avLst/>
+          </a:prstGeom>
+          <a:solidFill>
+            <a:srgbClr val="12304C"/>
+          </a:solidFill>
+          <a:ln w="19050">
+            <a:solidFill>
+              <a:srgbClr val="2AD3CD"/>
+            </a:solidFill>
+          </a:ln>
+        </p:spPr>
+        <p:style>
+          <a:lnRef idx="1">
+            <a:schemeClr val="accent1"/>
+          </a:lnRef>
+          <a:fillRef idx="3">
+            <a:schemeClr val="accent1"/>
+          </a:fillRef>
+          <a:effectRef idx="2">
+            <a:schemeClr val="accent1"/>
+          </a:effectRef>
+          <a:fontRef idx="minor">
+            <a:schemeClr val="lt1"/>
+          </a:fontRef>
+        </p:style>
+        <p:txBody>
+          <a:bodyPr rtlCol="0" anchor="ctr"/>
+          <a:lstStyle/>
+          <a:p>
+            <a:pPr algn="ctr"/>
+          </a:p>
+        </p:txBody>
+      </p:sp>
+      <p:sp>
+        <p:nvSpPr>
+          <p:cNvPr id="20" name="TextBox 19"/>
+          <p:cNvSpPr txBox="1"/>
+          <p:nvPr/>
+        </p:nvSpPr>
+        <p:spPr>
+          <a:xfrm>
+            <a:off x="6510528" y="1554480"/>
+            <a:ext cx="2121408" cy="237744"/>
+          </a:xfrm>
+          <a:prstGeom prst="rect">
+            <a:avLst/>
+          </a:prstGeom>
+          <a:noFill/>
+        </p:spPr>
+        <p:txBody>
+          <a:bodyPr wrap="square" anchor="t" lIns="18288" rIns="18288" tIns="9144" bIns="9144">
+            <a:spAutoFit/>
+          </a:bodyPr>
+          <a:lstStyle/>
+          <a:p>
+            <a:pPr algn="ctr">
+              <a:defRPr sz="1300" b="1">
+                <a:solidFill>
+                  <a:srgbClr val="2AD3CD"/>
+                </a:solidFill>
+                <a:latin typeface="Malgun Gothic"/>
+              </a:defRPr>
+            </a:pPr>
+            <a:r>
+              <a:t>+ STEAL</a:t>
+            </a:r>
+          </a:p>
+        </p:txBody>
+      </p:sp>
+      <p:sp>
+        <p:nvSpPr>
+          <p:cNvPr id="21" name="TextBox 20"/>
+          <p:cNvSpPr txBox="1"/>
+          <p:nvPr/>
+        </p:nvSpPr>
+        <p:spPr>
+          <a:xfrm>
+            <a:off x="6510528" y="2029968"/>
+            <a:ext cx="2121408" cy="493776"/>
+          </a:xfrm>
+          <a:prstGeom prst="rect">
+            <a:avLst/>
+          </a:prstGeom>
+          <a:noFill/>
+        </p:spPr>
+        <p:txBody>
+          <a:bodyPr wrap="square" anchor="t" lIns="18288" rIns="18288" tIns="9144" bIns="9144">
+            <a:spAutoFit/>
+          </a:bodyPr>
+          <a:lstStyle/>
+          <a:p>
+            <a:pPr algn="ctr">
+              <a:defRPr sz="3100" b="1">
+                <a:solidFill>
+                  <a:srgbClr val="2AD3CD"/>
+                </a:solidFill>
+                <a:latin typeface="Malgun Gothic"/>
+              </a:defRPr>
+            </a:pPr>
+            <a:r>
+              <a:t>10.89%</a:t>
+            </a:r>
+          </a:p>
+        </p:txBody>
+      </p:sp>
+      <p:sp>
+        <p:nvSpPr>
+          <p:cNvPr id="22" name="TextBox 21"/>
+          <p:cNvSpPr txBox="1"/>
+          <p:nvPr/>
+        </p:nvSpPr>
+        <p:spPr>
+          <a:xfrm>
+            <a:off x="6510528" y="2788920"/>
+            <a:ext cx="2121408" cy="274320"/>
+          </a:xfrm>
+          <a:prstGeom prst="rect">
+            <a:avLst/>
+          </a:prstGeom>
+          <a:noFill/>
+        </p:spPr>
+        <p:txBody>
+          <a:bodyPr wrap="square" anchor="t" lIns="18288" rIns="18288" tIns="9144" bIns="9144">
+            <a:spAutoFit/>
+          </a:bodyPr>
+          <a:lstStyle/>
+          <a:p>
+            <a:pPr algn="ctr">
+              <a:defRPr sz="1500" b="1">
+                <a:solidFill>
+                  <a:srgbClr val="F6F9FC"/>
+                </a:solidFill>
+                <a:latin typeface="Malgun Gothic"/>
+              </a:defRPr>
+            </a:pPr>
+            <a:r>
+              <a:t>loss 11,593</a:t>
+            </a:r>
+          </a:p>
+        </p:txBody>
+      </p:sp>
+      <p:sp>
+        <p:nvSpPr>
+          <p:cNvPr id="23" name="TextBox 22"/>
+          <p:cNvSpPr txBox="1"/>
+          <p:nvPr/>
+        </p:nvSpPr>
+        <p:spPr>
+          <a:xfrm>
+            <a:off x="8814816" y="2194560"/>
+            <a:ext cx="347472" cy="411480"/>
+          </a:xfrm>
+          <a:prstGeom prst="rect">
+            <a:avLst/>
+          </a:prstGeom>
+          <a:noFill/>
+        </p:spPr>
+        <p:txBody>
+          <a:bodyPr wrap="square" anchor="t" lIns="18288" rIns="18288" tIns="9144" bIns="9144">
+            <a:spAutoFit/>
+          </a:bodyPr>
+          <a:lstStyle/>
+          <a:p>
+            <a:pPr algn="ctr">
+              <a:defRPr sz="2200" b="1">
+                <a:solidFill>
+                  <a:srgbClr val="2AD3CD"/>
+                </a:solidFill>
+                <a:latin typeface="Malgun Gothic"/>
+              </a:defRPr>
+            </a:pPr>
+            <a:r>
+              <a:t>→</a:t>
+            </a:r>
+          </a:p>
+        </p:txBody>
+      </p:sp>
+      <p:sp>
+        <p:nvSpPr>
+          <p:cNvPr id="24" name="Rounded Rectangle 23"/>
+          <p:cNvSpPr/>
+          <p:nvPr/>
+        </p:nvSpPr>
+        <p:spPr>
+          <a:xfrm>
+            <a:off x="9162288" y="1280160"/>
+            <a:ext cx="2487168" cy="2423160"/>
           </a:xfrm>
           <a:prstGeom prst="roundRect">
             <a:avLst/>
@@ -12551,64 +12566,28 @@
       </p:sp>
       <p:sp>
         <p:nvSpPr>
-          <p:cNvPr id="15" name="TextBox 14"/>
-          <p:cNvSpPr txBox="1"/>
-          <p:nvPr/>
-        </p:nvSpPr>
-        <p:spPr>
-          <a:xfrm>
-            <a:off x="6117336" y="1271016"/>
-            <a:ext cx="987552" cy="164592"/>
-          </a:xfrm>
-          <a:prstGeom prst="rect">
-            <a:avLst/>
-          </a:prstGeom>
-          <a:noFill/>
-        </p:spPr>
-        <p:txBody>
-          <a:bodyPr wrap="square" anchor="t" lIns="18288" rIns="18288" tIns="9144" bIns="9144">
-            <a:spAutoFit/>
-          </a:bodyPr>
-          <a:lstStyle/>
-          <a:p>
-            <a:pPr algn="l">
-              <a:defRPr sz="900" b="1">
-                <a:solidFill>
-                  <a:srgbClr val="ACC2D6"/>
-                </a:solidFill>
-                <a:latin typeface="Malgun Gothic"/>
-              </a:defRPr>
-            </a:pPr>
-            <a:r>
-              <a:t>CLUSTER2</a:t>
-            </a:r>
-          </a:p>
-        </p:txBody>
-      </p:sp>
-      <p:sp>
-        <p:nvSpPr>
-          <p:cNvPr id="16" name="TextBox 15"/>
-          <p:cNvSpPr txBox="1"/>
-          <p:nvPr/>
-        </p:nvSpPr>
-        <p:spPr>
-          <a:xfrm>
-            <a:off x="6117336" y="1527048"/>
-            <a:ext cx="2322576" cy="310896"/>
-          </a:xfrm>
-          <a:prstGeom prst="rect">
-            <a:avLst/>
-          </a:prstGeom>
-          <a:noFill/>
-        </p:spPr>
-        <p:txBody>
-          <a:bodyPr wrap="square" anchor="t" lIns="18288" rIns="18288" tIns="9144" bIns="9144">
-            <a:spAutoFit/>
-          </a:bodyPr>
-          <a:lstStyle/>
-          <a:p>
-            <a:pPr algn="l">
-              <a:defRPr sz="2200" b="1">
+          <p:cNvPr id="25" name="TextBox 24"/>
+          <p:cNvSpPr txBox="1"/>
+          <p:nvPr/>
+        </p:nvSpPr>
+        <p:spPr>
+          <a:xfrm>
+            <a:off x="9345168" y="1554480"/>
+            <a:ext cx="2121408" cy="237744"/>
+          </a:xfrm>
+          <a:prstGeom prst="rect">
+            <a:avLst/>
+          </a:prstGeom>
+          <a:noFill/>
+        </p:spPr>
+        <p:txBody>
+          <a:bodyPr wrap="square" anchor="t" lIns="18288" rIns="18288" tIns="9144" bIns="9144">
+            <a:spAutoFit/>
+          </a:bodyPr>
+          <a:lstStyle/>
+          <a:p>
+            <a:pPr algn="ctr">
+              <a:defRPr sz="1300" b="1">
                 <a:solidFill>
                   <a:srgbClr val="37CD85"/>
                 </a:solidFill>
@@ -12616,21 +12595,93 @@
               </a:defRPr>
             </a:pPr>
             <a:r>
-              <a:t>94,157</a:t>
-            </a:r>
-          </a:p>
-        </p:txBody>
-      </p:sp>
-      <p:sp>
-        <p:nvSpPr>
-          <p:cNvPr id="17" name="Rounded Rectangle 16"/>
+              <a:t>+ STEAL_BUF</a:t>
+            </a:r>
+          </a:p>
+        </p:txBody>
+      </p:sp>
+      <p:sp>
+        <p:nvSpPr>
+          <p:cNvPr id="26" name="TextBox 25"/>
+          <p:cNvSpPr txBox="1"/>
+          <p:nvPr/>
+        </p:nvSpPr>
+        <p:spPr>
+          <a:xfrm>
+            <a:off x="9345168" y="2029968"/>
+            <a:ext cx="2121408" cy="493776"/>
+          </a:xfrm>
+          <a:prstGeom prst="rect">
+            <a:avLst/>
+          </a:prstGeom>
+          <a:noFill/>
+        </p:spPr>
+        <p:txBody>
+          <a:bodyPr wrap="square" anchor="t" lIns="18288" rIns="18288" tIns="9144" bIns="9144">
+            <a:spAutoFit/>
+          </a:bodyPr>
+          <a:lstStyle/>
+          <a:p>
+            <a:pPr algn="ctr">
+              <a:defRPr sz="3100" b="1">
+                <a:solidFill>
+                  <a:srgbClr val="37CD85"/>
+                </a:solidFill>
+                <a:latin typeface="Malgun Gothic"/>
+              </a:defRPr>
+            </a:pPr>
+            <a:r>
+              <a:t>0.47%</a:t>
+            </a:r>
+          </a:p>
+        </p:txBody>
+      </p:sp>
+      <p:sp>
+        <p:nvSpPr>
+          <p:cNvPr id="27" name="TextBox 26"/>
+          <p:cNvSpPr txBox="1"/>
+          <p:nvPr/>
+        </p:nvSpPr>
+        <p:spPr>
+          <a:xfrm>
+            <a:off x="9345168" y="2788920"/>
+            <a:ext cx="2121408" cy="274320"/>
+          </a:xfrm>
+          <a:prstGeom prst="rect">
+            <a:avLst/>
+          </a:prstGeom>
+          <a:noFill/>
+        </p:spPr>
+        <p:txBody>
+          <a:bodyPr wrap="square" anchor="t" lIns="18288" rIns="18288" tIns="9144" bIns="9144">
+            <a:spAutoFit/>
+          </a:bodyPr>
+          <a:lstStyle/>
+          <a:p>
+            <a:pPr algn="ctr">
+              <a:defRPr sz="1500" b="1">
+                <a:solidFill>
+                  <a:srgbClr val="F6F9FC"/>
+                </a:solidFill>
+                <a:latin typeface="Malgun Gothic"/>
+              </a:defRPr>
+            </a:pPr>
+            <a:r>
+              <a:t>loss 502</a:t>
+            </a:r>
+          </a:p>
+        </p:txBody>
+      </p:sp>
+      <p:sp>
+        <p:nvSpPr>
+          <p:cNvPr id="28" name="Rounded Rectangle 27"/>
           <p:cNvSpPr/>
           <p:nvPr/>
         </p:nvSpPr>
         <p:spPr>
           <a:xfrm>
-            <a:off x="9070848" y="1143000"/>
-            <a:ext cx="2194560" cy="896112"/>
+            <a:off x="1965960" y="4160520"/>
+            <a:ext cx="8275320" cy="841248"/>
           </a:xfrm>
           <a:prstGeom prst="roundRect">
             <a:avLst/>
@@ -12666,14 +12717,14 @@
       </p:sp>
       <p:sp>
         <p:nvSpPr>
-          <p:cNvPr id="18" name="TextBox 17"/>
-          <p:cNvSpPr txBox="1"/>
-          <p:nvPr/>
-        </p:nvSpPr>
-        <p:spPr>
-          <a:xfrm>
-            <a:off x="9235440" y="1417320"/>
-            <a:ext cx="1847088" cy="347472"/>
+          <p:cNvPr id="29" name="TextBox 28"/>
+          <p:cNvSpPr txBox="1"/>
+          <p:nvPr/>
+        </p:nvSpPr>
+        <p:spPr>
+          <a:xfrm>
+            <a:off x="2240280" y="4325112"/>
+            <a:ext cx="7726679" cy="274320"/>
           </a:xfrm>
           <a:prstGeom prst="rect">
             <a:avLst/>
@@ -12687,7 +12738,7 @@
           <a:lstStyle/>
           <a:p>
             <a:pPr algn="ctr">
-              <a:defRPr sz="2400" b="1">
+              <a:defRPr sz="2300" b="1">
                 <a:solidFill>
                   <a:srgbClr val="071627"/>
                 </a:solidFill>
@@ -12695,57 +12746,21 @@
               </a:defRPr>
             </a:pPr>
             <a:r>
-              <a:t>+20.4%</a:t>
-            </a:r>
-          </a:p>
-        </p:txBody>
-      </p:sp>
-      <p:sp>
-        <p:nvSpPr>
-          <p:cNvPr id="19" name="TextBox 18"/>
-          <p:cNvSpPr txBox="1"/>
-          <p:nvPr/>
-        </p:nvSpPr>
-        <p:spPr>
-          <a:xfrm>
-            <a:off x="713232" y="2788920"/>
-            <a:ext cx="1353312" cy="274320"/>
-          </a:xfrm>
-          <a:prstGeom prst="rect">
-            <a:avLst/>
-          </a:prstGeom>
-          <a:noFill/>
-        </p:spPr>
-        <p:txBody>
-          <a:bodyPr wrap="square" anchor="t" lIns="18288" rIns="18288" tIns="9144" bIns="9144">
-            <a:spAutoFit/>
-          </a:bodyPr>
-          <a:lstStyle/>
-          <a:p>
-            <a:pPr algn="l">
-              <a:defRPr sz="1400" b="1">
-                <a:solidFill>
-                  <a:srgbClr val="ACC2D6"/>
-                </a:solidFill>
-                <a:latin typeface="Malgun Gothic"/>
-              </a:defRPr>
-            </a:pPr>
-            <a:r>
-              <a:t>OVERRUN</a:t>
-            </a:r>
-          </a:p>
-        </p:txBody>
-      </p:sp>
-      <p:sp>
-        <p:nvSpPr>
-          <p:cNvPr id="20" name="Rounded Rectangle 19"/>
+              <a:t>CLUSTER2 → STEAL_BUF   11.52% → 0.47%</a:t>
+            </a:r>
+          </a:p>
+        </p:txBody>
+      </p:sp>
+      <p:sp>
+        <p:nvSpPr>
+          <p:cNvPr id="30" name="Rounded Rectangle 29"/>
           <p:cNvSpPr/>
           <p:nvPr/>
         </p:nvSpPr>
         <p:spPr>
           <a:xfrm>
-            <a:off x="2212848" y="2542032"/>
-            <a:ext cx="2770632" cy="896112"/>
+            <a:off x="713232" y="5669280"/>
+            <a:ext cx="10771632" cy="566928"/>
           </a:xfrm>
           <a:prstGeom prst="roundRect">
             <a:avLst/>
@@ -12781,737 +12796,7 @@
       </p:sp>
       <p:sp>
         <p:nvSpPr>
-          <p:cNvPr id="21" name="TextBox 20"/>
-          <p:cNvSpPr txBox="1"/>
-          <p:nvPr/>
-        </p:nvSpPr>
-        <p:spPr>
-          <a:xfrm>
-            <a:off x="2395728" y="2670048"/>
-            <a:ext cx="713232" cy="164592"/>
-          </a:xfrm>
-          <a:prstGeom prst="rect">
-            <a:avLst/>
-          </a:prstGeom>
-          <a:noFill/>
-        </p:spPr>
-        <p:txBody>
-          <a:bodyPr wrap="square" anchor="t" lIns="18288" rIns="18288" tIns="9144" bIns="9144">
-            <a:spAutoFit/>
-          </a:bodyPr>
-          <a:lstStyle/>
-          <a:p>
-            <a:pPr algn="l">
-              <a:defRPr sz="900" b="1">
-                <a:solidFill>
-                  <a:srgbClr val="ACC2D6"/>
-                </a:solidFill>
-                <a:latin typeface="Malgun Gothic"/>
-              </a:defRPr>
-            </a:pPr>
-            <a:r>
-              <a:t>SCALAR</a:t>
-            </a:r>
-          </a:p>
-        </p:txBody>
-      </p:sp>
-      <p:sp>
-        <p:nvSpPr>
-          <p:cNvPr id="22" name="TextBox 21"/>
-          <p:cNvSpPr txBox="1"/>
-          <p:nvPr/>
-        </p:nvSpPr>
-        <p:spPr>
-          <a:xfrm>
-            <a:off x="2395728" y="2926080"/>
-            <a:ext cx="2322576" cy="310896"/>
-          </a:xfrm>
-          <a:prstGeom prst="rect">
-            <a:avLst/>
-          </a:prstGeom>
-          <a:noFill/>
-        </p:spPr>
-        <p:txBody>
-          <a:bodyPr wrap="square" anchor="t" lIns="18288" rIns="18288" tIns="9144" bIns="9144">
-            <a:spAutoFit/>
-          </a:bodyPr>
-          <a:lstStyle/>
-          <a:p>
-            <a:pPr algn="l">
-              <a:defRPr sz="2200" b="1">
-                <a:solidFill>
-                  <a:srgbClr val="FF6376"/>
-                </a:solidFill>
-                <a:latin typeface="Malgun Gothic"/>
-              </a:defRPr>
-            </a:pPr>
-            <a:r>
-              <a:t>28,187</a:t>
-            </a:r>
-          </a:p>
-        </p:txBody>
-      </p:sp>
-      <p:sp>
-        <p:nvSpPr>
-          <p:cNvPr id="23" name="TextBox 22"/>
-          <p:cNvSpPr txBox="1"/>
-          <p:nvPr/>
-        </p:nvSpPr>
-        <p:spPr>
-          <a:xfrm>
-            <a:off x="5184648" y="2761488"/>
-            <a:ext cx="566928" cy="411480"/>
-          </a:xfrm>
-          <a:prstGeom prst="rect">
-            <a:avLst/>
-          </a:prstGeom>
-          <a:noFill/>
-        </p:spPr>
-        <p:txBody>
-          <a:bodyPr wrap="square" anchor="t" lIns="18288" rIns="18288" tIns="9144" bIns="9144">
-            <a:spAutoFit/>
-          </a:bodyPr>
-          <a:lstStyle/>
-          <a:p>
-            <a:pPr algn="ctr">
-              <a:defRPr sz="3000" b="1">
-                <a:solidFill>
-                  <a:srgbClr val="2AD3CD"/>
-                </a:solidFill>
-                <a:latin typeface="Malgun Gothic"/>
-              </a:defRPr>
-            </a:pPr>
-            <a:r>
-              <a:t>→</a:t>
-            </a:r>
-          </a:p>
-        </p:txBody>
-      </p:sp>
-      <p:sp>
-        <p:nvSpPr>
-          <p:cNvPr id="24" name="Rounded Rectangle 23"/>
-          <p:cNvSpPr/>
-          <p:nvPr/>
-        </p:nvSpPr>
-        <p:spPr>
-          <a:xfrm>
-            <a:off x="5934456" y="2542032"/>
-            <a:ext cx="2770632" cy="896112"/>
-          </a:xfrm>
-          <a:prstGeom prst="roundRect">
-            <a:avLst/>
-          </a:prstGeom>
-          <a:solidFill>
-            <a:srgbClr val="12304C"/>
-          </a:solidFill>
-          <a:ln w="19050">
-            <a:solidFill>
-              <a:srgbClr val="37CD85"/>
-            </a:solidFill>
-          </a:ln>
-        </p:spPr>
-        <p:style>
-          <a:lnRef idx="1">
-            <a:schemeClr val="accent1"/>
-          </a:lnRef>
-          <a:fillRef idx="3">
-            <a:schemeClr val="accent1"/>
-          </a:fillRef>
-          <a:effectRef idx="2">
-            <a:schemeClr val="accent1"/>
-          </a:effectRef>
-          <a:fontRef idx="minor">
-            <a:schemeClr val="lt1"/>
-          </a:fontRef>
-        </p:style>
-        <p:txBody>
-          <a:bodyPr rtlCol="0" anchor="ctr"/>
-          <a:lstStyle/>
-          <a:p>
-            <a:pPr algn="ctr"/>
-          </a:p>
-        </p:txBody>
-      </p:sp>
-      <p:sp>
-        <p:nvSpPr>
-          <p:cNvPr id="25" name="TextBox 24"/>
-          <p:cNvSpPr txBox="1"/>
-          <p:nvPr/>
-        </p:nvSpPr>
-        <p:spPr>
-          <a:xfrm>
-            <a:off x="6117336" y="2670048"/>
-            <a:ext cx="987552" cy="164592"/>
-          </a:xfrm>
-          <a:prstGeom prst="rect">
-            <a:avLst/>
-          </a:prstGeom>
-          <a:noFill/>
-        </p:spPr>
-        <p:txBody>
-          <a:bodyPr wrap="square" anchor="t" lIns="18288" rIns="18288" tIns="9144" bIns="9144">
-            <a:spAutoFit/>
-          </a:bodyPr>
-          <a:lstStyle/>
-          <a:p>
-            <a:pPr algn="l">
-              <a:defRPr sz="900" b="1">
-                <a:solidFill>
-                  <a:srgbClr val="ACC2D6"/>
-                </a:solidFill>
-                <a:latin typeface="Malgun Gothic"/>
-              </a:defRPr>
-            </a:pPr>
-            <a:r>
-              <a:t>CLUSTER2</a:t>
-            </a:r>
-          </a:p>
-        </p:txBody>
-      </p:sp>
-      <p:sp>
-        <p:nvSpPr>
-          <p:cNvPr id="26" name="TextBox 25"/>
-          <p:cNvSpPr txBox="1"/>
-          <p:nvPr/>
-        </p:nvSpPr>
-        <p:spPr>
-          <a:xfrm>
-            <a:off x="6117336" y="2926080"/>
-            <a:ext cx="2322576" cy="310896"/>
-          </a:xfrm>
-          <a:prstGeom prst="rect">
-            <a:avLst/>
-          </a:prstGeom>
-          <a:noFill/>
-        </p:spPr>
-        <p:txBody>
-          <a:bodyPr wrap="square" anchor="t" lIns="18288" rIns="18288" tIns="9144" bIns="9144">
-            <a:spAutoFit/>
-          </a:bodyPr>
-          <a:lstStyle/>
-          <a:p>
-            <a:pPr algn="l">
-              <a:defRPr sz="2200" b="1">
-                <a:solidFill>
-                  <a:srgbClr val="37CD85"/>
-                </a:solidFill>
-                <a:latin typeface="Malgun Gothic"/>
-              </a:defRPr>
-            </a:pPr>
-            <a:r>
-              <a:t>12,259</a:t>
-            </a:r>
-          </a:p>
-        </p:txBody>
-      </p:sp>
-      <p:sp>
-        <p:nvSpPr>
-          <p:cNvPr id="27" name="Rounded Rectangle 26"/>
-          <p:cNvSpPr/>
-          <p:nvPr/>
-        </p:nvSpPr>
-        <p:spPr>
-          <a:xfrm>
-            <a:off x="9070848" y="2542032"/>
-            <a:ext cx="2194560" cy="896112"/>
-          </a:xfrm>
-          <a:prstGeom prst="roundRect">
-            <a:avLst/>
-          </a:prstGeom>
-          <a:solidFill>
-            <a:srgbClr val="37CD85"/>
-          </a:solidFill>
-          <a:ln>
-            <a:noFill/>
-          </a:ln>
-        </p:spPr>
-        <p:style>
-          <a:lnRef idx="1">
-            <a:schemeClr val="accent1"/>
-          </a:lnRef>
-          <a:fillRef idx="3">
-            <a:schemeClr val="accent1"/>
-          </a:fillRef>
-          <a:effectRef idx="2">
-            <a:schemeClr val="accent1"/>
-          </a:effectRef>
-          <a:fontRef idx="minor">
-            <a:schemeClr val="lt1"/>
-          </a:fontRef>
-        </p:style>
-        <p:txBody>
-          <a:bodyPr rtlCol="0" anchor="ctr"/>
-          <a:lstStyle/>
-          <a:p>
-            <a:pPr algn="ctr"/>
-          </a:p>
-        </p:txBody>
-      </p:sp>
-      <p:sp>
-        <p:nvSpPr>
-          <p:cNvPr id="28" name="TextBox 27"/>
-          <p:cNvSpPr txBox="1"/>
-          <p:nvPr/>
-        </p:nvSpPr>
-        <p:spPr>
-          <a:xfrm>
-            <a:off x="9235440" y="2816352"/>
-            <a:ext cx="1847088" cy="347472"/>
-          </a:xfrm>
-          <a:prstGeom prst="rect">
-            <a:avLst/>
-          </a:prstGeom>
-          <a:noFill/>
-        </p:spPr>
-        <p:txBody>
-          <a:bodyPr wrap="square" anchor="t" lIns="18288" rIns="18288" tIns="9144" bIns="9144">
-            <a:spAutoFit/>
-          </a:bodyPr>
-          <a:lstStyle/>
-          <a:p>
-            <a:pPr algn="ctr">
-              <a:defRPr sz="2400" b="1">
-                <a:solidFill>
-                  <a:srgbClr val="071627"/>
-                </a:solidFill>
-                <a:latin typeface="Malgun Gothic"/>
-              </a:defRPr>
-            </a:pPr>
-            <a:r>
-              <a:t>−56.5%</a:t>
-            </a:r>
-          </a:p>
-        </p:txBody>
-      </p:sp>
-      <p:sp>
-        <p:nvSpPr>
-          <p:cNvPr id="29" name="TextBox 28"/>
-          <p:cNvSpPr txBox="1"/>
-          <p:nvPr/>
-        </p:nvSpPr>
-        <p:spPr>
-          <a:xfrm>
-            <a:off x="713232" y="4187952"/>
-            <a:ext cx="1353312" cy="274320"/>
-          </a:xfrm>
-          <a:prstGeom prst="rect">
-            <a:avLst/>
-          </a:prstGeom>
-          <a:noFill/>
-        </p:spPr>
-        <p:txBody>
-          <a:bodyPr wrap="square" anchor="t" lIns="18288" rIns="18288" tIns="9144" bIns="9144">
-            <a:spAutoFit/>
-          </a:bodyPr>
-          <a:lstStyle/>
-          <a:p>
-            <a:pPr algn="l">
-              <a:defRPr sz="1400" b="1">
-                <a:solidFill>
-                  <a:srgbClr val="ACC2D6"/>
-                </a:solidFill>
-                <a:latin typeface="Malgun Gothic"/>
-              </a:defRPr>
-            </a:pPr>
-            <a:r>
-              <a:t>EPC</a:t>
-            </a:r>
-          </a:p>
-        </p:txBody>
-      </p:sp>
-      <p:sp>
-        <p:nvSpPr>
-          <p:cNvPr id="30" name="Rounded Rectangle 29"/>
-          <p:cNvSpPr/>
-          <p:nvPr/>
-        </p:nvSpPr>
-        <p:spPr>
-          <a:xfrm>
-            <a:off x="2212848" y="3941064"/>
-            <a:ext cx="2770632" cy="896112"/>
-          </a:xfrm>
-          <a:prstGeom prst="roundRect">
-            <a:avLst/>
-          </a:prstGeom>
-          <a:solidFill>
-            <a:srgbClr val="12304C"/>
-          </a:solidFill>
-          <a:ln>
-            <a:noFill/>
-          </a:ln>
-        </p:spPr>
-        <p:style>
-          <a:lnRef idx="1">
-            <a:schemeClr val="accent1"/>
-          </a:lnRef>
-          <a:fillRef idx="3">
-            <a:schemeClr val="accent1"/>
-          </a:fillRef>
-          <a:effectRef idx="2">
-            <a:schemeClr val="accent1"/>
-          </a:effectRef>
-          <a:fontRef idx="minor">
-            <a:schemeClr val="lt1"/>
-          </a:fontRef>
-        </p:style>
-        <p:txBody>
-          <a:bodyPr rtlCol="0" anchor="ctr"/>
-          <a:lstStyle/>
-          <a:p>
-            <a:pPr algn="ctr"/>
-          </a:p>
-        </p:txBody>
-      </p:sp>
-      <p:sp>
-        <p:nvSpPr>
           <p:cNvPr id="31" name="TextBox 30"/>
-          <p:cNvSpPr txBox="1"/>
-          <p:nvPr/>
-        </p:nvSpPr>
-        <p:spPr>
-          <a:xfrm>
-            <a:off x="2395728" y="4069080"/>
-            <a:ext cx="713232" cy="164592"/>
-          </a:xfrm>
-          <a:prstGeom prst="rect">
-            <a:avLst/>
-          </a:prstGeom>
-          <a:noFill/>
-        </p:spPr>
-        <p:txBody>
-          <a:bodyPr wrap="square" anchor="t" lIns="18288" rIns="18288" tIns="9144" bIns="9144">
-            <a:spAutoFit/>
-          </a:bodyPr>
-          <a:lstStyle/>
-          <a:p>
-            <a:pPr algn="l">
-              <a:defRPr sz="900" b="1">
-                <a:solidFill>
-                  <a:srgbClr val="ACC2D6"/>
-                </a:solidFill>
-                <a:latin typeface="Malgun Gothic"/>
-              </a:defRPr>
-            </a:pPr>
-            <a:r>
-              <a:t>SCALAR</a:t>
-            </a:r>
-          </a:p>
-        </p:txBody>
-      </p:sp>
-      <p:sp>
-        <p:nvSpPr>
-          <p:cNvPr id="32" name="TextBox 31"/>
-          <p:cNvSpPr txBox="1"/>
-          <p:nvPr/>
-        </p:nvSpPr>
-        <p:spPr>
-          <a:xfrm>
-            <a:off x="2395728" y="4325112"/>
-            <a:ext cx="2322576" cy="310896"/>
-          </a:xfrm>
-          <a:prstGeom prst="rect">
-            <a:avLst/>
-          </a:prstGeom>
-          <a:noFill/>
-        </p:spPr>
-        <p:txBody>
-          <a:bodyPr wrap="square" anchor="t" lIns="18288" rIns="18288" tIns="9144" bIns="9144">
-            <a:spAutoFit/>
-          </a:bodyPr>
-          <a:lstStyle/>
-          <a:p>
-            <a:pPr algn="l">
-              <a:defRPr sz="2200" b="1">
-                <a:solidFill>
-                  <a:srgbClr val="FFB746"/>
-                </a:solidFill>
-                <a:latin typeface="Malgun Gothic"/>
-              </a:defRPr>
-            </a:pPr>
-            <a:r>
-              <a:t>0.6739</a:t>
-            </a:r>
-          </a:p>
-        </p:txBody>
-      </p:sp>
-      <p:sp>
-        <p:nvSpPr>
-          <p:cNvPr id="33" name="TextBox 32"/>
-          <p:cNvSpPr txBox="1"/>
-          <p:nvPr/>
-        </p:nvSpPr>
-        <p:spPr>
-          <a:xfrm>
-            <a:off x="5184648" y="4160520"/>
-            <a:ext cx="566928" cy="411480"/>
-          </a:xfrm>
-          <a:prstGeom prst="rect">
-            <a:avLst/>
-          </a:prstGeom>
-          <a:noFill/>
-        </p:spPr>
-        <p:txBody>
-          <a:bodyPr wrap="square" anchor="t" lIns="18288" rIns="18288" tIns="9144" bIns="9144">
-            <a:spAutoFit/>
-          </a:bodyPr>
-          <a:lstStyle/>
-          <a:p>
-            <a:pPr algn="ctr">
-              <a:defRPr sz="3000" b="1">
-                <a:solidFill>
-                  <a:srgbClr val="2AD3CD"/>
-                </a:solidFill>
-                <a:latin typeface="Malgun Gothic"/>
-              </a:defRPr>
-            </a:pPr>
-            <a:r>
-              <a:t>→</a:t>
-            </a:r>
-          </a:p>
-        </p:txBody>
-      </p:sp>
-      <p:sp>
-        <p:nvSpPr>
-          <p:cNvPr id="34" name="Rounded Rectangle 33"/>
-          <p:cNvSpPr/>
-          <p:nvPr/>
-        </p:nvSpPr>
-        <p:spPr>
-          <a:xfrm>
-            <a:off x="5934456" y="3941064"/>
-            <a:ext cx="2770632" cy="896112"/>
-          </a:xfrm>
-          <a:prstGeom prst="roundRect">
-            <a:avLst/>
-          </a:prstGeom>
-          <a:solidFill>
-            <a:srgbClr val="12304C"/>
-          </a:solidFill>
-          <a:ln w="19050">
-            <a:solidFill>
-              <a:srgbClr val="2AD3CD"/>
-            </a:solidFill>
-          </a:ln>
-        </p:spPr>
-        <p:style>
-          <a:lnRef idx="1">
-            <a:schemeClr val="accent1"/>
-          </a:lnRef>
-          <a:fillRef idx="3">
-            <a:schemeClr val="accent1"/>
-          </a:fillRef>
-          <a:effectRef idx="2">
-            <a:schemeClr val="accent1"/>
-          </a:effectRef>
-          <a:fontRef idx="minor">
-            <a:schemeClr val="lt1"/>
-          </a:fontRef>
-        </p:style>
-        <p:txBody>
-          <a:bodyPr rtlCol="0" anchor="ctr"/>
-          <a:lstStyle/>
-          <a:p>
-            <a:pPr algn="ctr"/>
-          </a:p>
-        </p:txBody>
-      </p:sp>
-      <p:sp>
-        <p:nvSpPr>
-          <p:cNvPr id="35" name="TextBox 34"/>
-          <p:cNvSpPr txBox="1"/>
-          <p:nvPr/>
-        </p:nvSpPr>
-        <p:spPr>
-          <a:xfrm>
-            <a:off x="6117336" y="4069080"/>
-            <a:ext cx="987552" cy="164592"/>
-          </a:xfrm>
-          <a:prstGeom prst="rect">
-            <a:avLst/>
-          </a:prstGeom>
-          <a:noFill/>
-        </p:spPr>
-        <p:txBody>
-          <a:bodyPr wrap="square" anchor="t" lIns="18288" rIns="18288" tIns="9144" bIns="9144">
-            <a:spAutoFit/>
-          </a:bodyPr>
-          <a:lstStyle/>
-          <a:p>
-            <a:pPr algn="l">
-              <a:defRPr sz="900" b="1">
-                <a:solidFill>
-                  <a:srgbClr val="ACC2D6"/>
-                </a:solidFill>
-                <a:latin typeface="Malgun Gothic"/>
-              </a:defRPr>
-            </a:pPr>
-            <a:r>
-              <a:t>CLUSTER2</a:t>
-            </a:r>
-          </a:p>
-        </p:txBody>
-      </p:sp>
-      <p:sp>
-        <p:nvSpPr>
-          <p:cNvPr id="36" name="TextBox 35"/>
-          <p:cNvSpPr txBox="1"/>
-          <p:nvPr/>
-        </p:nvSpPr>
-        <p:spPr>
-          <a:xfrm>
-            <a:off x="6117336" y="4325112"/>
-            <a:ext cx="2322576" cy="310896"/>
-          </a:xfrm>
-          <a:prstGeom prst="rect">
-            <a:avLst/>
-          </a:prstGeom>
-          <a:noFill/>
-        </p:spPr>
-        <p:txBody>
-          <a:bodyPr wrap="square" anchor="t" lIns="18288" rIns="18288" tIns="9144" bIns="9144">
-            <a:spAutoFit/>
-          </a:bodyPr>
-          <a:lstStyle/>
-          <a:p>
-            <a:pPr algn="l">
-              <a:defRPr sz="2200" b="1">
-                <a:solidFill>
-                  <a:srgbClr val="2AD3CD"/>
-                </a:solidFill>
-                <a:latin typeface="Malgun Gothic"/>
-              </a:defRPr>
-            </a:pPr>
-            <a:r>
-              <a:t>0.8116</a:t>
-            </a:r>
-          </a:p>
-        </p:txBody>
-      </p:sp>
-      <p:sp>
-        <p:nvSpPr>
-          <p:cNvPr id="37" name="Rounded Rectangle 36"/>
-          <p:cNvSpPr/>
-          <p:nvPr/>
-        </p:nvSpPr>
-        <p:spPr>
-          <a:xfrm>
-            <a:off x="9070848" y="3941064"/>
-            <a:ext cx="2194560" cy="896112"/>
-          </a:xfrm>
-          <a:prstGeom prst="roundRect">
-            <a:avLst/>
-          </a:prstGeom>
-          <a:solidFill>
-            <a:srgbClr val="2AD3CD"/>
-          </a:solidFill>
-          <a:ln>
-            <a:noFill/>
-          </a:ln>
-        </p:spPr>
-        <p:style>
-          <a:lnRef idx="1">
-            <a:schemeClr val="accent1"/>
-          </a:lnRef>
-          <a:fillRef idx="3">
-            <a:schemeClr val="accent1"/>
-          </a:fillRef>
-          <a:effectRef idx="2">
-            <a:schemeClr val="accent1"/>
-          </a:effectRef>
-          <a:fontRef idx="minor">
-            <a:schemeClr val="lt1"/>
-          </a:fontRef>
-        </p:style>
-        <p:txBody>
-          <a:bodyPr rtlCol="0" anchor="ctr"/>
-          <a:lstStyle/>
-          <a:p>
-            <a:pPr algn="ctr"/>
-          </a:p>
-        </p:txBody>
-      </p:sp>
-      <p:sp>
-        <p:nvSpPr>
-          <p:cNvPr id="38" name="TextBox 37"/>
-          <p:cNvSpPr txBox="1"/>
-          <p:nvPr/>
-        </p:nvSpPr>
-        <p:spPr>
-          <a:xfrm>
-            <a:off x="9235440" y="4215384"/>
-            <a:ext cx="1847088" cy="347472"/>
-          </a:xfrm>
-          <a:prstGeom prst="rect">
-            <a:avLst/>
-          </a:prstGeom>
-          <a:noFill/>
-        </p:spPr>
-        <p:txBody>
-          <a:bodyPr wrap="square" anchor="t" lIns="18288" rIns="18288" tIns="9144" bIns="9144">
-            <a:spAutoFit/>
-          </a:bodyPr>
-          <a:lstStyle/>
-          <a:p>
-            <a:pPr algn="ctr">
-              <a:defRPr sz="2400" b="1">
-                <a:solidFill>
-                  <a:srgbClr val="071627"/>
-                </a:solidFill>
-                <a:latin typeface="Malgun Gothic"/>
-              </a:defRPr>
-            </a:pPr>
-            <a:r>
-              <a:t>+20.4%</a:t>
-            </a:r>
-          </a:p>
-        </p:txBody>
-      </p:sp>
-      <p:sp>
-        <p:nvSpPr>
-          <p:cNvPr id="39" name="Rounded Rectangle 38"/>
-          <p:cNvSpPr/>
-          <p:nvPr/>
-        </p:nvSpPr>
-        <p:spPr>
-          <a:xfrm>
-            <a:off x="713232" y="5669280"/>
-            <a:ext cx="10771632" cy="566928"/>
-          </a:xfrm>
-          <a:prstGeom prst="roundRect">
-            <a:avLst/>
-          </a:prstGeom>
-          <a:solidFill>
-            <a:srgbClr val="12304C"/>
-          </a:solidFill>
-          <a:ln>
-            <a:noFill/>
-          </a:ln>
-        </p:spPr>
-        <p:style>
-          <a:lnRef idx="1">
-            <a:schemeClr val="accent1"/>
-          </a:lnRef>
-          <a:fillRef idx="3">
-            <a:schemeClr val="accent1"/>
-          </a:fillRef>
-          <a:effectRef idx="2">
-            <a:schemeClr val="accent1"/>
-          </a:effectRef>
-          <a:fontRef idx="minor">
-            <a:schemeClr val="lt1"/>
-          </a:fontRef>
-        </p:style>
-        <p:txBody>
-          <a:bodyPr rtlCol="0" anchor="ctr"/>
-          <a:lstStyle/>
-          <a:p>
-            <a:pPr algn="ctr"/>
-          </a:p>
-        </p:txBody>
-      </p:sp>
-      <p:sp>
-        <p:nvSpPr>
-          <p:cNvPr id="40" name="TextBox 39"/>
           <p:cNvSpPr txBox="1"/>
           <p:nvPr/>
         </p:nvSpPr>
@@ -13540,14 +12825,14 @@
               </a:defRPr>
             </a:pPr>
             <a:r>
-              <a:t>구조군 비교 결과: accepted +15,928 events  =  overrun 15,928건 감소</a:t>
-            </a:r>
-          </a:p>
-        </p:txBody>
-      </p:sp>
-      <p:sp>
-        <p:nvSpPr>
-          <p:cNvPr id="41" name="TextBox 40"/>
+              <a:t>손실 건수 24.42배 감소 · 상대 감소율 95.9% · 동일 106,416-event denominator</a:t>
+            </a:r>
+          </a:p>
+        </p:txBody>
+      </p:sp>
+      <p:sp>
+        <p:nvSpPr>
+          <p:cNvPr id="32" name="TextBox 31"/>
           <p:cNvSpPr txBox="1"/>
           <p:nvPr/>
         </p:nvSpPr>
@@ -13576,14 +12861,14 @@
               </a:defRPr>
             </a:pPr>
             <a:r>
-              <a:t>※ 최종 polarity-v1 trace의 exact head-to-head 개선율이 아니라 원본 구조군 비교</a:t>
-            </a:r>
-          </a:p>
-        </p:txBody>
-      </p:sp>
-      <p:sp>
-        <p:nvSpPr>
-          <p:cNvPr id="42" name="Rectangle 41"/>
+              <a:t>※ 최종 UZH polarity trace(8,503)는 별도 검증이며 이 비교와 섞지 않는다</a:t>
+            </a:r>
+          </a:p>
+        </p:txBody>
+      </p:sp>
+      <p:sp>
+        <p:nvSpPr>
+          <p:cNvPr id="33" name="Rectangle 32"/>
           <p:cNvSpPr/>
           <p:nvPr/>
         </p:nvSpPr>
@@ -13626,7 +12911,7 @@
       </p:sp>
       <p:sp>
         <p:nvSpPr>
-          <p:cNvPr id="43" name="Rounded Rectangle 42"/>
+          <p:cNvPr id="34" name="Rounded Rectangle 33"/>
           <p:cNvSpPr/>
           <p:nvPr/>
         </p:nvSpPr>
@@ -13669,7 +12954,7 @@
       </p:sp>
       <p:sp>
         <p:nvSpPr>
-          <p:cNvPr id="44" name="TextBox 43"/>
+          <p:cNvPr id="35" name="TextBox 34"/>
           <p:cNvSpPr txBox="1"/>
           <p:nvPr/>
         </p:nvSpPr>
@@ -13698,14 +12983,14 @@
               </a:defRPr>
             </a:pPr>
             <a:r>
-              <a:t>03  결과</a:t>
-            </a:r>
-          </a:p>
-        </p:txBody>
-      </p:sp>
-      <p:sp>
-        <p:nvSpPr>
-          <p:cNvPr id="45" name="TextBox 44"/>
+              <a:t>03  정량</a:t>
+            </a:r>
+          </a:p>
+        </p:txBody>
+      </p:sp>
+      <p:sp>
+        <p:nvSpPr>
+          <p:cNvPr id="36" name="TextBox 35"/>
           <p:cNvSpPr txBox="1"/>
           <p:nvPr/>
         </p:nvSpPr>
@@ -13734,14 +13019,14 @@
               </a:defRPr>
             </a:pPr>
             <a:r>
-              <a:t>대역폭·overflow 병목은 수치로 개선됐다</a:t>
-            </a:r>
-          </a:p>
-        </p:txBody>
-      </p:sp>
-      <p:sp>
-        <p:nvSpPr>
-          <p:cNvPr id="46" name="Rectangle 45"/>
+              <a:t>공식 50-workload에서 steal_buf가 손실을 거의 제거</a:t>
+            </a:r>
+          </a:p>
+        </p:txBody>
+      </p:sp>
+      <p:sp>
+        <p:nvSpPr>
+          <p:cNvPr id="37" name="Rectangle 36"/>
           <p:cNvSpPr/>
           <p:nvPr/>
         </p:nvSpPr>
@@ -13925,7 +13210,7 @@
               </a:defRPr>
             </a:pPr>
             <a:r>
-              <a:t>03  결과</a:t>
+              <a:t>03  검증</a:t>
             </a:r>
           </a:p>
         </p:txBody>
@@ -13961,7 +13246,7 @@
               </a:defRPr>
             </a:pPr>
             <a:r>
-              <a:t>최종 trace에서 buffer·polarity 오류 0</a:t>
+              <a:t>두 실제 TB가 비교 성능과 최종 polarity를 분리 검증</a:t>
             </a:r>
           </a:p>
         </p:txBody>
@@ -14040,7 +13325,7 @@
               </a:defRPr>
             </a:pPr>
             <a:r>
-              <a:t>Source: polarity_v1_release_receipt.json · Xcelium 23.09-s013</a:t>
+              <a:t>Source: committed TBs · Xcelium 23.09-s013 · independent Python verifier</a:t>
             </a:r>
           </a:p>
         </p:txBody>
@@ -14083,14 +13368,365 @@
       </p:sp>
       <p:sp>
         <p:nvSpPr>
-          <p:cNvPr id="9" name="TextBox 8"/>
-          <p:cNvSpPr txBox="1"/>
-          <p:nvPr/>
-        </p:nvSpPr>
-        <p:spPr>
-          <a:xfrm>
-            <a:off x="841248" y="1280160"/>
-            <a:ext cx="2926080" cy="731520"/>
+          <p:cNvPr id="9" name="Rounded Rectangle 8"/>
+          <p:cNvSpPr/>
+          <p:nvPr/>
+        </p:nvSpPr>
+        <p:spPr>
+          <a:xfrm>
+            <a:off x="658368" y="1078992"/>
+            <a:ext cx="5413248" cy="1078992"/>
+          </a:xfrm>
+          <a:prstGeom prst="roundRect">
+            <a:avLst/>
+          </a:prstGeom>
+          <a:solidFill>
+            <a:srgbClr val="12304C"/>
+          </a:solidFill>
+          <a:ln w="19050">
+            <a:solidFill>
+              <a:srgbClr val="FFB746"/>
+            </a:solidFill>
+          </a:ln>
+        </p:spPr>
+        <p:style>
+          <a:lnRef idx="1">
+            <a:schemeClr val="accent1"/>
+          </a:lnRef>
+          <a:fillRef idx="3">
+            <a:schemeClr val="accent1"/>
+          </a:fillRef>
+          <a:effectRef idx="2">
+            <a:schemeClr val="accent1"/>
+          </a:effectRef>
+          <a:fontRef idx="minor">
+            <a:schemeClr val="lt1"/>
+          </a:fontRef>
+        </p:style>
+        <p:txBody>
+          <a:bodyPr rtlCol="0" anchor="ctr"/>
+          <a:lstStyle/>
+          <a:p>
+            <a:pPr algn="ctr"/>
+          </a:p>
+        </p:txBody>
+      </p:sp>
+      <p:sp>
+        <p:nvSpPr>
+          <p:cNvPr id="10" name="TextBox 9"/>
+          <p:cNvSpPr txBox="1"/>
+          <p:nvPr/>
+        </p:nvSpPr>
+        <p:spPr>
+          <a:xfrm>
+            <a:off x="896112" y="1298448"/>
+            <a:ext cx="1920240" cy="219456"/>
+          </a:xfrm>
+          <a:prstGeom prst="rect">
+            <a:avLst/>
+          </a:prstGeom>
+          <a:noFill/>
+        </p:spPr>
+        <p:txBody>
+          <a:bodyPr wrap="square" anchor="t" lIns="18288" rIns="18288" tIns="9144" bIns="9144">
+            <a:spAutoFit/>
+          </a:bodyPr>
+          <a:lstStyle/>
+          <a:p>
+            <a:pPr algn="l">
+              <a:defRPr sz="1300" b="1">
+                <a:solidFill>
+                  <a:srgbClr val="FFB746"/>
+                </a:solidFill>
+                <a:latin typeface="Malgun Gothic"/>
+              </a:defRPr>
+            </a:pPr>
+            <a:r>
+              <a:t>50-WORKLOAD 비교 TB</a:t>
+            </a:r>
+          </a:p>
+        </p:txBody>
+      </p:sp>
+      <p:sp>
+        <p:nvSpPr>
+          <p:cNvPr id="11" name="TextBox 10"/>
+          <p:cNvSpPr txBox="1"/>
+          <p:nvPr/>
+        </p:nvSpPr>
+        <p:spPr>
+          <a:xfrm>
+            <a:off x="896112" y="1664208"/>
+            <a:ext cx="4846320" cy="219456"/>
+          </a:xfrm>
+          <a:prstGeom prst="rect">
+            <a:avLst/>
+          </a:prstGeom>
+          <a:noFill/>
+        </p:spPr>
+        <p:txBody>
+          <a:bodyPr wrap="square" anchor="t" lIns="18288" rIns="18288" tIns="9144" bIns="9144">
+            <a:spAutoFit/>
+          </a:bodyPr>
+          <a:lstStyle/>
+          <a:p>
+            <a:pPr algn="l">
+              <a:defRPr sz="1300" b="1">
+                <a:solidFill>
+                  <a:srgbClr val="F6F9FC"/>
+                </a:solidFill>
+                <a:latin typeface="Malgun Gothic"/>
+              </a:defRPr>
+            </a:pPr>
+            <a:r>
+              <a:t>tb_steal_buf_trace_phantom_debug.v</a:t>
+            </a:r>
+          </a:p>
+        </p:txBody>
+      </p:sp>
+      <p:sp>
+        <p:nvSpPr>
+          <p:cNvPr id="12" name="TextBox 11"/>
+          <p:cNvSpPr txBox="1"/>
+          <p:nvPr/>
+        </p:nvSpPr>
+        <p:spPr>
+          <a:xfrm>
+            <a:off x="2834640" y="1298448"/>
+            <a:ext cx="2907792" cy="219456"/>
+          </a:xfrm>
+          <a:prstGeom prst="rect">
+            <a:avLst/>
+          </a:prstGeom>
+          <a:noFill/>
+        </p:spPr>
+        <p:txBody>
+          <a:bodyPr wrap="square" anchor="t" lIns="18288" rIns="18288" tIns="9144" bIns="9144">
+            <a:spAutoFit/>
+          </a:bodyPr>
+          <a:lstStyle/>
+          <a:p>
+            <a:pPr algn="r">
+              <a:defRPr sz="1100" b="0">
+                <a:solidFill>
+                  <a:srgbClr val="ACC2D6"/>
+                </a:solidFill>
+                <a:latin typeface="Malgun Gothic"/>
+              </a:defRPr>
+            </a:pPr>
+            <a:r>
+              <a:t>50/50 PASS · loss 502 · phantom 0</a:t>
+            </a:r>
+          </a:p>
+        </p:txBody>
+      </p:sp>
+      <p:sp>
+        <p:nvSpPr>
+          <p:cNvPr id="13" name="Rounded Rectangle 12"/>
+          <p:cNvSpPr/>
+          <p:nvPr/>
+        </p:nvSpPr>
+        <p:spPr>
+          <a:xfrm>
+            <a:off x="6199632" y="1078992"/>
+            <a:ext cx="5321808" cy="1078992"/>
+          </a:xfrm>
+          <a:prstGeom prst="roundRect">
+            <a:avLst/>
+          </a:prstGeom>
+          <a:solidFill>
+            <a:srgbClr val="12304C"/>
+          </a:solidFill>
+          <a:ln w="19050">
+            <a:solidFill>
+              <a:srgbClr val="37CD85"/>
+            </a:solidFill>
+          </a:ln>
+        </p:spPr>
+        <p:style>
+          <a:lnRef idx="1">
+            <a:schemeClr val="accent1"/>
+          </a:lnRef>
+          <a:fillRef idx="3">
+            <a:schemeClr val="accent1"/>
+          </a:fillRef>
+          <a:effectRef idx="2">
+            <a:schemeClr val="accent1"/>
+          </a:effectRef>
+          <a:fontRef idx="minor">
+            <a:schemeClr val="lt1"/>
+          </a:fontRef>
+        </p:style>
+        <p:txBody>
+          <a:bodyPr rtlCol="0" anchor="ctr"/>
+          <a:lstStyle/>
+          <a:p>
+            <a:pPr algn="ctr"/>
+          </a:p>
+        </p:txBody>
+      </p:sp>
+      <p:sp>
+        <p:nvSpPr>
+          <p:cNvPr id="14" name="TextBox 13"/>
+          <p:cNvSpPr txBox="1"/>
+          <p:nvPr/>
+        </p:nvSpPr>
+        <p:spPr>
+          <a:xfrm>
+            <a:off x="6437376" y="1298448"/>
+            <a:ext cx="1828800" cy="219456"/>
+          </a:xfrm>
+          <a:prstGeom prst="rect">
+            <a:avLst/>
+          </a:prstGeom>
+          <a:noFill/>
+        </p:spPr>
+        <p:txBody>
+          <a:bodyPr wrap="square" anchor="t" lIns="18288" rIns="18288" tIns="9144" bIns="9144">
+            <a:spAutoFit/>
+          </a:bodyPr>
+          <a:lstStyle/>
+          <a:p>
+            <a:pPr algn="l">
+              <a:defRPr sz="1300" b="1">
+                <a:solidFill>
+                  <a:srgbClr val="37CD85"/>
+                </a:solidFill>
+                <a:latin typeface="Malgun Gothic"/>
+              </a:defRPr>
+            </a:pPr>
+            <a:r>
+              <a:t>최종 POLARITY TB</a:t>
+            </a:r>
+          </a:p>
+        </p:txBody>
+      </p:sp>
+      <p:sp>
+        <p:nvSpPr>
+          <p:cNvPr id="15" name="TextBox 14"/>
+          <p:cNvSpPr txBox="1"/>
+          <p:nvPr/>
+        </p:nvSpPr>
+        <p:spPr>
+          <a:xfrm>
+            <a:off x="6437376" y="1664208"/>
+            <a:ext cx="4754880" cy="219456"/>
+          </a:xfrm>
+          <a:prstGeom prst="rect">
+            <a:avLst/>
+          </a:prstGeom>
+          <a:noFill/>
+        </p:spPr>
+        <p:txBody>
+          <a:bodyPr wrap="square" anchor="t" lIns="18288" rIns="18288" tIns="9144" bIns="9144">
+            <a:spAutoFit/>
+          </a:bodyPr>
+          <a:lstStyle/>
+          <a:p>
+            <a:pPr algn="l">
+              <a:defRPr sz="1000" b="1">
+                <a:solidFill>
+                  <a:srgbClr val="F6F9FC"/>
+                </a:solidFill>
+                <a:latin typeface="Malgun Gothic"/>
+              </a:defRPr>
+            </a:pPr>
+            <a:r>
+              <a:t>redred_cluster2_polarity_v1_native_observational_tb.sv</a:t>
+            </a:r>
+          </a:p>
+        </p:txBody>
+      </p:sp>
+      <p:sp>
+        <p:nvSpPr>
+          <p:cNvPr id="16" name="TextBox 15"/>
+          <p:cNvSpPr txBox="1"/>
+          <p:nvPr/>
+        </p:nvSpPr>
+        <p:spPr>
+          <a:xfrm>
+            <a:off x="8394192" y="1298448"/>
+            <a:ext cx="2798064" cy="219456"/>
+          </a:xfrm>
+          <a:prstGeom prst="rect">
+            <a:avLst/>
+          </a:prstGeom>
+          <a:noFill/>
+        </p:spPr>
+        <p:txBody>
+          <a:bodyPr wrap="square" anchor="t" lIns="18288" rIns="18288" tIns="9144" bIns="9144">
+            <a:spAutoFit/>
+          </a:bodyPr>
+          <a:lstStyle/>
+          <a:p>
+            <a:pPr algn="r">
+              <a:defRPr sz="1100" b="0">
+                <a:solidFill>
+                  <a:srgbClr val="ACC2D6"/>
+                </a:solidFill>
+                <a:latin typeface="Malgun Gothic"/>
+              </a:defRPr>
+            </a:pPr>
+            <a:r>
+              <a:t>8,503/8,503 · mismatch 0</a:t>
+            </a:r>
+          </a:p>
+        </p:txBody>
+      </p:sp>
+      <p:sp>
+        <p:nvSpPr>
+          <p:cNvPr id="17" name="Rounded Rectangle 16"/>
+          <p:cNvSpPr/>
+          <p:nvPr/>
+        </p:nvSpPr>
+        <p:spPr>
+          <a:xfrm>
+            <a:off x="658368" y="2743200"/>
+            <a:ext cx="1755648" cy="1444752"/>
+          </a:xfrm>
+          <a:prstGeom prst="roundRect">
+            <a:avLst/>
+          </a:prstGeom>
+          <a:solidFill>
+            <a:srgbClr val="12304C"/>
+          </a:solidFill>
+          <a:ln w="19050">
+            <a:solidFill>
+              <a:srgbClr val="4793FF"/>
+            </a:solidFill>
+          </a:ln>
+        </p:spPr>
+        <p:style>
+          <a:lnRef idx="1">
+            <a:schemeClr val="accent1"/>
+          </a:lnRef>
+          <a:fillRef idx="3">
+            <a:schemeClr val="accent1"/>
+          </a:fillRef>
+          <a:effectRef idx="2">
+            <a:schemeClr val="accent1"/>
+          </a:effectRef>
+          <a:fontRef idx="minor">
+            <a:schemeClr val="lt1"/>
+          </a:fontRef>
+        </p:style>
+        <p:txBody>
+          <a:bodyPr rtlCol="0" anchor="ctr"/>
+          <a:lstStyle/>
+          <a:p>
+            <a:pPr algn="ctr"/>
+          </a:p>
+        </p:txBody>
+      </p:sp>
+      <p:sp>
+        <p:nvSpPr>
+          <p:cNvPr id="18" name="TextBox 17"/>
+          <p:cNvSpPr txBox="1"/>
+          <p:nvPr/>
+        </p:nvSpPr>
+        <p:spPr>
+          <a:xfrm>
+            <a:off x="804672" y="2926080"/>
+            <a:ext cx="1463040" cy="219456"/>
           </a:xfrm>
           <a:prstGeom prst="rect">
             <a:avLst/>
@@ -14104,7 +13740,7 @@
           <a:lstStyle/>
           <a:p>
             <a:pPr algn="ctr">
-              <a:defRPr sz="4800" b="1">
+              <a:defRPr sz="1100" b="1">
                 <a:solidFill>
                   <a:srgbClr val="4793FF"/>
                 </a:solidFill>
@@ -14112,21 +13748,21 @@
               </a:defRPr>
             </a:pPr>
             <a:r>
-              <a:t>8,503</a:t>
-            </a:r>
-          </a:p>
-        </p:txBody>
-      </p:sp>
-      <p:sp>
-        <p:nvSpPr>
-          <p:cNvPr id="10" name="TextBox 9"/>
-          <p:cNvSpPr txBox="1"/>
-          <p:nvPr/>
-        </p:nvSpPr>
-        <p:spPr>
-          <a:xfrm>
-            <a:off x="1325880" y="1993392"/>
-            <a:ext cx="1938528" cy="256032"/>
+              <a:t>TRACE</a:t>
+            </a:r>
+          </a:p>
+        </p:txBody>
+      </p:sp>
+      <p:sp>
+        <p:nvSpPr>
+          <p:cNvPr id="19" name="TextBox 18"/>
+          <p:cNvSpPr txBox="1"/>
+          <p:nvPr/>
+        </p:nvSpPr>
+        <p:spPr>
+          <a:xfrm>
+            <a:off x="804672" y="3355848"/>
+            <a:ext cx="1463040" cy="512064"/>
           </a:xfrm>
           <a:prstGeom prst="rect">
             <a:avLst/>
@@ -14142,27 +13778,31 @@
             <a:pPr algn="ctr">
               <a:defRPr sz="1200" b="1">
                 <a:solidFill>
-                  <a:srgbClr val="ACC2D6"/>
-                </a:solidFill>
-                <a:latin typeface="Malgun Gothic"/>
-              </a:defRPr>
-            </a:pPr>
-            <a:r>
-              <a:t>GENERATED</a:t>
-            </a:r>
-          </a:p>
-        </p:txBody>
-      </p:sp>
-      <p:sp>
-        <p:nvSpPr>
-          <p:cNvPr id="11" name="TextBox 10"/>
-          <p:cNvSpPr txBox="1"/>
-          <p:nvPr/>
-        </p:nvSpPr>
-        <p:spPr>
-          <a:xfrm>
-            <a:off x="3931920" y="1444752"/>
-            <a:ext cx="749808" cy="411480"/>
+                  <a:srgbClr val="F6F9FC"/>
+                </a:solidFill>
+                <a:latin typeface="Malgun Gothic"/>
+              </a:defRPr>
+            </a:pPr>
+            <a:r>
+              <a:t>arrival[15:0]</a:t>
+            </a:r>
+            <a:br/>
+            <a:r>
+              <a:t>polarity[15:0]</a:t>
+            </a:r>
+          </a:p>
+        </p:txBody>
+      </p:sp>
+      <p:sp>
+        <p:nvSpPr>
+          <p:cNvPr id="20" name="TextBox 19"/>
+          <p:cNvSpPr txBox="1"/>
+          <p:nvPr/>
+        </p:nvSpPr>
+        <p:spPr>
+          <a:xfrm>
+            <a:off x="2414015" y="3209544"/>
+            <a:ext cx="475488" cy="411480"/>
           </a:xfrm>
           <a:prstGeom prst="rect">
             <a:avLst/>
@@ -14176,7 +13816,7 @@
           <a:lstStyle/>
           <a:p>
             <a:pPr algn="ctr">
-              <a:defRPr sz="4200" b="1">
+              <a:defRPr sz="2200" b="1">
                 <a:solidFill>
                   <a:srgbClr val="2AD3CD"/>
                 </a:solidFill>
@@ -14191,194 +13831,14 @@
       </p:sp>
       <p:sp>
         <p:nvSpPr>
-          <p:cNvPr id="12" name="TextBox 11"/>
-          <p:cNvSpPr txBox="1"/>
-          <p:nvPr/>
-        </p:nvSpPr>
-        <p:spPr>
-          <a:xfrm>
-            <a:off x="4864608" y="1280160"/>
-            <a:ext cx="2926080" cy="731520"/>
-          </a:xfrm>
-          <a:prstGeom prst="rect">
-            <a:avLst/>
-          </a:prstGeom>
-          <a:noFill/>
-        </p:spPr>
-        <p:txBody>
-          <a:bodyPr wrap="square" anchor="t" lIns="18288" rIns="18288" tIns="9144" bIns="9144">
-            <a:spAutoFit/>
-          </a:bodyPr>
-          <a:lstStyle/>
-          <a:p>
-            <a:pPr algn="ctr">
-              <a:defRPr sz="4800" b="1">
-                <a:solidFill>
-                  <a:srgbClr val="37CD85"/>
-                </a:solidFill>
-                <a:latin typeface="Malgun Gothic"/>
-              </a:defRPr>
-            </a:pPr>
-            <a:r>
-              <a:t>8,503</a:t>
-            </a:r>
-          </a:p>
-        </p:txBody>
-      </p:sp>
-      <p:sp>
-        <p:nvSpPr>
-          <p:cNvPr id="13" name="TextBox 12"/>
-          <p:cNvSpPr txBox="1"/>
-          <p:nvPr/>
-        </p:nvSpPr>
-        <p:spPr>
-          <a:xfrm>
-            <a:off x="5349240" y="1993392"/>
-            <a:ext cx="1938528" cy="256032"/>
-          </a:xfrm>
-          <a:prstGeom prst="rect">
-            <a:avLst/>
-          </a:prstGeom>
-          <a:noFill/>
-        </p:spPr>
-        <p:txBody>
-          <a:bodyPr wrap="square" anchor="t" lIns="18288" rIns="18288" tIns="9144" bIns="9144">
-            <a:spAutoFit/>
-          </a:bodyPr>
-          <a:lstStyle/>
-          <a:p>
-            <a:pPr algn="ctr">
-              <a:defRPr sz="1200" b="1">
-                <a:solidFill>
-                  <a:srgbClr val="ACC2D6"/>
-                </a:solidFill>
-                <a:latin typeface="Malgun Gothic"/>
-              </a:defRPr>
-            </a:pPr>
-            <a:r>
-              <a:t>DELIVERED</a:t>
-            </a:r>
-          </a:p>
-        </p:txBody>
-      </p:sp>
-      <p:sp>
-        <p:nvSpPr>
-          <p:cNvPr id="14" name="TextBox 13"/>
-          <p:cNvSpPr txBox="1"/>
-          <p:nvPr/>
-        </p:nvSpPr>
-        <p:spPr>
-          <a:xfrm>
-            <a:off x="7909560" y="1444752"/>
-            <a:ext cx="566928" cy="548640"/>
-          </a:xfrm>
-          <a:prstGeom prst="rect">
-            <a:avLst/>
-          </a:prstGeom>
-          <a:noFill/>
-        </p:spPr>
-        <p:txBody>
-          <a:bodyPr wrap="square" anchor="t" lIns="18288" rIns="18288" tIns="9144" bIns="9144">
-            <a:spAutoFit/>
-          </a:bodyPr>
-          <a:lstStyle/>
-          <a:p>
-            <a:pPr algn="ctr">
-              <a:defRPr sz="3800" b="1">
-                <a:solidFill>
-                  <a:srgbClr val="ACC2D6"/>
-                </a:solidFill>
-                <a:latin typeface="Malgun Gothic"/>
-              </a:defRPr>
-            </a:pPr>
-            <a:r>
-              <a:t>+</a:t>
-            </a:r>
-          </a:p>
-        </p:txBody>
-      </p:sp>
-      <p:sp>
-        <p:nvSpPr>
-          <p:cNvPr id="15" name="TextBox 14"/>
-          <p:cNvSpPr txBox="1"/>
-          <p:nvPr/>
-        </p:nvSpPr>
-        <p:spPr>
-          <a:xfrm>
-            <a:off x="8686800" y="1280160"/>
-            <a:ext cx="2377440" cy="731520"/>
-          </a:xfrm>
-          <a:prstGeom prst="rect">
-            <a:avLst/>
-          </a:prstGeom>
-          <a:noFill/>
-        </p:spPr>
-        <p:txBody>
-          <a:bodyPr wrap="square" anchor="t" lIns="18288" rIns="18288" tIns="9144" bIns="9144">
-            <a:spAutoFit/>
-          </a:bodyPr>
-          <a:lstStyle/>
-          <a:p>
-            <a:pPr algn="ctr">
-              <a:defRPr sz="4800" b="1">
-                <a:solidFill>
-                  <a:srgbClr val="37CD85"/>
-                </a:solidFill>
-                <a:latin typeface="Malgun Gothic"/>
-              </a:defRPr>
-            </a:pPr>
-            <a:r>
-              <a:t>0</a:t>
-            </a:r>
-          </a:p>
-        </p:txBody>
-      </p:sp>
-      <p:sp>
-        <p:nvSpPr>
-          <p:cNvPr id="16" name="TextBox 15"/>
-          <p:cNvSpPr txBox="1"/>
-          <p:nvPr/>
-        </p:nvSpPr>
-        <p:spPr>
-          <a:xfrm>
-            <a:off x="8915400" y="1993392"/>
-            <a:ext cx="1920240" cy="256032"/>
-          </a:xfrm>
-          <a:prstGeom prst="rect">
-            <a:avLst/>
-          </a:prstGeom>
-          <a:noFill/>
-        </p:spPr>
-        <p:txBody>
-          <a:bodyPr wrap="square" anchor="t" lIns="18288" rIns="18288" tIns="9144" bIns="9144">
-            <a:spAutoFit/>
-          </a:bodyPr>
-          <a:lstStyle/>
-          <a:p>
-            <a:pPr algn="ctr">
-              <a:defRPr sz="1200" b="1">
-                <a:solidFill>
-                  <a:srgbClr val="ACC2D6"/>
-                </a:solidFill>
-                <a:latin typeface="Malgun Gothic"/>
-              </a:defRPr>
-            </a:pPr>
-            <a:r>
-              <a:t>OVERRUN</a:t>
-            </a:r>
-          </a:p>
-        </p:txBody>
-      </p:sp>
-      <p:sp>
-        <p:nvSpPr>
-          <p:cNvPr id="17" name="Rounded Rectangle 16"/>
+          <p:cNvPr id="21" name="Rounded Rectangle 20"/>
           <p:cNvSpPr/>
           <p:nvPr/>
         </p:nvSpPr>
         <p:spPr>
           <a:xfrm>
-            <a:off x="804672" y="3063240"/>
-            <a:ext cx="3182112" cy="1280160"/>
+            <a:off x="2889504" y="2743200"/>
+            <a:ext cx="1755648" cy="1444752"/>
           </a:xfrm>
           <a:prstGeom prst="roundRect">
             <a:avLst/>
@@ -14416,14 +13876,14 @@
       </p:sp>
       <p:sp>
         <p:nvSpPr>
-          <p:cNvPr id="18" name="TextBox 17"/>
-          <p:cNvSpPr txBox="1"/>
-          <p:nvPr/>
-        </p:nvSpPr>
-        <p:spPr>
-          <a:xfrm>
-            <a:off x="1033271" y="3337560"/>
-            <a:ext cx="548640" cy="411480"/>
+          <p:cNvPr id="22" name="TextBox 21"/>
+          <p:cNvSpPr txBox="1"/>
+          <p:nvPr/>
+        </p:nvSpPr>
+        <p:spPr>
+          <a:xfrm>
+            <a:off x="3035808" y="2926080"/>
+            <a:ext cx="1463040" cy="219456"/>
           </a:xfrm>
           <a:prstGeom prst="rect">
             <a:avLst/>
@@ -14437,7 +13897,7 @@
           <a:lstStyle/>
           <a:p>
             <a:pPr algn="ctr">
-              <a:defRPr sz="2600" b="1">
+              <a:defRPr sz="1100" b="1">
                 <a:solidFill>
                   <a:srgbClr val="2AD3CD"/>
                 </a:solidFill>
@@ -14445,35 +13905,35 @@
               </a:defRPr>
             </a:pPr>
             <a:r>
-              <a:t>✓</a:t>
-            </a:r>
-          </a:p>
-        </p:txBody>
-      </p:sp>
-      <p:sp>
-        <p:nvSpPr>
-          <p:cNvPr id="19" name="TextBox 18"/>
-          <p:cNvSpPr txBox="1"/>
-          <p:nvPr/>
-        </p:nvSpPr>
-        <p:spPr>
-          <a:xfrm>
-            <a:off x="1664207" y="3264408"/>
-            <a:ext cx="2011680" cy="274320"/>
-          </a:xfrm>
-          <a:prstGeom prst="rect">
-            <a:avLst/>
-          </a:prstGeom>
-          <a:noFill/>
-        </p:spPr>
-        <p:txBody>
-          <a:bodyPr wrap="square" anchor="t" lIns="18288" rIns="18288" tIns="9144" bIns="9144">
-            <a:spAutoFit/>
-          </a:bodyPr>
-          <a:lstStyle/>
-          <a:p>
-            <a:pPr algn="l">
-              <a:defRPr sz="1700" b="1">
+              <a:t>ENQUEUE</a:t>
+            </a:r>
+          </a:p>
+        </p:txBody>
+      </p:sp>
+      <p:sp>
+        <p:nvSpPr>
+          <p:cNvPr id="23" name="TextBox 22"/>
+          <p:cNvSpPr txBox="1"/>
+          <p:nvPr/>
+        </p:nvSpPr>
+        <p:spPr>
+          <a:xfrm>
+            <a:off x="3035808" y="3355848"/>
+            <a:ext cx="1463040" cy="512064"/>
+          </a:xfrm>
+          <a:prstGeom prst="rect">
+            <a:avLst/>
+          </a:prstGeom>
+          <a:noFill/>
+        </p:spPr>
+        <p:txBody>
+          <a:bodyPr wrap="square" anchor="t" lIns="18288" rIns="18288" tIns="9144" bIns="9144">
+            <a:spAutoFit/>
+          </a:bodyPr>
+          <a:lstStyle/>
+          <a:p>
+            <a:pPr algn="ctr">
+              <a:defRPr sz="1200" b="1">
                 <a:solidFill>
                   <a:srgbClr val="F6F9FC"/>
                 </a:solidFill>
@@ -14481,57 +13941,218 @@
               </a:defRPr>
             </a:pPr>
             <a:r>
-              <a:t>독립 ledger</a:t>
-            </a:r>
-          </a:p>
-        </p:txBody>
-      </p:sp>
-      <p:sp>
-        <p:nvSpPr>
-          <p:cNvPr id="20" name="TextBox 19"/>
-          <p:cNvSpPr txBox="1"/>
-          <p:nvPr/>
-        </p:nvSpPr>
-        <p:spPr>
-          <a:xfrm>
-            <a:off x="1664207" y="3730752"/>
-            <a:ext cx="2011680" cy="219456"/>
-          </a:xfrm>
-          <a:prstGeom prst="rect">
-            <a:avLst/>
-          </a:prstGeom>
-          <a:noFill/>
-        </p:spPr>
-        <p:txBody>
-          <a:bodyPr wrap="square" anchor="t" lIns="18288" rIns="18288" tIns="9144" bIns="9144">
-            <a:spAutoFit/>
-          </a:bodyPr>
-          <a:lstStyle/>
-          <a:p>
-            <a:pPr algn="l">
-              <a:defRPr sz="1100" b="0">
-                <a:solidFill>
-                  <a:srgbClr val="ACC2D6"/>
-                </a:solidFill>
-                <a:latin typeface="Malgun Gothic"/>
-              </a:defRPr>
-            </a:pPr>
-            <a:r>
-              <a:t>order violations 0</a:t>
-            </a:r>
-          </a:p>
-        </p:txBody>
-      </p:sp>
-      <p:sp>
-        <p:nvSpPr>
-          <p:cNvPr id="21" name="Rounded Rectangle 20"/>
+              <a:t>source FIFO</a:t>
+            </a:r>
+            <a:br/>
+            <a:r>
+              <a:t>depth 0→1→2</a:t>
+            </a:r>
+          </a:p>
+        </p:txBody>
+      </p:sp>
+      <p:sp>
+        <p:nvSpPr>
+          <p:cNvPr id="24" name="TextBox 23"/>
+          <p:cNvSpPr txBox="1"/>
+          <p:nvPr/>
+        </p:nvSpPr>
+        <p:spPr>
+          <a:xfrm>
+            <a:off x="4645152" y="3209544"/>
+            <a:ext cx="475488" cy="411480"/>
+          </a:xfrm>
+          <a:prstGeom prst="rect">
+            <a:avLst/>
+          </a:prstGeom>
+          <a:noFill/>
+        </p:spPr>
+        <p:txBody>
+          <a:bodyPr wrap="square" anchor="t" lIns="18288" rIns="18288" tIns="9144" bIns="9144">
+            <a:spAutoFit/>
+          </a:bodyPr>
+          <a:lstStyle/>
+          <a:p>
+            <a:pPr algn="ctr">
+              <a:defRPr sz="2200" b="1">
+                <a:solidFill>
+                  <a:srgbClr val="2AD3CD"/>
+                </a:solidFill>
+                <a:latin typeface="Malgun Gothic"/>
+              </a:defRPr>
+            </a:pPr>
+            <a:r>
+              <a:t>→</a:t>
+            </a:r>
+          </a:p>
+        </p:txBody>
+      </p:sp>
+      <p:sp>
+        <p:nvSpPr>
+          <p:cNvPr id="25" name="Rounded Rectangle 24"/>
           <p:cNvSpPr/>
           <p:nvPr/>
         </p:nvSpPr>
         <p:spPr>
           <a:xfrm>
-            <a:off x="4370832" y="3063240"/>
-            <a:ext cx="3182112" cy="1280160"/>
+            <a:off x="5120640" y="2743200"/>
+            <a:ext cx="1755648" cy="1444752"/>
+          </a:xfrm>
+          <a:prstGeom prst="roundRect">
+            <a:avLst/>
+          </a:prstGeom>
+          <a:solidFill>
+            <a:srgbClr val="12304C"/>
+          </a:solidFill>
+          <a:ln w="19050">
+            <a:solidFill>
+              <a:srgbClr val="B27EFF"/>
+            </a:solidFill>
+          </a:ln>
+        </p:spPr>
+        <p:style>
+          <a:lnRef idx="1">
+            <a:schemeClr val="accent1"/>
+          </a:lnRef>
+          <a:fillRef idx="3">
+            <a:schemeClr val="accent1"/>
+          </a:fillRef>
+          <a:effectRef idx="2">
+            <a:schemeClr val="accent1"/>
+          </a:effectRef>
+          <a:fontRef idx="minor">
+            <a:schemeClr val="lt1"/>
+          </a:fontRef>
+        </p:style>
+        <p:txBody>
+          <a:bodyPr rtlCol="0" anchor="ctr"/>
+          <a:lstStyle/>
+          <a:p>
+            <a:pPr algn="ctr"/>
+          </a:p>
+        </p:txBody>
+      </p:sp>
+      <p:sp>
+        <p:nvSpPr>
+          <p:cNvPr id="26" name="TextBox 25"/>
+          <p:cNvSpPr txBox="1"/>
+          <p:nvPr/>
+        </p:nvSpPr>
+        <p:spPr>
+          <a:xfrm>
+            <a:off x="5266944" y="2926080"/>
+            <a:ext cx="1463040" cy="219456"/>
+          </a:xfrm>
+          <a:prstGeom prst="rect">
+            <a:avLst/>
+          </a:prstGeom>
+          <a:noFill/>
+        </p:spPr>
+        <p:txBody>
+          <a:bodyPr wrap="square" anchor="t" lIns="18288" rIns="18288" tIns="9144" bIns="9144">
+            <a:spAutoFit/>
+          </a:bodyPr>
+          <a:lstStyle/>
+          <a:p>
+            <a:pPr algn="ctr">
+              <a:defRPr sz="1100" b="1">
+                <a:solidFill>
+                  <a:srgbClr val="B27EFF"/>
+                </a:solidFill>
+                <a:latin typeface="Malgun Gothic"/>
+              </a:defRPr>
+            </a:pPr>
+            <a:r>
+              <a:t>ARBITRATE</a:t>
+            </a:r>
+          </a:p>
+        </p:txBody>
+      </p:sp>
+      <p:sp>
+        <p:nvSpPr>
+          <p:cNvPr id="27" name="TextBox 26"/>
+          <p:cNvSpPr txBox="1"/>
+          <p:nvPr/>
+        </p:nvSpPr>
+        <p:spPr>
+          <a:xfrm>
+            <a:off x="5266944" y="3355848"/>
+            <a:ext cx="1463040" cy="512064"/>
+          </a:xfrm>
+          <a:prstGeom prst="rect">
+            <a:avLst/>
+          </a:prstGeom>
+          <a:noFill/>
+        </p:spPr>
+        <p:txBody>
+          <a:bodyPr wrap="square" anchor="t" lIns="18288" rIns="18288" tIns="9144" bIns="9144">
+            <a:spAutoFit/>
+          </a:bodyPr>
+          <a:lstStyle/>
+          <a:p>
+            <a:pPr algn="ctr">
+              <a:defRPr sz="1200" b="1">
+                <a:solidFill>
+                  <a:srgbClr val="F6F9FC"/>
+                </a:solidFill>
+                <a:latin typeface="Malgun Gothic"/>
+              </a:defRPr>
+            </a:pPr>
+            <a:r>
+              <a:t>center/periph</a:t>
+            </a:r>
+            <a:br/>
+            <a:r>
+              <a:t>+ conditional steal</a:t>
+            </a:r>
+          </a:p>
+        </p:txBody>
+      </p:sp>
+      <p:sp>
+        <p:nvSpPr>
+          <p:cNvPr id="28" name="TextBox 27"/>
+          <p:cNvSpPr txBox="1"/>
+          <p:nvPr/>
+        </p:nvSpPr>
+        <p:spPr>
+          <a:xfrm>
+            <a:off x="6876288" y="3209544"/>
+            <a:ext cx="475488" cy="411480"/>
+          </a:xfrm>
+          <a:prstGeom prst="rect">
+            <a:avLst/>
+          </a:prstGeom>
+          <a:noFill/>
+        </p:spPr>
+        <p:txBody>
+          <a:bodyPr wrap="square" anchor="t" lIns="18288" rIns="18288" tIns="9144" bIns="9144">
+            <a:spAutoFit/>
+          </a:bodyPr>
+          <a:lstStyle/>
+          <a:p>
+            <a:pPr algn="ctr">
+              <a:defRPr sz="2200" b="1">
+                <a:solidFill>
+                  <a:srgbClr val="2AD3CD"/>
+                </a:solidFill>
+                <a:latin typeface="Malgun Gothic"/>
+              </a:defRPr>
+            </a:pPr>
+            <a:r>
+              <a:t>→</a:t>
+            </a:r>
+          </a:p>
+        </p:txBody>
+      </p:sp>
+      <p:sp>
+        <p:nvSpPr>
+          <p:cNvPr id="29" name="Rounded Rectangle 28"/>
+          <p:cNvSpPr/>
+          <p:nvPr/>
+        </p:nvSpPr>
+        <p:spPr>
+          <a:xfrm>
+            <a:off x="7351775" y="2743200"/>
+            <a:ext cx="1755648" cy="1444752"/>
           </a:xfrm>
           <a:prstGeom prst="roundRect">
             <a:avLst/>
@@ -14569,14 +14190,14 @@
       </p:sp>
       <p:sp>
         <p:nvSpPr>
-          <p:cNvPr id="22" name="TextBox 21"/>
-          <p:cNvSpPr txBox="1"/>
-          <p:nvPr/>
-        </p:nvSpPr>
-        <p:spPr>
-          <a:xfrm>
-            <a:off x="4599432" y="3337560"/>
-            <a:ext cx="548640" cy="411480"/>
+          <p:cNvPr id="30" name="TextBox 29"/>
+          <p:cNvSpPr txBox="1"/>
+          <p:nvPr/>
+        </p:nvSpPr>
+        <p:spPr>
+          <a:xfrm>
+            <a:off x="7498079" y="2926080"/>
+            <a:ext cx="1463040" cy="219456"/>
           </a:xfrm>
           <a:prstGeom prst="rect">
             <a:avLst/>
@@ -14590,7 +14211,7 @@
           <a:lstStyle/>
           <a:p>
             <a:pPr algn="ctr">
-              <a:defRPr sz="2600" b="1">
+              <a:defRPr sz="1100" b="1">
                 <a:solidFill>
                   <a:srgbClr val="37CD85"/>
                 </a:solidFill>
@@ -14598,35 +14219,35 @@
               </a:defRPr>
             </a:pPr>
             <a:r>
-              <a:t>✓</a:t>
-            </a:r>
-          </a:p>
-        </p:txBody>
-      </p:sp>
-      <p:sp>
-        <p:nvSpPr>
-          <p:cNvPr id="23" name="TextBox 22"/>
-          <p:cNvSpPr txBox="1"/>
-          <p:nvPr/>
-        </p:nvSpPr>
-        <p:spPr>
-          <a:xfrm>
-            <a:off x="5230368" y="3264408"/>
-            <a:ext cx="2011680" cy="274320"/>
-          </a:xfrm>
-          <a:prstGeom prst="rect">
-            <a:avLst/>
-          </a:prstGeom>
-          <a:noFill/>
-        </p:spPr>
-        <p:txBody>
-          <a:bodyPr wrap="square" anchor="t" lIns="18288" rIns="18288" tIns="9144" bIns="9144">
-            <a:spAutoFit/>
-          </a:bodyPr>
-          <a:lstStyle/>
-          <a:p>
-            <a:pPr algn="l">
-              <a:defRPr sz="1700" b="1">
+              <a:t>RETIRE</a:t>
+            </a:r>
+          </a:p>
+        </p:txBody>
+      </p:sp>
+      <p:sp>
+        <p:nvSpPr>
+          <p:cNvPr id="31" name="TextBox 30"/>
+          <p:cNvSpPr txBox="1"/>
+          <p:nvPr/>
+        </p:nvSpPr>
+        <p:spPr>
+          <a:xfrm>
+            <a:off x="7498079" y="3355848"/>
+            <a:ext cx="1463040" cy="512064"/>
+          </a:xfrm>
+          <a:prstGeom prst="rect">
+            <a:avLst/>
+          </a:prstGeom>
+          <a:noFill/>
+        </p:spPr>
+        <p:txBody>
+          <a:bodyPr wrap="square" anchor="t" lIns="18288" rIns="18288" tIns="9144" bIns="9144">
+            <a:spAutoFit/>
+          </a:bodyPr>
+          <a:lstStyle/>
+          <a:p>
+            <a:pPr algn="ctr">
+              <a:defRPr sz="1200" b="1">
                 <a:solidFill>
                   <a:srgbClr val="F6F9FC"/>
                 </a:solidFill>
@@ -14634,57 +14255,61 @@
               </a:defRPr>
             </a:pPr>
             <a:r>
-              <a:t>drain 후 empty</a:t>
-            </a:r>
-          </a:p>
-        </p:txBody>
-      </p:sp>
-      <p:sp>
-        <p:nvSpPr>
-          <p:cNvPr id="24" name="TextBox 23"/>
-          <p:cNvSpPr txBox="1"/>
-          <p:nvPr/>
-        </p:nvSpPr>
-        <p:spPr>
-          <a:xfrm>
-            <a:off x="5230368" y="3730752"/>
-            <a:ext cx="2011680" cy="219456"/>
-          </a:xfrm>
-          <a:prstGeom prst="rect">
-            <a:avLst/>
-          </a:prstGeom>
-          <a:noFill/>
-        </p:spPr>
-        <p:txBody>
-          <a:bodyPr wrap="square" anchor="t" lIns="18288" rIns="18288" tIns="9144" bIns="9144">
-            <a:spAutoFit/>
-          </a:bodyPr>
-          <a:lstStyle/>
-          <a:p>
-            <a:pPr algn="l">
-              <a:defRPr sz="1100" b="0">
-                <a:solidFill>
-                  <a:srgbClr val="ACC2D6"/>
-                </a:solidFill>
-                <a:latin typeface="Malgun Gothic"/>
-              </a:defRPr>
-            </a:pPr>
-            <a:r>
-              <a:t>남은 event 0</a:t>
-            </a:r>
-          </a:p>
-        </p:txBody>
-      </p:sp>
-      <p:sp>
-        <p:nvSpPr>
-          <p:cNvPr id="25" name="Rounded Rectangle 24"/>
+              <a:t>row + col_mask</a:t>
+            </a:r>
+            <a:br/>
+            <a:r>
+              <a:t>+ pol_mask</a:t>
+            </a:r>
+          </a:p>
+        </p:txBody>
+      </p:sp>
+      <p:sp>
+        <p:nvSpPr>
+          <p:cNvPr id="32" name="TextBox 31"/>
+          <p:cNvSpPr txBox="1"/>
+          <p:nvPr/>
+        </p:nvSpPr>
+        <p:spPr>
+          <a:xfrm>
+            <a:off x="9107424" y="3209544"/>
+            <a:ext cx="475488" cy="411480"/>
+          </a:xfrm>
+          <a:prstGeom prst="rect">
+            <a:avLst/>
+          </a:prstGeom>
+          <a:noFill/>
+        </p:spPr>
+        <p:txBody>
+          <a:bodyPr wrap="square" anchor="t" lIns="18288" rIns="18288" tIns="9144" bIns="9144">
+            <a:spAutoFit/>
+          </a:bodyPr>
+          <a:lstStyle/>
+          <a:p>
+            <a:pPr algn="ctr">
+              <a:defRPr sz="2200" b="1">
+                <a:solidFill>
+                  <a:srgbClr val="2AD3CD"/>
+                </a:solidFill>
+                <a:latin typeface="Malgun Gothic"/>
+              </a:defRPr>
+            </a:pPr>
+            <a:r>
+              <a:t>→</a:t>
+            </a:r>
+          </a:p>
+        </p:txBody>
+      </p:sp>
+      <p:sp>
+        <p:nvSpPr>
+          <p:cNvPr id="33" name="Rounded Rectangle 32"/>
           <p:cNvSpPr/>
           <p:nvPr/>
         </p:nvSpPr>
         <p:spPr>
           <a:xfrm>
-            <a:off x="7936992" y="3063240"/>
-            <a:ext cx="3182112" cy="1280160"/>
+            <a:off x="9582912" y="2743200"/>
+            <a:ext cx="1755648" cy="1444752"/>
           </a:xfrm>
           <a:prstGeom prst="roundRect">
             <a:avLst/>
@@ -14694,7 +14319,7 @@
           </a:solidFill>
           <a:ln w="19050">
             <a:solidFill>
-              <a:srgbClr val="B27EFF"/>
+              <a:srgbClr val="FFB746"/>
             </a:solidFill>
           </a:ln>
         </p:spPr>
@@ -14722,14 +14347,14 @@
       </p:sp>
       <p:sp>
         <p:nvSpPr>
-          <p:cNvPr id="26" name="TextBox 25"/>
-          <p:cNvSpPr txBox="1"/>
-          <p:nvPr/>
-        </p:nvSpPr>
-        <p:spPr>
-          <a:xfrm>
-            <a:off x="8165592" y="3337560"/>
-            <a:ext cx="548640" cy="411480"/>
+          <p:cNvPr id="34" name="TextBox 33"/>
+          <p:cNvSpPr txBox="1"/>
+          <p:nvPr/>
+        </p:nvSpPr>
+        <p:spPr>
+          <a:xfrm>
+            <a:off x="9729216" y="2926080"/>
+            <a:ext cx="1463040" cy="219456"/>
           </a:xfrm>
           <a:prstGeom prst="rect">
             <a:avLst/>
@@ -14743,43 +14368,43 @@
           <a:lstStyle/>
           <a:p>
             <a:pPr algn="ctr">
-              <a:defRPr sz="2600" b="1">
-                <a:solidFill>
-                  <a:srgbClr val="B27EFF"/>
-                </a:solidFill>
-                <a:latin typeface="Malgun Gothic"/>
-              </a:defRPr>
-            </a:pPr>
-            <a:r>
-              <a:t>✓</a:t>
-            </a:r>
-          </a:p>
-        </p:txBody>
-      </p:sp>
-      <p:sp>
-        <p:nvSpPr>
-          <p:cNvPr id="27" name="TextBox 26"/>
-          <p:cNvSpPr txBox="1"/>
-          <p:nvPr/>
-        </p:nvSpPr>
-        <p:spPr>
-          <a:xfrm>
-            <a:off x="8796528" y="3264408"/>
-            <a:ext cx="2011680" cy="274320"/>
-          </a:xfrm>
-          <a:prstGeom prst="rect">
-            <a:avLst/>
-          </a:prstGeom>
-          <a:noFill/>
-        </p:spPr>
-        <p:txBody>
-          <a:bodyPr wrap="square" anchor="t" lIns="18288" rIns="18288" tIns="9144" bIns="9144">
-            <a:spAutoFit/>
-          </a:bodyPr>
-          <a:lstStyle/>
-          <a:p>
-            <a:pPr algn="l">
-              <a:defRPr sz="1700" b="1">
+              <a:defRPr sz="1100" b="1">
+                <a:solidFill>
+                  <a:srgbClr val="FFB746"/>
+                </a:solidFill>
+                <a:latin typeface="Malgun Gothic"/>
+              </a:defRPr>
+            </a:pPr>
+            <a:r>
+              <a:t>LEDGER</a:t>
+            </a:r>
+          </a:p>
+        </p:txBody>
+      </p:sp>
+      <p:sp>
+        <p:nvSpPr>
+          <p:cNvPr id="35" name="TextBox 34"/>
+          <p:cNvSpPr txBox="1"/>
+          <p:nvPr/>
+        </p:nvSpPr>
+        <p:spPr>
+          <a:xfrm>
+            <a:off x="9729216" y="3355848"/>
+            <a:ext cx="1463040" cy="512064"/>
+          </a:xfrm>
+          <a:prstGeom prst="rect">
+            <a:avLst/>
+          </a:prstGeom>
+          <a:noFill/>
+        </p:spPr>
+        <p:txBody>
+          <a:bodyPr wrap="square" anchor="t" lIns="18288" rIns="18288" tIns="9144" bIns="9144">
+            <a:spAutoFit/>
+          </a:bodyPr>
+          <a:lstStyle/>
+          <a:p>
+            <a:pPr algn="ctr">
+              <a:defRPr sz="1200" b="1">
                 <a:solidFill>
                   <a:srgbClr val="F6F9FC"/>
                 </a:solidFill>
@@ -14787,57 +14412,25 @@
               </a:defRPr>
             </a:pPr>
             <a:r>
-              <a:t>polarity 보존</a:t>
-            </a:r>
-          </a:p>
-        </p:txBody>
-      </p:sp>
-      <p:sp>
-        <p:nvSpPr>
-          <p:cNvPr id="28" name="TextBox 27"/>
-          <p:cNvSpPr txBox="1"/>
-          <p:nvPr/>
-        </p:nvSpPr>
-        <p:spPr>
-          <a:xfrm>
-            <a:off x="8796528" y="3730752"/>
-            <a:ext cx="2011680" cy="219456"/>
-          </a:xfrm>
-          <a:prstGeom prst="rect">
-            <a:avLst/>
-          </a:prstGeom>
-          <a:noFill/>
-        </p:spPr>
-        <p:txBody>
-          <a:bodyPr wrap="square" anchor="t" lIns="18288" rIns="18288" tIns="9144" bIns="9144">
-            <a:spAutoFit/>
-          </a:bodyPr>
-          <a:lstStyle/>
-          <a:p>
-            <a:pPr algn="l">
-              <a:defRPr sz="1100" b="0">
-                <a:solidFill>
-                  <a:srgbClr val="ACC2D6"/>
-                </a:solidFill>
-                <a:latin typeface="Malgun Gothic"/>
-              </a:defRPr>
-            </a:pPr>
-            <a:r>
-              <a:t>mismatch 0</a:t>
-            </a:r>
-          </a:p>
-        </p:txBody>
-      </p:sp>
-      <p:sp>
-        <p:nvSpPr>
-          <p:cNvPr id="29" name="Rounded Rectangle 28"/>
+              <a:t>cycle별 원시값</a:t>
+            </a:r>
+            <a:br/>
+            <a:r>
+              <a:t>독립 재계산</a:t>
+            </a:r>
+          </a:p>
+        </p:txBody>
+      </p:sp>
+      <p:sp>
+        <p:nvSpPr>
+          <p:cNvPr id="36" name="Rounded Rectangle 35"/>
           <p:cNvSpPr/>
           <p:nvPr/>
         </p:nvSpPr>
         <p:spPr>
           <a:xfrm>
-            <a:off x="713232" y="5669280"/>
-            <a:ext cx="10771632" cy="566928"/>
+            <a:off x="1188720" y="4590288"/>
+            <a:ext cx="9784080" cy="658368"/>
           </a:xfrm>
           <a:prstGeom prst="roundRect">
             <a:avLst/>
@@ -14873,7 +14466,86 @@
       </p:sp>
       <p:sp>
         <p:nvSpPr>
-          <p:cNvPr id="30" name="TextBox 29"/>
+          <p:cNvPr id="37" name="TextBox 36"/>
+          <p:cNvSpPr txBox="1"/>
+          <p:nvPr/>
+        </p:nvSpPr>
+        <p:spPr>
+          <a:xfrm>
+            <a:off x="1408176" y="4782312"/>
+            <a:ext cx="9345168" cy="246888"/>
+          </a:xfrm>
+          <a:prstGeom prst="rect">
+            <a:avLst/>
+          </a:prstGeom>
+          <a:noFill/>
+        </p:spPr>
+        <p:txBody>
+          <a:bodyPr wrap="square" anchor="t" lIns="18288" rIns="18288" tIns="9144" bIns="9144">
+            <a:spAutoFit/>
+          </a:bodyPr>
+          <a:lstStyle/>
+          <a:p>
+            <a:pPr algn="ctr">
+              <a:defRPr sz="1200" b="1">
+                <a:solidFill>
+                  <a:srgbClr val="F6F9FC"/>
+                </a:solidFill>
+                <a:latin typeface="Malgun Gothic"/>
+              </a:defRPr>
+            </a:pPr>
+            <a:r>
+              <a:t>실제 CYCLE 4162  |  lane0: row2 col=0x6 pol=0x0  ·  lane1: row0 col=0x1 pol=0x1  →  4 events 동시 retire</a:t>
+            </a:r>
+          </a:p>
+        </p:txBody>
+      </p:sp>
+      <p:sp>
+        <p:nvSpPr>
+          <p:cNvPr id="38" name="Rounded Rectangle 37"/>
+          <p:cNvSpPr/>
+          <p:nvPr/>
+        </p:nvSpPr>
+        <p:spPr>
+          <a:xfrm>
+            <a:off x="713232" y="5669280"/>
+            <a:ext cx="10771632" cy="566928"/>
+          </a:xfrm>
+          <a:prstGeom prst="roundRect">
+            <a:avLst/>
+          </a:prstGeom>
+          <a:solidFill>
+            <a:srgbClr val="12304C"/>
+          </a:solidFill>
+          <a:ln>
+            <a:noFill/>
+          </a:ln>
+        </p:spPr>
+        <p:style>
+          <a:lnRef idx="1">
+            <a:schemeClr val="accent1"/>
+          </a:lnRef>
+          <a:fillRef idx="3">
+            <a:schemeClr val="accent1"/>
+          </a:fillRef>
+          <a:effectRef idx="2">
+            <a:schemeClr val="accent1"/>
+          </a:effectRef>
+          <a:fontRef idx="minor">
+            <a:schemeClr val="lt1"/>
+          </a:fontRef>
+        </p:style>
+        <p:txBody>
+          <a:bodyPr rtlCol="0" anchor="ctr"/>
+          <a:lstStyle/>
+          <a:p>
+            <a:pPr algn="ctr"/>
+          </a:p>
+        </p:txBody>
+      </p:sp>
+      <p:sp>
+        <p:nvSpPr>
+          <p:cNvPr id="39" name="TextBox 38"/>
           <p:cNvSpPr txBox="1"/>
           <p:nvPr/>
         </p:nvSpPr>
@@ -14902,14 +14574,14 @@
               </a:defRPr>
             </a:pPr>
             <a:r>
-              <a:t>generated = delivered + overrun · phantom 0 · duplicate 0</a:t>
-            </a:r>
-          </a:p>
-        </p:txBody>
-      </p:sp>
-      <p:sp>
-        <p:nvSpPr>
-          <p:cNvPr id="31" name="Rectangle 30"/>
+              <a:t>8,503 = 8,503 + overrun 0 · mismatch/phantom/duplicate 0 · drain empty · Python 독립검증</a:t>
+            </a:r>
+          </a:p>
+        </p:txBody>
+      </p:sp>
+      <p:sp>
+        <p:nvSpPr>
+          <p:cNvPr id="40" name="Rectangle 39"/>
           <p:cNvSpPr/>
           <p:nvPr/>
         </p:nvSpPr>
@@ -14952,7 +14624,7 @@
       </p:sp>
       <p:sp>
         <p:nvSpPr>
-          <p:cNvPr id="32" name="Rounded Rectangle 31"/>
+          <p:cNvPr id="41" name="Rounded Rectangle 40"/>
           <p:cNvSpPr/>
           <p:nvPr/>
         </p:nvSpPr>
@@ -14995,7 +14667,7 @@
       </p:sp>
       <p:sp>
         <p:nvSpPr>
-          <p:cNvPr id="33" name="TextBox 32"/>
+          <p:cNvPr id="42" name="TextBox 41"/>
           <p:cNvSpPr txBox="1"/>
           <p:nvPr/>
         </p:nvSpPr>
@@ -15024,14 +14696,14 @@
               </a:defRPr>
             </a:pPr>
             <a:r>
-              <a:t>03  결과</a:t>
-            </a:r>
-          </a:p>
-        </p:txBody>
-      </p:sp>
-      <p:sp>
-        <p:nvSpPr>
-          <p:cNvPr id="34" name="TextBox 33"/>
+              <a:t>03  검증</a:t>
+            </a:r>
+          </a:p>
+        </p:txBody>
+      </p:sp>
+      <p:sp>
+        <p:nvSpPr>
+          <p:cNvPr id="43" name="TextBox 42"/>
           <p:cNvSpPr txBox="1"/>
           <p:nvPr/>
         </p:nvSpPr>
@@ -15060,14 +14732,14 @@
               </a:defRPr>
             </a:pPr>
             <a:r>
-              <a:t>최종 trace에서 buffer·polarity 오류 0</a:t>
-            </a:r>
-          </a:p>
-        </p:txBody>
-      </p:sp>
-      <p:sp>
-        <p:nvSpPr>
-          <p:cNvPr id="35" name="Rectangle 34"/>
+              <a:t>두 실제 TB가 비교 성능과 최종 polarity를 분리 검증</a:t>
+            </a:r>
+          </a:p>
+        </p:txBody>
+      </p:sp>
+      <p:sp>
+        <p:nvSpPr>
+          <p:cNvPr id="44" name="Rectangle 43"/>
           <p:cNvSpPr/>
           <p:nvPr/>
         </p:nvSpPr>

--- a/submission/cluster2_digital_first_round_20260828/presentation/cluster2_digital_first_round_20260828.pptx
+++ b/submission/cluster2_digital_first_round_20260828/presentation/cluster2_digital_first_round_20260828.pptx
@@ -3179,7 +3179,7 @@
               </a:defRPr>
             </a:pPr>
             <a:r>
-              <a:t>AER 손실을 24.42배 줄인 구조</a:t>
+              <a:t>AER의 네 병목을 네 구조로 완화</a:t>
             </a:r>
           </a:p>
         </p:txBody>
@@ -3272,7 +3272,7 @@
         <p:spPr>
           <a:xfrm>
             <a:off x="1225296" y="2560320"/>
-            <a:ext cx="2194560" cy="237744"/>
+            <a:ext cx="640080" cy="237744"/>
           </a:xfrm>
           <a:prstGeom prst="rect">
             <a:avLst/>
@@ -3294,7 +3294,7 @@
               </a:defRPr>
             </a:pPr>
             <a:r>
-              <a:t>기본 CLUSTER2</a:t>
+              <a:t>문제</a:t>
             </a:r>
           </a:p>
         </p:txBody>
@@ -3330,7 +3330,7 @@
               </a:defRPr>
             </a:pPr>
             <a:r>
-              <a:t>11.52%</a:t>
+              <a:t>4 bottlenecks</a:t>
             </a:r>
           </a:p>
         </p:txBody>
@@ -3447,7 +3447,7 @@
               </a:defRPr>
             </a:pPr>
             <a:r>
-              <a:t>STEAL + DEPTH-2</a:t>
+              <a:t>4 RTL IDEAS</a:t>
             </a:r>
           </a:p>
         </p:txBody>
@@ -3475,7 +3475,7 @@
           <a:lstStyle/>
           <a:p>
             <a:pPr algn="ctr">
-              <a:defRPr sz="2000" b="1">
+              <a:defRPr sz="2100" b="1">
                 <a:solidFill>
                   <a:srgbClr val="F6F9FC"/>
                 </a:solidFill>
@@ -3483,11 +3483,11 @@
               </a:defRPr>
             </a:pPr>
             <a:r>
-              <a:t>재발화 흡수</a:t>
+              <a:t>FIFO · bitmap</a:t>
             </a:r>
             <a:br/>
             <a:r>
-              <a:t>idle lane 재사용</a:t>
+              <a:t>steal · polarity</a:t>
             </a:r>
           </a:p>
         </p:txBody>
@@ -3602,7 +3602,7 @@
               </a:defRPr>
             </a:pPr>
             <a:r>
-              <a:t>STEAL_BUF</a:t>
+              <a:t>최종 RTL</a:t>
             </a:r>
           </a:p>
         </p:txBody>
@@ -3615,8 +3615,8 @@
         </p:nvSpPr>
         <p:spPr>
           <a:xfrm>
-            <a:off x="9765792" y="2852928"/>
-            <a:ext cx="1353312" cy="438912"/>
+            <a:off x="9802368" y="2852928"/>
+            <a:ext cx="1280160" cy="438912"/>
           </a:xfrm>
           <a:prstGeom prst="rect">
             <a:avLst/>
@@ -3630,7 +3630,7 @@
           <a:lstStyle/>
           <a:p>
             <a:pPr algn="ctr">
-              <a:defRPr sz="2500" b="1">
+              <a:defRPr sz="2700" b="1">
                 <a:solidFill>
                   <a:srgbClr val="071627"/>
                 </a:solidFill>
@@ -3638,7 +3638,7 @@
               </a:defRPr>
             </a:pPr>
             <a:r>
-              <a:t>0.47%</a:t>
+              <a:t>8,503</a:t>
             </a:r>
           </a:p>
         </p:txBody>
@@ -3651,8 +3651,8 @@
         </p:nvSpPr>
         <p:spPr>
           <a:xfrm>
-            <a:off x="9765792" y="3364992"/>
-            <a:ext cx="1353312" cy="182880"/>
+            <a:off x="9838944" y="3364992"/>
+            <a:ext cx="1207008" cy="182880"/>
           </a:xfrm>
           <a:prstGeom prst="rect">
             <a:avLst/>
@@ -3666,7 +3666,7 @@
           <a:lstStyle/>
           <a:p>
             <a:pPr algn="ctr">
-              <a:defRPr sz="800" b="1">
+              <a:defRPr sz="1000" b="1">
                 <a:solidFill>
                   <a:srgbClr val="071627"/>
                 </a:solidFill>
@@ -3674,7 +3674,7 @@
               </a:defRPr>
             </a:pPr>
             <a:r>
-              <a:t>502 / 106,416</a:t>
+              <a:t>무손실</a:t>
             </a:r>
           </a:p>
         </p:txBody>
@@ -3710,7 +3710,7 @@
               </a:defRPr>
             </a:pPr>
             <a:r>
-              <a:t>Ryu 6문제  ·  실제 TB  ·  개선 수치  ·  물리 구현  ·  CAV/2차 확장</a:t>
+              <a:t>병목 정의  ·  구조 아이디어  ·  개선 수치  ·  물리 구현  ·  CAV 확장</a:t>
             </a:r>
           </a:p>
         </p:txBody>
@@ -3930,7 +3930,7 @@
               </a:defRPr>
             </a:pPr>
             <a:r>
-              <a:t>1차 결론과 2차 확장 경로가 수치로 연결된다</a:t>
+              <a:t>결론: 네 병목을 구조적으로 분리해 완화했다</a:t>
             </a:r>
           </a:p>
         </p:txBody>
@@ -4059,6 +4059,159 @@
         <p:spPr>
           <a:xfrm>
             <a:off x="713232" y="1298448"/>
+            <a:ext cx="3218688" cy="2057400"/>
+          </a:xfrm>
+          <a:prstGeom prst="roundRect">
+            <a:avLst/>
+          </a:prstGeom>
+          <a:solidFill>
+            <a:srgbClr val="12304C"/>
+          </a:solidFill>
+          <a:ln w="19050">
+            <a:solidFill>
+              <a:srgbClr val="2AD3CD"/>
+            </a:solidFill>
+          </a:ln>
+        </p:spPr>
+        <p:style>
+          <a:lnRef idx="1">
+            <a:schemeClr val="accent1"/>
+          </a:lnRef>
+          <a:fillRef idx="3">
+            <a:schemeClr val="accent1"/>
+          </a:fillRef>
+          <a:effectRef idx="2">
+            <a:schemeClr val="accent1"/>
+          </a:effectRef>
+          <a:fontRef idx="minor">
+            <a:schemeClr val="lt1"/>
+          </a:fontRef>
+        </p:style>
+        <p:txBody>
+          <a:bodyPr rtlCol="0" anchor="ctr"/>
+          <a:lstStyle/>
+          <a:p>
+            <a:pPr algn="ctr"/>
+          </a:p>
+        </p:txBody>
+      </p:sp>
+      <p:sp>
+        <p:nvSpPr>
+          <p:cNvPr id="10" name="TextBox 9"/>
+          <p:cNvSpPr txBox="1"/>
+          <p:nvPr/>
+        </p:nvSpPr>
+        <p:spPr>
+          <a:xfrm>
+            <a:off x="941832" y="1554480"/>
+            <a:ext cx="2761488" cy="256032"/>
+          </a:xfrm>
+          <a:prstGeom prst="rect">
+            <a:avLst/>
+          </a:prstGeom>
+          <a:noFill/>
+        </p:spPr>
+        <p:txBody>
+          <a:bodyPr wrap="square" anchor="t" lIns="18288" rIns="18288" tIns="9144" bIns="9144">
+            <a:spAutoFit/>
+          </a:bodyPr>
+          <a:lstStyle/>
+          <a:p>
+            <a:pPr algn="ctr">
+              <a:defRPr sz="1300" b="1">
+                <a:solidFill>
+                  <a:srgbClr val="2AD3CD"/>
+                </a:solidFill>
+                <a:latin typeface="Malgun Gothic"/>
+              </a:defRPr>
+            </a:pPr>
+            <a:r>
+              <a:t>네 병목 → 네 해법</a:t>
+            </a:r>
+          </a:p>
+        </p:txBody>
+      </p:sp>
+      <p:sp>
+        <p:nvSpPr>
+          <p:cNvPr id="11" name="TextBox 10"/>
+          <p:cNvSpPr txBox="1"/>
+          <p:nvPr/>
+        </p:nvSpPr>
+        <p:spPr>
+          <a:xfrm>
+            <a:off x="932688" y="2011680"/>
+            <a:ext cx="2779776" cy="329184"/>
+          </a:xfrm>
+          <a:prstGeom prst="rect">
+            <a:avLst/>
+          </a:prstGeom>
+          <a:noFill/>
+        </p:spPr>
+        <p:txBody>
+          <a:bodyPr wrap="square" anchor="t" lIns="18288" rIns="18288" tIns="9144" bIns="9144">
+            <a:spAutoFit/>
+          </a:bodyPr>
+          <a:lstStyle/>
+          <a:p>
+            <a:pPr algn="ctr">
+              <a:defRPr sz="2100" b="1">
+                <a:solidFill>
+                  <a:srgbClr val="F6F9FC"/>
+                </a:solidFill>
+                <a:latin typeface="Malgun Gothic"/>
+              </a:defRPr>
+            </a:pPr>
+            <a:r>
+              <a:t>FIFO · bitmap · steal</a:t>
+            </a:r>
+          </a:p>
+        </p:txBody>
+      </p:sp>
+      <p:sp>
+        <p:nvSpPr>
+          <p:cNvPr id="12" name="TextBox 11"/>
+          <p:cNvSpPr txBox="1"/>
+          <p:nvPr/>
+        </p:nvSpPr>
+        <p:spPr>
+          <a:xfrm>
+            <a:off x="932688" y="2560320"/>
+            <a:ext cx="2779776" cy="347472"/>
+          </a:xfrm>
+          <a:prstGeom prst="rect">
+            <a:avLst/>
+          </a:prstGeom>
+          <a:noFill/>
+        </p:spPr>
+        <p:txBody>
+          <a:bodyPr wrap="square" anchor="t" lIns="18288" rIns="18288" tIns="9144" bIns="9144">
+            <a:spAutoFit/>
+          </a:bodyPr>
+          <a:lstStyle/>
+          <a:p>
+            <a:pPr algn="ctr">
+              <a:defRPr sz="1800" b="1">
+                <a:solidFill>
+                  <a:srgbClr val="2AD3CD"/>
+                </a:solidFill>
+                <a:latin typeface="Malgun Gothic"/>
+              </a:defRPr>
+            </a:pPr>
+            <a:r>
+              <a:t>polarity lockstep</a:t>
+            </a:r>
+          </a:p>
+        </p:txBody>
+      </p:sp>
+      <p:sp>
+        <p:nvSpPr>
+          <p:cNvPr id="13" name="Rounded Rectangle 12"/>
+          <p:cNvSpPr/>
+          <p:nvPr/>
+        </p:nvSpPr>
+        <p:spPr>
+          <a:xfrm>
+            <a:off x="4315968" y="1298448"/>
             <a:ext cx="3218688" cy="2057400"/>
           </a:xfrm>
           <a:prstGeom prst="roundRect">
@@ -4097,13 +4250,13 @@
       </p:sp>
       <p:sp>
         <p:nvSpPr>
-          <p:cNvPr id="10" name="TextBox 9"/>
-          <p:cNvSpPr txBox="1"/>
-          <p:nvPr/>
-        </p:nvSpPr>
-        <p:spPr>
-          <a:xfrm>
-            <a:off x="941832" y="1554480"/>
+          <p:cNvPr id="14" name="TextBox 13"/>
+          <p:cNvSpPr txBox="1"/>
+          <p:nvPr/>
+        </p:nvSpPr>
+        <p:spPr>
+          <a:xfrm>
+            <a:off x="4544568" y="1554480"/>
             <a:ext cx="2761488" cy="256032"/>
           </a:xfrm>
           <a:prstGeom prst="rect">
@@ -4126,20 +4279,20 @@
               </a:defRPr>
             </a:pPr>
             <a:r>
-              <a:t>1차 핵심 개선</a:t>
-            </a:r>
-          </a:p>
-        </p:txBody>
-      </p:sp>
-      <p:sp>
-        <p:nvSpPr>
-          <p:cNvPr id="11" name="TextBox 10"/>
-          <p:cNvSpPr txBox="1"/>
-          <p:nvPr/>
-        </p:nvSpPr>
-        <p:spPr>
-          <a:xfrm>
-            <a:off x="932688" y="2011680"/>
+              <a:t>최종 RTL 증명</a:t>
+            </a:r>
+          </a:p>
+        </p:txBody>
+      </p:sp>
+      <p:sp>
+        <p:nvSpPr>
+          <p:cNvPr id="15" name="TextBox 14"/>
+          <p:cNvSpPr txBox="1"/>
+          <p:nvPr/>
+        </p:nvSpPr>
+        <p:spPr>
+          <a:xfrm>
+            <a:off x="4535424" y="2011680"/>
             <a:ext cx="2779776" cy="329184"/>
           </a:xfrm>
           <a:prstGeom prst="rect">
@@ -4162,20 +4315,20 @@
               </a:defRPr>
             </a:pPr>
             <a:r>
-              <a:t>11.52% → 0.47%</a:t>
-            </a:r>
-          </a:p>
-        </p:txBody>
-      </p:sp>
-      <p:sp>
-        <p:nvSpPr>
-          <p:cNvPr id="12" name="TextBox 11"/>
-          <p:cNvSpPr txBox="1"/>
-          <p:nvPr/>
-        </p:nvSpPr>
-        <p:spPr>
-          <a:xfrm>
-            <a:off x="932688" y="2560320"/>
+              <a:t>8,503 / 8,503 보존</a:t>
+            </a:r>
+          </a:p>
+        </p:txBody>
+      </p:sp>
+      <p:sp>
+        <p:nvSpPr>
+          <p:cNvPr id="16" name="TextBox 15"/>
+          <p:cNvSpPr txBox="1"/>
+          <p:nvPr/>
+        </p:nvSpPr>
+        <p:spPr>
+          <a:xfrm>
+            <a:off x="4535424" y="2560320"/>
             <a:ext cx="2779776" cy="347472"/>
           </a:xfrm>
           <a:prstGeom prst="rect">
@@ -4193,159 +4346,6 @@
               <a:defRPr sz="1800" b="1">
                 <a:solidFill>
                   <a:srgbClr val="37CD85"/>
-                </a:solidFill>
-                <a:latin typeface="Malgun Gothic"/>
-              </a:defRPr>
-            </a:pPr>
-            <a:r>
-              <a:t>손실 24.42배 감소</a:t>
-            </a:r>
-          </a:p>
-        </p:txBody>
-      </p:sp>
-      <p:sp>
-        <p:nvSpPr>
-          <p:cNvPr id="13" name="Rounded Rectangle 12"/>
-          <p:cNvSpPr/>
-          <p:nvPr/>
-        </p:nvSpPr>
-        <p:spPr>
-          <a:xfrm>
-            <a:off x="4315968" y="1298448"/>
-            <a:ext cx="3218688" cy="2057400"/>
-          </a:xfrm>
-          <a:prstGeom prst="roundRect">
-            <a:avLst/>
-          </a:prstGeom>
-          <a:solidFill>
-            <a:srgbClr val="12304C"/>
-          </a:solidFill>
-          <a:ln w="19050">
-            <a:solidFill>
-              <a:srgbClr val="2AD3CD"/>
-            </a:solidFill>
-          </a:ln>
-        </p:spPr>
-        <p:style>
-          <a:lnRef idx="1">
-            <a:schemeClr val="accent1"/>
-          </a:lnRef>
-          <a:fillRef idx="3">
-            <a:schemeClr val="accent1"/>
-          </a:fillRef>
-          <a:effectRef idx="2">
-            <a:schemeClr val="accent1"/>
-          </a:effectRef>
-          <a:fontRef idx="minor">
-            <a:schemeClr val="lt1"/>
-          </a:fontRef>
-        </p:style>
-        <p:txBody>
-          <a:bodyPr rtlCol="0" anchor="ctr"/>
-          <a:lstStyle/>
-          <a:p>
-            <a:pPr algn="ctr"/>
-          </a:p>
-        </p:txBody>
-      </p:sp>
-      <p:sp>
-        <p:nvSpPr>
-          <p:cNvPr id="14" name="TextBox 13"/>
-          <p:cNvSpPr txBox="1"/>
-          <p:nvPr/>
-        </p:nvSpPr>
-        <p:spPr>
-          <a:xfrm>
-            <a:off x="4544568" y="1554480"/>
-            <a:ext cx="2761488" cy="256032"/>
-          </a:xfrm>
-          <a:prstGeom prst="rect">
-            <a:avLst/>
-          </a:prstGeom>
-          <a:noFill/>
-        </p:spPr>
-        <p:txBody>
-          <a:bodyPr wrap="square" anchor="t" lIns="18288" rIns="18288" tIns="9144" bIns="9144">
-            <a:spAutoFit/>
-          </a:bodyPr>
-          <a:lstStyle/>
-          <a:p>
-            <a:pPr algn="ctr">
-              <a:defRPr sz="1300" b="1">
-                <a:solidFill>
-                  <a:srgbClr val="2AD3CD"/>
-                </a:solidFill>
-                <a:latin typeface="Malgun Gothic"/>
-              </a:defRPr>
-            </a:pPr>
-            <a:r>
-              <a:t>최종 RTL 증명</a:t>
-            </a:r>
-          </a:p>
-        </p:txBody>
-      </p:sp>
-      <p:sp>
-        <p:nvSpPr>
-          <p:cNvPr id="15" name="TextBox 14"/>
-          <p:cNvSpPr txBox="1"/>
-          <p:nvPr/>
-        </p:nvSpPr>
-        <p:spPr>
-          <a:xfrm>
-            <a:off x="4535424" y="2011680"/>
-            <a:ext cx="2779776" cy="329184"/>
-          </a:xfrm>
-          <a:prstGeom prst="rect">
-            <a:avLst/>
-          </a:prstGeom>
-          <a:noFill/>
-        </p:spPr>
-        <p:txBody>
-          <a:bodyPr wrap="square" anchor="t" lIns="18288" rIns="18288" tIns="9144" bIns="9144">
-            <a:spAutoFit/>
-          </a:bodyPr>
-          <a:lstStyle/>
-          <a:p>
-            <a:pPr algn="ctr">
-              <a:defRPr sz="2100" b="1">
-                <a:solidFill>
-                  <a:srgbClr val="F6F9FC"/>
-                </a:solidFill>
-                <a:latin typeface="Malgun Gothic"/>
-              </a:defRPr>
-            </a:pPr>
-            <a:r>
-              <a:t>8,503 / 8,503 보존</a:t>
-            </a:r>
-          </a:p>
-        </p:txBody>
-      </p:sp>
-      <p:sp>
-        <p:nvSpPr>
-          <p:cNvPr id="16" name="TextBox 15"/>
-          <p:cNvSpPr txBox="1"/>
-          <p:nvPr/>
-        </p:nvSpPr>
-        <p:spPr>
-          <a:xfrm>
-            <a:off x="4535424" y="2560320"/>
-            <a:ext cx="2779776" cy="347472"/>
-          </a:xfrm>
-          <a:prstGeom prst="rect">
-            <a:avLst/>
-          </a:prstGeom>
-          <a:noFill/>
-        </p:spPr>
-        <p:txBody>
-          <a:bodyPr wrap="square" anchor="t" lIns="18288" rIns="18288" tIns="9144" bIns="9144">
-            <a:spAutoFit/>
-          </a:bodyPr>
-          <a:lstStyle/>
-          <a:p>
-            <a:pPr algn="ctr">
-              <a:defRPr sz="1800" b="1">
-                <a:solidFill>
-                  <a:srgbClr val="2AD3CD"/>
                 </a:solidFill>
                 <a:latin typeface="Malgun Gothic"/>
               </a:defRPr>
@@ -4432,7 +4432,7 @@
               </a:defRPr>
             </a:pPr>
             <a:r>
-              <a:t>CAV 확장 근거</a:t>
+              <a:t>별도 확장 경로</a:t>
             </a:r>
           </a:p>
         </p:txBody>
@@ -4517,8 +4517,8 @@
         </p:nvSpPr>
         <p:spPr>
           <a:xfrm>
-            <a:off x="713232" y="3822191"/>
-            <a:ext cx="10424160" cy="1188720"/>
+            <a:off x="713232" y="3913632"/>
+            <a:ext cx="10424160" cy="1005840"/>
           </a:xfrm>
           <a:prstGeom prst="roundRect">
             <a:avLst/>
@@ -4560,8 +4560,44 @@
         </p:nvSpPr>
         <p:spPr>
           <a:xfrm>
-            <a:off x="960120" y="4069080"/>
-            <a:ext cx="658368" cy="237744"/>
+            <a:off x="987552" y="4206240"/>
+            <a:ext cx="960120" cy="219456"/>
+          </a:xfrm>
+          <a:prstGeom prst="rect">
+            <a:avLst/>
+          </a:prstGeom>
+          <a:noFill/>
+        </p:spPr>
+        <p:txBody>
+          <a:bodyPr wrap="square" anchor="t" lIns="18288" rIns="18288" tIns="9144" bIns="9144">
+            <a:spAutoFit/>
+          </a:bodyPr>
+          <a:lstStyle/>
+          <a:p>
+            <a:pPr algn="l">
+              <a:defRPr sz="1200" b="1">
+                <a:solidFill>
+                  <a:srgbClr val="FFB746"/>
+                </a:solidFill>
+                <a:latin typeface="Malgun Gothic"/>
+              </a:defRPr>
+            </a:pPr>
+            <a:r>
+              <a:t>NEXT</a:t>
+            </a:r>
+          </a:p>
+        </p:txBody>
+      </p:sp>
+      <p:sp>
+        <p:nvSpPr>
+          <p:cNvPr id="23" name="TextBox 22"/>
+          <p:cNvSpPr txBox="1"/>
+          <p:nvPr/>
+        </p:nvSpPr>
+        <p:spPr>
+          <a:xfrm>
+            <a:off x="1965960" y="4114800"/>
+            <a:ext cx="8732520" cy="347472"/>
           </a:xfrm>
           <a:prstGeom prst="rect">
             <a:avLst/>
@@ -4575,43 +4611,7 @@
           <a:lstStyle/>
           <a:p>
             <a:pPr algn="ctr">
-              <a:defRPr sz="1300" b="1">
-                <a:solidFill>
-                  <a:srgbClr val="FFB746"/>
-                </a:solidFill>
-                <a:latin typeface="Malgun Gothic"/>
-              </a:defRPr>
-            </a:pPr>
-            <a:r>
-              <a:t>2차</a:t>
-            </a:r>
-          </a:p>
-        </p:txBody>
-      </p:sp>
-      <p:sp>
-        <p:nvSpPr>
-          <p:cNvPr id="23" name="TextBox 22"/>
-          <p:cNvSpPr txBox="1"/>
-          <p:nvPr/>
-        </p:nvSpPr>
-        <p:spPr>
-          <a:xfrm>
-            <a:off x="1664208" y="4005072"/>
-            <a:ext cx="2816352" cy="256032"/>
-          </a:xfrm>
-          <a:prstGeom prst="rect">
-            <a:avLst/>
-          </a:prstGeom>
-          <a:noFill/>
-        </p:spPr>
-        <p:txBody>
-          <a:bodyPr wrap="square" anchor="t" lIns="18288" rIns="18288" tIns="9144" bIns="9144">
-            <a:spAutoFit/>
-          </a:bodyPr>
-          <a:lstStyle/>
-          <a:p>
-            <a:pPr algn="ctr">
-              <a:defRPr sz="1600" b="1">
+              <a:defRPr sz="1800" b="1">
                 <a:solidFill>
                   <a:srgbClr val="F6F9FC"/>
                 </a:solidFill>
@@ -4619,194 +4619,14 @@
               </a:defRPr>
             </a:pPr>
             <a:r>
-              <a:t>steal_buf + repeat-flag</a:t>
-            </a:r>
-          </a:p>
-        </p:txBody>
-      </p:sp>
-      <p:sp>
-        <p:nvSpPr>
-          <p:cNvPr id="24" name="TextBox 23"/>
-          <p:cNvSpPr txBox="1"/>
-          <p:nvPr/>
-        </p:nvSpPr>
-        <p:spPr>
-          <a:xfrm>
-            <a:off x="1664208" y="4407408"/>
-            <a:ext cx="2816352" cy="201168"/>
-          </a:xfrm>
-          <a:prstGeom prst="rect">
-            <a:avLst/>
-          </a:prstGeom>
-          <a:noFill/>
-        </p:spPr>
-        <p:txBody>
-          <a:bodyPr wrap="square" anchor="t" lIns="18288" rIns="18288" tIns="9144" bIns="9144">
-            <a:spAutoFit/>
-          </a:bodyPr>
-          <a:lstStyle/>
-          <a:p>
-            <a:pPr algn="ctr">
-              <a:defRPr sz="1000" b="1">
-                <a:solidFill>
-                  <a:srgbClr val="37CD85"/>
-                </a:solidFill>
-                <a:latin typeface="Malgun Gothic"/>
-              </a:defRPr>
-            </a:pPr>
-            <a:r>
-              <a:t>검증 후보: link bits −15.61%</a:t>
-            </a:r>
-          </a:p>
-        </p:txBody>
-      </p:sp>
-      <p:sp>
-        <p:nvSpPr>
-          <p:cNvPr id="25" name="TextBox 24"/>
-          <p:cNvSpPr txBox="1"/>
-          <p:nvPr/>
-        </p:nvSpPr>
-        <p:spPr>
-          <a:xfrm>
-            <a:off x="4617720" y="4005072"/>
-            <a:ext cx="2944368" cy="256032"/>
-          </a:xfrm>
-          <a:prstGeom prst="rect">
-            <a:avLst/>
-          </a:prstGeom>
-          <a:noFill/>
-        </p:spPr>
-        <p:txBody>
-          <a:bodyPr wrap="square" anchor="t" lIns="18288" rIns="18288" tIns="9144" bIns="9144">
-            <a:spAutoFit/>
-          </a:bodyPr>
-          <a:lstStyle/>
-          <a:p>
-            <a:pPr algn="ctr">
-              <a:defRPr sz="1500" b="1">
-                <a:solidFill>
-                  <a:srgbClr val="F6F9FC"/>
-                </a:solidFill>
-                <a:latin typeface="Malgun Gothic"/>
-              </a:defRPr>
-            </a:pPr>
-            <a:r>
-              <a:t>polarity → CAV full replay / RTL</a:t>
-            </a:r>
-          </a:p>
-        </p:txBody>
-      </p:sp>
-      <p:sp>
-        <p:nvSpPr>
-          <p:cNvPr id="26" name="TextBox 25"/>
-          <p:cNvSpPr txBox="1"/>
-          <p:nvPr/>
-        </p:nvSpPr>
-        <p:spPr>
-          <a:xfrm>
-            <a:off x="4617720" y="4407408"/>
-            <a:ext cx="2944368" cy="201168"/>
-          </a:xfrm>
-          <a:prstGeom prst="rect">
-            <a:avLst/>
-          </a:prstGeom>
-          <a:noFill/>
-        </p:spPr>
-        <p:txBody>
-          <a:bodyPr wrap="square" anchor="t" lIns="18288" rIns="18288" tIns="9144" bIns="9144">
-            <a:spAutoFit/>
-          </a:bodyPr>
-          <a:lstStyle/>
-          <a:p>
-            <a:pPr algn="ctr">
-              <a:defRPr sz="1000" b="1">
-                <a:solidFill>
-                  <a:srgbClr val="B27EFF"/>
-                </a:solidFill>
-                <a:latin typeface="Malgun Gothic"/>
-              </a:defRPr>
-            </a:pPr>
-            <a:r>
-              <a:t>wire · backpressure · world path</a:t>
-            </a:r>
-          </a:p>
-        </p:txBody>
-      </p:sp>
-      <p:sp>
-        <p:nvSpPr>
-          <p:cNvPr id="27" name="TextBox 26"/>
-          <p:cNvSpPr txBox="1"/>
-          <p:nvPr/>
-        </p:nvSpPr>
-        <p:spPr>
-          <a:xfrm>
-            <a:off x="7744968" y="4005072"/>
-            <a:ext cx="2907792" cy="256032"/>
-          </a:xfrm>
-          <a:prstGeom prst="rect">
-            <a:avLst/>
-          </a:prstGeom>
-          <a:noFill/>
-        </p:spPr>
-        <p:txBody>
-          <a:bodyPr wrap="square" anchor="t" lIns="18288" rIns="18288" tIns="9144" bIns="9144">
-            <a:spAutoFit/>
-          </a:bodyPr>
-          <a:lstStyle/>
-          <a:p>
-            <a:pPr algn="ctr">
-              <a:defRPr sz="1500" b="1">
-                <a:solidFill>
-                  <a:srgbClr val="F6F9FC"/>
-                </a:solidFill>
-                <a:latin typeface="Malgun Gothic"/>
-              </a:defRPr>
-            </a:pPr>
-            <a:r>
-              <a:t>timestamp · activity power</a:t>
-            </a:r>
-          </a:p>
-        </p:txBody>
-      </p:sp>
-      <p:sp>
-        <p:nvSpPr>
-          <p:cNvPr id="28" name="TextBox 27"/>
-          <p:cNvSpPr txBox="1"/>
-          <p:nvPr/>
-        </p:nvSpPr>
-        <p:spPr>
-          <a:xfrm>
-            <a:off x="7744968" y="4407408"/>
-            <a:ext cx="2907792" cy="201168"/>
-          </a:xfrm>
-          <a:prstGeom prst="rect">
-            <a:avLst/>
-          </a:prstGeom>
-          <a:noFill/>
-        </p:spPr>
-        <p:txBody>
-          <a:bodyPr wrap="square" anchor="t" lIns="18288" rIns="18288" tIns="9144" bIns="9144">
-            <a:spAutoFit/>
-          </a:bodyPr>
-          <a:lstStyle/>
-          <a:p>
-            <a:pPr algn="ctr">
-              <a:defRPr sz="1000" b="1">
-                <a:solidFill>
-                  <a:srgbClr val="FF6376"/>
-                </a:solidFill>
-                <a:latin typeface="Malgun Gothic"/>
-              </a:defRPr>
-            </a:pPr>
-            <a:r>
-              <a:t>jitter 해법 · VCD/SAIF · exact Fmax</a:t>
-            </a:r>
-          </a:p>
-        </p:txBody>
-      </p:sp>
-      <p:sp>
-        <p:nvSpPr>
-          <p:cNvPr id="29" name="Rounded Rectangle 28"/>
+              <a:t>final-trace 직접 비교  ·  CAV RTL  ·  activity power  ·  signoff</a:t>
+            </a:r>
+          </a:p>
+        </p:txBody>
+      </p:sp>
+      <p:sp>
+        <p:nvSpPr>
+          <p:cNvPr id="24" name="Rounded Rectangle 23"/>
           <p:cNvSpPr/>
           <p:nvPr/>
         </p:nvSpPr>
@@ -4849,7 +4669,7 @@
       </p:sp>
       <p:sp>
         <p:nvSpPr>
-          <p:cNvPr id="30" name="TextBox 29"/>
+          <p:cNvPr id="25" name="TextBox 24"/>
           <p:cNvSpPr txBox="1"/>
           <p:nvPr/>
         </p:nvSpPr>
@@ -4872,20 +4692,20 @@
             <a:pPr algn="ctr">
               <a:defRPr sz="1600" b="1">
                 <a:solidFill>
-                  <a:srgbClr val="FFB746"/>
-                </a:solidFill>
-                <a:latin typeface="Malgun Gothic"/>
-              </a:defRPr>
-            </a:pPr>
-            <a:r>
-              <a:t>row-trim −14.29%는 기본 Cluster2 전용 — steal_buf에는 적용 불가</a:t>
-            </a:r>
-          </a:p>
-        </p:txBody>
-      </p:sp>
-      <p:sp>
-        <p:nvSpPr>
-          <p:cNvPr id="31" name="Rectangle 30"/>
+                  <a:srgbClr val="37CD85"/>
+                </a:solidFill>
+                <a:latin typeface="Malgun Gothic"/>
+              </a:defRPr>
+            </a:pPr>
+            <a:r>
+              <a:t>GO: polarity RTL·TB·PPA evidence 제출  |  HOLD: exact Fmax·CAV RTL·signoff</a:t>
+            </a:r>
+          </a:p>
+        </p:txBody>
+      </p:sp>
+      <p:sp>
+        <p:nvSpPr>
+          <p:cNvPr id="26" name="Rectangle 25"/>
           <p:cNvSpPr/>
           <p:nvPr/>
         </p:nvSpPr>
@@ -4928,7 +4748,7 @@
       </p:sp>
       <p:sp>
         <p:nvSpPr>
-          <p:cNvPr id="32" name="Rounded Rectangle 31"/>
+          <p:cNvPr id="27" name="Rounded Rectangle 26"/>
           <p:cNvSpPr/>
           <p:nvPr/>
         </p:nvSpPr>
@@ -4971,7 +4791,7 @@
       </p:sp>
       <p:sp>
         <p:nvSpPr>
-          <p:cNvPr id="33" name="TextBox 32"/>
+          <p:cNvPr id="28" name="TextBox 27"/>
           <p:cNvSpPr txBox="1"/>
           <p:nvPr/>
         </p:nvSpPr>
@@ -5007,7 +4827,7 @@
       </p:sp>
       <p:sp>
         <p:nvSpPr>
-          <p:cNvPr id="34" name="TextBox 33"/>
+          <p:cNvPr id="29" name="TextBox 28"/>
           <p:cNvSpPr txBox="1"/>
           <p:nvPr/>
         </p:nvSpPr>
@@ -5036,14 +4856,14 @@
               </a:defRPr>
             </a:pPr>
             <a:r>
-              <a:t>1차 결론과 2차 확장 경로가 수치로 연결된다</a:t>
-            </a:r>
-          </a:p>
-        </p:txBody>
-      </p:sp>
-      <p:sp>
-        <p:nvSpPr>
-          <p:cNvPr id="35" name="Rectangle 34"/>
+              <a:t>결론: 네 병목을 구조적으로 분리해 완화했다</a:t>
+            </a:r>
+          </a:p>
+        </p:txBody>
+      </p:sp>
+      <p:sp>
+        <p:nvSpPr>
+          <p:cNvPr id="30" name="Rectangle 29"/>
           <p:cNvSpPr/>
           <p:nvPr/>
         </p:nvSpPr>
@@ -5227,7 +5047,7 @@
               </a:defRPr>
             </a:pPr>
             <a:r>
-              <a:t>01  문제</a:t>
+              <a:t>01  병목</a:t>
             </a:r>
           </a:p>
         </p:txBody>
@@ -5263,7 +5083,7 @@
               </a:defRPr>
             </a:pPr>
             <a:r>
-              <a:t>Ryu의 전통 AER 6문제에 대한 우리의 대응</a:t>
+              <a:t>우리 AER이 겨냥한 병목은 네 가지다</a:t>
             </a:r>
           </a:p>
         </p:txBody>
@@ -5342,7 +5162,7 @@
               </a:defRPr>
             </a:pPr>
             <a:r>
-              <a:t>Source: Ryu CVPRW 2019 slides · Ganghee sections 67, 86–89</a:t>
+              <a:t>Source: final polarity RTL contract and bottleneck audit</a:t>
             </a:r>
           </a:p>
         </p:txBody>
@@ -5391,8 +5211,161 @@
         </p:nvSpPr>
         <p:spPr>
           <a:xfrm>
-            <a:off x="658368" y="1097280"/>
-            <a:ext cx="3310128" cy="1325880"/>
+            <a:off x="713232" y="1170432"/>
+            <a:ext cx="5230368" cy="1572768"/>
+          </a:xfrm>
+          <a:prstGeom prst="roundRect">
+            <a:avLst/>
+          </a:prstGeom>
+          <a:solidFill>
+            <a:srgbClr val="12304C"/>
+          </a:solidFill>
+          <a:ln w="19050">
+            <a:solidFill>
+              <a:srgbClr val="FF6376"/>
+            </a:solidFill>
+          </a:ln>
+        </p:spPr>
+        <p:style>
+          <a:lnRef idx="1">
+            <a:schemeClr val="accent1"/>
+          </a:lnRef>
+          <a:fillRef idx="3">
+            <a:schemeClr val="accent1"/>
+          </a:fillRef>
+          <a:effectRef idx="2">
+            <a:schemeClr val="accent1"/>
+          </a:effectRef>
+          <a:fontRef idx="minor">
+            <a:schemeClr val="lt1"/>
+          </a:fontRef>
+        </p:style>
+        <p:txBody>
+          <a:bodyPr rtlCol="0" anchor="ctr"/>
+          <a:lstStyle/>
+          <a:p>
+            <a:pPr algn="ctr"/>
+          </a:p>
+        </p:txBody>
+      </p:sp>
+      <p:sp>
+        <p:nvSpPr>
+          <p:cNvPr id="10" name="TextBox 9"/>
+          <p:cNvSpPr txBox="1"/>
+          <p:nvPr/>
+        </p:nvSpPr>
+        <p:spPr>
+          <a:xfrm>
+            <a:off x="950976" y="1353312"/>
+            <a:ext cx="4736592" cy="274320"/>
+          </a:xfrm>
+          <a:prstGeom prst="rect">
+            <a:avLst/>
+          </a:prstGeom>
+          <a:noFill/>
+        </p:spPr>
+        <p:txBody>
+          <a:bodyPr wrap="square" anchor="t" lIns="18288" rIns="18288" tIns="9144" bIns="9144">
+            <a:spAutoFit/>
+          </a:bodyPr>
+          <a:lstStyle/>
+          <a:p>
+            <a:pPr algn="l">
+              <a:defRPr sz="1600" b="1">
+                <a:solidFill>
+                  <a:srgbClr val="FF6376"/>
+                </a:solidFill>
+                <a:latin typeface="Malgun Gothic"/>
+              </a:defRPr>
+            </a:pPr>
+            <a:r>
+              <a:t>① 출력 직렬화</a:t>
+            </a:r>
+          </a:p>
+        </p:txBody>
+      </p:sp>
+      <p:sp>
+        <p:nvSpPr>
+          <p:cNvPr id="11" name="TextBox 10"/>
+          <p:cNvSpPr txBox="1"/>
+          <p:nvPr/>
+        </p:nvSpPr>
+        <p:spPr>
+          <a:xfrm>
+            <a:off x="950976" y="1773936"/>
+            <a:ext cx="4736592" cy="274320"/>
+          </a:xfrm>
+          <a:prstGeom prst="rect">
+            <a:avLst/>
+          </a:prstGeom>
+          <a:noFill/>
+        </p:spPr>
+        <p:txBody>
+          <a:bodyPr wrap="square" anchor="t" lIns="18288" rIns="18288" tIns="9144" bIns="9144">
+            <a:spAutoFit/>
+          </a:bodyPr>
+          <a:lstStyle/>
+          <a:p>
+            <a:pPr algn="l">
+              <a:defRPr sz="1700" b="1">
+                <a:solidFill>
+                  <a:srgbClr val="F6F9FC"/>
+                </a:solidFill>
+                <a:latin typeface="Malgun Gothic"/>
+              </a:defRPr>
+            </a:pPr>
+            <a:r>
+              <a:t>여러 source가 동시에 발생</a:t>
+            </a:r>
+          </a:p>
+        </p:txBody>
+      </p:sp>
+      <p:sp>
+        <p:nvSpPr>
+          <p:cNvPr id="12" name="TextBox 11"/>
+          <p:cNvSpPr txBox="1"/>
+          <p:nvPr/>
+        </p:nvSpPr>
+        <p:spPr>
+          <a:xfrm>
+            <a:off x="950976" y="2267712"/>
+            <a:ext cx="4736592" cy="228600"/>
+          </a:xfrm>
+          <a:prstGeom prst="rect">
+            <a:avLst/>
+          </a:prstGeom>
+          <a:noFill/>
+        </p:spPr>
+        <p:txBody>
+          <a:bodyPr wrap="square" anchor="t" lIns="18288" rIns="18288" tIns="9144" bIns="9144">
+            <a:spAutoFit/>
+          </a:bodyPr>
+          <a:lstStyle/>
+          <a:p>
+            <a:pPr algn="l">
+              <a:defRPr sz="1200" b="0">
+                <a:solidFill>
+                  <a:srgbClr val="ACC2D6"/>
+                </a:solidFill>
+                <a:latin typeface="Malgun Gothic"/>
+              </a:defRPr>
+            </a:pPr>
+            <a:r>
+              <a:t>한 cycle에 1 event만 retire</a:t>
+            </a:r>
+          </a:p>
+        </p:txBody>
+      </p:sp>
+      <p:sp>
+        <p:nvSpPr>
+          <p:cNvPr id="13" name="Rounded Rectangle 12"/>
+          <p:cNvSpPr/>
+          <p:nvPr/>
+        </p:nvSpPr>
+        <p:spPr>
+          <a:xfrm>
+            <a:off x="6236208" y="1170432"/>
+            <a:ext cx="5230368" cy="1572768"/>
           </a:xfrm>
           <a:prstGeom prst="roundRect">
             <a:avLst/>
@@ -5430,14 +5403,14 @@
       </p:sp>
       <p:sp>
         <p:nvSpPr>
-          <p:cNvPr id="10" name="TextBox 9"/>
-          <p:cNvSpPr txBox="1"/>
-          <p:nvPr/>
-        </p:nvSpPr>
-        <p:spPr>
-          <a:xfrm>
-            <a:off x="841247" y="1252728"/>
-            <a:ext cx="2944368" cy="256032"/>
+          <p:cNvPr id="14" name="TextBox 13"/>
+          <p:cNvSpPr txBox="1"/>
+          <p:nvPr/>
+        </p:nvSpPr>
+        <p:spPr>
+          <a:xfrm>
+            <a:off x="6473952" y="1353312"/>
+            <a:ext cx="4736592" cy="274320"/>
           </a:xfrm>
           <a:prstGeom prst="rect">
             <a:avLst/>
@@ -5451,7 +5424,43 @@
           <a:lstStyle/>
           <a:p>
             <a:pPr algn="l">
-              <a:defRPr sz="1400" b="1">
+              <a:defRPr sz="1600" b="1">
+                <a:solidFill>
+                  <a:srgbClr val="FFB746"/>
+                </a:solidFill>
+                <a:latin typeface="Malgun Gothic"/>
+              </a:defRPr>
+            </a:pPr>
+            <a:r>
+              <a:t>② SOURCE 재발생</a:t>
+            </a:r>
+          </a:p>
+        </p:txBody>
+      </p:sp>
+      <p:sp>
+        <p:nvSpPr>
+          <p:cNvPr id="15" name="TextBox 14"/>
+          <p:cNvSpPr txBox="1"/>
+          <p:nvPr/>
+        </p:nvSpPr>
+        <p:spPr>
+          <a:xfrm>
+            <a:off x="6473952" y="1773936"/>
+            <a:ext cx="4736592" cy="274320"/>
+          </a:xfrm>
+          <a:prstGeom prst="rect">
+            <a:avLst/>
+          </a:prstGeom>
+          <a:noFill/>
+        </p:spPr>
+        <p:txBody>
+          <a:bodyPr wrap="square" anchor="t" lIns="18288" rIns="18288" tIns="9144" bIns="9144">
+            <a:spAutoFit/>
+          </a:bodyPr>
+          <a:lstStyle/>
+          <a:p>
+            <a:pPr algn="l">
+              <a:defRPr sz="1700" b="1">
                 <a:solidFill>
                   <a:srgbClr val="F6F9FC"/>
                 </a:solidFill>
@@ -5459,21 +5468,21 @@
               </a:defRPr>
             </a:pPr>
             <a:r>
-              <a:t>① 주소 오버헤드</a:t>
-            </a:r>
-          </a:p>
-        </p:txBody>
-      </p:sp>
-      <p:sp>
-        <p:nvSpPr>
-          <p:cNvPr id="11" name="TextBox 10"/>
-          <p:cNvSpPr txBox="1"/>
-          <p:nvPr/>
-        </p:nvSpPr>
-        <p:spPr>
-          <a:xfrm>
-            <a:off x="841247" y="1609344"/>
-            <a:ext cx="2944368" cy="228600"/>
+              <a:t>grant 전에 같은 source 재발생</a:t>
+            </a:r>
+          </a:p>
+        </p:txBody>
+      </p:sp>
+      <p:sp>
+        <p:nvSpPr>
+          <p:cNvPr id="16" name="TextBox 15"/>
+          <p:cNvSpPr txBox="1"/>
+          <p:nvPr/>
+        </p:nvSpPr>
+        <p:spPr>
+          <a:xfrm>
+            <a:off x="6473952" y="2267712"/>
+            <a:ext cx="4736592" cy="228600"/>
           </a:xfrm>
           <a:prstGeom prst="rect">
             <a:avLst/>
@@ -5487,43 +5496,7 @@
           <a:lstStyle/>
           <a:p>
             <a:pPr algn="l">
-              <a:defRPr sz="1200" b="1">
-                <a:solidFill>
-                  <a:srgbClr val="FFB746"/>
-                </a:solidFill>
-                <a:latin typeface="Malgun Gothic"/>
-              </a:defRPr>
-            </a:pPr>
-            <a:r>
-              <a:t>PARTIAL</a:t>
-            </a:r>
-          </a:p>
-        </p:txBody>
-      </p:sp>
-      <p:sp>
-        <p:nvSpPr>
-          <p:cNvPr id="12" name="TextBox 11"/>
-          <p:cNvSpPr txBox="1"/>
-          <p:nvPr/>
-        </p:nvSpPr>
-        <p:spPr>
-          <a:xfrm>
-            <a:off x="841247" y="1975104"/>
-            <a:ext cx="2944368" cy="219456"/>
-          </a:xfrm>
-          <a:prstGeom prst="rect">
-            <a:avLst/>
-          </a:prstGeom>
-          <a:noFill/>
-        </p:spPr>
-        <p:txBody>
-          <a:bodyPr wrap="square" anchor="t" lIns="18288" rIns="18288" tIns="9144" bIns="9144">
-            <a:spAutoFit/>
-          </a:bodyPr>
-          <a:lstStyle/>
-          <a:p>
-            <a:pPr algn="l">
-              <a:defRPr sz="1000" b="0">
+              <a:defRPr sz="1200" b="0">
                 <a:solidFill>
                   <a:srgbClr val="ACC2D6"/>
                 </a:solidFill>
@@ -5531,160 +5504,7 @@
               </a:defRPr>
             </a:pPr>
             <a:r>
-              <a:t>row bitmap · 2차 repeat −15.61%</a:t>
-            </a:r>
-          </a:p>
-        </p:txBody>
-      </p:sp>
-      <p:sp>
-        <p:nvSpPr>
-          <p:cNvPr id="13" name="Rounded Rectangle 12"/>
-          <p:cNvSpPr/>
-          <p:nvPr/>
-        </p:nvSpPr>
-        <p:spPr>
-          <a:xfrm>
-            <a:off x="4315968" y="1097280"/>
-            <a:ext cx="3310128" cy="1325880"/>
-          </a:xfrm>
-          <a:prstGeom prst="roundRect">
-            <a:avLst/>
-          </a:prstGeom>
-          <a:solidFill>
-            <a:srgbClr val="12304C"/>
-          </a:solidFill>
-          <a:ln w="19050">
-            <a:solidFill>
-              <a:srgbClr val="37CD85"/>
-            </a:solidFill>
-          </a:ln>
-        </p:spPr>
-        <p:style>
-          <a:lnRef idx="1">
-            <a:schemeClr val="accent1"/>
-          </a:lnRef>
-          <a:fillRef idx="3">
-            <a:schemeClr val="accent1"/>
-          </a:fillRef>
-          <a:effectRef idx="2">
-            <a:schemeClr val="accent1"/>
-          </a:effectRef>
-          <a:fontRef idx="minor">
-            <a:schemeClr val="lt1"/>
-          </a:fontRef>
-        </p:style>
-        <p:txBody>
-          <a:bodyPr rtlCol="0" anchor="ctr"/>
-          <a:lstStyle/>
-          <a:p>
-            <a:pPr algn="ctr"/>
-          </a:p>
-        </p:txBody>
-      </p:sp>
-      <p:sp>
-        <p:nvSpPr>
-          <p:cNvPr id="14" name="TextBox 13"/>
-          <p:cNvSpPr txBox="1"/>
-          <p:nvPr/>
-        </p:nvSpPr>
-        <p:spPr>
-          <a:xfrm>
-            <a:off x="4498848" y="1252728"/>
-            <a:ext cx="2944368" cy="256032"/>
-          </a:xfrm>
-          <a:prstGeom prst="rect">
-            <a:avLst/>
-          </a:prstGeom>
-          <a:noFill/>
-        </p:spPr>
-        <p:txBody>
-          <a:bodyPr wrap="square" anchor="t" lIns="18288" rIns="18288" tIns="9144" bIns="9144">
-            <a:spAutoFit/>
-          </a:bodyPr>
-          <a:lstStyle/>
-          <a:p>
-            <a:pPr algn="l">
-              <a:defRPr sz="1400" b="1">
-                <a:solidFill>
-                  <a:srgbClr val="F6F9FC"/>
-                </a:solidFill>
-                <a:latin typeface="Malgun Gothic"/>
-              </a:defRPr>
-            </a:pPr>
-            <a:r>
-              <a:t>② 공유채널 대역폭</a:t>
-            </a:r>
-          </a:p>
-        </p:txBody>
-      </p:sp>
-      <p:sp>
-        <p:nvSpPr>
-          <p:cNvPr id="15" name="TextBox 14"/>
-          <p:cNvSpPr txBox="1"/>
-          <p:nvPr/>
-        </p:nvSpPr>
-        <p:spPr>
-          <a:xfrm>
-            <a:off x="4498848" y="1609344"/>
-            <a:ext cx="2944368" cy="228600"/>
-          </a:xfrm>
-          <a:prstGeom prst="rect">
-            <a:avLst/>
-          </a:prstGeom>
-          <a:noFill/>
-        </p:spPr>
-        <p:txBody>
-          <a:bodyPr wrap="square" anchor="t" lIns="18288" rIns="18288" tIns="9144" bIns="9144">
-            <a:spAutoFit/>
-          </a:bodyPr>
-          <a:lstStyle/>
-          <a:p>
-            <a:pPr algn="l">
-              <a:defRPr sz="1200" b="1">
-                <a:solidFill>
-                  <a:srgbClr val="37CD85"/>
-                </a:solidFill>
-                <a:latin typeface="Malgun Gothic"/>
-              </a:defRPr>
-            </a:pPr>
-            <a:r>
-              <a:t>SOLVED @ N=16</a:t>
-            </a:r>
-          </a:p>
-        </p:txBody>
-      </p:sp>
-      <p:sp>
-        <p:nvSpPr>
-          <p:cNvPr id="16" name="TextBox 15"/>
-          <p:cNvSpPr txBox="1"/>
-          <p:nvPr/>
-        </p:nvSpPr>
-        <p:spPr>
-          <a:xfrm>
-            <a:off x="4498848" y="1975104"/>
-            <a:ext cx="2944368" cy="219456"/>
-          </a:xfrm>
-          <a:prstGeom prst="rect">
-            <a:avLst/>
-          </a:prstGeom>
-          <a:noFill/>
-        </p:spPr>
-        <p:txBody>
-          <a:bodyPr wrap="square" anchor="t" lIns="18288" rIns="18288" tIns="9144" bIns="9144">
-            <a:spAutoFit/>
-          </a:bodyPr>
-          <a:lstStyle/>
-          <a:p>
-            <a:pPr algn="l">
-              <a:defRPr sz="1000" b="0">
-                <a:solidFill>
-                  <a:srgbClr val="ACC2D6"/>
-                </a:solidFill>
-                <a:latin typeface="Malgun Gothic"/>
-              </a:defRPr>
-            </a:pPr>
-            <a:r>
-              <a:t>2 lanes · 최대 8 events/cycle</a:t>
+              <a:t>local full → overrun</a:t>
             </a:r>
           </a:p>
         </p:txBody>
@@ -5697,467 +5517,8 @@
         </p:nvSpPr>
         <p:spPr>
           <a:xfrm>
-            <a:off x="7973568" y="1097280"/>
-            <a:ext cx="3310128" cy="1325880"/>
-          </a:xfrm>
-          <a:prstGeom prst="roundRect">
-            <a:avLst/>
-          </a:prstGeom>
-          <a:solidFill>
-            <a:srgbClr val="12304C"/>
-          </a:solidFill>
-          <a:ln w="19050">
-            <a:solidFill>
-              <a:srgbClr val="2AD3CD"/>
-            </a:solidFill>
-          </a:ln>
-        </p:spPr>
-        <p:style>
-          <a:lnRef idx="1">
-            <a:schemeClr val="accent1"/>
-          </a:lnRef>
-          <a:fillRef idx="3">
-            <a:schemeClr val="accent1"/>
-          </a:fillRef>
-          <a:effectRef idx="2">
-            <a:schemeClr val="accent1"/>
-          </a:effectRef>
-          <a:fontRef idx="minor">
-            <a:schemeClr val="lt1"/>
-          </a:fontRef>
-        </p:style>
-        <p:txBody>
-          <a:bodyPr rtlCol="0" anchor="ctr"/>
-          <a:lstStyle/>
-          <a:p>
-            <a:pPr algn="ctr"/>
-          </a:p>
-        </p:txBody>
-      </p:sp>
-      <p:sp>
-        <p:nvSpPr>
-          <p:cNvPr id="18" name="TextBox 17"/>
-          <p:cNvSpPr txBox="1"/>
-          <p:nvPr/>
-        </p:nvSpPr>
-        <p:spPr>
-          <a:xfrm>
-            <a:off x="8156448" y="1252728"/>
-            <a:ext cx="2944368" cy="256032"/>
-          </a:xfrm>
-          <a:prstGeom prst="rect">
-            <a:avLst/>
-          </a:prstGeom>
-          <a:noFill/>
-        </p:spPr>
-        <p:txBody>
-          <a:bodyPr wrap="square" anchor="t" lIns="18288" rIns="18288" tIns="9144" bIns="9144">
-            <a:spAutoFit/>
-          </a:bodyPr>
-          <a:lstStyle/>
-          <a:p>
-            <a:pPr algn="l">
-              <a:defRPr sz="1400" b="1">
-                <a:solidFill>
-                  <a:srgbClr val="F6F9FC"/>
-                </a:solidFill>
-                <a:latin typeface="Malgun Gothic"/>
-              </a:defRPr>
-            </a:pPr>
-            <a:r>
-              <a:t>③ 중재 지연</a:t>
-            </a:r>
-          </a:p>
-        </p:txBody>
-      </p:sp>
-      <p:sp>
-        <p:nvSpPr>
-          <p:cNvPr id="19" name="TextBox 18"/>
-          <p:cNvSpPr txBox="1"/>
-          <p:nvPr/>
-        </p:nvSpPr>
-        <p:spPr>
-          <a:xfrm>
-            <a:off x="8156448" y="1609344"/>
-            <a:ext cx="2944368" cy="228600"/>
-          </a:xfrm>
-          <a:prstGeom prst="rect">
-            <a:avLst/>
-          </a:prstGeom>
-          <a:noFill/>
-        </p:spPr>
-        <p:txBody>
-          <a:bodyPr wrap="square" anchor="t" lIns="18288" rIns="18288" tIns="9144" bIns="9144">
-            <a:spAutoFit/>
-          </a:bodyPr>
-          <a:lstStyle/>
-          <a:p>
-            <a:pPr algn="l">
-              <a:defRPr sz="1200" b="1">
-                <a:solidFill>
-                  <a:srgbClr val="2AD3CD"/>
-                </a:solidFill>
-                <a:latin typeface="Malgun Gothic"/>
-              </a:defRPr>
-            </a:pPr>
-            <a:r>
-              <a:t>REDUCED</a:t>
-            </a:r>
-          </a:p>
-        </p:txBody>
-      </p:sp>
-      <p:sp>
-        <p:nvSpPr>
-          <p:cNvPr id="20" name="TextBox 19"/>
-          <p:cNvSpPr txBox="1"/>
-          <p:nvPr/>
-        </p:nvSpPr>
-        <p:spPr>
-          <a:xfrm>
-            <a:off x="8156448" y="1975104"/>
-            <a:ext cx="2944368" cy="219456"/>
-          </a:xfrm>
-          <a:prstGeom prst="rect">
-            <a:avLst/>
-          </a:prstGeom>
-          <a:noFill/>
-        </p:spPr>
-        <p:txBody>
-          <a:bodyPr wrap="square" anchor="t" lIns="18288" rIns="18288" tIns="9144" bIns="9144">
-            <a:spAutoFit/>
-          </a:bodyPr>
-          <a:lstStyle/>
-          <a:p>
-            <a:pPr algn="l">
-              <a:defRPr sz="1000" b="0">
-                <a:solidFill>
-                  <a:srgbClr val="ACC2D6"/>
-                </a:solidFill>
-                <a:latin typeface="Malgun Gothic"/>
-              </a:defRPr>
-            </a:pPr>
-            <a:r>
-              <a:t>row batch + 병렬 retire</a:t>
-            </a:r>
-          </a:p>
-        </p:txBody>
-      </p:sp>
-      <p:sp>
-        <p:nvSpPr>
-          <p:cNvPr id="21" name="Rounded Rectangle 20"/>
-          <p:cNvSpPr/>
-          <p:nvPr/>
-        </p:nvSpPr>
-        <p:spPr>
-          <a:xfrm>
-            <a:off x="658368" y="2907792"/>
-            <a:ext cx="3310128" cy="1325880"/>
-          </a:xfrm>
-          <a:prstGeom prst="roundRect">
-            <a:avLst/>
-          </a:prstGeom>
-          <a:solidFill>
-            <a:srgbClr val="12304C"/>
-          </a:solidFill>
-          <a:ln w="19050">
-            <a:solidFill>
-              <a:srgbClr val="37CD85"/>
-            </a:solidFill>
-          </a:ln>
-        </p:spPr>
-        <p:style>
-          <a:lnRef idx="1">
-            <a:schemeClr val="accent1"/>
-          </a:lnRef>
-          <a:fillRef idx="3">
-            <a:schemeClr val="accent1"/>
-          </a:fillRef>
-          <a:effectRef idx="2">
-            <a:schemeClr val="accent1"/>
-          </a:effectRef>
-          <a:fontRef idx="minor">
-            <a:schemeClr val="lt1"/>
-          </a:fontRef>
-        </p:style>
-        <p:txBody>
-          <a:bodyPr rtlCol="0" anchor="ctr"/>
-          <a:lstStyle/>
-          <a:p>
-            <a:pPr algn="ctr"/>
-          </a:p>
-        </p:txBody>
-      </p:sp>
-      <p:sp>
-        <p:nvSpPr>
-          <p:cNvPr id="22" name="TextBox 21"/>
-          <p:cNvSpPr txBox="1"/>
-          <p:nvPr/>
-        </p:nvSpPr>
-        <p:spPr>
-          <a:xfrm>
-            <a:off x="841247" y="3063240"/>
-            <a:ext cx="2944368" cy="256032"/>
-          </a:xfrm>
-          <a:prstGeom prst="rect">
-            <a:avLst/>
-          </a:prstGeom>
-          <a:noFill/>
-        </p:spPr>
-        <p:txBody>
-          <a:bodyPr wrap="square" anchor="t" lIns="18288" rIns="18288" tIns="9144" bIns="9144">
-            <a:spAutoFit/>
-          </a:bodyPr>
-          <a:lstStyle/>
-          <a:p>
-            <a:pPr algn="l">
-              <a:defRPr sz="1400" b="1">
-                <a:solidFill>
-                  <a:srgbClr val="F6F9FC"/>
-                </a:solidFill>
-                <a:latin typeface="Malgun Gothic"/>
-              </a:defRPr>
-            </a:pPr>
-            <a:r>
-              <a:t>④ 중재 불공정</a:t>
-            </a:r>
-          </a:p>
-        </p:txBody>
-      </p:sp>
-      <p:sp>
-        <p:nvSpPr>
-          <p:cNvPr id="23" name="TextBox 22"/>
-          <p:cNvSpPr txBox="1"/>
-          <p:nvPr/>
-        </p:nvSpPr>
-        <p:spPr>
-          <a:xfrm>
-            <a:off x="841247" y="3419856"/>
-            <a:ext cx="2944368" cy="228600"/>
-          </a:xfrm>
-          <a:prstGeom prst="rect">
-            <a:avLst/>
-          </a:prstGeom>
-          <a:noFill/>
-        </p:spPr>
-        <p:txBody>
-          <a:bodyPr wrap="square" anchor="t" lIns="18288" rIns="18288" tIns="9144" bIns="9144">
-            <a:spAutoFit/>
-          </a:bodyPr>
-          <a:lstStyle/>
-          <a:p>
-            <a:pPr algn="l">
-              <a:defRPr sz="1200" b="1">
-                <a:solidFill>
-                  <a:srgbClr val="37CD85"/>
-                </a:solidFill>
-                <a:latin typeface="Malgun Gothic"/>
-              </a:defRPr>
-            </a:pPr>
-            <a:r>
-              <a:t>REDUCED</a:t>
-            </a:r>
-          </a:p>
-        </p:txBody>
-      </p:sp>
-      <p:sp>
-        <p:nvSpPr>
-          <p:cNvPr id="24" name="TextBox 23"/>
-          <p:cNvSpPr txBox="1"/>
-          <p:nvPr/>
-        </p:nvSpPr>
-        <p:spPr>
-          <a:xfrm>
-            <a:off x="841247" y="3785616"/>
-            <a:ext cx="2944368" cy="219456"/>
-          </a:xfrm>
-          <a:prstGeom prst="rect">
-            <a:avLst/>
-          </a:prstGeom>
-          <a:noFill/>
-        </p:spPr>
-        <p:txBody>
-          <a:bodyPr wrap="square" anchor="t" lIns="18288" rIns="18288" tIns="9144" bIns="9144">
-            <a:spAutoFit/>
-          </a:bodyPr>
-          <a:lstStyle/>
-          <a:p>
-            <a:pPr algn="l">
-              <a:defRPr sz="1000" b="0">
-                <a:solidFill>
-                  <a:srgbClr val="ACC2D6"/>
-                </a:solidFill>
-                <a:latin typeface="Malgun Gothic"/>
-              </a:defRPr>
-            </a:pPr>
-            <a:r>
-              <a:t>분리 arbiter + conditional steal</a:t>
-            </a:r>
-          </a:p>
-        </p:txBody>
-      </p:sp>
-      <p:sp>
-        <p:nvSpPr>
-          <p:cNvPr id="25" name="Rounded Rectangle 24"/>
-          <p:cNvSpPr/>
-          <p:nvPr/>
-        </p:nvSpPr>
-        <p:spPr>
-          <a:xfrm>
-            <a:off x="4315968" y="2907792"/>
-            <a:ext cx="3310128" cy="1325880"/>
-          </a:xfrm>
-          <a:prstGeom prst="roundRect">
-            <a:avLst/>
-          </a:prstGeom>
-          <a:solidFill>
-            <a:srgbClr val="12304C"/>
-          </a:solidFill>
-          <a:ln w="19050">
-            <a:solidFill>
-              <a:srgbClr val="FF6376"/>
-            </a:solidFill>
-          </a:ln>
-        </p:spPr>
-        <p:style>
-          <a:lnRef idx="1">
-            <a:schemeClr val="accent1"/>
-          </a:lnRef>
-          <a:fillRef idx="3">
-            <a:schemeClr val="accent1"/>
-          </a:fillRef>
-          <a:effectRef idx="2">
-            <a:schemeClr val="accent1"/>
-          </a:effectRef>
-          <a:fontRef idx="minor">
-            <a:schemeClr val="lt1"/>
-          </a:fontRef>
-        </p:style>
-        <p:txBody>
-          <a:bodyPr rtlCol="0" anchor="ctr"/>
-          <a:lstStyle/>
-          <a:p>
-            <a:pPr algn="ctr"/>
-          </a:p>
-        </p:txBody>
-      </p:sp>
-      <p:sp>
-        <p:nvSpPr>
-          <p:cNvPr id="26" name="TextBox 25"/>
-          <p:cNvSpPr txBox="1"/>
-          <p:nvPr/>
-        </p:nvSpPr>
-        <p:spPr>
-          <a:xfrm>
-            <a:off x="4498848" y="3063240"/>
-            <a:ext cx="2944368" cy="256032"/>
-          </a:xfrm>
-          <a:prstGeom prst="rect">
-            <a:avLst/>
-          </a:prstGeom>
-          <a:noFill/>
-        </p:spPr>
-        <p:txBody>
-          <a:bodyPr wrap="square" anchor="t" lIns="18288" rIns="18288" tIns="9144" bIns="9144">
-            <a:spAutoFit/>
-          </a:bodyPr>
-          <a:lstStyle/>
-          <a:p>
-            <a:pPr algn="l">
-              <a:defRPr sz="1400" b="1">
-                <a:solidFill>
-                  <a:srgbClr val="F6F9FC"/>
-                </a:solidFill>
-                <a:latin typeface="Malgun Gothic"/>
-              </a:defRPr>
-            </a:pPr>
-            <a:r>
-              <a:t>⑤ timestamp 왜곡</a:t>
-            </a:r>
-          </a:p>
-        </p:txBody>
-      </p:sp>
-      <p:sp>
-        <p:nvSpPr>
-          <p:cNvPr id="27" name="TextBox 26"/>
-          <p:cNvSpPr txBox="1"/>
-          <p:nvPr/>
-        </p:nvSpPr>
-        <p:spPr>
-          <a:xfrm>
-            <a:off x="4498848" y="3419856"/>
-            <a:ext cx="2944368" cy="228600"/>
-          </a:xfrm>
-          <a:prstGeom prst="rect">
-            <a:avLst/>
-          </a:prstGeom>
-          <a:noFill/>
-        </p:spPr>
-        <p:txBody>
-          <a:bodyPr wrap="square" anchor="t" lIns="18288" rIns="18288" tIns="9144" bIns="9144">
-            <a:spAutoFit/>
-          </a:bodyPr>
-          <a:lstStyle/>
-          <a:p>
-            <a:pPr algn="l">
-              <a:defRPr sz="1200" b="1">
-                <a:solidFill>
-                  <a:srgbClr val="FF6376"/>
-                </a:solidFill>
-                <a:latin typeface="Malgun Gothic"/>
-              </a:defRPr>
-            </a:pPr>
-            <a:r>
-              <a:t>HOLD</a:t>
-            </a:r>
-          </a:p>
-        </p:txBody>
-      </p:sp>
-      <p:sp>
-        <p:nvSpPr>
-          <p:cNvPr id="28" name="TextBox 27"/>
-          <p:cNvSpPr txBox="1"/>
-          <p:nvPr/>
-        </p:nvSpPr>
-        <p:spPr>
-          <a:xfrm>
-            <a:off x="4498848" y="3785616"/>
-            <a:ext cx="2944368" cy="219456"/>
-          </a:xfrm>
-          <a:prstGeom prst="rect">
-            <a:avLst/>
-          </a:prstGeom>
-          <a:noFill/>
-        </p:spPr>
-        <p:txBody>
-          <a:bodyPr wrap="square" anchor="t" lIns="18288" rIns="18288" tIns="9144" bIns="9144">
-            <a:spAutoFit/>
-          </a:bodyPr>
-          <a:lstStyle/>
-          <a:p>
-            <a:pPr algn="l">
-              <a:defRPr sz="1000" b="0">
-                <a:solidFill>
-                  <a:srgbClr val="ACC2D6"/>
-                </a:solidFill>
-                <a:latin typeface="Malgun Gothic"/>
-              </a:defRPr>
-            </a:pPr>
-            <a:r>
-              <a:t>고부하 jitter 해법 미완료</a:t>
-            </a:r>
-          </a:p>
-        </p:txBody>
-      </p:sp>
-      <p:sp>
-        <p:nvSpPr>
-          <p:cNvPr id="29" name="Rounded Rectangle 28"/>
-          <p:cNvSpPr/>
-          <p:nvPr/>
-        </p:nvSpPr>
-        <p:spPr>
-          <a:xfrm>
-            <a:off x="7973568" y="2907792"/>
-            <a:ext cx="3310128" cy="1325880"/>
+            <a:off x="713232" y="3310128"/>
+            <a:ext cx="5230368" cy="1572768"/>
           </a:xfrm>
           <a:prstGeom prst="roundRect">
             <a:avLst/>
@@ -6195,14 +5556,14 @@
       </p:sp>
       <p:sp>
         <p:nvSpPr>
-          <p:cNvPr id="30" name="TextBox 29"/>
-          <p:cNvSpPr txBox="1"/>
-          <p:nvPr/>
-        </p:nvSpPr>
-        <p:spPr>
-          <a:xfrm>
-            <a:off x="8156448" y="3063240"/>
-            <a:ext cx="2944368" cy="256032"/>
+          <p:cNvPr id="18" name="TextBox 17"/>
+          <p:cNvSpPr txBox="1"/>
+          <p:nvPr/>
+        </p:nvSpPr>
+        <p:spPr>
+          <a:xfrm>
+            <a:off x="950976" y="3493008"/>
+            <a:ext cx="4736592" cy="274320"/>
           </a:xfrm>
           <a:prstGeom prst="rect">
             <a:avLst/>
@@ -6216,7 +5577,43 @@
           <a:lstStyle/>
           <a:p>
             <a:pPr algn="l">
-              <a:defRPr sz="1400" b="1">
+              <a:defRPr sz="1600" b="1">
+                <a:solidFill>
+                  <a:srgbClr val="B27EFF"/>
+                </a:solidFill>
+                <a:latin typeface="Malgun Gothic"/>
+              </a:defRPr>
+            </a:pPr>
+            <a:r>
+              <a:t>③ TRAFFIC 불균형</a:t>
+            </a:r>
+          </a:p>
+        </p:txBody>
+      </p:sp>
+      <p:sp>
+        <p:nvSpPr>
+          <p:cNvPr id="19" name="TextBox 18"/>
+          <p:cNvSpPr txBox="1"/>
+          <p:nvPr/>
+        </p:nvSpPr>
+        <p:spPr>
+          <a:xfrm>
+            <a:off x="950976" y="3913632"/>
+            <a:ext cx="4736592" cy="274320"/>
+          </a:xfrm>
+          <a:prstGeom prst="rect">
+            <a:avLst/>
+          </a:prstGeom>
+          <a:noFill/>
+        </p:spPr>
+        <p:txBody>
+          <a:bodyPr wrap="square" anchor="t" lIns="18288" rIns="18288" tIns="9144" bIns="9144">
+            <a:spAutoFit/>
+          </a:bodyPr>
+          <a:lstStyle/>
+          <a:p>
+            <a:pPr algn="l">
+              <a:defRPr sz="1700" b="1">
                 <a:solidFill>
                   <a:srgbClr val="F6F9FC"/>
                 </a:solidFill>
@@ -6224,21 +5621,21 @@
               </a:defRPr>
             </a:pPr>
             <a:r>
-              <a:t>⑥ motion artifact</a:t>
-            </a:r>
-          </a:p>
-        </p:txBody>
-      </p:sp>
-      <p:sp>
-        <p:nvSpPr>
-          <p:cNvPr id="31" name="TextBox 30"/>
-          <p:cNvSpPr txBox="1"/>
-          <p:nvPr/>
-        </p:nvSpPr>
-        <p:spPr>
-          <a:xfrm>
-            <a:off x="8156448" y="3419856"/>
-            <a:ext cx="2944368" cy="228600"/>
+              <a:t>center 또는 peripheral에 집중</a:t>
+            </a:r>
+          </a:p>
+        </p:txBody>
+      </p:sp>
+      <p:sp>
+        <p:nvSpPr>
+          <p:cNvPr id="20" name="TextBox 19"/>
+          <p:cNvSpPr txBox="1"/>
+          <p:nvPr/>
+        </p:nvSpPr>
+        <p:spPr>
+          <a:xfrm>
+            <a:off x="950976" y="4407408"/>
+            <a:ext cx="4736592" cy="228600"/>
           </a:xfrm>
           <a:prstGeom prst="rect">
             <a:avLst/>
@@ -6252,29 +5649,74 @@
           <a:lstStyle/>
           <a:p>
             <a:pPr algn="l">
-              <a:defRPr sz="1200" b="1">
-                <a:solidFill>
-                  <a:srgbClr val="B27EFF"/>
-                </a:solidFill>
-                <a:latin typeface="Malgun Gothic"/>
-              </a:defRPr>
-            </a:pPr>
-            <a:r>
-              <a:t>PARTIAL</a:t>
-            </a:r>
-          </a:p>
-        </p:txBody>
-      </p:sp>
-      <p:sp>
-        <p:nvSpPr>
-          <p:cNvPr id="32" name="TextBox 31"/>
-          <p:cNvSpPr txBox="1"/>
-          <p:nvPr/>
-        </p:nvSpPr>
-        <p:spPr>
-          <a:xfrm>
-            <a:off x="8156448" y="3785616"/>
-            <a:ext cx="2944368" cy="219456"/>
+              <a:defRPr sz="1200" b="0">
+                <a:solidFill>
+                  <a:srgbClr val="ACC2D6"/>
+                </a:solidFill>
+                <a:latin typeface="Malgun Gothic"/>
+              </a:defRPr>
+            </a:pPr>
+            <a:r>
+              <a:t>고정 lane이 놀며 처리력 낭비</a:t>
+            </a:r>
+          </a:p>
+        </p:txBody>
+      </p:sp>
+      <p:sp>
+        <p:nvSpPr>
+          <p:cNvPr id="21" name="Rounded Rectangle 20"/>
+          <p:cNvSpPr/>
+          <p:nvPr/>
+        </p:nvSpPr>
+        <p:spPr>
+          <a:xfrm>
+            <a:off x="6236208" y="3310128"/>
+            <a:ext cx="5230368" cy="1572768"/>
+          </a:xfrm>
+          <a:prstGeom prst="roundRect">
+            <a:avLst/>
+          </a:prstGeom>
+          <a:solidFill>
+            <a:srgbClr val="12304C"/>
+          </a:solidFill>
+          <a:ln w="19050">
+            <a:solidFill>
+              <a:srgbClr val="4793FF"/>
+            </a:solidFill>
+          </a:ln>
+        </p:spPr>
+        <p:style>
+          <a:lnRef idx="1">
+            <a:schemeClr val="accent1"/>
+          </a:lnRef>
+          <a:fillRef idx="3">
+            <a:schemeClr val="accent1"/>
+          </a:fillRef>
+          <a:effectRef idx="2">
+            <a:schemeClr val="accent1"/>
+          </a:effectRef>
+          <a:fontRef idx="minor">
+            <a:schemeClr val="lt1"/>
+          </a:fontRef>
+        </p:style>
+        <p:txBody>
+          <a:bodyPr rtlCol="0" anchor="ctr"/>
+          <a:lstStyle/>
+          <a:p>
+            <a:pPr algn="ctr"/>
+          </a:p>
+        </p:txBody>
+      </p:sp>
+      <p:sp>
+        <p:nvSpPr>
+          <p:cNvPr id="22" name="TextBox 21"/>
+          <p:cNvSpPr txBox="1"/>
+          <p:nvPr/>
+        </p:nvSpPr>
+        <p:spPr>
+          <a:xfrm>
+            <a:off x="6473952" y="3493008"/>
+            <a:ext cx="4736592" cy="274320"/>
           </a:xfrm>
           <a:prstGeom prst="rect">
             <a:avLst/>
@@ -6288,7 +5730,79 @@
           <a:lstStyle/>
           <a:p>
             <a:pPr algn="l">
-              <a:defRPr sz="1000" b="0">
+              <a:defRPr sz="1600" b="1">
+                <a:solidFill>
+                  <a:srgbClr val="4793FF"/>
+                </a:solidFill>
+                <a:latin typeface="Malgun Gothic"/>
+              </a:defRPr>
+            </a:pPr>
+            <a:r>
+              <a:t>④ POLARITY 정렬</a:t>
+            </a:r>
+          </a:p>
+        </p:txBody>
+      </p:sp>
+      <p:sp>
+        <p:nvSpPr>
+          <p:cNvPr id="23" name="TextBox 22"/>
+          <p:cNvSpPr txBox="1"/>
+          <p:nvPr/>
+        </p:nvSpPr>
+        <p:spPr>
+          <a:xfrm>
+            <a:off x="6473952" y="3913632"/>
+            <a:ext cx="4736592" cy="274320"/>
+          </a:xfrm>
+          <a:prstGeom prst="rect">
+            <a:avLst/>
+          </a:prstGeom>
+          <a:noFill/>
+        </p:spPr>
+        <p:txBody>
+          <a:bodyPr wrap="square" anchor="t" lIns="18288" rIns="18288" tIns="9144" bIns="9144">
+            <a:spAutoFit/>
+          </a:bodyPr>
+          <a:lstStyle/>
+          <a:p>
+            <a:pPr algn="l">
+              <a:defRPr sz="1700" b="1">
+                <a:solidFill>
+                  <a:srgbClr val="F6F9FC"/>
+                </a:solidFill>
+                <a:latin typeface="Malgun Gothic"/>
+              </a:defRPr>
+            </a:pPr>
+            <a:r>
+              <a:t>주소와 polarity의 저장·pop 분리</a:t>
+            </a:r>
+          </a:p>
+        </p:txBody>
+      </p:sp>
+      <p:sp>
+        <p:nvSpPr>
+          <p:cNvPr id="24" name="TextBox 23"/>
+          <p:cNvSpPr txBox="1"/>
+          <p:nvPr/>
+        </p:nvSpPr>
+        <p:spPr>
+          <a:xfrm>
+            <a:off x="6473952" y="4407408"/>
+            <a:ext cx="4736592" cy="228600"/>
+          </a:xfrm>
+          <a:prstGeom prst="rect">
+            <a:avLst/>
+          </a:prstGeom>
+          <a:noFill/>
+        </p:spPr>
+        <p:txBody>
+          <a:bodyPr wrap="square" anchor="t" lIns="18288" rIns="18288" tIns="9144" bIns="9144">
+            <a:spAutoFit/>
+          </a:bodyPr>
+          <a:lstStyle/>
+          <a:p>
+            <a:pPr algn="l">
+              <a:defRPr sz="1200" b="0">
                 <a:solidFill>
                   <a:srgbClr val="ACC2D6"/>
                 </a:solidFill>
@@ -6296,14 +5810,14 @@
               </a:defRPr>
             </a:pPr>
             <a:r>
-              <a:t>동시 row/lane spread 0 · 고부하 HOLD</a:t>
-            </a:r>
-          </a:p>
-        </p:txBody>
-      </p:sp>
-      <p:sp>
-        <p:nvSpPr>
-          <p:cNvPr id="33" name="Rounded Rectangle 32"/>
+              <a:t>event 의미 mismatch 위험</a:t>
+            </a:r>
+          </a:p>
+        </p:txBody>
+      </p:sp>
+      <p:sp>
+        <p:nvSpPr>
+          <p:cNvPr id="25" name="Rounded Rectangle 24"/>
           <p:cNvSpPr/>
           <p:nvPr/>
         </p:nvSpPr>
@@ -6346,7 +5860,7 @@
       </p:sp>
       <p:sp>
         <p:nvSpPr>
-          <p:cNvPr id="34" name="TextBox 33"/>
+          <p:cNvPr id="26" name="TextBox 25"/>
           <p:cNvSpPr txBox="1"/>
           <p:nvPr/>
         </p:nvSpPr>
@@ -6375,14 +5889,14 @@
               </a:defRPr>
             </a:pPr>
             <a:r>
-              <a:t>해결된 축과 남은 축을 분리한다 — timestamp/motion을 해결 완료로 과장하지 않는다</a:t>
-            </a:r>
-          </a:p>
-        </p:txBody>
-      </p:sp>
-      <p:sp>
-        <p:nvSpPr>
-          <p:cNvPr id="35" name="Rectangle 34"/>
+              <a:t>대역폭 · buffer · 자원 활용 · metadata 정렬이 서로 다른 병목으로 연결된다</a:t>
+            </a:r>
+          </a:p>
+        </p:txBody>
+      </p:sp>
+      <p:sp>
+        <p:nvSpPr>
+          <p:cNvPr id="27" name="Rectangle 26"/>
           <p:cNvSpPr/>
           <p:nvPr/>
         </p:nvSpPr>
@@ -6425,7 +5939,7 @@
       </p:sp>
       <p:sp>
         <p:nvSpPr>
-          <p:cNvPr id="36" name="Rounded Rectangle 35"/>
+          <p:cNvPr id="28" name="Rounded Rectangle 27"/>
           <p:cNvSpPr/>
           <p:nvPr/>
         </p:nvSpPr>
@@ -6468,7 +5982,7 @@
       </p:sp>
       <p:sp>
         <p:nvSpPr>
-          <p:cNvPr id="37" name="TextBox 36"/>
+          <p:cNvPr id="29" name="TextBox 28"/>
           <p:cNvSpPr txBox="1"/>
           <p:nvPr/>
         </p:nvSpPr>
@@ -6497,14 +6011,14 @@
               </a:defRPr>
             </a:pPr>
             <a:r>
-              <a:t>01  문제</a:t>
-            </a:r>
-          </a:p>
-        </p:txBody>
-      </p:sp>
-      <p:sp>
-        <p:nvSpPr>
-          <p:cNvPr id="38" name="TextBox 37"/>
+              <a:t>01  병목</a:t>
+            </a:r>
+          </a:p>
+        </p:txBody>
+      </p:sp>
+      <p:sp>
+        <p:nvSpPr>
+          <p:cNvPr id="30" name="TextBox 29"/>
           <p:cNvSpPr txBox="1"/>
           <p:nvPr/>
         </p:nvSpPr>
@@ -6533,14 +6047,14 @@
               </a:defRPr>
             </a:pPr>
             <a:r>
-              <a:t>Ryu의 전통 AER 6문제에 대한 우리의 대응</a:t>
-            </a:r>
-          </a:p>
-        </p:txBody>
-      </p:sp>
-      <p:sp>
-        <p:nvSpPr>
-          <p:cNvPr id="39" name="Rectangle 38"/>
+              <a:t>우리 AER이 겨냥한 병목은 네 가지다</a:t>
+            </a:r>
+          </a:p>
+        </p:txBody>
+      </p:sp>
+      <p:sp>
+        <p:nvSpPr>
+          <p:cNvPr id="31" name="Rectangle 30"/>
           <p:cNvSpPr/>
           <p:nvPr/>
         </p:nvSpPr>
@@ -6724,7 +6238,7 @@
               </a:defRPr>
             </a:pPr>
             <a:r>
-              <a:t>02  핵심</a:t>
+              <a:t>01  병목</a:t>
             </a:r>
           </a:p>
         </p:txBody>
@@ -6760,7 +6274,7 @@
               </a:defRPr>
             </a:pPr>
             <a:r>
-              <a:t>기본 Cluster2의 빈틈을 steal_buf가 직접 메운다</a:t>
+              <a:t>① 출력 직렬화가 ② source-local overrun으로 이어진다</a:t>
             </a:r>
           </a:p>
         </p:txBody>
@@ -6839,7 +6353,7 @@
               </a:defRPr>
             </a:pPr>
             <a:r>
-              <a:t>Source: official full50 Xcelium comparison · Ganghee sections 65–66</a:t>
+              <a:t>Source: recovered scalar Fovea Xcelium full50 diagnostics</a:t>
             </a:r>
           </a:p>
         </p:txBody>
@@ -6882,24 +6396,60 @@
       </p:sp>
       <p:sp>
         <p:nvSpPr>
-          <p:cNvPr id="9" name="Rounded Rectangle 8"/>
+          <p:cNvPr id="9" name="TextBox 8"/>
+          <p:cNvSpPr txBox="1"/>
+          <p:nvPr/>
+        </p:nvSpPr>
+        <p:spPr>
+          <a:xfrm>
+            <a:off x="731520" y="1143000"/>
+            <a:ext cx="2011680" cy="256032"/>
+          </a:xfrm>
+          <a:prstGeom prst="rect">
+            <a:avLst/>
+          </a:prstGeom>
+          <a:noFill/>
+        </p:spPr>
+        <p:txBody>
+          <a:bodyPr wrap="square" anchor="t" lIns="18288" rIns="18288" tIns="9144" bIns="9144">
+            <a:spAutoFit/>
+          </a:bodyPr>
+          <a:lstStyle/>
+          <a:p>
+            <a:pPr algn="ctr">
+              <a:defRPr sz="1400" b="1">
+                <a:solidFill>
+                  <a:srgbClr val="4793FF"/>
+                </a:solidFill>
+                <a:latin typeface="Malgun Gothic"/>
+              </a:defRPr>
+            </a:pPr>
+            <a:r>
+              <a:t>동시 입력</a:t>
+            </a:r>
+          </a:p>
+        </p:txBody>
+      </p:sp>
+      <p:sp>
+        <p:nvSpPr>
+          <p:cNvPr id="10" name="Rounded Rectangle 9"/>
           <p:cNvSpPr/>
           <p:nvPr/>
         </p:nvSpPr>
         <p:spPr>
           <a:xfrm>
-            <a:off x="713232" y="1143000"/>
-            <a:ext cx="4800600" cy="3611880"/>
+            <a:off x="841248" y="1581912"/>
+            <a:ext cx="310896" cy="310896"/>
           </a:xfrm>
           <a:prstGeom prst="roundRect">
             <a:avLst/>
           </a:prstGeom>
           <a:solidFill>
-            <a:srgbClr val="12304C"/>
+            <a:srgbClr val="193E5C"/>
           </a:solidFill>
           <a:ln w="19050">
             <a:solidFill>
-              <a:srgbClr val="FFB746"/>
+              <a:srgbClr val="4793FF"/>
             </a:solidFill>
           </a:ln>
         </p:spPr>
@@ -6927,240 +6477,24 @@
       </p:sp>
       <p:sp>
         <p:nvSpPr>
-          <p:cNvPr id="10" name="TextBox 9"/>
-          <p:cNvSpPr txBox="1"/>
-          <p:nvPr/>
-        </p:nvSpPr>
-        <p:spPr>
-          <a:xfrm>
-            <a:off x="987552" y="1444752"/>
-            <a:ext cx="4251960" cy="274320"/>
-          </a:xfrm>
-          <a:prstGeom prst="rect">
-            <a:avLst/>
-          </a:prstGeom>
-          <a:noFill/>
-        </p:spPr>
-        <p:txBody>
-          <a:bodyPr wrap="square" anchor="t" lIns="18288" rIns="18288" tIns="9144" bIns="9144">
-            <a:spAutoFit/>
-          </a:bodyPr>
-          <a:lstStyle/>
-          <a:p>
-            <a:pPr algn="ctr">
-              <a:defRPr sz="1600" b="1">
-                <a:solidFill>
-                  <a:srgbClr val="FFB746"/>
-                </a:solidFill>
-                <a:latin typeface="Malgun Gothic"/>
-              </a:defRPr>
-            </a:pPr>
-            <a:r>
-              <a:t>BASIC CLUSTER2</a:t>
-            </a:r>
-          </a:p>
-        </p:txBody>
-      </p:sp>
-      <p:sp>
-        <p:nvSpPr>
-          <p:cNvPr id="11" name="TextBox 10"/>
-          <p:cNvSpPr txBox="1"/>
-          <p:nvPr/>
-        </p:nvSpPr>
-        <p:spPr>
-          <a:xfrm>
-            <a:off x="987552" y="1984248"/>
-            <a:ext cx="4251960" cy="347472"/>
-          </a:xfrm>
-          <a:prstGeom prst="rect">
-            <a:avLst/>
-          </a:prstGeom>
-          <a:noFill/>
-        </p:spPr>
-        <p:txBody>
-          <a:bodyPr wrap="square" anchor="t" lIns="18288" rIns="18288" tIns="9144" bIns="9144">
-            <a:spAutoFit/>
-          </a:bodyPr>
-          <a:lstStyle/>
-          <a:p>
-            <a:pPr algn="ctr">
-              <a:defRPr sz="2300" b="1">
-                <a:solidFill>
-                  <a:srgbClr val="F6F9FC"/>
-                </a:solidFill>
-                <a:latin typeface="Malgun Gothic"/>
-              </a:defRPr>
-            </a:pPr>
-            <a:r>
-              <a:t>source당 pending 1개</a:t>
-            </a:r>
-          </a:p>
-        </p:txBody>
-      </p:sp>
-      <p:sp>
-        <p:nvSpPr>
-          <p:cNvPr id="12" name="TextBox 11"/>
-          <p:cNvSpPr txBox="1"/>
-          <p:nvPr/>
-        </p:nvSpPr>
-        <p:spPr>
-          <a:xfrm>
-            <a:off x="987552" y="2633472"/>
-            <a:ext cx="4251960" cy="256032"/>
-          </a:xfrm>
-          <a:prstGeom prst="rect">
-            <a:avLst/>
-          </a:prstGeom>
-          <a:noFill/>
-        </p:spPr>
-        <p:txBody>
-          <a:bodyPr wrap="square" anchor="t" lIns="18288" rIns="18288" tIns="9144" bIns="9144">
-            <a:spAutoFit/>
-          </a:bodyPr>
-          <a:lstStyle/>
-          <a:p>
-            <a:pPr algn="ctr">
-              <a:defRPr sz="1400" b="0">
-                <a:solidFill>
-                  <a:srgbClr val="ACC2D6"/>
-                </a:solidFill>
-                <a:latin typeface="Malgun Gothic"/>
-              </a:defRPr>
-            </a:pPr>
-            <a:r>
-              <a:t>재발화가 grant보다 빠르면</a:t>
-            </a:r>
-          </a:p>
-        </p:txBody>
-      </p:sp>
-      <p:sp>
-        <p:nvSpPr>
-          <p:cNvPr id="13" name="TextBox 12"/>
-          <p:cNvSpPr txBox="1"/>
-          <p:nvPr/>
-        </p:nvSpPr>
-        <p:spPr>
-          <a:xfrm>
-            <a:off x="987552" y="3054096"/>
-            <a:ext cx="4251960" cy="347472"/>
-          </a:xfrm>
-          <a:prstGeom prst="rect">
-            <a:avLst/>
-          </a:prstGeom>
-          <a:noFill/>
-        </p:spPr>
-        <p:txBody>
-          <a:bodyPr wrap="square" anchor="t" lIns="18288" rIns="18288" tIns="9144" bIns="9144">
-            <a:spAutoFit/>
-          </a:bodyPr>
-          <a:lstStyle/>
-          <a:p>
-            <a:pPr algn="ctr">
-              <a:defRPr sz="2000" b="1">
-                <a:solidFill>
-                  <a:srgbClr val="FF6376"/>
-                </a:solidFill>
-                <a:latin typeface="Malgun Gothic"/>
-              </a:defRPr>
-            </a:pPr>
-            <a:r>
-              <a:t>LOCAL FULL → OVERRUN</a:t>
-            </a:r>
-          </a:p>
-        </p:txBody>
-      </p:sp>
-      <p:sp>
-        <p:nvSpPr>
-          <p:cNvPr id="14" name="TextBox 13"/>
-          <p:cNvSpPr txBox="1"/>
-          <p:nvPr/>
-        </p:nvSpPr>
-        <p:spPr>
-          <a:xfrm>
-            <a:off x="987552" y="3886200"/>
-            <a:ext cx="4251960" cy="384048"/>
-          </a:xfrm>
-          <a:prstGeom prst="rect">
-            <a:avLst/>
-          </a:prstGeom>
-          <a:noFill/>
-        </p:spPr>
-        <p:txBody>
-          <a:bodyPr wrap="square" anchor="t" lIns="18288" rIns="18288" tIns="9144" bIns="9144">
-            <a:spAutoFit/>
-          </a:bodyPr>
-          <a:lstStyle/>
-          <a:p>
-            <a:pPr algn="ctr">
-              <a:defRPr sz="2500" b="1">
-                <a:solidFill>
-                  <a:srgbClr val="FF6376"/>
-                </a:solidFill>
-                <a:latin typeface="Malgun Gothic"/>
-              </a:defRPr>
-            </a:pPr>
-            <a:r>
-              <a:t>11.52%  ·  12,259 loss</a:t>
-            </a:r>
-          </a:p>
-        </p:txBody>
-      </p:sp>
-      <p:sp>
-        <p:nvSpPr>
-          <p:cNvPr id="15" name="TextBox 14"/>
-          <p:cNvSpPr txBox="1"/>
-          <p:nvPr/>
-        </p:nvSpPr>
-        <p:spPr>
-          <a:xfrm>
-            <a:off x="5669280" y="2606040"/>
-            <a:ext cx="658368" cy="411480"/>
-          </a:xfrm>
-          <a:prstGeom prst="rect">
-            <a:avLst/>
-          </a:prstGeom>
-          <a:noFill/>
-        </p:spPr>
-        <p:txBody>
-          <a:bodyPr wrap="square" anchor="t" lIns="18288" rIns="18288" tIns="9144" bIns="9144">
-            <a:spAutoFit/>
-          </a:bodyPr>
-          <a:lstStyle/>
-          <a:p>
-            <a:pPr algn="ctr">
-              <a:defRPr sz="3800" b="1">
-                <a:solidFill>
-                  <a:srgbClr val="2AD3CD"/>
-                </a:solidFill>
-                <a:latin typeface="Malgun Gothic"/>
-              </a:defRPr>
-            </a:pPr>
-            <a:r>
-              <a:t>→</a:t>
-            </a:r>
-          </a:p>
-        </p:txBody>
-      </p:sp>
-      <p:sp>
-        <p:nvSpPr>
-          <p:cNvPr id="16" name="Rounded Rectangle 15"/>
+          <p:cNvPr id="11" name="Rounded Rectangle 10"/>
           <p:cNvSpPr/>
           <p:nvPr/>
         </p:nvSpPr>
         <p:spPr>
           <a:xfrm>
-            <a:off x="6492240" y="1143000"/>
-            <a:ext cx="4800600" cy="3611880"/>
+            <a:off x="1280160" y="1581912"/>
+            <a:ext cx="310896" cy="310896"/>
           </a:xfrm>
           <a:prstGeom prst="roundRect">
             <a:avLst/>
           </a:prstGeom>
           <a:solidFill>
-            <a:srgbClr val="12304C"/>
+            <a:srgbClr val="193E5C"/>
           </a:solidFill>
           <a:ln w="19050">
             <a:solidFill>
-              <a:srgbClr val="37CD85"/>
+              <a:srgbClr val="4793FF"/>
             </a:solidFill>
           </a:ln>
         </p:spPr>
@@ -7188,14 +6522,464 @@
       </p:sp>
       <p:sp>
         <p:nvSpPr>
-          <p:cNvPr id="17" name="TextBox 16"/>
-          <p:cNvSpPr txBox="1"/>
-          <p:nvPr/>
-        </p:nvSpPr>
-        <p:spPr>
-          <a:xfrm>
-            <a:off x="6766560" y="1444752"/>
-            <a:ext cx="4251960" cy="274320"/>
+          <p:cNvPr id="12" name="Rounded Rectangle 11"/>
+          <p:cNvSpPr/>
+          <p:nvPr/>
+        </p:nvSpPr>
+        <p:spPr>
+          <a:xfrm>
+            <a:off x="1719072" y="1581912"/>
+            <a:ext cx="310896" cy="310896"/>
+          </a:xfrm>
+          <a:prstGeom prst="roundRect">
+            <a:avLst/>
+          </a:prstGeom>
+          <a:solidFill>
+            <a:srgbClr val="193E5C"/>
+          </a:solidFill>
+          <a:ln w="19050">
+            <a:solidFill>
+              <a:srgbClr val="4793FF"/>
+            </a:solidFill>
+          </a:ln>
+        </p:spPr>
+        <p:style>
+          <a:lnRef idx="1">
+            <a:schemeClr val="accent1"/>
+          </a:lnRef>
+          <a:fillRef idx="3">
+            <a:schemeClr val="accent1"/>
+          </a:fillRef>
+          <a:effectRef idx="2">
+            <a:schemeClr val="accent1"/>
+          </a:effectRef>
+          <a:fontRef idx="minor">
+            <a:schemeClr val="lt1"/>
+          </a:fontRef>
+        </p:style>
+        <p:txBody>
+          <a:bodyPr rtlCol="0" anchor="ctr"/>
+          <a:lstStyle/>
+          <a:p>
+            <a:pPr algn="ctr"/>
+          </a:p>
+        </p:txBody>
+      </p:sp>
+      <p:sp>
+        <p:nvSpPr>
+          <p:cNvPr id="13" name="Rounded Rectangle 12"/>
+          <p:cNvSpPr/>
+          <p:nvPr/>
+        </p:nvSpPr>
+        <p:spPr>
+          <a:xfrm>
+            <a:off x="2157984" y="1581912"/>
+            <a:ext cx="310896" cy="310896"/>
+          </a:xfrm>
+          <a:prstGeom prst="roundRect">
+            <a:avLst/>
+          </a:prstGeom>
+          <a:solidFill>
+            <a:srgbClr val="193E5C"/>
+          </a:solidFill>
+          <a:ln w="19050">
+            <a:solidFill>
+              <a:srgbClr val="4793FF"/>
+            </a:solidFill>
+          </a:ln>
+        </p:spPr>
+        <p:style>
+          <a:lnRef idx="1">
+            <a:schemeClr val="accent1"/>
+          </a:lnRef>
+          <a:fillRef idx="3">
+            <a:schemeClr val="accent1"/>
+          </a:fillRef>
+          <a:effectRef idx="2">
+            <a:schemeClr val="accent1"/>
+          </a:effectRef>
+          <a:fontRef idx="minor">
+            <a:schemeClr val="lt1"/>
+          </a:fontRef>
+        </p:style>
+        <p:txBody>
+          <a:bodyPr rtlCol="0" anchor="ctr"/>
+          <a:lstStyle/>
+          <a:p>
+            <a:pPr algn="ctr"/>
+          </a:p>
+        </p:txBody>
+      </p:sp>
+      <p:sp>
+        <p:nvSpPr>
+          <p:cNvPr id="14" name="Rounded Rectangle 13"/>
+          <p:cNvSpPr/>
+          <p:nvPr/>
+        </p:nvSpPr>
+        <p:spPr>
+          <a:xfrm>
+            <a:off x="841248" y="2020824"/>
+            <a:ext cx="310896" cy="310896"/>
+          </a:xfrm>
+          <a:prstGeom prst="roundRect">
+            <a:avLst/>
+          </a:prstGeom>
+          <a:solidFill>
+            <a:srgbClr val="193E5C"/>
+          </a:solidFill>
+          <a:ln w="19050">
+            <a:solidFill>
+              <a:srgbClr val="4793FF"/>
+            </a:solidFill>
+          </a:ln>
+        </p:spPr>
+        <p:style>
+          <a:lnRef idx="1">
+            <a:schemeClr val="accent1"/>
+          </a:lnRef>
+          <a:fillRef idx="3">
+            <a:schemeClr val="accent1"/>
+          </a:fillRef>
+          <a:effectRef idx="2">
+            <a:schemeClr val="accent1"/>
+          </a:effectRef>
+          <a:fontRef idx="minor">
+            <a:schemeClr val="lt1"/>
+          </a:fontRef>
+        </p:style>
+        <p:txBody>
+          <a:bodyPr rtlCol="0" anchor="ctr"/>
+          <a:lstStyle/>
+          <a:p>
+            <a:pPr algn="ctr"/>
+          </a:p>
+        </p:txBody>
+      </p:sp>
+      <p:sp>
+        <p:nvSpPr>
+          <p:cNvPr id="15" name="Rounded Rectangle 14"/>
+          <p:cNvSpPr/>
+          <p:nvPr/>
+        </p:nvSpPr>
+        <p:spPr>
+          <a:xfrm>
+            <a:off x="1280160" y="2020824"/>
+            <a:ext cx="310896" cy="310896"/>
+          </a:xfrm>
+          <a:prstGeom prst="roundRect">
+            <a:avLst/>
+          </a:prstGeom>
+          <a:solidFill>
+            <a:srgbClr val="193E5C"/>
+          </a:solidFill>
+          <a:ln w="19050">
+            <a:solidFill>
+              <a:srgbClr val="4793FF"/>
+            </a:solidFill>
+          </a:ln>
+        </p:spPr>
+        <p:style>
+          <a:lnRef idx="1">
+            <a:schemeClr val="accent1"/>
+          </a:lnRef>
+          <a:fillRef idx="3">
+            <a:schemeClr val="accent1"/>
+          </a:fillRef>
+          <a:effectRef idx="2">
+            <a:schemeClr val="accent1"/>
+          </a:effectRef>
+          <a:fontRef idx="minor">
+            <a:schemeClr val="lt1"/>
+          </a:fontRef>
+        </p:style>
+        <p:txBody>
+          <a:bodyPr rtlCol="0" anchor="ctr"/>
+          <a:lstStyle/>
+          <a:p>
+            <a:pPr algn="ctr"/>
+          </a:p>
+        </p:txBody>
+      </p:sp>
+      <p:sp>
+        <p:nvSpPr>
+          <p:cNvPr id="16" name="Rounded Rectangle 15"/>
+          <p:cNvSpPr/>
+          <p:nvPr/>
+        </p:nvSpPr>
+        <p:spPr>
+          <a:xfrm>
+            <a:off x="1719072" y="2020824"/>
+            <a:ext cx="310896" cy="310896"/>
+          </a:xfrm>
+          <a:prstGeom prst="roundRect">
+            <a:avLst/>
+          </a:prstGeom>
+          <a:solidFill>
+            <a:srgbClr val="193E5C"/>
+          </a:solidFill>
+          <a:ln w="19050">
+            <a:solidFill>
+              <a:srgbClr val="4793FF"/>
+            </a:solidFill>
+          </a:ln>
+        </p:spPr>
+        <p:style>
+          <a:lnRef idx="1">
+            <a:schemeClr val="accent1"/>
+          </a:lnRef>
+          <a:fillRef idx="3">
+            <a:schemeClr val="accent1"/>
+          </a:fillRef>
+          <a:effectRef idx="2">
+            <a:schemeClr val="accent1"/>
+          </a:effectRef>
+          <a:fontRef idx="minor">
+            <a:schemeClr val="lt1"/>
+          </a:fontRef>
+        </p:style>
+        <p:txBody>
+          <a:bodyPr rtlCol="0" anchor="ctr"/>
+          <a:lstStyle/>
+          <a:p>
+            <a:pPr algn="ctr"/>
+          </a:p>
+        </p:txBody>
+      </p:sp>
+      <p:sp>
+        <p:nvSpPr>
+          <p:cNvPr id="17" name="Rounded Rectangle 16"/>
+          <p:cNvSpPr/>
+          <p:nvPr/>
+        </p:nvSpPr>
+        <p:spPr>
+          <a:xfrm>
+            <a:off x="2157984" y="2020824"/>
+            <a:ext cx="310896" cy="310896"/>
+          </a:xfrm>
+          <a:prstGeom prst="roundRect">
+            <a:avLst/>
+          </a:prstGeom>
+          <a:solidFill>
+            <a:srgbClr val="193E5C"/>
+          </a:solidFill>
+          <a:ln w="19050">
+            <a:solidFill>
+              <a:srgbClr val="4793FF"/>
+            </a:solidFill>
+          </a:ln>
+        </p:spPr>
+        <p:style>
+          <a:lnRef idx="1">
+            <a:schemeClr val="accent1"/>
+          </a:lnRef>
+          <a:fillRef idx="3">
+            <a:schemeClr val="accent1"/>
+          </a:fillRef>
+          <a:effectRef idx="2">
+            <a:schemeClr val="accent1"/>
+          </a:effectRef>
+          <a:fontRef idx="minor">
+            <a:schemeClr val="lt1"/>
+          </a:fontRef>
+        </p:style>
+        <p:txBody>
+          <a:bodyPr rtlCol="0" anchor="ctr"/>
+          <a:lstStyle/>
+          <a:p>
+            <a:pPr algn="ctr"/>
+          </a:p>
+        </p:txBody>
+      </p:sp>
+      <p:sp>
+        <p:nvSpPr>
+          <p:cNvPr id="18" name="Rounded Rectangle 17"/>
+          <p:cNvSpPr/>
+          <p:nvPr/>
+        </p:nvSpPr>
+        <p:spPr>
+          <a:xfrm>
+            <a:off x="841248" y="2459736"/>
+            <a:ext cx="310896" cy="310896"/>
+          </a:xfrm>
+          <a:prstGeom prst="roundRect">
+            <a:avLst/>
+          </a:prstGeom>
+          <a:solidFill>
+            <a:srgbClr val="193E5C"/>
+          </a:solidFill>
+          <a:ln w="19050">
+            <a:solidFill>
+              <a:srgbClr val="4793FF"/>
+            </a:solidFill>
+          </a:ln>
+        </p:spPr>
+        <p:style>
+          <a:lnRef idx="1">
+            <a:schemeClr val="accent1"/>
+          </a:lnRef>
+          <a:fillRef idx="3">
+            <a:schemeClr val="accent1"/>
+          </a:fillRef>
+          <a:effectRef idx="2">
+            <a:schemeClr val="accent1"/>
+          </a:effectRef>
+          <a:fontRef idx="minor">
+            <a:schemeClr val="lt1"/>
+          </a:fontRef>
+        </p:style>
+        <p:txBody>
+          <a:bodyPr rtlCol="0" anchor="ctr"/>
+          <a:lstStyle/>
+          <a:p>
+            <a:pPr algn="ctr"/>
+          </a:p>
+        </p:txBody>
+      </p:sp>
+      <p:sp>
+        <p:nvSpPr>
+          <p:cNvPr id="19" name="Rounded Rectangle 18"/>
+          <p:cNvSpPr/>
+          <p:nvPr/>
+        </p:nvSpPr>
+        <p:spPr>
+          <a:xfrm>
+            <a:off x="1280160" y="2459736"/>
+            <a:ext cx="310896" cy="310896"/>
+          </a:xfrm>
+          <a:prstGeom prst="roundRect">
+            <a:avLst/>
+          </a:prstGeom>
+          <a:solidFill>
+            <a:srgbClr val="193E5C"/>
+          </a:solidFill>
+          <a:ln w="19050">
+            <a:solidFill>
+              <a:srgbClr val="4793FF"/>
+            </a:solidFill>
+          </a:ln>
+        </p:spPr>
+        <p:style>
+          <a:lnRef idx="1">
+            <a:schemeClr val="accent1"/>
+          </a:lnRef>
+          <a:fillRef idx="3">
+            <a:schemeClr val="accent1"/>
+          </a:fillRef>
+          <a:effectRef idx="2">
+            <a:schemeClr val="accent1"/>
+          </a:effectRef>
+          <a:fontRef idx="minor">
+            <a:schemeClr val="lt1"/>
+          </a:fontRef>
+        </p:style>
+        <p:txBody>
+          <a:bodyPr rtlCol="0" anchor="ctr"/>
+          <a:lstStyle/>
+          <a:p>
+            <a:pPr algn="ctr"/>
+          </a:p>
+        </p:txBody>
+      </p:sp>
+      <p:sp>
+        <p:nvSpPr>
+          <p:cNvPr id="20" name="Rounded Rectangle 19"/>
+          <p:cNvSpPr/>
+          <p:nvPr/>
+        </p:nvSpPr>
+        <p:spPr>
+          <a:xfrm>
+            <a:off x="1719072" y="2459736"/>
+            <a:ext cx="310896" cy="310896"/>
+          </a:xfrm>
+          <a:prstGeom prst="roundRect">
+            <a:avLst/>
+          </a:prstGeom>
+          <a:solidFill>
+            <a:srgbClr val="193E5C"/>
+          </a:solidFill>
+          <a:ln w="19050">
+            <a:solidFill>
+              <a:srgbClr val="4793FF"/>
+            </a:solidFill>
+          </a:ln>
+        </p:spPr>
+        <p:style>
+          <a:lnRef idx="1">
+            <a:schemeClr val="accent1"/>
+          </a:lnRef>
+          <a:fillRef idx="3">
+            <a:schemeClr val="accent1"/>
+          </a:fillRef>
+          <a:effectRef idx="2">
+            <a:schemeClr val="accent1"/>
+          </a:effectRef>
+          <a:fontRef idx="minor">
+            <a:schemeClr val="lt1"/>
+          </a:fontRef>
+        </p:style>
+        <p:txBody>
+          <a:bodyPr rtlCol="0" anchor="ctr"/>
+          <a:lstStyle/>
+          <a:p>
+            <a:pPr algn="ctr"/>
+          </a:p>
+        </p:txBody>
+      </p:sp>
+      <p:sp>
+        <p:nvSpPr>
+          <p:cNvPr id="21" name="Rounded Rectangle 20"/>
+          <p:cNvSpPr/>
+          <p:nvPr/>
+        </p:nvSpPr>
+        <p:spPr>
+          <a:xfrm>
+            <a:off x="2157984" y="2459736"/>
+            <a:ext cx="310896" cy="310896"/>
+          </a:xfrm>
+          <a:prstGeom prst="roundRect">
+            <a:avLst/>
+          </a:prstGeom>
+          <a:solidFill>
+            <a:srgbClr val="193E5C"/>
+          </a:solidFill>
+          <a:ln w="19050">
+            <a:solidFill>
+              <a:srgbClr val="4793FF"/>
+            </a:solidFill>
+          </a:ln>
+        </p:spPr>
+        <p:style>
+          <a:lnRef idx="1">
+            <a:schemeClr val="accent1"/>
+          </a:lnRef>
+          <a:fillRef idx="3">
+            <a:schemeClr val="accent1"/>
+          </a:fillRef>
+          <a:effectRef idx="2">
+            <a:schemeClr val="accent1"/>
+          </a:effectRef>
+          <a:fontRef idx="minor">
+            <a:schemeClr val="lt1"/>
+          </a:fontRef>
+        </p:style>
+        <p:txBody>
+          <a:bodyPr rtlCol="0" anchor="ctr"/>
+          <a:lstStyle/>
+          <a:p>
+            <a:pPr algn="ctr"/>
+          </a:p>
+        </p:txBody>
+      </p:sp>
+      <p:sp>
+        <p:nvSpPr>
+          <p:cNvPr id="22" name="TextBox 21"/>
+          <p:cNvSpPr txBox="1"/>
+          <p:nvPr/>
+        </p:nvSpPr>
+        <p:spPr>
+          <a:xfrm>
+            <a:off x="2834640" y="1993392"/>
+            <a:ext cx="640080" cy="411480"/>
           </a:xfrm>
           <a:prstGeom prst="rect">
             <a:avLst/>
@@ -7209,173 +6993,29 @@
           <a:lstStyle/>
           <a:p>
             <a:pPr algn="ctr">
-              <a:defRPr sz="1600" b="1">
-                <a:solidFill>
-                  <a:srgbClr val="37CD85"/>
-                </a:solidFill>
-                <a:latin typeface="Malgun Gothic"/>
-              </a:defRPr>
-            </a:pPr>
-            <a:r>
-              <a:t>CLUSTER2 STEAL_BUF</a:t>
-            </a:r>
-          </a:p>
-        </p:txBody>
-      </p:sp>
-      <p:sp>
-        <p:nvSpPr>
-          <p:cNvPr id="18" name="TextBox 17"/>
-          <p:cNvSpPr txBox="1"/>
-          <p:nvPr/>
-        </p:nvSpPr>
-        <p:spPr>
-          <a:xfrm>
-            <a:off x="6766560" y="1984248"/>
-            <a:ext cx="4251960" cy="347472"/>
-          </a:xfrm>
-          <a:prstGeom prst="rect">
-            <a:avLst/>
-          </a:prstGeom>
-          <a:noFill/>
-        </p:spPr>
-        <p:txBody>
-          <a:bodyPr wrap="square" anchor="t" lIns="18288" rIns="18288" tIns="9144" bIns="9144">
-            <a:spAutoFit/>
-          </a:bodyPr>
-          <a:lstStyle/>
-          <a:p>
-            <a:pPr algn="ctr">
-              <a:defRPr sz="2300" b="1">
-                <a:solidFill>
-                  <a:srgbClr val="F6F9FC"/>
-                </a:solidFill>
-                <a:latin typeface="Malgun Gothic"/>
-              </a:defRPr>
-            </a:pPr>
-            <a:r>
-              <a:t>source별 depth-2 FIFO</a:t>
-            </a:r>
-          </a:p>
-        </p:txBody>
-      </p:sp>
-      <p:sp>
-        <p:nvSpPr>
-          <p:cNvPr id="19" name="TextBox 18"/>
-          <p:cNvSpPr txBox="1"/>
-          <p:nvPr/>
-        </p:nvSpPr>
-        <p:spPr>
-          <a:xfrm>
-            <a:off x="6766560" y="2633472"/>
-            <a:ext cx="4251960" cy="256032"/>
-          </a:xfrm>
-          <a:prstGeom prst="rect">
-            <a:avLst/>
-          </a:prstGeom>
-          <a:noFill/>
-        </p:spPr>
-        <p:txBody>
-          <a:bodyPr wrap="square" anchor="t" lIns="18288" rIns="18288" tIns="9144" bIns="9144">
-            <a:spAutoFit/>
-          </a:bodyPr>
-          <a:lstStyle/>
-          <a:p>
-            <a:pPr algn="ctr">
-              <a:defRPr sz="1400" b="0">
-                <a:solidFill>
-                  <a:srgbClr val="ACC2D6"/>
-                </a:solidFill>
-                <a:latin typeface="Malgun Gothic"/>
-              </a:defRPr>
-            </a:pPr>
-            <a:r>
-              <a:t>두 번째 event 흡수 + idle lane steal</a:t>
-            </a:r>
-          </a:p>
-        </p:txBody>
-      </p:sp>
-      <p:sp>
-        <p:nvSpPr>
-          <p:cNvPr id="20" name="TextBox 19"/>
-          <p:cNvSpPr txBox="1"/>
-          <p:nvPr/>
-        </p:nvSpPr>
-        <p:spPr>
-          <a:xfrm>
-            <a:off x="6766560" y="3054096"/>
-            <a:ext cx="4251960" cy="347472"/>
-          </a:xfrm>
-          <a:prstGeom prst="rect">
-            <a:avLst/>
-          </a:prstGeom>
-          <a:noFill/>
-        </p:spPr>
-        <p:txBody>
-          <a:bodyPr wrap="square" anchor="t" lIns="18288" rIns="18288" tIns="9144" bIns="9144">
-            <a:spAutoFit/>
-          </a:bodyPr>
-          <a:lstStyle/>
-          <a:p>
-            <a:pPr algn="ctr">
-              <a:defRPr sz="1800" b="1">
-                <a:solidFill>
-                  <a:srgbClr val="2AD3CD"/>
-                </a:solidFill>
-                <a:latin typeface="Malgun Gothic"/>
-              </a:defRPr>
-            </a:pPr>
-            <a:r>
-              <a:t>RETRIGGER + IMBALANCE 대응</a:t>
-            </a:r>
-          </a:p>
-        </p:txBody>
-      </p:sp>
-      <p:sp>
-        <p:nvSpPr>
-          <p:cNvPr id="21" name="TextBox 20"/>
-          <p:cNvSpPr txBox="1"/>
-          <p:nvPr/>
-        </p:nvSpPr>
-        <p:spPr>
-          <a:xfrm>
-            <a:off x="6766560" y="3886200"/>
-            <a:ext cx="4251960" cy="384048"/>
-          </a:xfrm>
-          <a:prstGeom prst="rect">
-            <a:avLst/>
-          </a:prstGeom>
-          <a:noFill/>
-        </p:spPr>
-        <p:txBody>
-          <a:bodyPr wrap="square" anchor="t" lIns="18288" rIns="18288" tIns="9144" bIns="9144">
-            <a:spAutoFit/>
-          </a:bodyPr>
-          <a:lstStyle/>
-          <a:p>
-            <a:pPr algn="ctr">
-              <a:defRPr sz="2500" b="1">
-                <a:solidFill>
-                  <a:srgbClr val="37CD85"/>
-                </a:solidFill>
-                <a:latin typeface="Malgun Gothic"/>
-              </a:defRPr>
-            </a:pPr>
-            <a:r>
-              <a:t>0.47%  ·  502 loss</a:t>
-            </a:r>
-          </a:p>
-        </p:txBody>
-      </p:sp>
-      <p:sp>
-        <p:nvSpPr>
-          <p:cNvPr id="22" name="Rounded Rectangle 21"/>
+              <a:defRPr sz="3400" b="1">
+                <a:solidFill>
+                  <a:srgbClr val="FFB746"/>
+                </a:solidFill>
+                <a:latin typeface="Malgun Gothic"/>
+              </a:defRPr>
+            </a:pPr>
+            <a:r>
+              <a:t>→</a:t>
+            </a:r>
+          </a:p>
+        </p:txBody>
+      </p:sp>
+      <p:sp>
+        <p:nvSpPr>
+          <p:cNvPr id="23" name="Rounded Rectangle 22"/>
           <p:cNvSpPr/>
           <p:nvPr/>
         </p:nvSpPr>
         <p:spPr>
           <a:xfrm>
-            <a:off x="713232" y="5669280"/>
-            <a:ext cx="10771632" cy="566928"/>
+            <a:off x="3675887" y="1325880"/>
+            <a:ext cx="2834640" cy="1874519"/>
           </a:xfrm>
           <a:prstGeom prst="roundRect">
             <a:avLst/>
@@ -7411,7 +7051,732 @@
       </p:sp>
       <p:sp>
         <p:nvSpPr>
-          <p:cNvPr id="23" name="TextBox 22"/>
+          <p:cNvPr id="24" name="TextBox 23"/>
+          <p:cNvSpPr txBox="1"/>
+          <p:nvPr/>
+        </p:nvSpPr>
+        <p:spPr>
+          <a:xfrm>
+            <a:off x="3931920" y="1627632"/>
+            <a:ext cx="2331720" cy="292608"/>
+          </a:xfrm>
+          <a:prstGeom prst="rect">
+            <a:avLst/>
+          </a:prstGeom>
+          <a:noFill/>
+        </p:spPr>
+        <p:txBody>
+          <a:bodyPr wrap="square" anchor="t" lIns="18288" rIns="18288" tIns="9144" bIns="9144">
+            <a:spAutoFit/>
+          </a:bodyPr>
+          <a:lstStyle/>
+          <a:p>
+            <a:pPr algn="ctr">
+              <a:defRPr sz="1800" b="1">
+                <a:solidFill>
+                  <a:srgbClr val="F6F9FC"/>
+                </a:solidFill>
+                <a:latin typeface="Malgun Gothic"/>
+              </a:defRPr>
+            </a:pPr>
+            <a:r>
+              <a:t>공유 arbitration</a:t>
+            </a:r>
+          </a:p>
+        </p:txBody>
+      </p:sp>
+      <p:sp>
+        <p:nvSpPr>
+          <p:cNvPr id="25" name="TextBox 24"/>
+          <p:cNvSpPr txBox="1"/>
+          <p:nvPr/>
+        </p:nvSpPr>
+        <p:spPr>
+          <a:xfrm>
+            <a:off x="4069080" y="2103120"/>
+            <a:ext cx="2057400" cy="658368"/>
+          </a:xfrm>
+          <a:prstGeom prst="rect">
+            <a:avLst/>
+          </a:prstGeom>
+          <a:noFill/>
+        </p:spPr>
+        <p:txBody>
+          <a:bodyPr wrap="square" anchor="t" lIns="18288" rIns="18288" tIns="9144" bIns="9144">
+            <a:spAutoFit/>
+          </a:bodyPr>
+          <a:lstStyle/>
+          <a:p>
+            <a:pPr algn="ctr">
+              <a:defRPr sz="1500" b="0">
+                <a:solidFill>
+                  <a:srgbClr val="ACC2D6"/>
+                </a:solidFill>
+                <a:latin typeface="Malgun Gothic"/>
+              </a:defRPr>
+            </a:pPr>
+            <a:r>
+              <a:t>여러 event가</a:t>
+            </a:r>
+            <a:br/>
+            <a:r>
+              <a:t>하나의 출력 순서를 기다림</a:t>
+            </a:r>
+          </a:p>
+        </p:txBody>
+      </p:sp>
+      <p:sp>
+        <p:nvSpPr>
+          <p:cNvPr id="26" name="TextBox 25"/>
+          <p:cNvSpPr txBox="1"/>
+          <p:nvPr/>
+        </p:nvSpPr>
+        <p:spPr>
+          <a:xfrm>
+            <a:off x="6748272" y="1993392"/>
+            <a:ext cx="640080" cy="411480"/>
+          </a:xfrm>
+          <a:prstGeom prst="rect">
+            <a:avLst/>
+          </a:prstGeom>
+          <a:noFill/>
+        </p:spPr>
+        <p:txBody>
+          <a:bodyPr wrap="square" anchor="t" lIns="18288" rIns="18288" tIns="9144" bIns="9144">
+            <a:spAutoFit/>
+          </a:bodyPr>
+          <a:lstStyle/>
+          <a:p>
+            <a:pPr algn="ctr">
+              <a:defRPr sz="3400" b="1">
+                <a:solidFill>
+                  <a:srgbClr val="FF6376"/>
+                </a:solidFill>
+                <a:latin typeface="Malgun Gothic"/>
+              </a:defRPr>
+            </a:pPr>
+            <a:r>
+              <a:t>→</a:t>
+            </a:r>
+          </a:p>
+        </p:txBody>
+      </p:sp>
+      <p:sp>
+        <p:nvSpPr>
+          <p:cNvPr id="27" name="Rounded Rectangle 26"/>
+          <p:cNvSpPr/>
+          <p:nvPr/>
+        </p:nvSpPr>
+        <p:spPr>
+          <a:xfrm>
+            <a:off x="7571231" y="1325880"/>
+            <a:ext cx="3611880" cy="1874519"/>
+          </a:xfrm>
+          <a:prstGeom prst="roundRect">
+            <a:avLst/>
+          </a:prstGeom>
+          <a:solidFill>
+            <a:srgbClr val="12304C"/>
+          </a:solidFill>
+          <a:ln w="19050">
+            <a:solidFill>
+              <a:srgbClr val="FF6376"/>
+            </a:solidFill>
+          </a:ln>
+        </p:spPr>
+        <p:style>
+          <a:lnRef idx="1">
+            <a:schemeClr val="accent1"/>
+          </a:lnRef>
+          <a:fillRef idx="3">
+            <a:schemeClr val="accent1"/>
+          </a:fillRef>
+          <a:effectRef idx="2">
+            <a:schemeClr val="accent1"/>
+          </a:effectRef>
+          <a:fontRef idx="minor">
+            <a:schemeClr val="lt1"/>
+          </a:fontRef>
+        </p:style>
+        <p:txBody>
+          <a:bodyPr rtlCol="0" anchor="ctr"/>
+          <a:lstStyle/>
+          <a:p>
+            <a:pPr algn="ctr"/>
+          </a:p>
+        </p:txBody>
+      </p:sp>
+      <p:sp>
+        <p:nvSpPr>
+          <p:cNvPr id="28" name="TextBox 27"/>
+          <p:cNvSpPr txBox="1"/>
+          <p:nvPr/>
+        </p:nvSpPr>
+        <p:spPr>
+          <a:xfrm>
+            <a:off x="7882127" y="1664208"/>
+            <a:ext cx="2971800" cy="384048"/>
+          </a:xfrm>
+          <a:prstGeom prst="rect">
+            <a:avLst/>
+          </a:prstGeom>
+          <a:noFill/>
+        </p:spPr>
+        <p:txBody>
+          <a:bodyPr wrap="square" anchor="t" lIns="18288" rIns="18288" tIns="9144" bIns="9144">
+            <a:spAutoFit/>
+          </a:bodyPr>
+          <a:lstStyle/>
+          <a:p>
+            <a:pPr algn="ctr">
+              <a:defRPr sz="2400" b="1">
+                <a:solidFill>
+                  <a:srgbClr val="FF6376"/>
+                </a:solidFill>
+                <a:latin typeface="Malgun Gothic"/>
+              </a:defRPr>
+            </a:pPr>
+            <a:r>
+              <a:t>1 EVENT / CYCLE</a:t>
+            </a:r>
+          </a:p>
+        </p:txBody>
+      </p:sp>
+      <p:sp>
+        <p:nvSpPr>
+          <p:cNvPr id="29" name="TextBox 28"/>
+          <p:cNvSpPr txBox="1"/>
+          <p:nvPr/>
+        </p:nvSpPr>
+        <p:spPr>
+          <a:xfrm>
+            <a:off x="7818120" y="2331720"/>
+            <a:ext cx="3108960" cy="347472"/>
+          </a:xfrm>
+          <a:prstGeom prst="rect">
+            <a:avLst/>
+          </a:prstGeom>
+          <a:noFill/>
+        </p:spPr>
+        <p:txBody>
+          <a:bodyPr wrap="square" anchor="t" lIns="18288" rIns="18288" tIns="9144" bIns="9144">
+            <a:spAutoFit/>
+          </a:bodyPr>
+          <a:lstStyle/>
+          <a:p>
+            <a:pPr algn="ctr">
+              <a:defRPr sz="1500" b="1">
+                <a:solidFill>
+                  <a:srgbClr val="F6F9FC"/>
+                </a:solidFill>
+                <a:latin typeface="Malgun Gothic"/>
+              </a:defRPr>
+            </a:pPr>
+            <a:r>
+              <a:t>대기 누적  →  source-local overrun</a:t>
+            </a:r>
+          </a:p>
+        </p:txBody>
+      </p:sp>
+      <p:sp>
+        <p:nvSpPr>
+          <p:cNvPr id="30" name="Rounded Rectangle 29"/>
+          <p:cNvSpPr/>
+          <p:nvPr/>
+        </p:nvSpPr>
+        <p:spPr>
+          <a:xfrm>
+            <a:off x="749808" y="3730752"/>
+            <a:ext cx="3218688" cy="1234440"/>
+          </a:xfrm>
+          <a:prstGeom prst="roundRect">
+            <a:avLst/>
+          </a:prstGeom>
+          <a:solidFill>
+            <a:srgbClr val="12304C"/>
+          </a:solidFill>
+          <a:ln>
+            <a:noFill/>
+          </a:ln>
+        </p:spPr>
+        <p:style>
+          <a:lnRef idx="1">
+            <a:schemeClr val="accent1"/>
+          </a:lnRef>
+          <a:fillRef idx="3">
+            <a:schemeClr val="accent1"/>
+          </a:fillRef>
+          <a:effectRef idx="2">
+            <a:schemeClr val="accent1"/>
+          </a:effectRef>
+          <a:fontRef idx="minor">
+            <a:schemeClr val="lt1"/>
+          </a:fontRef>
+        </p:style>
+        <p:txBody>
+          <a:bodyPr rtlCol="0" anchor="ctr"/>
+          <a:lstStyle/>
+          <a:p>
+            <a:pPr algn="ctr"/>
+          </a:p>
+        </p:txBody>
+      </p:sp>
+      <p:sp>
+        <p:nvSpPr>
+          <p:cNvPr id="31" name="TextBox 30"/>
+          <p:cNvSpPr txBox="1"/>
+          <p:nvPr/>
+        </p:nvSpPr>
+        <p:spPr>
+          <a:xfrm>
+            <a:off x="914400" y="3858768"/>
+            <a:ext cx="2889504" cy="201168"/>
+          </a:xfrm>
+          <a:prstGeom prst="rect">
+            <a:avLst/>
+          </a:prstGeom>
+          <a:noFill/>
+        </p:spPr>
+        <p:txBody>
+          <a:bodyPr wrap="square" anchor="t" lIns="18288" rIns="18288" tIns="9144" bIns="9144">
+            <a:spAutoFit/>
+          </a:bodyPr>
+          <a:lstStyle/>
+          <a:p>
+            <a:pPr algn="l">
+              <a:defRPr sz="1000" b="1">
+                <a:solidFill>
+                  <a:srgbClr val="ACC2D6"/>
+                </a:solidFill>
+                <a:latin typeface="Malgun Gothic"/>
+              </a:defRPr>
+            </a:pPr>
+            <a:r>
+              <a:t>ACCEPTED</a:t>
+            </a:r>
+          </a:p>
+        </p:txBody>
+      </p:sp>
+      <p:sp>
+        <p:nvSpPr>
+          <p:cNvPr id="32" name="TextBox 31"/>
+          <p:cNvSpPr txBox="1"/>
+          <p:nvPr/>
+        </p:nvSpPr>
+        <p:spPr>
+          <a:xfrm>
+            <a:off x="914400" y="4169664"/>
+            <a:ext cx="2889504" cy="475488"/>
+          </a:xfrm>
+          <a:prstGeom prst="rect">
+            <a:avLst/>
+          </a:prstGeom>
+          <a:noFill/>
+        </p:spPr>
+        <p:txBody>
+          <a:bodyPr wrap="square" anchor="ctr" lIns="18288" rIns="18288" tIns="9144" bIns="9144">
+            <a:spAutoFit/>
+          </a:bodyPr>
+          <a:lstStyle/>
+          <a:p>
+            <a:pPr algn="l">
+              <a:defRPr sz="2400" b="1">
+                <a:solidFill>
+                  <a:srgbClr val="FFB746"/>
+                </a:solidFill>
+                <a:latin typeface="Malgun Gothic"/>
+              </a:defRPr>
+            </a:pPr>
+            <a:r>
+              <a:t>78,229 / 106,416</a:t>
+            </a:r>
+          </a:p>
+        </p:txBody>
+      </p:sp>
+      <p:sp>
+        <p:nvSpPr>
+          <p:cNvPr id="33" name="TextBox 32"/>
+          <p:cNvSpPr txBox="1"/>
+          <p:nvPr/>
+        </p:nvSpPr>
+        <p:spPr>
+          <a:xfrm>
+            <a:off x="914400" y="4645152"/>
+            <a:ext cx="2889504" cy="182880"/>
+          </a:xfrm>
+          <a:prstGeom prst="rect">
+            <a:avLst/>
+          </a:prstGeom>
+          <a:noFill/>
+        </p:spPr>
+        <p:txBody>
+          <a:bodyPr wrap="square" anchor="t" lIns="18288" rIns="18288" tIns="9144" bIns="9144">
+            <a:spAutoFit/>
+          </a:bodyPr>
+          <a:lstStyle/>
+          <a:p>
+            <a:pPr algn="l">
+              <a:defRPr sz="900" b="0">
+                <a:solidFill>
+                  <a:srgbClr val="ACC2D6"/>
+                </a:solidFill>
+                <a:latin typeface="Malgun Gothic"/>
+              </a:defRPr>
+            </a:pPr>
+            <a:r>
+              <a:t>73.51%</a:t>
+            </a:r>
+          </a:p>
+        </p:txBody>
+      </p:sp>
+      <p:sp>
+        <p:nvSpPr>
+          <p:cNvPr id="34" name="Rounded Rectangle 33"/>
+          <p:cNvSpPr/>
+          <p:nvPr/>
+        </p:nvSpPr>
+        <p:spPr>
+          <a:xfrm>
+            <a:off x="4453128" y="3730752"/>
+            <a:ext cx="2743200" cy="1234440"/>
+          </a:xfrm>
+          <a:prstGeom prst="roundRect">
+            <a:avLst/>
+          </a:prstGeom>
+          <a:solidFill>
+            <a:srgbClr val="12304C"/>
+          </a:solidFill>
+          <a:ln>
+            <a:noFill/>
+          </a:ln>
+        </p:spPr>
+        <p:style>
+          <a:lnRef idx="1">
+            <a:schemeClr val="accent1"/>
+          </a:lnRef>
+          <a:fillRef idx="3">
+            <a:schemeClr val="accent1"/>
+          </a:fillRef>
+          <a:effectRef idx="2">
+            <a:schemeClr val="accent1"/>
+          </a:effectRef>
+          <a:fontRef idx="minor">
+            <a:schemeClr val="lt1"/>
+          </a:fontRef>
+        </p:style>
+        <p:txBody>
+          <a:bodyPr rtlCol="0" anchor="ctr"/>
+          <a:lstStyle/>
+          <a:p>
+            <a:pPr algn="ctr"/>
+          </a:p>
+        </p:txBody>
+      </p:sp>
+      <p:sp>
+        <p:nvSpPr>
+          <p:cNvPr id="35" name="TextBox 34"/>
+          <p:cNvSpPr txBox="1"/>
+          <p:nvPr/>
+        </p:nvSpPr>
+        <p:spPr>
+          <a:xfrm>
+            <a:off x="4617720" y="3858768"/>
+            <a:ext cx="2414016" cy="201168"/>
+          </a:xfrm>
+          <a:prstGeom prst="rect">
+            <a:avLst/>
+          </a:prstGeom>
+          <a:noFill/>
+        </p:spPr>
+        <p:txBody>
+          <a:bodyPr wrap="square" anchor="t" lIns="18288" rIns="18288" tIns="9144" bIns="9144">
+            <a:spAutoFit/>
+          </a:bodyPr>
+          <a:lstStyle/>
+          <a:p>
+            <a:pPr algn="l">
+              <a:defRPr sz="1000" b="1">
+                <a:solidFill>
+                  <a:srgbClr val="ACC2D6"/>
+                </a:solidFill>
+                <a:latin typeface="Malgun Gothic"/>
+              </a:defRPr>
+            </a:pPr>
+            <a:r>
+              <a:t>OVERRUN</a:t>
+            </a:r>
+          </a:p>
+        </p:txBody>
+      </p:sp>
+      <p:sp>
+        <p:nvSpPr>
+          <p:cNvPr id="36" name="TextBox 35"/>
+          <p:cNvSpPr txBox="1"/>
+          <p:nvPr/>
+        </p:nvSpPr>
+        <p:spPr>
+          <a:xfrm>
+            <a:off x="4617720" y="4169664"/>
+            <a:ext cx="2414016" cy="475488"/>
+          </a:xfrm>
+          <a:prstGeom prst="rect">
+            <a:avLst/>
+          </a:prstGeom>
+          <a:noFill/>
+        </p:spPr>
+        <p:txBody>
+          <a:bodyPr wrap="square" anchor="ctr" lIns="18288" rIns="18288" tIns="9144" bIns="9144">
+            <a:spAutoFit/>
+          </a:bodyPr>
+          <a:lstStyle/>
+          <a:p>
+            <a:pPr algn="l">
+              <a:defRPr sz="2800" b="1">
+                <a:solidFill>
+                  <a:srgbClr val="FF6376"/>
+                </a:solidFill>
+                <a:latin typeface="Malgun Gothic"/>
+              </a:defRPr>
+            </a:pPr>
+            <a:r>
+              <a:t>28,187</a:t>
+            </a:r>
+          </a:p>
+        </p:txBody>
+      </p:sp>
+      <p:sp>
+        <p:nvSpPr>
+          <p:cNvPr id="37" name="TextBox 36"/>
+          <p:cNvSpPr txBox="1"/>
+          <p:nvPr/>
+        </p:nvSpPr>
+        <p:spPr>
+          <a:xfrm>
+            <a:off x="4617720" y="4645152"/>
+            <a:ext cx="2414016" cy="182880"/>
+          </a:xfrm>
+          <a:prstGeom prst="rect">
+            <a:avLst/>
+          </a:prstGeom>
+          <a:noFill/>
+        </p:spPr>
+        <p:txBody>
+          <a:bodyPr wrap="square" anchor="t" lIns="18288" rIns="18288" tIns="9144" bIns="9144">
+            <a:spAutoFit/>
+          </a:bodyPr>
+          <a:lstStyle/>
+          <a:p>
+            <a:pPr algn="l">
+              <a:defRPr sz="900" b="0">
+                <a:solidFill>
+                  <a:srgbClr val="ACC2D6"/>
+                </a:solidFill>
+                <a:latin typeface="Malgun Gothic"/>
+              </a:defRPr>
+            </a:pPr>
+            <a:r>
+              <a:t>full50 baseline</a:t>
+            </a:r>
+          </a:p>
+        </p:txBody>
+      </p:sp>
+      <p:sp>
+        <p:nvSpPr>
+          <p:cNvPr id="38" name="Rounded Rectangle 37"/>
+          <p:cNvSpPr/>
+          <p:nvPr/>
+        </p:nvSpPr>
+        <p:spPr>
+          <a:xfrm>
+            <a:off x="7680960" y="3730752"/>
+            <a:ext cx="3493008" cy="1234440"/>
+          </a:xfrm>
+          <a:prstGeom prst="roundRect">
+            <a:avLst/>
+          </a:prstGeom>
+          <a:solidFill>
+            <a:srgbClr val="12304C"/>
+          </a:solidFill>
+          <a:ln>
+            <a:noFill/>
+          </a:ln>
+        </p:spPr>
+        <p:style>
+          <a:lnRef idx="1">
+            <a:schemeClr val="accent1"/>
+          </a:lnRef>
+          <a:fillRef idx="3">
+            <a:schemeClr val="accent1"/>
+          </a:fillRef>
+          <a:effectRef idx="2">
+            <a:schemeClr val="accent1"/>
+          </a:effectRef>
+          <a:fontRef idx="minor">
+            <a:schemeClr val="lt1"/>
+          </a:fontRef>
+        </p:style>
+        <p:txBody>
+          <a:bodyPr rtlCol="0" anchor="ctr"/>
+          <a:lstStyle/>
+          <a:p>
+            <a:pPr algn="ctr"/>
+          </a:p>
+        </p:txBody>
+      </p:sp>
+      <p:sp>
+        <p:nvSpPr>
+          <p:cNvPr id="39" name="TextBox 38"/>
+          <p:cNvSpPr txBox="1"/>
+          <p:nvPr/>
+        </p:nvSpPr>
+        <p:spPr>
+          <a:xfrm>
+            <a:off x="7845552" y="3858768"/>
+            <a:ext cx="3163824" cy="201168"/>
+          </a:xfrm>
+          <a:prstGeom prst="rect">
+            <a:avLst/>
+          </a:prstGeom>
+          <a:noFill/>
+        </p:spPr>
+        <p:txBody>
+          <a:bodyPr wrap="square" anchor="t" lIns="18288" rIns="18288" tIns="9144" bIns="9144">
+            <a:spAutoFit/>
+          </a:bodyPr>
+          <a:lstStyle/>
+          <a:p>
+            <a:pPr algn="l">
+              <a:defRPr sz="1000" b="1">
+                <a:solidFill>
+                  <a:srgbClr val="ACC2D6"/>
+                </a:solidFill>
+                <a:latin typeface="Malgun Gothic"/>
+              </a:defRPr>
+            </a:pPr>
+            <a:r>
+              <a:t>THROUGHPUT</a:t>
+            </a:r>
+          </a:p>
+        </p:txBody>
+      </p:sp>
+      <p:sp>
+        <p:nvSpPr>
+          <p:cNvPr id="40" name="TextBox 39"/>
+          <p:cNvSpPr txBox="1"/>
+          <p:nvPr/>
+        </p:nvSpPr>
+        <p:spPr>
+          <a:xfrm>
+            <a:off x="7845552" y="4169664"/>
+            <a:ext cx="3163824" cy="475488"/>
+          </a:xfrm>
+          <a:prstGeom prst="rect">
+            <a:avLst/>
+          </a:prstGeom>
+          <a:noFill/>
+        </p:spPr>
+        <p:txBody>
+          <a:bodyPr wrap="square" anchor="ctr" lIns="18288" rIns="18288" tIns="9144" bIns="9144">
+            <a:spAutoFit/>
+          </a:bodyPr>
+          <a:lstStyle/>
+          <a:p>
+            <a:pPr algn="l">
+              <a:defRPr sz="2700" b="1">
+                <a:solidFill>
+                  <a:srgbClr val="FF6376"/>
+                </a:solidFill>
+                <a:latin typeface="Malgun Gothic"/>
+              </a:defRPr>
+            </a:pPr>
+            <a:r>
+              <a:t>0.673901 EPC</a:t>
+            </a:r>
+          </a:p>
+        </p:txBody>
+      </p:sp>
+      <p:sp>
+        <p:nvSpPr>
+          <p:cNvPr id="41" name="TextBox 40"/>
+          <p:cNvSpPr txBox="1"/>
+          <p:nvPr/>
+        </p:nvSpPr>
+        <p:spPr>
+          <a:xfrm>
+            <a:off x="7845552" y="4645152"/>
+            <a:ext cx="3163824" cy="182880"/>
+          </a:xfrm>
+          <a:prstGeom prst="rect">
+            <a:avLst/>
+          </a:prstGeom>
+          <a:noFill/>
+        </p:spPr>
+        <p:txBody>
+          <a:bodyPr wrap="square" anchor="t" lIns="18288" rIns="18288" tIns="9144" bIns="9144">
+            <a:spAutoFit/>
+          </a:bodyPr>
+          <a:lstStyle/>
+          <a:p>
+            <a:pPr algn="l">
+              <a:defRPr sz="900" b="0">
+                <a:solidFill>
+                  <a:srgbClr val="ACC2D6"/>
+                </a:solidFill>
+                <a:latin typeface="Malgun Gothic"/>
+              </a:defRPr>
+            </a:pPr>
+            <a:r>
+              <a:t>fixed-window</a:t>
+            </a:r>
+          </a:p>
+        </p:txBody>
+      </p:sp>
+      <p:sp>
+        <p:nvSpPr>
+          <p:cNvPr id="42" name="Rounded Rectangle 41"/>
+          <p:cNvSpPr/>
+          <p:nvPr/>
+        </p:nvSpPr>
+        <p:spPr>
+          <a:xfrm>
+            <a:off x="713232" y="5669280"/>
+            <a:ext cx="10771632" cy="566928"/>
+          </a:xfrm>
+          <a:prstGeom prst="roundRect">
+            <a:avLst/>
+          </a:prstGeom>
+          <a:solidFill>
+            <a:srgbClr val="12304C"/>
+          </a:solidFill>
+          <a:ln>
+            <a:noFill/>
+          </a:ln>
+        </p:spPr>
+        <p:style>
+          <a:lnRef idx="1">
+            <a:schemeClr val="accent1"/>
+          </a:lnRef>
+          <a:fillRef idx="3">
+            <a:schemeClr val="accent1"/>
+          </a:fillRef>
+          <a:effectRef idx="2">
+            <a:schemeClr val="accent1"/>
+          </a:effectRef>
+          <a:fontRef idx="minor">
+            <a:schemeClr val="lt1"/>
+          </a:fontRef>
+        </p:style>
+        <p:txBody>
+          <a:bodyPr rtlCol="0" anchor="ctr"/>
+          <a:lstStyle/>
+          <a:p>
+            <a:pPr algn="ctr"/>
+          </a:p>
+        </p:txBody>
+      </p:sp>
+      <p:sp>
+        <p:nvSpPr>
+          <p:cNvPr id="43" name="TextBox 42"/>
           <p:cNvSpPr txBox="1"/>
           <p:nvPr/>
         </p:nvSpPr>
@@ -7434,20 +7799,20 @@
             <a:pPr algn="ctr">
               <a:defRPr sz="1600" b="1">
                 <a:solidFill>
-                  <a:srgbClr val="37CD85"/>
-                </a:solidFill>
-                <a:latin typeface="Malgun Gothic"/>
-              </a:defRPr>
-            </a:pPr>
-            <a:r>
-              <a:t>동일 106,416 events · 손실 12,259 → 502 · 24.42배 감소(−95.9%)</a:t>
-            </a:r>
-          </a:p>
-        </p:txBody>
-      </p:sp>
-      <p:sp>
-        <p:nvSpPr>
-          <p:cNvPr id="24" name="Rectangle 23"/>
+                  <a:srgbClr val="FFB746"/>
+                </a:solidFill>
+                <a:latin typeface="Malgun Gothic"/>
+              </a:defRPr>
+            </a:pPr>
+            <a:r>
+              <a:t>발생률이 서비스율을 넘는 순간, scalar 출력이 손실의 원인이 된다</a:t>
+            </a:r>
+          </a:p>
+        </p:txBody>
+      </p:sp>
+      <p:sp>
+        <p:nvSpPr>
+          <p:cNvPr id="44" name="Rectangle 43"/>
           <p:cNvSpPr/>
           <p:nvPr/>
         </p:nvSpPr>
@@ -7490,7 +7855,7 @@
       </p:sp>
       <p:sp>
         <p:nvSpPr>
-          <p:cNvPr id="25" name="Rounded Rectangle 24"/>
+          <p:cNvPr id="45" name="Rounded Rectangle 44"/>
           <p:cNvSpPr/>
           <p:nvPr/>
         </p:nvSpPr>
@@ -7533,7 +7898,7 @@
       </p:sp>
       <p:sp>
         <p:nvSpPr>
-          <p:cNvPr id="26" name="TextBox 25"/>
+          <p:cNvPr id="46" name="TextBox 45"/>
           <p:cNvSpPr txBox="1"/>
           <p:nvPr/>
         </p:nvSpPr>
@@ -7562,14 +7927,14 @@
               </a:defRPr>
             </a:pPr>
             <a:r>
-              <a:t>02  핵심</a:t>
-            </a:r>
-          </a:p>
-        </p:txBody>
-      </p:sp>
-      <p:sp>
-        <p:nvSpPr>
-          <p:cNvPr id="27" name="TextBox 26"/>
+              <a:t>01  병목</a:t>
+            </a:r>
+          </a:p>
+        </p:txBody>
+      </p:sp>
+      <p:sp>
+        <p:nvSpPr>
+          <p:cNvPr id="47" name="TextBox 46"/>
           <p:cNvSpPr txBox="1"/>
           <p:nvPr/>
         </p:nvSpPr>
@@ -7598,14 +7963,14 @@
               </a:defRPr>
             </a:pPr>
             <a:r>
-              <a:t>기본 Cluster2의 빈틈을 steal_buf가 직접 메운다</a:t>
-            </a:r>
-          </a:p>
-        </p:txBody>
-      </p:sp>
-      <p:sp>
-        <p:nvSpPr>
-          <p:cNvPr id="28" name="Rectangle 27"/>
+              <a:t>① 출력 직렬화가 ② source-local overrun으로 이어진다</a:t>
+            </a:r>
+          </a:p>
+        </p:txBody>
+      </p:sp>
+      <p:sp>
+        <p:nvSpPr>
+          <p:cNvPr id="48" name="Rectangle 47"/>
           <p:cNvSpPr/>
           <p:nvPr/>
         </p:nvSpPr>
@@ -11796,7 +12161,7 @@
               </a:defRPr>
             </a:pPr>
             <a:r>
-              <a:t>03  정량</a:t>
+              <a:t>03  결과</a:t>
             </a:r>
           </a:p>
         </p:txBody>
@@ -11832,7 +12197,7 @@
               </a:defRPr>
             </a:pPr>
             <a:r>
-              <a:t>공식 50-workload에서 steal_buf가 손실을 거의 제거</a:t>
+              <a:t>대역폭·overflow 병목은 수치로 개선됐다</a:t>
             </a:r>
           </a:p>
         </p:txBody>
@@ -11911,7 +12276,7 @@
               </a:defRPr>
             </a:pPr>
             <a:r>
-              <a:t>Source: Xcelium 23.09-s013 · 50/50 PHANTOM_DEBUG_PASS</a:t>
+              <a:t>Source: recovered Xcelium full50 · scalar Fovea vs original Cluster2 architecture family</a:t>
             </a:r>
           </a:p>
         </p:txBody>
@@ -11954,14 +12319,201 @@
       </p:sp>
       <p:sp>
         <p:nvSpPr>
-          <p:cNvPr id="9" name="Rounded Rectangle 8"/>
+          <p:cNvPr id="9" name="TextBox 8"/>
+          <p:cNvSpPr txBox="1"/>
+          <p:nvPr/>
+        </p:nvSpPr>
+        <p:spPr>
+          <a:xfrm>
+            <a:off x="713232" y="1389888"/>
+            <a:ext cx="1353312" cy="274320"/>
+          </a:xfrm>
+          <a:prstGeom prst="rect">
+            <a:avLst/>
+          </a:prstGeom>
+          <a:noFill/>
+        </p:spPr>
+        <p:txBody>
+          <a:bodyPr wrap="square" anchor="t" lIns="18288" rIns="18288" tIns="9144" bIns="9144">
+            <a:spAutoFit/>
+          </a:bodyPr>
+          <a:lstStyle/>
+          <a:p>
+            <a:pPr algn="l">
+              <a:defRPr sz="1400" b="1">
+                <a:solidFill>
+                  <a:srgbClr val="ACC2D6"/>
+                </a:solidFill>
+                <a:latin typeface="Malgun Gothic"/>
+              </a:defRPr>
+            </a:pPr>
+            <a:r>
+              <a:t>ACCEPTED</a:t>
+            </a:r>
+          </a:p>
+        </p:txBody>
+      </p:sp>
+      <p:sp>
+        <p:nvSpPr>
+          <p:cNvPr id="10" name="Rounded Rectangle 9"/>
           <p:cNvSpPr/>
           <p:nvPr/>
         </p:nvSpPr>
         <p:spPr>
           <a:xfrm>
-            <a:off x="658368" y="1280160"/>
-            <a:ext cx="2487168" cy="2423160"/>
+            <a:off x="2212848" y="1143000"/>
+            <a:ext cx="2770632" cy="896112"/>
+          </a:xfrm>
+          <a:prstGeom prst="roundRect">
+            <a:avLst/>
+          </a:prstGeom>
+          <a:solidFill>
+            <a:srgbClr val="12304C"/>
+          </a:solidFill>
+          <a:ln>
+            <a:noFill/>
+          </a:ln>
+        </p:spPr>
+        <p:style>
+          <a:lnRef idx="1">
+            <a:schemeClr val="accent1"/>
+          </a:lnRef>
+          <a:fillRef idx="3">
+            <a:schemeClr val="accent1"/>
+          </a:fillRef>
+          <a:effectRef idx="2">
+            <a:schemeClr val="accent1"/>
+          </a:effectRef>
+          <a:fontRef idx="minor">
+            <a:schemeClr val="lt1"/>
+          </a:fontRef>
+        </p:style>
+        <p:txBody>
+          <a:bodyPr rtlCol="0" anchor="ctr"/>
+          <a:lstStyle/>
+          <a:p>
+            <a:pPr algn="ctr"/>
+          </a:p>
+        </p:txBody>
+      </p:sp>
+      <p:sp>
+        <p:nvSpPr>
+          <p:cNvPr id="11" name="TextBox 10"/>
+          <p:cNvSpPr txBox="1"/>
+          <p:nvPr/>
+        </p:nvSpPr>
+        <p:spPr>
+          <a:xfrm>
+            <a:off x="2395728" y="1271016"/>
+            <a:ext cx="713232" cy="164592"/>
+          </a:xfrm>
+          <a:prstGeom prst="rect">
+            <a:avLst/>
+          </a:prstGeom>
+          <a:noFill/>
+        </p:spPr>
+        <p:txBody>
+          <a:bodyPr wrap="square" anchor="t" lIns="18288" rIns="18288" tIns="9144" bIns="9144">
+            <a:spAutoFit/>
+          </a:bodyPr>
+          <a:lstStyle/>
+          <a:p>
+            <a:pPr algn="l">
+              <a:defRPr sz="900" b="1">
+                <a:solidFill>
+                  <a:srgbClr val="ACC2D6"/>
+                </a:solidFill>
+                <a:latin typeface="Malgun Gothic"/>
+              </a:defRPr>
+            </a:pPr>
+            <a:r>
+              <a:t>SCALAR</a:t>
+            </a:r>
+          </a:p>
+        </p:txBody>
+      </p:sp>
+      <p:sp>
+        <p:nvSpPr>
+          <p:cNvPr id="12" name="TextBox 11"/>
+          <p:cNvSpPr txBox="1"/>
+          <p:nvPr/>
+        </p:nvSpPr>
+        <p:spPr>
+          <a:xfrm>
+            <a:off x="2395728" y="1527048"/>
+            <a:ext cx="2322576" cy="310896"/>
+          </a:xfrm>
+          <a:prstGeom prst="rect">
+            <a:avLst/>
+          </a:prstGeom>
+          <a:noFill/>
+        </p:spPr>
+        <p:txBody>
+          <a:bodyPr wrap="square" anchor="t" lIns="18288" rIns="18288" tIns="9144" bIns="9144">
+            <a:spAutoFit/>
+          </a:bodyPr>
+          <a:lstStyle/>
+          <a:p>
+            <a:pPr algn="l">
+              <a:defRPr sz="2200" b="1">
+                <a:solidFill>
+                  <a:srgbClr val="FFB746"/>
+                </a:solidFill>
+                <a:latin typeface="Malgun Gothic"/>
+              </a:defRPr>
+            </a:pPr>
+            <a:r>
+              <a:t>78,229</a:t>
+            </a:r>
+          </a:p>
+        </p:txBody>
+      </p:sp>
+      <p:sp>
+        <p:nvSpPr>
+          <p:cNvPr id="13" name="TextBox 12"/>
+          <p:cNvSpPr txBox="1"/>
+          <p:nvPr/>
+        </p:nvSpPr>
+        <p:spPr>
+          <a:xfrm>
+            <a:off x="5184648" y="1362456"/>
+            <a:ext cx="566928" cy="411480"/>
+          </a:xfrm>
+          <a:prstGeom prst="rect">
+            <a:avLst/>
+          </a:prstGeom>
+          <a:noFill/>
+        </p:spPr>
+        <p:txBody>
+          <a:bodyPr wrap="square" anchor="t" lIns="18288" rIns="18288" tIns="9144" bIns="9144">
+            <a:spAutoFit/>
+          </a:bodyPr>
+          <a:lstStyle/>
+          <a:p>
+            <a:pPr algn="ctr">
+              <a:defRPr sz="3000" b="1">
+                <a:solidFill>
+                  <a:srgbClr val="2AD3CD"/>
+                </a:solidFill>
+                <a:latin typeface="Malgun Gothic"/>
+              </a:defRPr>
+            </a:pPr>
+            <a:r>
+              <a:t>→</a:t>
+            </a:r>
+          </a:p>
+        </p:txBody>
+      </p:sp>
+      <p:sp>
+        <p:nvSpPr>
+          <p:cNvPr id="14" name="Rounded Rectangle 13"/>
+          <p:cNvSpPr/>
+          <p:nvPr/>
+        </p:nvSpPr>
+        <p:spPr>
+          <a:xfrm>
+            <a:off x="5934456" y="1143000"/>
+            <a:ext cx="2770632" cy="896112"/>
           </a:xfrm>
           <a:prstGeom prst="roundRect">
             <a:avLst/>
@@ -11971,7 +12523,7 @@
           </a:solidFill>
           <a:ln w="19050">
             <a:solidFill>
-              <a:srgbClr val="FF6376"/>
+              <a:srgbClr val="37CD85"/>
             </a:solidFill>
           </a:ln>
         </p:spPr>
@@ -11999,14 +12551,129 @@
       </p:sp>
       <p:sp>
         <p:nvSpPr>
-          <p:cNvPr id="10" name="TextBox 9"/>
-          <p:cNvSpPr txBox="1"/>
-          <p:nvPr/>
-        </p:nvSpPr>
-        <p:spPr>
-          <a:xfrm>
-            <a:off x="841247" y="1554480"/>
-            <a:ext cx="2121408" cy="237744"/>
+          <p:cNvPr id="15" name="TextBox 14"/>
+          <p:cNvSpPr txBox="1"/>
+          <p:nvPr/>
+        </p:nvSpPr>
+        <p:spPr>
+          <a:xfrm>
+            <a:off x="6117336" y="1271016"/>
+            <a:ext cx="987552" cy="164592"/>
+          </a:xfrm>
+          <a:prstGeom prst="rect">
+            <a:avLst/>
+          </a:prstGeom>
+          <a:noFill/>
+        </p:spPr>
+        <p:txBody>
+          <a:bodyPr wrap="square" anchor="t" lIns="18288" rIns="18288" tIns="9144" bIns="9144">
+            <a:spAutoFit/>
+          </a:bodyPr>
+          <a:lstStyle/>
+          <a:p>
+            <a:pPr algn="l">
+              <a:defRPr sz="900" b="1">
+                <a:solidFill>
+                  <a:srgbClr val="ACC2D6"/>
+                </a:solidFill>
+                <a:latin typeface="Malgun Gothic"/>
+              </a:defRPr>
+            </a:pPr>
+            <a:r>
+              <a:t>CLUSTER2</a:t>
+            </a:r>
+          </a:p>
+        </p:txBody>
+      </p:sp>
+      <p:sp>
+        <p:nvSpPr>
+          <p:cNvPr id="16" name="TextBox 15"/>
+          <p:cNvSpPr txBox="1"/>
+          <p:nvPr/>
+        </p:nvSpPr>
+        <p:spPr>
+          <a:xfrm>
+            <a:off x="6117336" y="1527048"/>
+            <a:ext cx="2322576" cy="310896"/>
+          </a:xfrm>
+          <a:prstGeom prst="rect">
+            <a:avLst/>
+          </a:prstGeom>
+          <a:noFill/>
+        </p:spPr>
+        <p:txBody>
+          <a:bodyPr wrap="square" anchor="t" lIns="18288" rIns="18288" tIns="9144" bIns="9144">
+            <a:spAutoFit/>
+          </a:bodyPr>
+          <a:lstStyle/>
+          <a:p>
+            <a:pPr algn="l">
+              <a:defRPr sz="2200" b="1">
+                <a:solidFill>
+                  <a:srgbClr val="37CD85"/>
+                </a:solidFill>
+                <a:latin typeface="Malgun Gothic"/>
+              </a:defRPr>
+            </a:pPr>
+            <a:r>
+              <a:t>94,157</a:t>
+            </a:r>
+          </a:p>
+        </p:txBody>
+      </p:sp>
+      <p:sp>
+        <p:nvSpPr>
+          <p:cNvPr id="17" name="Rounded Rectangle 16"/>
+          <p:cNvSpPr/>
+          <p:nvPr/>
+        </p:nvSpPr>
+        <p:spPr>
+          <a:xfrm>
+            <a:off x="9070848" y="1143000"/>
+            <a:ext cx="2194560" cy="896112"/>
+          </a:xfrm>
+          <a:prstGeom prst="roundRect">
+            <a:avLst/>
+          </a:prstGeom>
+          <a:solidFill>
+            <a:srgbClr val="37CD85"/>
+          </a:solidFill>
+          <a:ln>
+            <a:noFill/>
+          </a:ln>
+        </p:spPr>
+        <p:style>
+          <a:lnRef idx="1">
+            <a:schemeClr val="accent1"/>
+          </a:lnRef>
+          <a:fillRef idx="3">
+            <a:schemeClr val="accent1"/>
+          </a:fillRef>
+          <a:effectRef idx="2">
+            <a:schemeClr val="accent1"/>
+          </a:effectRef>
+          <a:fontRef idx="minor">
+            <a:schemeClr val="lt1"/>
+          </a:fontRef>
+        </p:style>
+        <p:txBody>
+          <a:bodyPr rtlCol="0" anchor="ctr"/>
+          <a:lstStyle/>
+          <a:p>
+            <a:pPr algn="ctr"/>
+          </a:p>
+        </p:txBody>
+      </p:sp>
+      <p:sp>
+        <p:nvSpPr>
+          <p:cNvPr id="18" name="TextBox 17"/>
+          <p:cNvSpPr txBox="1"/>
+          <p:nvPr/>
+        </p:nvSpPr>
+        <p:spPr>
+          <a:xfrm>
+            <a:off x="9235440" y="1417320"/>
+            <a:ext cx="1847088" cy="347472"/>
           </a:xfrm>
           <a:prstGeom prst="rect">
             <a:avLst/>
@@ -12020,7 +12687,158 @@
           <a:lstStyle/>
           <a:p>
             <a:pPr algn="ctr">
-              <a:defRPr sz="1300" b="1">
+              <a:defRPr sz="2400" b="1">
+                <a:solidFill>
+                  <a:srgbClr val="071627"/>
+                </a:solidFill>
+                <a:latin typeface="Malgun Gothic"/>
+              </a:defRPr>
+            </a:pPr>
+            <a:r>
+              <a:t>+20.4%</a:t>
+            </a:r>
+          </a:p>
+        </p:txBody>
+      </p:sp>
+      <p:sp>
+        <p:nvSpPr>
+          <p:cNvPr id="19" name="TextBox 18"/>
+          <p:cNvSpPr txBox="1"/>
+          <p:nvPr/>
+        </p:nvSpPr>
+        <p:spPr>
+          <a:xfrm>
+            <a:off x="713232" y="2788920"/>
+            <a:ext cx="1353312" cy="274320"/>
+          </a:xfrm>
+          <a:prstGeom prst="rect">
+            <a:avLst/>
+          </a:prstGeom>
+          <a:noFill/>
+        </p:spPr>
+        <p:txBody>
+          <a:bodyPr wrap="square" anchor="t" lIns="18288" rIns="18288" tIns="9144" bIns="9144">
+            <a:spAutoFit/>
+          </a:bodyPr>
+          <a:lstStyle/>
+          <a:p>
+            <a:pPr algn="l">
+              <a:defRPr sz="1400" b="1">
+                <a:solidFill>
+                  <a:srgbClr val="ACC2D6"/>
+                </a:solidFill>
+                <a:latin typeface="Malgun Gothic"/>
+              </a:defRPr>
+            </a:pPr>
+            <a:r>
+              <a:t>OVERRUN</a:t>
+            </a:r>
+          </a:p>
+        </p:txBody>
+      </p:sp>
+      <p:sp>
+        <p:nvSpPr>
+          <p:cNvPr id="20" name="Rounded Rectangle 19"/>
+          <p:cNvSpPr/>
+          <p:nvPr/>
+        </p:nvSpPr>
+        <p:spPr>
+          <a:xfrm>
+            <a:off x="2212848" y="2542032"/>
+            <a:ext cx="2770632" cy="896112"/>
+          </a:xfrm>
+          <a:prstGeom prst="roundRect">
+            <a:avLst/>
+          </a:prstGeom>
+          <a:solidFill>
+            <a:srgbClr val="12304C"/>
+          </a:solidFill>
+          <a:ln>
+            <a:noFill/>
+          </a:ln>
+        </p:spPr>
+        <p:style>
+          <a:lnRef idx="1">
+            <a:schemeClr val="accent1"/>
+          </a:lnRef>
+          <a:fillRef idx="3">
+            <a:schemeClr val="accent1"/>
+          </a:fillRef>
+          <a:effectRef idx="2">
+            <a:schemeClr val="accent1"/>
+          </a:effectRef>
+          <a:fontRef idx="minor">
+            <a:schemeClr val="lt1"/>
+          </a:fontRef>
+        </p:style>
+        <p:txBody>
+          <a:bodyPr rtlCol="0" anchor="ctr"/>
+          <a:lstStyle/>
+          <a:p>
+            <a:pPr algn="ctr"/>
+          </a:p>
+        </p:txBody>
+      </p:sp>
+      <p:sp>
+        <p:nvSpPr>
+          <p:cNvPr id="21" name="TextBox 20"/>
+          <p:cNvSpPr txBox="1"/>
+          <p:nvPr/>
+        </p:nvSpPr>
+        <p:spPr>
+          <a:xfrm>
+            <a:off x="2395728" y="2670048"/>
+            <a:ext cx="713232" cy="164592"/>
+          </a:xfrm>
+          <a:prstGeom prst="rect">
+            <a:avLst/>
+          </a:prstGeom>
+          <a:noFill/>
+        </p:spPr>
+        <p:txBody>
+          <a:bodyPr wrap="square" anchor="t" lIns="18288" rIns="18288" tIns="9144" bIns="9144">
+            <a:spAutoFit/>
+          </a:bodyPr>
+          <a:lstStyle/>
+          <a:p>
+            <a:pPr algn="l">
+              <a:defRPr sz="900" b="1">
+                <a:solidFill>
+                  <a:srgbClr val="ACC2D6"/>
+                </a:solidFill>
+                <a:latin typeface="Malgun Gothic"/>
+              </a:defRPr>
+            </a:pPr>
+            <a:r>
+              <a:t>SCALAR</a:t>
+            </a:r>
+          </a:p>
+        </p:txBody>
+      </p:sp>
+      <p:sp>
+        <p:nvSpPr>
+          <p:cNvPr id="22" name="TextBox 21"/>
+          <p:cNvSpPr txBox="1"/>
+          <p:nvPr/>
+        </p:nvSpPr>
+        <p:spPr>
+          <a:xfrm>
+            <a:off x="2395728" y="2926080"/>
+            <a:ext cx="2322576" cy="310896"/>
+          </a:xfrm>
+          <a:prstGeom prst="rect">
+            <a:avLst/>
+          </a:prstGeom>
+          <a:noFill/>
+        </p:spPr>
+        <p:txBody>
+          <a:bodyPr wrap="square" anchor="t" lIns="18288" rIns="18288" tIns="9144" bIns="9144">
+            <a:spAutoFit/>
+          </a:bodyPr>
+          <a:lstStyle/>
+          <a:p>
+            <a:pPr algn="l">
+              <a:defRPr sz="2200" b="1">
                 <a:solidFill>
                   <a:srgbClr val="FF6376"/>
                 </a:solidFill>
@@ -12028,21 +12846,21 @@
               </a:defRPr>
             </a:pPr>
             <a:r>
-              <a:t>FOVEA</a:t>
-            </a:r>
-          </a:p>
-        </p:txBody>
-      </p:sp>
-      <p:sp>
-        <p:nvSpPr>
-          <p:cNvPr id="11" name="TextBox 10"/>
-          <p:cNvSpPr txBox="1"/>
-          <p:nvPr/>
-        </p:nvSpPr>
-        <p:spPr>
-          <a:xfrm>
-            <a:off x="841247" y="2029968"/>
-            <a:ext cx="2121408" cy="493776"/>
+              <a:t>28,187</a:t>
+            </a:r>
+          </a:p>
+        </p:txBody>
+      </p:sp>
+      <p:sp>
+        <p:nvSpPr>
+          <p:cNvPr id="23" name="TextBox 22"/>
+          <p:cNvSpPr txBox="1"/>
+          <p:nvPr/>
+        </p:nvSpPr>
+        <p:spPr>
+          <a:xfrm>
+            <a:off x="5184648" y="2761488"/>
+            <a:ext cx="566928" cy="411480"/>
           </a:xfrm>
           <a:prstGeom prst="rect">
             <a:avLst/>
@@ -12056,79 +12874,7 @@
           <a:lstStyle/>
           <a:p>
             <a:pPr algn="ctr">
-              <a:defRPr sz="3100" b="1">
-                <a:solidFill>
-                  <a:srgbClr val="FF6376"/>
-                </a:solidFill>
-                <a:latin typeface="Malgun Gothic"/>
-              </a:defRPr>
-            </a:pPr>
-            <a:r>
-              <a:t>26.49%</a:t>
-            </a:r>
-          </a:p>
-        </p:txBody>
-      </p:sp>
-      <p:sp>
-        <p:nvSpPr>
-          <p:cNvPr id="12" name="TextBox 11"/>
-          <p:cNvSpPr txBox="1"/>
-          <p:nvPr/>
-        </p:nvSpPr>
-        <p:spPr>
-          <a:xfrm>
-            <a:off x="841247" y="2788920"/>
-            <a:ext cx="2121408" cy="274320"/>
-          </a:xfrm>
-          <a:prstGeom prst="rect">
-            <a:avLst/>
-          </a:prstGeom>
-          <a:noFill/>
-        </p:spPr>
-        <p:txBody>
-          <a:bodyPr wrap="square" anchor="t" lIns="18288" rIns="18288" tIns="9144" bIns="9144">
-            <a:spAutoFit/>
-          </a:bodyPr>
-          <a:lstStyle/>
-          <a:p>
-            <a:pPr algn="ctr">
-              <a:defRPr sz="1500" b="1">
-                <a:solidFill>
-                  <a:srgbClr val="F6F9FC"/>
-                </a:solidFill>
-                <a:latin typeface="Malgun Gothic"/>
-              </a:defRPr>
-            </a:pPr>
-            <a:r>
-              <a:t>loss 28,187</a:t>
-            </a:r>
-          </a:p>
-        </p:txBody>
-      </p:sp>
-      <p:sp>
-        <p:nvSpPr>
-          <p:cNvPr id="13" name="TextBox 12"/>
-          <p:cNvSpPr txBox="1"/>
-          <p:nvPr/>
-        </p:nvSpPr>
-        <p:spPr>
-          <a:xfrm>
-            <a:off x="3145536" y="2194560"/>
-            <a:ext cx="347472" cy="411480"/>
-          </a:xfrm>
-          <a:prstGeom prst="rect">
-            <a:avLst/>
-          </a:prstGeom>
-          <a:noFill/>
-        </p:spPr>
-        <p:txBody>
-          <a:bodyPr wrap="square" anchor="t" lIns="18288" rIns="18288" tIns="9144" bIns="9144">
-            <a:spAutoFit/>
-          </a:bodyPr>
-          <a:lstStyle/>
-          <a:p>
-            <a:pPr algn="ctr">
-              <a:defRPr sz="2200" b="1">
+              <a:defRPr sz="3000" b="1">
                 <a:solidFill>
                   <a:srgbClr val="2AD3CD"/>
                 </a:solidFill>
@@ -12143,14 +12889,14 @@
       </p:sp>
       <p:sp>
         <p:nvSpPr>
-          <p:cNvPr id="14" name="Rounded Rectangle 13"/>
+          <p:cNvPr id="24" name="Rounded Rectangle 23"/>
           <p:cNvSpPr/>
           <p:nvPr/>
         </p:nvSpPr>
         <p:spPr>
           <a:xfrm>
-            <a:off x="3493008" y="1280160"/>
-            <a:ext cx="2487168" cy="2423160"/>
+            <a:off x="5934456" y="2542032"/>
+            <a:ext cx="2770632" cy="896112"/>
           </a:xfrm>
           <a:prstGeom prst="roundRect">
             <a:avLst/>
@@ -12160,7 +12906,7 @@
           </a:solidFill>
           <a:ln w="19050">
             <a:solidFill>
-              <a:srgbClr val="FFB746"/>
+              <a:srgbClr val="37CD85"/>
             </a:solidFill>
           </a:ln>
         </p:spPr>
@@ -12188,14 +12934,129 @@
       </p:sp>
       <p:sp>
         <p:nvSpPr>
-          <p:cNvPr id="15" name="TextBox 14"/>
-          <p:cNvSpPr txBox="1"/>
-          <p:nvPr/>
-        </p:nvSpPr>
-        <p:spPr>
-          <a:xfrm>
-            <a:off x="3675888" y="1554480"/>
-            <a:ext cx="2121408" cy="237744"/>
+          <p:cNvPr id="25" name="TextBox 24"/>
+          <p:cNvSpPr txBox="1"/>
+          <p:nvPr/>
+        </p:nvSpPr>
+        <p:spPr>
+          <a:xfrm>
+            <a:off x="6117336" y="2670048"/>
+            <a:ext cx="987552" cy="164592"/>
+          </a:xfrm>
+          <a:prstGeom prst="rect">
+            <a:avLst/>
+          </a:prstGeom>
+          <a:noFill/>
+        </p:spPr>
+        <p:txBody>
+          <a:bodyPr wrap="square" anchor="t" lIns="18288" rIns="18288" tIns="9144" bIns="9144">
+            <a:spAutoFit/>
+          </a:bodyPr>
+          <a:lstStyle/>
+          <a:p>
+            <a:pPr algn="l">
+              <a:defRPr sz="900" b="1">
+                <a:solidFill>
+                  <a:srgbClr val="ACC2D6"/>
+                </a:solidFill>
+                <a:latin typeface="Malgun Gothic"/>
+              </a:defRPr>
+            </a:pPr>
+            <a:r>
+              <a:t>CLUSTER2</a:t>
+            </a:r>
+          </a:p>
+        </p:txBody>
+      </p:sp>
+      <p:sp>
+        <p:nvSpPr>
+          <p:cNvPr id="26" name="TextBox 25"/>
+          <p:cNvSpPr txBox="1"/>
+          <p:nvPr/>
+        </p:nvSpPr>
+        <p:spPr>
+          <a:xfrm>
+            <a:off x="6117336" y="2926080"/>
+            <a:ext cx="2322576" cy="310896"/>
+          </a:xfrm>
+          <a:prstGeom prst="rect">
+            <a:avLst/>
+          </a:prstGeom>
+          <a:noFill/>
+        </p:spPr>
+        <p:txBody>
+          <a:bodyPr wrap="square" anchor="t" lIns="18288" rIns="18288" tIns="9144" bIns="9144">
+            <a:spAutoFit/>
+          </a:bodyPr>
+          <a:lstStyle/>
+          <a:p>
+            <a:pPr algn="l">
+              <a:defRPr sz="2200" b="1">
+                <a:solidFill>
+                  <a:srgbClr val="37CD85"/>
+                </a:solidFill>
+                <a:latin typeface="Malgun Gothic"/>
+              </a:defRPr>
+            </a:pPr>
+            <a:r>
+              <a:t>12,259</a:t>
+            </a:r>
+          </a:p>
+        </p:txBody>
+      </p:sp>
+      <p:sp>
+        <p:nvSpPr>
+          <p:cNvPr id="27" name="Rounded Rectangle 26"/>
+          <p:cNvSpPr/>
+          <p:nvPr/>
+        </p:nvSpPr>
+        <p:spPr>
+          <a:xfrm>
+            <a:off x="9070848" y="2542032"/>
+            <a:ext cx="2194560" cy="896112"/>
+          </a:xfrm>
+          <a:prstGeom prst="roundRect">
+            <a:avLst/>
+          </a:prstGeom>
+          <a:solidFill>
+            <a:srgbClr val="37CD85"/>
+          </a:solidFill>
+          <a:ln>
+            <a:noFill/>
+          </a:ln>
+        </p:spPr>
+        <p:style>
+          <a:lnRef idx="1">
+            <a:schemeClr val="accent1"/>
+          </a:lnRef>
+          <a:fillRef idx="3">
+            <a:schemeClr val="accent1"/>
+          </a:fillRef>
+          <a:effectRef idx="2">
+            <a:schemeClr val="accent1"/>
+          </a:effectRef>
+          <a:fontRef idx="minor">
+            <a:schemeClr val="lt1"/>
+          </a:fontRef>
+        </p:style>
+        <p:txBody>
+          <a:bodyPr rtlCol="0" anchor="ctr"/>
+          <a:lstStyle/>
+          <a:p>
+            <a:pPr algn="ctr"/>
+          </a:p>
+        </p:txBody>
+      </p:sp>
+      <p:sp>
+        <p:nvSpPr>
+          <p:cNvPr id="28" name="TextBox 27"/>
+          <p:cNvSpPr txBox="1"/>
+          <p:nvPr/>
+        </p:nvSpPr>
+        <p:spPr>
+          <a:xfrm>
+            <a:off x="9235440" y="2816352"/>
+            <a:ext cx="1847088" cy="347472"/>
           </a:xfrm>
           <a:prstGeom prst="rect">
             <a:avLst/>
@@ -12209,7 +13070,158 @@
           <a:lstStyle/>
           <a:p>
             <a:pPr algn="ctr">
-              <a:defRPr sz="1300" b="1">
+              <a:defRPr sz="2400" b="1">
+                <a:solidFill>
+                  <a:srgbClr val="071627"/>
+                </a:solidFill>
+                <a:latin typeface="Malgun Gothic"/>
+              </a:defRPr>
+            </a:pPr>
+            <a:r>
+              <a:t>−56.5%</a:t>
+            </a:r>
+          </a:p>
+        </p:txBody>
+      </p:sp>
+      <p:sp>
+        <p:nvSpPr>
+          <p:cNvPr id="29" name="TextBox 28"/>
+          <p:cNvSpPr txBox="1"/>
+          <p:nvPr/>
+        </p:nvSpPr>
+        <p:spPr>
+          <a:xfrm>
+            <a:off x="713232" y="4187952"/>
+            <a:ext cx="1353312" cy="274320"/>
+          </a:xfrm>
+          <a:prstGeom prst="rect">
+            <a:avLst/>
+          </a:prstGeom>
+          <a:noFill/>
+        </p:spPr>
+        <p:txBody>
+          <a:bodyPr wrap="square" anchor="t" lIns="18288" rIns="18288" tIns="9144" bIns="9144">
+            <a:spAutoFit/>
+          </a:bodyPr>
+          <a:lstStyle/>
+          <a:p>
+            <a:pPr algn="l">
+              <a:defRPr sz="1400" b="1">
+                <a:solidFill>
+                  <a:srgbClr val="ACC2D6"/>
+                </a:solidFill>
+                <a:latin typeface="Malgun Gothic"/>
+              </a:defRPr>
+            </a:pPr>
+            <a:r>
+              <a:t>EPC</a:t>
+            </a:r>
+          </a:p>
+        </p:txBody>
+      </p:sp>
+      <p:sp>
+        <p:nvSpPr>
+          <p:cNvPr id="30" name="Rounded Rectangle 29"/>
+          <p:cNvSpPr/>
+          <p:nvPr/>
+        </p:nvSpPr>
+        <p:spPr>
+          <a:xfrm>
+            <a:off x="2212848" y="3941064"/>
+            <a:ext cx="2770632" cy="896112"/>
+          </a:xfrm>
+          <a:prstGeom prst="roundRect">
+            <a:avLst/>
+          </a:prstGeom>
+          <a:solidFill>
+            <a:srgbClr val="12304C"/>
+          </a:solidFill>
+          <a:ln>
+            <a:noFill/>
+          </a:ln>
+        </p:spPr>
+        <p:style>
+          <a:lnRef idx="1">
+            <a:schemeClr val="accent1"/>
+          </a:lnRef>
+          <a:fillRef idx="3">
+            <a:schemeClr val="accent1"/>
+          </a:fillRef>
+          <a:effectRef idx="2">
+            <a:schemeClr val="accent1"/>
+          </a:effectRef>
+          <a:fontRef idx="minor">
+            <a:schemeClr val="lt1"/>
+          </a:fontRef>
+        </p:style>
+        <p:txBody>
+          <a:bodyPr rtlCol="0" anchor="ctr"/>
+          <a:lstStyle/>
+          <a:p>
+            <a:pPr algn="ctr"/>
+          </a:p>
+        </p:txBody>
+      </p:sp>
+      <p:sp>
+        <p:nvSpPr>
+          <p:cNvPr id="31" name="TextBox 30"/>
+          <p:cNvSpPr txBox="1"/>
+          <p:nvPr/>
+        </p:nvSpPr>
+        <p:spPr>
+          <a:xfrm>
+            <a:off x="2395728" y="4069080"/>
+            <a:ext cx="713232" cy="164592"/>
+          </a:xfrm>
+          <a:prstGeom prst="rect">
+            <a:avLst/>
+          </a:prstGeom>
+          <a:noFill/>
+        </p:spPr>
+        <p:txBody>
+          <a:bodyPr wrap="square" anchor="t" lIns="18288" rIns="18288" tIns="9144" bIns="9144">
+            <a:spAutoFit/>
+          </a:bodyPr>
+          <a:lstStyle/>
+          <a:p>
+            <a:pPr algn="l">
+              <a:defRPr sz="900" b="1">
+                <a:solidFill>
+                  <a:srgbClr val="ACC2D6"/>
+                </a:solidFill>
+                <a:latin typeface="Malgun Gothic"/>
+              </a:defRPr>
+            </a:pPr>
+            <a:r>
+              <a:t>SCALAR</a:t>
+            </a:r>
+          </a:p>
+        </p:txBody>
+      </p:sp>
+      <p:sp>
+        <p:nvSpPr>
+          <p:cNvPr id="32" name="TextBox 31"/>
+          <p:cNvSpPr txBox="1"/>
+          <p:nvPr/>
+        </p:nvSpPr>
+        <p:spPr>
+          <a:xfrm>
+            <a:off x="2395728" y="4325112"/>
+            <a:ext cx="2322576" cy="310896"/>
+          </a:xfrm>
+          <a:prstGeom prst="rect">
+            <a:avLst/>
+          </a:prstGeom>
+          <a:noFill/>
+        </p:spPr>
+        <p:txBody>
+          <a:bodyPr wrap="square" anchor="t" lIns="18288" rIns="18288" tIns="9144" bIns="9144">
+            <a:spAutoFit/>
+          </a:bodyPr>
+          <a:lstStyle/>
+          <a:p>
+            <a:pPr algn="l">
+              <a:defRPr sz="2200" b="1">
                 <a:solidFill>
                   <a:srgbClr val="FFB746"/>
                 </a:solidFill>
@@ -12217,21 +13229,21 @@
               </a:defRPr>
             </a:pPr>
             <a:r>
-              <a:t>CLUSTER2</a:t>
-            </a:r>
-          </a:p>
-        </p:txBody>
-      </p:sp>
-      <p:sp>
-        <p:nvSpPr>
-          <p:cNvPr id="16" name="TextBox 15"/>
-          <p:cNvSpPr txBox="1"/>
-          <p:nvPr/>
-        </p:nvSpPr>
-        <p:spPr>
-          <a:xfrm>
-            <a:off x="3675888" y="2029968"/>
-            <a:ext cx="2121408" cy="493776"/>
+              <a:t>0.6739</a:t>
+            </a:r>
+          </a:p>
+        </p:txBody>
+      </p:sp>
+      <p:sp>
+        <p:nvSpPr>
+          <p:cNvPr id="33" name="TextBox 32"/>
+          <p:cNvSpPr txBox="1"/>
+          <p:nvPr/>
+        </p:nvSpPr>
+        <p:spPr>
+          <a:xfrm>
+            <a:off x="5184648" y="4160520"/>
+            <a:ext cx="566928" cy="411480"/>
           </a:xfrm>
           <a:prstGeom prst="rect">
             <a:avLst/>
@@ -12245,79 +13257,7 @@
           <a:lstStyle/>
           <a:p>
             <a:pPr algn="ctr">
-              <a:defRPr sz="3100" b="1">
-                <a:solidFill>
-                  <a:srgbClr val="FFB746"/>
-                </a:solidFill>
-                <a:latin typeface="Malgun Gothic"/>
-              </a:defRPr>
-            </a:pPr>
-            <a:r>
-              <a:t>11.52%</a:t>
-            </a:r>
-          </a:p>
-        </p:txBody>
-      </p:sp>
-      <p:sp>
-        <p:nvSpPr>
-          <p:cNvPr id="17" name="TextBox 16"/>
-          <p:cNvSpPr txBox="1"/>
-          <p:nvPr/>
-        </p:nvSpPr>
-        <p:spPr>
-          <a:xfrm>
-            <a:off x="3675888" y="2788920"/>
-            <a:ext cx="2121408" cy="274320"/>
-          </a:xfrm>
-          <a:prstGeom prst="rect">
-            <a:avLst/>
-          </a:prstGeom>
-          <a:noFill/>
-        </p:spPr>
-        <p:txBody>
-          <a:bodyPr wrap="square" anchor="t" lIns="18288" rIns="18288" tIns="9144" bIns="9144">
-            <a:spAutoFit/>
-          </a:bodyPr>
-          <a:lstStyle/>
-          <a:p>
-            <a:pPr algn="ctr">
-              <a:defRPr sz="1500" b="1">
-                <a:solidFill>
-                  <a:srgbClr val="F6F9FC"/>
-                </a:solidFill>
-                <a:latin typeface="Malgun Gothic"/>
-              </a:defRPr>
-            </a:pPr>
-            <a:r>
-              <a:t>loss 12,259</a:t>
-            </a:r>
-          </a:p>
-        </p:txBody>
-      </p:sp>
-      <p:sp>
-        <p:nvSpPr>
-          <p:cNvPr id="18" name="TextBox 17"/>
-          <p:cNvSpPr txBox="1"/>
-          <p:nvPr/>
-        </p:nvSpPr>
-        <p:spPr>
-          <a:xfrm>
-            <a:off x="5980176" y="2194560"/>
-            <a:ext cx="347472" cy="411480"/>
-          </a:xfrm>
-          <a:prstGeom prst="rect">
-            <a:avLst/>
-          </a:prstGeom>
-          <a:noFill/>
-        </p:spPr>
-        <p:txBody>
-          <a:bodyPr wrap="square" anchor="t" lIns="18288" rIns="18288" tIns="9144" bIns="9144">
-            <a:spAutoFit/>
-          </a:bodyPr>
-          <a:lstStyle/>
-          <a:p>
-            <a:pPr algn="ctr">
-              <a:defRPr sz="2200" b="1">
+              <a:defRPr sz="3000" b="1">
                 <a:solidFill>
                   <a:srgbClr val="2AD3CD"/>
                 </a:solidFill>
@@ -12332,14 +13272,14 @@
       </p:sp>
       <p:sp>
         <p:nvSpPr>
-          <p:cNvPr id="19" name="Rounded Rectangle 18"/>
+          <p:cNvPr id="34" name="Rounded Rectangle 33"/>
           <p:cNvSpPr/>
           <p:nvPr/>
         </p:nvSpPr>
         <p:spPr>
           <a:xfrm>
-            <a:off x="6327648" y="1280160"/>
-            <a:ext cx="2487168" cy="2423160"/>
+            <a:off x="5934456" y="3941064"/>
+            <a:ext cx="2770632" cy="896112"/>
           </a:xfrm>
           <a:prstGeom prst="roundRect">
             <a:avLst/>
@@ -12377,28 +13317,64 @@
       </p:sp>
       <p:sp>
         <p:nvSpPr>
-          <p:cNvPr id="20" name="TextBox 19"/>
-          <p:cNvSpPr txBox="1"/>
-          <p:nvPr/>
-        </p:nvSpPr>
-        <p:spPr>
-          <a:xfrm>
-            <a:off x="6510528" y="1554480"/>
-            <a:ext cx="2121408" cy="237744"/>
-          </a:xfrm>
-          <a:prstGeom prst="rect">
-            <a:avLst/>
-          </a:prstGeom>
-          <a:noFill/>
-        </p:spPr>
-        <p:txBody>
-          <a:bodyPr wrap="square" anchor="t" lIns="18288" rIns="18288" tIns="9144" bIns="9144">
-            <a:spAutoFit/>
-          </a:bodyPr>
-          <a:lstStyle/>
-          <a:p>
-            <a:pPr algn="ctr">
-              <a:defRPr sz="1300" b="1">
+          <p:cNvPr id="35" name="TextBox 34"/>
+          <p:cNvSpPr txBox="1"/>
+          <p:nvPr/>
+        </p:nvSpPr>
+        <p:spPr>
+          <a:xfrm>
+            <a:off x="6117336" y="4069080"/>
+            <a:ext cx="987552" cy="164592"/>
+          </a:xfrm>
+          <a:prstGeom prst="rect">
+            <a:avLst/>
+          </a:prstGeom>
+          <a:noFill/>
+        </p:spPr>
+        <p:txBody>
+          <a:bodyPr wrap="square" anchor="t" lIns="18288" rIns="18288" tIns="9144" bIns="9144">
+            <a:spAutoFit/>
+          </a:bodyPr>
+          <a:lstStyle/>
+          <a:p>
+            <a:pPr algn="l">
+              <a:defRPr sz="900" b="1">
+                <a:solidFill>
+                  <a:srgbClr val="ACC2D6"/>
+                </a:solidFill>
+                <a:latin typeface="Malgun Gothic"/>
+              </a:defRPr>
+            </a:pPr>
+            <a:r>
+              <a:t>CLUSTER2</a:t>
+            </a:r>
+          </a:p>
+        </p:txBody>
+      </p:sp>
+      <p:sp>
+        <p:nvSpPr>
+          <p:cNvPr id="36" name="TextBox 35"/>
+          <p:cNvSpPr txBox="1"/>
+          <p:nvPr/>
+        </p:nvSpPr>
+        <p:spPr>
+          <a:xfrm>
+            <a:off x="6117336" y="4325112"/>
+            <a:ext cx="2322576" cy="310896"/>
+          </a:xfrm>
+          <a:prstGeom prst="rect">
+            <a:avLst/>
+          </a:prstGeom>
+          <a:noFill/>
+        </p:spPr>
+        <p:txBody>
+          <a:bodyPr wrap="square" anchor="t" lIns="18288" rIns="18288" tIns="9144" bIns="9144">
+            <a:spAutoFit/>
+          </a:bodyPr>
+          <a:lstStyle/>
+          <a:p>
+            <a:pPr algn="l">
+              <a:defRPr sz="2200" b="1">
                 <a:solidFill>
                   <a:srgbClr val="2AD3CD"/>
                 </a:solidFill>
@@ -12406,140 +13382,30 @@
               </a:defRPr>
             </a:pPr>
             <a:r>
-              <a:t>+ STEAL</a:t>
-            </a:r>
-          </a:p>
-        </p:txBody>
-      </p:sp>
-      <p:sp>
-        <p:nvSpPr>
-          <p:cNvPr id="21" name="TextBox 20"/>
-          <p:cNvSpPr txBox="1"/>
-          <p:nvPr/>
-        </p:nvSpPr>
-        <p:spPr>
-          <a:xfrm>
-            <a:off x="6510528" y="2029968"/>
-            <a:ext cx="2121408" cy="493776"/>
-          </a:xfrm>
-          <a:prstGeom prst="rect">
-            <a:avLst/>
-          </a:prstGeom>
-          <a:noFill/>
-        </p:spPr>
-        <p:txBody>
-          <a:bodyPr wrap="square" anchor="t" lIns="18288" rIns="18288" tIns="9144" bIns="9144">
-            <a:spAutoFit/>
-          </a:bodyPr>
-          <a:lstStyle/>
-          <a:p>
-            <a:pPr algn="ctr">
-              <a:defRPr sz="3100" b="1">
-                <a:solidFill>
-                  <a:srgbClr val="2AD3CD"/>
-                </a:solidFill>
-                <a:latin typeface="Malgun Gothic"/>
-              </a:defRPr>
-            </a:pPr>
-            <a:r>
-              <a:t>10.89%</a:t>
-            </a:r>
-          </a:p>
-        </p:txBody>
-      </p:sp>
-      <p:sp>
-        <p:nvSpPr>
-          <p:cNvPr id="22" name="TextBox 21"/>
-          <p:cNvSpPr txBox="1"/>
-          <p:nvPr/>
-        </p:nvSpPr>
-        <p:spPr>
-          <a:xfrm>
-            <a:off x="6510528" y="2788920"/>
-            <a:ext cx="2121408" cy="274320"/>
-          </a:xfrm>
-          <a:prstGeom prst="rect">
-            <a:avLst/>
-          </a:prstGeom>
-          <a:noFill/>
-        </p:spPr>
-        <p:txBody>
-          <a:bodyPr wrap="square" anchor="t" lIns="18288" rIns="18288" tIns="9144" bIns="9144">
-            <a:spAutoFit/>
-          </a:bodyPr>
-          <a:lstStyle/>
-          <a:p>
-            <a:pPr algn="ctr">
-              <a:defRPr sz="1500" b="1">
-                <a:solidFill>
-                  <a:srgbClr val="F6F9FC"/>
-                </a:solidFill>
-                <a:latin typeface="Malgun Gothic"/>
-              </a:defRPr>
-            </a:pPr>
-            <a:r>
-              <a:t>loss 11,593</a:t>
-            </a:r>
-          </a:p>
-        </p:txBody>
-      </p:sp>
-      <p:sp>
-        <p:nvSpPr>
-          <p:cNvPr id="23" name="TextBox 22"/>
-          <p:cNvSpPr txBox="1"/>
-          <p:nvPr/>
-        </p:nvSpPr>
-        <p:spPr>
-          <a:xfrm>
-            <a:off x="8814816" y="2194560"/>
-            <a:ext cx="347472" cy="411480"/>
-          </a:xfrm>
-          <a:prstGeom prst="rect">
-            <a:avLst/>
-          </a:prstGeom>
-          <a:noFill/>
-        </p:spPr>
-        <p:txBody>
-          <a:bodyPr wrap="square" anchor="t" lIns="18288" rIns="18288" tIns="9144" bIns="9144">
-            <a:spAutoFit/>
-          </a:bodyPr>
-          <a:lstStyle/>
-          <a:p>
-            <a:pPr algn="ctr">
-              <a:defRPr sz="2200" b="1">
-                <a:solidFill>
-                  <a:srgbClr val="2AD3CD"/>
-                </a:solidFill>
-                <a:latin typeface="Malgun Gothic"/>
-              </a:defRPr>
-            </a:pPr>
-            <a:r>
-              <a:t>→</a:t>
-            </a:r>
-          </a:p>
-        </p:txBody>
-      </p:sp>
-      <p:sp>
-        <p:nvSpPr>
-          <p:cNvPr id="24" name="Rounded Rectangle 23"/>
+              <a:t>0.8116</a:t>
+            </a:r>
+          </a:p>
+        </p:txBody>
+      </p:sp>
+      <p:sp>
+        <p:nvSpPr>
+          <p:cNvPr id="37" name="Rounded Rectangle 36"/>
           <p:cNvSpPr/>
           <p:nvPr/>
         </p:nvSpPr>
         <p:spPr>
           <a:xfrm>
-            <a:off x="9162288" y="1280160"/>
-            <a:ext cx="2487168" cy="2423160"/>
+            <a:off x="9070848" y="3941064"/>
+            <a:ext cx="2194560" cy="896112"/>
           </a:xfrm>
           <a:prstGeom prst="roundRect">
             <a:avLst/>
           </a:prstGeom>
           <a:solidFill>
-            <a:srgbClr val="12304C"/>
+            <a:srgbClr val="2AD3CD"/>
           </a:solidFill>
-          <a:ln w="19050">
-            <a:solidFill>
-              <a:srgbClr val="37CD85"/>
-            </a:solidFill>
+          <a:ln>
+            <a:noFill/>
           </a:ln>
         </p:spPr>
         <p:style>
@@ -12566,14 +13432,14 @@
       </p:sp>
       <p:sp>
         <p:nvSpPr>
-          <p:cNvPr id="25" name="TextBox 24"/>
-          <p:cNvSpPr txBox="1"/>
-          <p:nvPr/>
-        </p:nvSpPr>
-        <p:spPr>
-          <a:xfrm>
-            <a:off x="9345168" y="1554480"/>
-            <a:ext cx="2121408" cy="237744"/>
+          <p:cNvPr id="38" name="TextBox 37"/>
+          <p:cNvSpPr txBox="1"/>
+          <p:nvPr/>
+        </p:nvSpPr>
+        <p:spPr>
+          <a:xfrm>
+            <a:off x="9235440" y="4215384"/>
+            <a:ext cx="1847088" cy="347472"/>
           </a:xfrm>
           <a:prstGeom prst="rect">
             <a:avLst/>
@@ -12587,158 +13453,7 @@
           <a:lstStyle/>
           <a:p>
             <a:pPr algn="ctr">
-              <a:defRPr sz="1300" b="1">
-                <a:solidFill>
-                  <a:srgbClr val="37CD85"/>
-                </a:solidFill>
-                <a:latin typeface="Malgun Gothic"/>
-              </a:defRPr>
-            </a:pPr>
-            <a:r>
-              <a:t>+ STEAL_BUF</a:t>
-            </a:r>
-          </a:p>
-        </p:txBody>
-      </p:sp>
-      <p:sp>
-        <p:nvSpPr>
-          <p:cNvPr id="26" name="TextBox 25"/>
-          <p:cNvSpPr txBox="1"/>
-          <p:nvPr/>
-        </p:nvSpPr>
-        <p:spPr>
-          <a:xfrm>
-            <a:off x="9345168" y="2029968"/>
-            <a:ext cx="2121408" cy="493776"/>
-          </a:xfrm>
-          <a:prstGeom prst="rect">
-            <a:avLst/>
-          </a:prstGeom>
-          <a:noFill/>
-        </p:spPr>
-        <p:txBody>
-          <a:bodyPr wrap="square" anchor="t" lIns="18288" rIns="18288" tIns="9144" bIns="9144">
-            <a:spAutoFit/>
-          </a:bodyPr>
-          <a:lstStyle/>
-          <a:p>
-            <a:pPr algn="ctr">
-              <a:defRPr sz="3100" b="1">
-                <a:solidFill>
-                  <a:srgbClr val="37CD85"/>
-                </a:solidFill>
-                <a:latin typeface="Malgun Gothic"/>
-              </a:defRPr>
-            </a:pPr>
-            <a:r>
-              <a:t>0.47%</a:t>
-            </a:r>
-          </a:p>
-        </p:txBody>
-      </p:sp>
-      <p:sp>
-        <p:nvSpPr>
-          <p:cNvPr id="27" name="TextBox 26"/>
-          <p:cNvSpPr txBox="1"/>
-          <p:nvPr/>
-        </p:nvSpPr>
-        <p:spPr>
-          <a:xfrm>
-            <a:off x="9345168" y="2788920"/>
-            <a:ext cx="2121408" cy="274320"/>
-          </a:xfrm>
-          <a:prstGeom prst="rect">
-            <a:avLst/>
-          </a:prstGeom>
-          <a:noFill/>
-        </p:spPr>
-        <p:txBody>
-          <a:bodyPr wrap="square" anchor="t" lIns="18288" rIns="18288" tIns="9144" bIns="9144">
-            <a:spAutoFit/>
-          </a:bodyPr>
-          <a:lstStyle/>
-          <a:p>
-            <a:pPr algn="ctr">
-              <a:defRPr sz="1500" b="1">
-                <a:solidFill>
-                  <a:srgbClr val="F6F9FC"/>
-                </a:solidFill>
-                <a:latin typeface="Malgun Gothic"/>
-              </a:defRPr>
-            </a:pPr>
-            <a:r>
-              <a:t>loss 502</a:t>
-            </a:r>
-          </a:p>
-        </p:txBody>
-      </p:sp>
-      <p:sp>
-        <p:nvSpPr>
-          <p:cNvPr id="28" name="Rounded Rectangle 27"/>
-          <p:cNvSpPr/>
-          <p:nvPr/>
-        </p:nvSpPr>
-        <p:spPr>
-          <a:xfrm>
-            <a:off x="1965960" y="4160520"/>
-            <a:ext cx="8275320" cy="841248"/>
-          </a:xfrm>
-          <a:prstGeom prst="roundRect">
-            <a:avLst/>
-          </a:prstGeom>
-          <a:solidFill>
-            <a:srgbClr val="37CD85"/>
-          </a:solidFill>
-          <a:ln>
-            <a:noFill/>
-          </a:ln>
-        </p:spPr>
-        <p:style>
-          <a:lnRef idx="1">
-            <a:schemeClr val="accent1"/>
-          </a:lnRef>
-          <a:fillRef idx="3">
-            <a:schemeClr val="accent1"/>
-          </a:fillRef>
-          <a:effectRef idx="2">
-            <a:schemeClr val="accent1"/>
-          </a:effectRef>
-          <a:fontRef idx="minor">
-            <a:schemeClr val="lt1"/>
-          </a:fontRef>
-        </p:style>
-        <p:txBody>
-          <a:bodyPr rtlCol="0" anchor="ctr"/>
-          <a:lstStyle/>
-          <a:p>
-            <a:pPr algn="ctr"/>
-          </a:p>
-        </p:txBody>
-      </p:sp>
-      <p:sp>
-        <p:nvSpPr>
-          <p:cNvPr id="29" name="TextBox 28"/>
-          <p:cNvSpPr txBox="1"/>
-          <p:nvPr/>
-        </p:nvSpPr>
-        <p:spPr>
-          <a:xfrm>
-            <a:off x="2240280" y="4325112"/>
-            <a:ext cx="7726679" cy="274320"/>
-          </a:xfrm>
-          <a:prstGeom prst="rect">
-            <a:avLst/>
-          </a:prstGeom>
-          <a:noFill/>
-        </p:spPr>
-        <p:txBody>
-          <a:bodyPr wrap="square" anchor="t" lIns="18288" rIns="18288" tIns="9144" bIns="9144">
-            <a:spAutoFit/>
-          </a:bodyPr>
-          <a:lstStyle/>
-          <a:p>
-            <a:pPr algn="ctr">
-              <a:defRPr sz="2300" b="1">
+              <a:defRPr sz="2400" b="1">
                 <a:solidFill>
                   <a:srgbClr val="071627"/>
                 </a:solidFill>
@@ -12746,14 +13461,14 @@
               </a:defRPr>
             </a:pPr>
             <a:r>
-              <a:t>CLUSTER2 → STEAL_BUF   11.52% → 0.47%</a:t>
-            </a:r>
-          </a:p>
-        </p:txBody>
-      </p:sp>
-      <p:sp>
-        <p:nvSpPr>
-          <p:cNvPr id="30" name="Rounded Rectangle 29"/>
+              <a:t>+20.4%</a:t>
+            </a:r>
+          </a:p>
+        </p:txBody>
+      </p:sp>
+      <p:sp>
+        <p:nvSpPr>
+          <p:cNvPr id="39" name="Rounded Rectangle 38"/>
           <p:cNvSpPr/>
           <p:nvPr/>
         </p:nvSpPr>
@@ -12796,7 +13511,7 @@
       </p:sp>
       <p:sp>
         <p:nvSpPr>
-          <p:cNvPr id="31" name="TextBox 30"/>
+          <p:cNvPr id="40" name="TextBox 39"/>
           <p:cNvSpPr txBox="1"/>
           <p:nvPr/>
         </p:nvSpPr>
@@ -12825,14 +13540,14 @@
               </a:defRPr>
             </a:pPr>
             <a:r>
-              <a:t>손실 건수 24.42배 감소 · 상대 감소율 95.9% · 동일 106,416-event denominator</a:t>
-            </a:r>
-          </a:p>
-        </p:txBody>
-      </p:sp>
-      <p:sp>
-        <p:nvSpPr>
-          <p:cNvPr id="32" name="TextBox 31"/>
+              <a:t>구조군 비교 결과: accepted +15,928 events  =  overrun 15,928건 감소</a:t>
+            </a:r>
+          </a:p>
+        </p:txBody>
+      </p:sp>
+      <p:sp>
+        <p:nvSpPr>
+          <p:cNvPr id="41" name="TextBox 40"/>
           <p:cNvSpPr txBox="1"/>
           <p:nvPr/>
         </p:nvSpPr>
@@ -12861,14 +13576,14 @@
               </a:defRPr>
             </a:pPr>
             <a:r>
-              <a:t>※ 최종 UZH polarity trace(8,503)는 별도 검증이며 이 비교와 섞지 않는다</a:t>
-            </a:r>
-          </a:p>
-        </p:txBody>
-      </p:sp>
-      <p:sp>
-        <p:nvSpPr>
-          <p:cNvPr id="33" name="Rectangle 32"/>
+              <a:t>※ 최종 polarity-v1 trace의 exact head-to-head 개선율이 아니라 원본 구조군 비교</a:t>
+            </a:r>
+          </a:p>
+        </p:txBody>
+      </p:sp>
+      <p:sp>
+        <p:nvSpPr>
+          <p:cNvPr id="42" name="Rectangle 41"/>
           <p:cNvSpPr/>
           <p:nvPr/>
         </p:nvSpPr>
@@ -12911,7 +13626,7 @@
       </p:sp>
       <p:sp>
         <p:nvSpPr>
-          <p:cNvPr id="34" name="Rounded Rectangle 33"/>
+          <p:cNvPr id="43" name="Rounded Rectangle 42"/>
           <p:cNvSpPr/>
           <p:nvPr/>
         </p:nvSpPr>
@@ -12954,7 +13669,7 @@
       </p:sp>
       <p:sp>
         <p:nvSpPr>
-          <p:cNvPr id="35" name="TextBox 34"/>
+          <p:cNvPr id="44" name="TextBox 43"/>
           <p:cNvSpPr txBox="1"/>
           <p:nvPr/>
         </p:nvSpPr>
@@ -12983,14 +13698,14 @@
               </a:defRPr>
             </a:pPr>
             <a:r>
-              <a:t>03  정량</a:t>
-            </a:r>
-          </a:p>
-        </p:txBody>
-      </p:sp>
-      <p:sp>
-        <p:nvSpPr>
-          <p:cNvPr id="36" name="TextBox 35"/>
+              <a:t>03  결과</a:t>
+            </a:r>
+          </a:p>
+        </p:txBody>
+      </p:sp>
+      <p:sp>
+        <p:nvSpPr>
+          <p:cNvPr id="45" name="TextBox 44"/>
           <p:cNvSpPr txBox="1"/>
           <p:nvPr/>
         </p:nvSpPr>
@@ -13019,14 +13734,14 @@
               </a:defRPr>
             </a:pPr>
             <a:r>
-              <a:t>공식 50-workload에서 steal_buf가 손실을 거의 제거</a:t>
-            </a:r>
-          </a:p>
-        </p:txBody>
-      </p:sp>
-      <p:sp>
-        <p:nvSpPr>
-          <p:cNvPr id="37" name="Rectangle 36"/>
+              <a:t>대역폭·overflow 병목은 수치로 개선됐다</a:t>
+            </a:r>
+          </a:p>
+        </p:txBody>
+      </p:sp>
+      <p:sp>
+        <p:nvSpPr>
+          <p:cNvPr id="46" name="Rectangle 45"/>
           <p:cNvSpPr/>
           <p:nvPr/>
         </p:nvSpPr>
@@ -13210,7 +13925,7 @@
               </a:defRPr>
             </a:pPr>
             <a:r>
-              <a:t>03  검증</a:t>
+              <a:t>03  결과</a:t>
             </a:r>
           </a:p>
         </p:txBody>
@@ -13246,7 +13961,7 @@
               </a:defRPr>
             </a:pPr>
             <a:r>
-              <a:t>두 실제 TB가 비교 성능과 최종 polarity를 분리 검증</a:t>
+              <a:t>최종 trace에서 buffer·polarity 오류 0</a:t>
             </a:r>
           </a:p>
         </p:txBody>
@@ -13325,7 +14040,7 @@
               </a:defRPr>
             </a:pPr>
             <a:r>
-              <a:t>Source: committed TBs · Xcelium 23.09-s013 · independent Python verifier</a:t>
+              <a:t>Source: polarity_v1_release_receipt.json · Xcelium 23.09-s013</a:t>
             </a:r>
           </a:p>
         </p:txBody>
@@ -13368,14 +14083,302 @@
       </p:sp>
       <p:sp>
         <p:nvSpPr>
-          <p:cNvPr id="9" name="Rounded Rectangle 8"/>
+          <p:cNvPr id="9" name="TextBox 8"/>
+          <p:cNvSpPr txBox="1"/>
+          <p:nvPr/>
+        </p:nvSpPr>
+        <p:spPr>
+          <a:xfrm>
+            <a:off x="841248" y="1280160"/>
+            <a:ext cx="2926080" cy="731520"/>
+          </a:xfrm>
+          <a:prstGeom prst="rect">
+            <a:avLst/>
+          </a:prstGeom>
+          <a:noFill/>
+        </p:spPr>
+        <p:txBody>
+          <a:bodyPr wrap="square" anchor="t" lIns="18288" rIns="18288" tIns="9144" bIns="9144">
+            <a:spAutoFit/>
+          </a:bodyPr>
+          <a:lstStyle/>
+          <a:p>
+            <a:pPr algn="ctr">
+              <a:defRPr sz="4800" b="1">
+                <a:solidFill>
+                  <a:srgbClr val="4793FF"/>
+                </a:solidFill>
+                <a:latin typeface="Malgun Gothic"/>
+              </a:defRPr>
+            </a:pPr>
+            <a:r>
+              <a:t>8,503</a:t>
+            </a:r>
+          </a:p>
+        </p:txBody>
+      </p:sp>
+      <p:sp>
+        <p:nvSpPr>
+          <p:cNvPr id="10" name="TextBox 9"/>
+          <p:cNvSpPr txBox="1"/>
+          <p:nvPr/>
+        </p:nvSpPr>
+        <p:spPr>
+          <a:xfrm>
+            <a:off x="1325880" y="1993392"/>
+            <a:ext cx="1938528" cy="256032"/>
+          </a:xfrm>
+          <a:prstGeom prst="rect">
+            <a:avLst/>
+          </a:prstGeom>
+          <a:noFill/>
+        </p:spPr>
+        <p:txBody>
+          <a:bodyPr wrap="square" anchor="t" lIns="18288" rIns="18288" tIns="9144" bIns="9144">
+            <a:spAutoFit/>
+          </a:bodyPr>
+          <a:lstStyle/>
+          <a:p>
+            <a:pPr algn="ctr">
+              <a:defRPr sz="1200" b="1">
+                <a:solidFill>
+                  <a:srgbClr val="ACC2D6"/>
+                </a:solidFill>
+                <a:latin typeface="Malgun Gothic"/>
+              </a:defRPr>
+            </a:pPr>
+            <a:r>
+              <a:t>GENERATED</a:t>
+            </a:r>
+          </a:p>
+        </p:txBody>
+      </p:sp>
+      <p:sp>
+        <p:nvSpPr>
+          <p:cNvPr id="11" name="TextBox 10"/>
+          <p:cNvSpPr txBox="1"/>
+          <p:nvPr/>
+        </p:nvSpPr>
+        <p:spPr>
+          <a:xfrm>
+            <a:off x="3931920" y="1444752"/>
+            <a:ext cx="749808" cy="411480"/>
+          </a:xfrm>
+          <a:prstGeom prst="rect">
+            <a:avLst/>
+          </a:prstGeom>
+          <a:noFill/>
+        </p:spPr>
+        <p:txBody>
+          <a:bodyPr wrap="square" anchor="t" lIns="18288" rIns="18288" tIns="9144" bIns="9144">
+            <a:spAutoFit/>
+          </a:bodyPr>
+          <a:lstStyle/>
+          <a:p>
+            <a:pPr algn="ctr">
+              <a:defRPr sz="4200" b="1">
+                <a:solidFill>
+                  <a:srgbClr val="2AD3CD"/>
+                </a:solidFill>
+                <a:latin typeface="Malgun Gothic"/>
+              </a:defRPr>
+            </a:pPr>
+            <a:r>
+              <a:t>→</a:t>
+            </a:r>
+          </a:p>
+        </p:txBody>
+      </p:sp>
+      <p:sp>
+        <p:nvSpPr>
+          <p:cNvPr id="12" name="TextBox 11"/>
+          <p:cNvSpPr txBox="1"/>
+          <p:nvPr/>
+        </p:nvSpPr>
+        <p:spPr>
+          <a:xfrm>
+            <a:off x="4864608" y="1280160"/>
+            <a:ext cx="2926080" cy="731520"/>
+          </a:xfrm>
+          <a:prstGeom prst="rect">
+            <a:avLst/>
+          </a:prstGeom>
+          <a:noFill/>
+        </p:spPr>
+        <p:txBody>
+          <a:bodyPr wrap="square" anchor="t" lIns="18288" rIns="18288" tIns="9144" bIns="9144">
+            <a:spAutoFit/>
+          </a:bodyPr>
+          <a:lstStyle/>
+          <a:p>
+            <a:pPr algn="ctr">
+              <a:defRPr sz="4800" b="1">
+                <a:solidFill>
+                  <a:srgbClr val="37CD85"/>
+                </a:solidFill>
+                <a:latin typeface="Malgun Gothic"/>
+              </a:defRPr>
+            </a:pPr>
+            <a:r>
+              <a:t>8,503</a:t>
+            </a:r>
+          </a:p>
+        </p:txBody>
+      </p:sp>
+      <p:sp>
+        <p:nvSpPr>
+          <p:cNvPr id="13" name="TextBox 12"/>
+          <p:cNvSpPr txBox="1"/>
+          <p:nvPr/>
+        </p:nvSpPr>
+        <p:spPr>
+          <a:xfrm>
+            <a:off x="5349240" y="1993392"/>
+            <a:ext cx="1938528" cy="256032"/>
+          </a:xfrm>
+          <a:prstGeom prst="rect">
+            <a:avLst/>
+          </a:prstGeom>
+          <a:noFill/>
+        </p:spPr>
+        <p:txBody>
+          <a:bodyPr wrap="square" anchor="t" lIns="18288" rIns="18288" tIns="9144" bIns="9144">
+            <a:spAutoFit/>
+          </a:bodyPr>
+          <a:lstStyle/>
+          <a:p>
+            <a:pPr algn="ctr">
+              <a:defRPr sz="1200" b="1">
+                <a:solidFill>
+                  <a:srgbClr val="ACC2D6"/>
+                </a:solidFill>
+                <a:latin typeface="Malgun Gothic"/>
+              </a:defRPr>
+            </a:pPr>
+            <a:r>
+              <a:t>DELIVERED</a:t>
+            </a:r>
+          </a:p>
+        </p:txBody>
+      </p:sp>
+      <p:sp>
+        <p:nvSpPr>
+          <p:cNvPr id="14" name="TextBox 13"/>
+          <p:cNvSpPr txBox="1"/>
+          <p:nvPr/>
+        </p:nvSpPr>
+        <p:spPr>
+          <a:xfrm>
+            <a:off x="7909560" y="1444752"/>
+            <a:ext cx="566928" cy="548640"/>
+          </a:xfrm>
+          <a:prstGeom prst="rect">
+            <a:avLst/>
+          </a:prstGeom>
+          <a:noFill/>
+        </p:spPr>
+        <p:txBody>
+          <a:bodyPr wrap="square" anchor="t" lIns="18288" rIns="18288" tIns="9144" bIns="9144">
+            <a:spAutoFit/>
+          </a:bodyPr>
+          <a:lstStyle/>
+          <a:p>
+            <a:pPr algn="ctr">
+              <a:defRPr sz="3800" b="1">
+                <a:solidFill>
+                  <a:srgbClr val="ACC2D6"/>
+                </a:solidFill>
+                <a:latin typeface="Malgun Gothic"/>
+              </a:defRPr>
+            </a:pPr>
+            <a:r>
+              <a:t>+</a:t>
+            </a:r>
+          </a:p>
+        </p:txBody>
+      </p:sp>
+      <p:sp>
+        <p:nvSpPr>
+          <p:cNvPr id="15" name="TextBox 14"/>
+          <p:cNvSpPr txBox="1"/>
+          <p:nvPr/>
+        </p:nvSpPr>
+        <p:spPr>
+          <a:xfrm>
+            <a:off x="8686800" y="1280160"/>
+            <a:ext cx="2377440" cy="731520"/>
+          </a:xfrm>
+          <a:prstGeom prst="rect">
+            <a:avLst/>
+          </a:prstGeom>
+          <a:noFill/>
+        </p:spPr>
+        <p:txBody>
+          <a:bodyPr wrap="square" anchor="t" lIns="18288" rIns="18288" tIns="9144" bIns="9144">
+            <a:spAutoFit/>
+          </a:bodyPr>
+          <a:lstStyle/>
+          <a:p>
+            <a:pPr algn="ctr">
+              <a:defRPr sz="4800" b="1">
+                <a:solidFill>
+                  <a:srgbClr val="37CD85"/>
+                </a:solidFill>
+                <a:latin typeface="Malgun Gothic"/>
+              </a:defRPr>
+            </a:pPr>
+            <a:r>
+              <a:t>0</a:t>
+            </a:r>
+          </a:p>
+        </p:txBody>
+      </p:sp>
+      <p:sp>
+        <p:nvSpPr>
+          <p:cNvPr id="16" name="TextBox 15"/>
+          <p:cNvSpPr txBox="1"/>
+          <p:nvPr/>
+        </p:nvSpPr>
+        <p:spPr>
+          <a:xfrm>
+            <a:off x="8915400" y="1993392"/>
+            <a:ext cx="1920240" cy="256032"/>
+          </a:xfrm>
+          <a:prstGeom prst="rect">
+            <a:avLst/>
+          </a:prstGeom>
+          <a:noFill/>
+        </p:spPr>
+        <p:txBody>
+          <a:bodyPr wrap="square" anchor="t" lIns="18288" rIns="18288" tIns="9144" bIns="9144">
+            <a:spAutoFit/>
+          </a:bodyPr>
+          <a:lstStyle/>
+          <a:p>
+            <a:pPr algn="ctr">
+              <a:defRPr sz="1200" b="1">
+                <a:solidFill>
+                  <a:srgbClr val="ACC2D6"/>
+                </a:solidFill>
+                <a:latin typeface="Malgun Gothic"/>
+              </a:defRPr>
+            </a:pPr>
+            <a:r>
+              <a:t>OVERRUN</a:t>
+            </a:r>
+          </a:p>
+        </p:txBody>
+      </p:sp>
+      <p:sp>
+        <p:nvSpPr>
+          <p:cNvPr id="17" name="Rounded Rectangle 16"/>
           <p:cNvSpPr/>
           <p:nvPr/>
         </p:nvSpPr>
         <p:spPr>
           <a:xfrm>
-            <a:off x="658368" y="1078992"/>
-            <a:ext cx="5413248" cy="1078992"/>
+            <a:off x="804672" y="3063240"/>
+            <a:ext cx="3182112" cy="1280160"/>
           </a:xfrm>
           <a:prstGeom prst="roundRect">
             <a:avLst/>
@@ -13385,7 +14388,7 @@
           </a:solidFill>
           <a:ln w="19050">
             <a:solidFill>
-              <a:srgbClr val="FFB746"/>
+              <a:srgbClr val="2AD3CD"/>
             </a:solidFill>
           </a:ln>
         </p:spPr>
@@ -13413,14 +14416,50 @@
       </p:sp>
       <p:sp>
         <p:nvSpPr>
-          <p:cNvPr id="10" name="TextBox 9"/>
-          <p:cNvSpPr txBox="1"/>
-          <p:nvPr/>
-        </p:nvSpPr>
-        <p:spPr>
-          <a:xfrm>
-            <a:off x="896112" y="1298448"/>
-            <a:ext cx="1920240" cy="219456"/>
+          <p:cNvPr id="18" name="TextBox 17"/>
+          <p:cNvSpPr txBox="1"/>
+          <p:nvPr/>
+        </p:nvSpPr>
+        <p:spPr>
+          <a:xfrm>
+            <a:off x="1033271" y="3337560"/>
+            <a:ext cx="548640" cy="411480"/>
+          </a:xfrm>
+          <a:prstGeom prst="rect">
+            <a:avLst/>
+          </a:prstGeom>
+          <a:noFill/>
+        </p:spPr>
+        <p:txBody>
+          <a:bodyPr wrap="square" anchor="t" lIns="18288" rIns="18288" tIns="9144" bIns="9144">
+            <a:spAutoFit/>
+          </a:bodyPr>
+          <a:lstStyle/>
+          <a:p>
+            <a:pPr algn="ctr">
+              <a:defRPr sz="2600" b="1">
+                <a:solidFill>
+                  <a:srgbClr val="2AD3CD"/>
+                </a:solidFill>
+                <a:latin typeface="Malgun Gothic"/>
+              </a:defRPr>
+            </a:pPr>
+            <a:r>
+              <a:t>✓</a:t>
+            </a:r>
+          </a:p>
+        </p:txBody>
+      </p:sp>
+      <p:sp>
+        <p:nvSpPr>
+          <p:cNvPr id="19" name="TextBox 18"/>
+          <p:cNvSpPr txBox="1"/>
+          <p:nvPr/>
+        </p:nvSpPr>
+        <p:spPr>
+          <a:xfrm>
+            <a:off x="1664207" y="3264408"/>
+            <a:ext cx="2011680" cy="274320"/>
           </a:xfrm>
           <a:prstGeom prst="rect">
             <a:avLst/>
@@ -13434,29 +14473,29 @@
           <a:lstStyle/>
           <a:p>
             <a:pPr algn="l">
-              <a:defRPr sz="1300" b="1">
-                <a:solidFill>
-                  <a:srgbClr val="FFB746"/>
-                </a:solidFill>
-                <a:latin typeface="Malgun Gothic"/>
-              </a:defRPr>
-            </a:pPr>
-            <a:r>
-              <a:t>50-WORKLOAD 비교 TB</a:t>
-            </a:r>
-          </a:p>
-        </p:txBody>
-      </p:sp>
-      <p:sp>
-        <p:nvSpPr>
-          <p:cNvPr id="11" name="TextBox 10"/>
-          <p:cNvSpPr txBox="1"/>
-          <p:nvPr/>
-        </p:nvSpPr>
-        <p:spPr>
-          <a:xfrm>
-            <a:off x="896112" y="1664208"/>
-            <a:ext cx="4846320" cy="219456"/>
+              <a:defRPr sz="1700" b="1">
+                <a:solidFill>
+                  <a:srgbClr val="F6F9FC"/>
+                </a:solidFill>
+                <a:latin typeface="Malgun Gothic"/>
+              </a:defRPr>
+            </a:pPr>
+            <a:r>
+              <a:t>독립 ledger</a:t>
+            </a:r>
+          </a:p>
+        </p:txBody>
+      </p:sp>
+      <p:sp>
+        <p:nvSpPr>
+          <p:cNvPr id="20" name="TextBox 19"/>
+          <p:cNvSpPr txBox="1"/>
+          <p:nvPr/>
+        </p:nvSpPr>
+        <p:spPr>
+          <a:xfrm>
+            <a:off x="1664207" y="3730752"/>
+            <a:ext cx="2011680" cy="219456"/>
           </a:xfrm>
           <a:prstGeom prst="rect">
             <a:avLst/>
@@ -13470,42 +14509,6 @@
           <a:lstStyle/>
           <a:p>
             <a:pPr algn="l">
-              <a:defRPr sz="1300" b="1">
-                <a:solidFill>
-                  <a:srgbClr val="F6F9FC"/>
-                </a:solidFill>
-                <a:latin typeface="Malgun Gothic"/>
-              </a:defRPr>
-            </a:pPr>
-            <a:r>
-              <a:t>tb_steal_buf_trace_phantom_debug.v</a:t>
-            </a:r>
-          </a:p>
-        </p:txBody>
-      </p:sp>
-      <p:sp>
-        <p:nvSpPr>
-          <p:cNvPr id="12" name="TextBox 11"/>
-          <p:cNvSpPr txBox="1"/>
-          <p:nvPr/>
-        </p:nvSpPr>
-        <p:spPr>
-          <a:xfrm>
-            <a:off x="2834640" y="1298448"/>
-            <a:ext cx="2907792" cy="219456"/>
-          </a:xfrm>
-          <a:prstGeom prst="rect">
-            <a:avLst/>
-          </a:prstGeom>
-          <a:noFill/>
-        </p:spPr>
-        <p:txBody>
-          <a:bodyPr wrap="square" anchor="t" lIns="18288" rIns="18288" tIns="9144" bIns="9144">
-            <a:spAutoFit/>
-          </a:bodyPr>
-          <a:lstStyle/>
-          <a:p>
-            <a:pPr algn="r">
               <a:defRPr sz="1100" b="0">
                 <a:solidFill>
                   <a:srgbClr val="ACC2D6"/>
@@ -13514,21 +14517,21 @@
               </a:defRPr>
             </a:pPr>
             <a:r>
-              <a:t>50/50 PASS · loss 502 · phantom 0</a:t>
-            </a:r>
-          </a:p>
-        </p:txBody>
-      </p:sp>
-      <p:sp>
-        <p:nvSpPr>
-          <p:cNvPr id="13" name="Rounded Rectangle 12"/>
+              <a:t>order violations 0</a:t>
+            </a:r>
+          </a:p>
+        </p:txBody>
+      </p:sp>
+      <p:sp>
+        <p:nvSpPr>
+          <p:cNvPr id="21" name="Rounded Rectangle 20"/>
           <p:cNvSpPr/>
           <p:nvPr/>
         </p:nvSpPr>
         <p:spPr>
           <a:xfrm>
-            <a:off x="6199632" y="1078992"/>
-            <a:ext cx="5321808" cy="1078992"/>
+            <a:off x="4370832" y="3063240"/>
+            <a:ext cx="3182112" cy="1280160"/>
           </a:xfrm>
           <a:prstGeom prst="roundRect">
             <a:avLst/>
@@ -13566,14 +14569,50 @@
       </p:sp>
       <p:sp>
         <p:nvSpPr>
-          <p:cNvPr id="14" name="TextBox 13"/>
-          <p:cNvSpPr txBox="1"/>
-          <p:nvPr/>
-        </p:nvSpPr>
-        <p:spPr>
-          <a:xfrm>
-            <a:off x="6437376" y="1298448"/>
-            <a:ext cx="1828800" cy="219456"/>
+          <p:cNvPr id="22" name="TextBox 21"/>
+          <p:cNvSpPr txBox="1"/>
+          <p:nvPr/>
+        </p:nvSpPr>
+        <p:spPr>
+          <a:xfrm>
+            <a:off x="4599432" y="3337560"/>
+            <a:ext cx="548640" cy="411480"/>
+          </a:xfrm>
+          <a:prstGeom prst="rect">
+            <a:avLst/>
+          </a:prstGeom>
+          <a:noFill/>
+        </p:spPr>
+        <p:txBody>
+          <a:bodyPr wrap="square" anchor="t" lIns="18288" rIns="18288" tIns="9144" bIns="9144">
+            <a:spAutoFit/>
+          </a:bodyPr>
+          <a:lstStyle/>
+          <a:p>
+            <a:pPr algn="ctr">
+              <a:defRPr sz="2600" b="1">
+                <a:solidFill>
+                  <a:srgbClr val="37CD85"/>
+                </a:solidFill>
+                <a:latin typeface="Malgun Gothic"/>
+              </a:defRPr>
+            </a:pPr>
+            <a:r>
+              <a:t>✓</a:t>
+            </a:r>
+          </a:p>
+        </p:txBody>
+      </p:sp>
+      <p:sp>
+        <p:nvSpPr>
+          <p:cNvPr id="23" name="TextBox 22"/>
+          <p:cNvSpPr txBox="1"/>
+          <p:nvPr/>
+        </p:nvSpPr>
+        <p:spPr>
+          <a:xfrm>
+            <a:off x="5230368" y="3264408"/>
+            <a:ext cx="2011680" cy="274320"/>
           </a:xfrm>
           <a:prstGeom prst="rect">
             <a:avLst/>
@@ -13587,29 +14626,29 @@
           <a:lstStyle/>
           <a:p>
             <a:pPr algn="l">
-              <a:defRPr sz="1300" b="1">
-                <a:solidFill>
-                  <a:srgbClr val="37CD85"/>
-                </a:solidFill>
-                <a:latin typeface="Malgun Gothic"/>
-              </a:defRPr>
-            </a:pPr>
-            <a:r>
-              <a:t>최종 POLARITY TB</a:t>
-            </a:r>
-          </a:p>
-        </p:txBody>
-      </p:sp>
-      <p:sp>
-        <p:nvSpPr>
-          <p:cNvPr id="15" name="TextBox 14"/>
-          <p:cNvSpPr txBox="1"/>
-          <p:nvPr/>
-        </p:nvSpPr>
-        <p:spPr>
-          <a:xfrm>
-            <a:off x="6437376" y="1664208"/>
-            <a:ext cx="4754880" cy="219456"/>
+              <a:defRPr sz="1700" b="1">
+                <a:solidFill>
+                  <a:srgbClr val="F6F9FC"/>
+                </a:solidFill>
+                <a:latin typeface="Malgun Gothic"/>
+              </a:defRPr>
+            </a:pPr>
+            <a:r>
+              <a:t>drain 후 empty</a:t>
+            </a:r>
+          </a:p>
+        </p:txBody>
+      </p:sp>
+      <p:sp>
+        <p:nvSpPr>
+          <p:cNvPr id="24" name="TextBox 23"/>
+          <p:cNvSpPr txBox="1"/>
+          <p:nvPr/>
+        </p:nvSpPr>
+        <p:spPr>
+          <a:xfrm>
+            <a:off x="5230368" y="3730752"/>
+            <a:ext cx="2011680" cy="219456"/>
           </a:xfrm>
           <a:prstGeom prst="rect">
             <a:avLst/>
@@ -13623,42 +14662,6 @@
           <a:lstStyle/>
           <a:p>
             <a:pPr algn="l">
-              <a:defRPr sz="1000" b="1">
-                <a:solidFill>
-                  <a:srgbClr val="F6F9FC"/>
-                </a:solidFill>
-                <a:latin typeface="Malgun Gothic"/>
-              </a:defRPr>
-            </a:pPr>
-            <a:r>
-              <a:t>redred_cluster2_polarity_v1_native_observational_tb.sv</a:t>
-            </a:r>
-          </a:p>
-        </p:txBody>
-      </p:sp>
-      <p:sp>
-        <p:nvSpPr>
-          <p:cNvPr id="16" name="TextBox 15"/>
-          <p:cNvSpPr txBox="1"/>
-          <p:nvPr/>
-        </p:nvSpPr>
-        <p:spPr>
-          <a:xfrm>
-            <a:off x="8394192" y="1298448"/>
-            <a:ext cx="2798064" cy="219456"/>
-          </a:xfrm>
-          <a:prstGeom prst="rect">
-            <a:avLst/>
-          </a:prstGeom>
-          <a:noFill/>
-        </p:spPr>
-        <p:txBody>
-          <a:bodyPr wrap="square" anchor="t" lIns="18288" rIns="18288" tIns="9144" bIns="9144">
-            <a:spAutoFit/>
-          </a:bodyPr>
-          <a:lstStyle/>
-          <a:p>
-            <a:pPr algn="r">
               <a:defRPr sz="1100" b="0">
                 <a:solidFill>
                   <a:srgbClr val="ACC2D6"/>
@@ -13667,321 +14670,7 @@
               </a:defRPr>
             </a:pPr>
             <a:r>
-              <a:t>8,503/8,503 · mismatch 0</a:t>
-            </a:r>
-          </a:p>
-        </p:txBody>
-      </p:sp>
-      <p:sp>
-        <p:nvSpPr>
-          <p:cNvPr id="17" name="Rounded Rectangle 16"/>
-          <p:cNvSpPr/>
-          <p:nvPr/>
-        </p:nvSpPr>
-        <p:spPr>
-          <a:xfrm>
-            <a:off x="658368" y="2743200"/>
-            <a:ext cx="1755648" cy="1444752"/>
-          </a:xfrm>
-          <a:prstGeom prst="roundRect">
-            <a:avLst/>
-          </a:prstGeom>
-          <a:solidFill>
-            <a:srgbClr val="12304C"/>
-          </a:solidFill>
-          <a:ln w="19050">
-            <a:solidFill>
-              <a:srgbClr val="4793FF"/>
-            </a:solidFill>
-          </a:ln>
-        </p:spPr>
-        <p:style>
-          <a:lnRef idx="1">
-            <a:schemeClr val="accent1"/>
-          </a:lnRef>
-          <a:fillRef idx="3">
-            <a:schemeClr val="accent1"/>
-          </a:fillRef>
-          <a:effectRef idx="2">
-            <a:schemeClr val="accent1"/>
-          </a:effectRef>
-          <a:fontRef idx="minor">
-            <a:schemeClr val="lt1"/>
-          </a:fontRef>
-        </p:style>
-        <p:txBody>
-          <a:bodyPr rtlCol="0" anchor="ctr"/>
-          <a:lstStyle/>
-          <a:p>
-            <a:pPr algn="ctr"/>
-          </a:p>
-        </p:txBody>
-      </p:sp>
-      <p:sp>
-        <p:nvSpPr>
-          <p:cNvPr id="18" name="TextBox 17"/>
-          <p:cNvSpPr txBox="1"/>
-          <p:nvPr/>
-        </p:nvSpPr>
-        <p:spPr>
-          <a:xfrm>
-            <a:off x="804672" y="2926080"/>
-            <a:ext cx="1463040" cy="219456"/>
-          </a:xfrm>
-          <a:prstGeom prst="rect">
-            <a:avLst/>
-          </a:prstGeom>
-          <a:noFill/>
-        </p:spPr>
-        <p:txBody>
-          <a:bodyPr wrap="square" anchor="t" lIns="18288" rIns="18288" tIns="9144" bIns="9144">
-            <a:spAutoFit/>
-          </a:bodyPr>
-          <a:lstStyle/>
-          <a:p>
-            <a:pPr algn="ctr">
-              <a:defRPr sz="1100" b="1">
-                <a:solidFill>
-                  <a:srgbClr val="4793FF"/>
-                </a:solidFill>
-                <a:latin typeface="Malgun Gothic"/>
-              </a:defRPr>
-            </a:pPr>
-            <a:r>
-              <a:t>TRACE</a:t>
-            </a:r>
-          </a:p>
-        </p:txBody>
-      </p:sp>
-      <p:sp>
-        <p:nvSpPr>
-          <p:cNvPr id="19" name="TextBox 18"/>
-          <p:cNvSpPr txBox="1"/>
-          <p:nvPr/>
-        </p:nvSpPr>
-        <p:spPr>
-          <a:xfrm>
-            <a:off x="804672" y="3355848"/>
-            <a:ext cx="1463040" cy="512064"/>
-          </a:xfrm>
-          <a:prstGeom prst="rect">
-            <a:avLst/>
-          </a:prstGeom>
-          <a:noFill/>
-        </p:spPr>
-        <p:txBody>
-          <a:bodyPr wrap="square" anchor="t" lIns="18288" rIns="18288" tIns="9144" bIns="9144">
-            <a:spAutoFit/>
-          </a:bodyPr>
-          <a:lstStyle/>
-          <a:p>
-            <a:pPr algn="ctr">
-              <a:defRPr sz="1200" b="1">
-                <a:solidFill>
-                  <a:srgbClr val="F6F9FC"/>
-                </a:solidFill>
-                <a:latin typeface="Malgun Gothic"/>
-              </a:defRPr>
-            </a:pPr>
-            <a:r>
-              <a:t>arrival[15:0]</a:t>
-            </a:r>
-            <a:br/>
-            <a:r>
-              <a:t>polarity[15:0]</a:t>
-            </a:r>
-          </a:p>
-        </p:txBody>
-      </p:sp>
-      <p:sp>
-        <p:nvSpPr>
-          <p:cNvPr id="20" name="TextBox 19"/>
-          <p:cNvSpPr txBox="1"/>
-          <p:nvPr/>
-        </p:nvSpPr>
-        <p:spPr>
-          <a:xfrm>
-            <a:off x="2414015" y="3209544"/>
-            <a:ext cx="475488" cy="411480"/>
-          </a:xfrm>
-          <a:prstGeom prst="rect">
-            <a:avLst/>
-          </a:prstGeom>
-          <a:noFill/>
-        </p:spPr>
-        <p:txBody>
-          <a:bodyPr wrap="square" anchor="t" lIns="18288" rIns="18288" tIns="9144" bIns="9144">
-            <a:spAutoFit/>
-          </a:bodyPr>
-          <a:lstStyle/>
-          <a:p>
-            <a:pPr algn="ctr">
-              <a:defRPr sz="2200" b="1">
-                <a:solidFill>
-                  <a:srgbClr val="2AD3CD"/>
-                </a:solidFill>
-                <a:latin typeface="Malgun Gothic"/>
-              </a:defRPr>
-            </a:pPr>
-            <a:r>
-              <a:t>→</a:t>
-            </a:r>
-          </a:p>
-        </p:txBody>
-      </p:sp>
-      <p:sp>
-        <p:nvSpPr>
-          <p:cNvPr id="21" name="Rounded Rectangle 20"/>
-          <p:cNvSpPr/>
-          <p:nvPr/>
-        </p:nvSpPr>
-        <p:spPr>
-          <a:xfrm>
-            <a:off x="2889504" y="2743200"/>
-            <a:ext cx="1755648" cy="1444752"/>
-          </a:xfrm>
-          <a:prstGeom prst="roundRect">
-            <a:avLst/>
-          </a:prstGeom>
-          <a:solidFill>
-            <a:srgbClr val="12304C"/>
-          </a:solidFill>
-          <a:ln w="19050">
-            <a:solidFill>
-              <a:srgbClr val="2AD3CD"/>
-            </a:solidFill>
-          </a:ln>
-        </p:spPr>
-        <p:style>
-          <a:lnRef idx="1">
-            <a:schemeClr val="accent1"/>
-          </a:lnRef>
-          <a:fillRef idx="3">
-            <a:schemeClr val="accent1"/>
-          </a:fillRef>
-          <a:effectRef idx="2">
-            <a:schemeClr val="accent1"/>
-          </a:effectRef>
-          <a:fontRef idx="minor">
-            <a:schemeClr val="lt1"/>
-          </a:fontRef>
-        </p:style>
-        <p:txBody>
-          <a:bodyPr rtlCol="0" anchor="ctr"/>
-          <a:lstStyle/>
-          <a:p>
-            <a:pPr algn="ctr"/>
-          </a:p>
-        </p:txBody>
-      </p:sp>
-      <p:sp>
-        <p:nvSpPr>
-          <p:cNvPr id="22" name="TextBox 21"/>
-          <p:cNvSpPr txBox="1"/>
-          <p:nvPr/>
-        </p:nvSpPr>
-        <p:spPr>
-          <a:xfrm>
-            <a:off x="3035808" y="2926080"/>
-            <a:ext cx="1463040" cy="219456"/>
-          </a:xfrm>
-          <a:prstGeom prst="rect">
-            <a:avLst/>
-          </a:prstGeom>
-          <a:noFill/>
-        </p:spPr>
-        <p:txBody>
-          <a:bodyPr wrap="square" anchor="t" lIns="18288" rIns="18288" tIns="9144" bIns="9144">
-            <a:spAutoFit/>
-          </a:bodyPr>
-          <a:lstStyle/>
-          <a:p>
-            <a:pPr algn="ctr">
-              <a:defRPr sz="1100" b="1">
-                <a:solidFill>
-                  <a:srgbClr val="2AD3CD"/>
-                </a:solidFill>
-                <a:latin typeface="Malgun Gothic"/>
-              </a:defRPr>
-            </a:pPr>
-            <a:r>
-              <a:t>ENQUEUE</a:t>
-            </a:r>
-          </a:p>
-        </p:txBody>
-      </p:sp>
-      <p:sp>
-        <p:nvSpPr>
-          <p:cNvPr id="23" name="TextBox 22"/>
-          <p:cNvSpPr txBox="1"/>
-          <p:nvPr/>
-        </p:nvSpPr>
-        <p:spPr>
-          <a:xfrm>
-            <a:off x="3035808" y="3355848"/>
-            <a:ext cx="1463040" cy="512064"/>
-          </a:xfrm>
-          <a:prstGeom prst="rect">
-            <a:avLst/>
-          </a:prstGeom>
-          <a:noFill/>
-        </p:spPr>
-        <p:txBody>
-          <a:bodyPr wrap="square" anchor="t" lIns="18288" rIns="18288" tIns="9144" bIns="9144">
-            <a:spAutoFit/>
-          </a:bodyPr>
-          <a:lstStyle/>
-          <a:p>
-            <a:pPr algn="ctr">
-              <a:defRPr sz="1200" b="1">
-                <a:solidFill>
-                  <a:srgbClr val="F6F9FC"/>
-                </a:solidFill>
-                <a:latin typeface="Malgun Gothic"/>
-              </a:defRPr>
-            </a:pPr>
-            <a:r>
-              <a:t>source FIFO</a:t>
-            </a:r>
-            <a:br/>
-            <a:r>
-              <a:t>depth 0→1→2</a:t>
-            </a:r>
-          </a:p>
-        </p:txBody>
-      </p:sp>
-      <p:sp>
-        <p:nvSpPr>
-          <p:cNvPr id="24" name="TextBox 23"/>
-          <p:cNvSpPr txBox="1"/>
-          <p:nvPr/>
-        </p:nvSpPr>
-        <p:spPr>
-          <a:xfrm>
-            <a:off x="4645152" y="3209544"/>
-            <a:ext cx="475488" cy="411480"/>
-          </a:xfrm>
-          <a:prstGeom prst="rect">
-            <a:avLst/>
-          </a:prstGeom>
-          <a:noFill/>
-        </p:spPr>
-        <p:txBody>
-          <a:bodyPr wrap="square" anchor="t" lIns="18288" rIns="18288" tIns="9144" bIns="9144">
-            <a:spAutoFit/>
-          </a:bodyPr>
-          <a:lstStyle/>
-          <a:p>
-            <a:pPr algn="ctr">
-              <a:defRPr sz="2200" b="1">
-                <a:solidFill>
-                  <a:srgbClr val="2AD3CD"/>
-                </a:solidFill>
-                <a:latin typeface="Malgun Gothic"/>
-              </a:defRPr>
-            </a:pPr>
-            <a:r>
-              <a:t>→</a:t>
+              <a:t>남은 event 0</a:t>
             </a:r>
           </a:p>
         </p:txBody>
@@ -13994,8 +14683,8 @@
         </p:nvSpPr>
         <p:spPr>
           <a:xfrm>
-            <a:off x="5120640" y="2743200"/>
-            <a:ext cx="1755648" cy="1444752"/>
+            <a:off x="7936992" y="3063240"/>
+            <a:ext cx="3182112" cy="1280160"/>
           </a:xfrm>
           <a:prstGeom prst="roundRect">
             <a:avLst/>
@@ -14039,8 +14728,8 @@
         </p:nvSpPr>
         <p:spPr>
           <a:xfrm>
-            <a:off x="5266944" y="2926080"/>
-            <a:ext cx="1463040" cy="219456"/>
+            <a:off x="8165592" y="3337560"/>
+            <a:ext cx="548640" cy="411480"/>
           </a:xfrm>
           <a:prstGeom prst="rect">
             <a:avLst/>
@@ -14054,7 +14743,7 @@
           <a:lstStyle/>
           <a:p>
             <a:pPr algn="ctr">
-              <a:defRPr sz="1100" b="1">
+              <a:defRPr sz="2600" b="1">
                 <a:solidFill>
                   <a:srgbClr val="B27EFF"/>
                 </a:solidFill>
@@ -14062,7 +14751,7 @@
               </a:defRPr>
             </a:pPr>
             <a:r>
-              <a:t>ARBITRATE</a:t>
+              <a:t>✓</a:t>
             </a:r>
           </a:p>
         </p:txBody>
@@ -14075,22 +14764,22 @@
         </p:nvSpPr>
         <p:spPr>
           <a:xfrm>
-            <a:off x="5266944" y="3355848"/>
-            <a:ext cx="1463040" cy="512064"/>
-          </a:xfrm>
-          <a:prstGeom prst="rect">
-            <a:avLst/>
-          </a:prstGeom>
-          <a:noFill/>
-        </p:spPr>
-        <p:txBody>
-          <a:bodyPr wrap="square" anchor="t" lIns="18288" rIns="18288" tIns="9144" bIns="9144">
-            <a:spAutoFit/>
-          </a:bodyPr>
-          <a:lstStyle/>
-          <a:p>
-            <a:pPr algn="ctr">
-              <a:defRPr sz="1200" b="1">
+            <a:off x="8796528" y="3264408"/>
+            <a:ext cx="2011680" cy="274320"/>
+          </a:xfrm>
+          <a:prstGeom prst="rect">
+            <a:avLst/>
+          </a:prstGeom>
+          <a:noFill/>
+        </p:spPr>
+        <p:txBody>
+          <a:bodyPr wrap="square" anchor="t" lIns="18288" rIns="18288" tIns="9144" bIns="9144">
+            <a:spAutoFit/>
+          </a:bodyPr>
+          <a:lstStyle/>
+          <a:p>
+            <a:pPr algn="l">
+              <a:defRPr sz="1700" b="1">
                 <a:solidFill>
                   <a:srgbClr val="F6F9FC"/>
                 </a:solidFill>
@@ -14098,11 +14787,7 @@
               </a:defRPr>
             </a:pPr>
             <a:r>
-              <a:t>center/periph</a:t>
-            </a:r>
-            <a:br/>
-            <a:r>
-              <a:t>+ conditional steal</a:t>
+              <a:t>polarity 보존</a:t>
             </a:r>
           </a:p>
         </p:txBody>
@@ -14115,30 +14800,30 @@
         </p:nvSpPr>
         <p:spPr>
           <a:xfrm>
-            <a:off x="6876288" y="3209544"/>
-            <a:ext cx="475488" cy="411480"/>
-          </a:xfrm>
-          <a:prstGeom prst="rect">
-            <a:avLst/>
-          </a:prstGeom>
-          <a:noFill/>
-        </p:spPr>
-        <p:txBody>
-          <a:bodyPr wrap="square" anchor="t" lIns="18288" rIns="18288" tIns="9144" bIns="9144">
-            <a:spAutoFit/>
-          </a:bodyPr>
-          <a:lstStyle/>
-          <a:p>
-            <a:pPr algn="ctr">
-              <a:defRPr sz="2200" b="1">
-                <a:solidFill>
-                  <a:srgbClr val="2AD3CD"/>
-                </a:solidFill>
-                <a:latin typeface="Malgun Gothic"/>
-              </a:defRPr>
-            </a:pPr>
-            <a:r>
-              <a:t>→</a:t>
+            <a:off x="8796528" y="3730752"/>
+            <a:ext cx="2011680" cy="219456"/>
+          </a:xfrm>
+          <a:prstGeom prst="rect">
+            <a:avLst/>
+          </a:prstGeom>
+          <a:noFill/>
+        </p:spPr>
+        <p:txBody>
+          <a:bodyPr wrap="square" anchor="t" lIns="18288" rIns="18288" tIns="9144" bIns="9144">
+            <a:spAutoFit/>
+          </a:bodyPr>
+          <a:lstStyle/>
+          <a:p>
+            <a:pPr algn="l">
+              <a:defRPr sz="1100" b="0">
+                <a:solidFill>
+                  <a:srgbClr val="ACC2D6"/>
+                </a:solidFill>
+                <a:latin typeface="Malgun Gothic"/>
+              </a:defRPr>
+            </a:pPr>
+            <a:r>
+              <a:t>mismatch 0</a:t>
             </a:r>
           </a:p>
         </p:txBody>
@@ -14151,286 +14836,8 @@
         </p:nvSpPr>
         <p:spPr>
           <a:xfrm>
-            <a:off x="7351775" y="2743200"/>
-            <a:ext cx="1755648" cy="1444752"/>
-          </a:xfrm>
-          <a:prstGeom prst="roundRect">
-            <a:avLst/>
-          </a:prstGeom>
-          <a:solidFill>
-            <a:srgbClr val="12304C"/>
-          </a:solidFill>
-          <a:ln w="19050">
-            <a:solidFill>
-              <a:srgbClr val="37CD85"/>
-            </a:solidFill>
-          </a:ln>
-        </p:spPr>
-        <p:style>
-          <a:lnRef idx="1">
-            <a:schemeClr val="accent1"/>
-          </a:lnRef>
-          <a:fillRef idx="3">
-            <a:schemeClr val="accent1"/>
-          </a:fillRef>
-          <a:effectRef idx="2">
-            <a:schemeClr val="accent1"/>
-          </a:effectRef>
-          <a:fontRef idx="minor">
-            <a:schemeClr val="lt1"/>
-          </a:fontRef>
-        </p:style>
-        <p:txBody>
-          <a:bodyPr rtlCol="0" anchor="ctr"/>
-          <a:lstStyle/>
-          <a:p>
-            <a:pPr algn="ctr"/>
-          </a:p>
-        </p:txBody>
-      </p:sp>
-      <p:sp>
-        <p:nvSpPr>
-          <p:cNvPr id="30" name="TextBox 29"/>
-          <p:cNvSpPr txBox="1"/>
-          <p:nvPr/>
-        </p:nvSpPr>
-        <p:spPr>
-          <a:xfrm>
-            <a:off x="7498079" y="2926080"/>
-            <a:ext cx="1463040" cy="219456"/>
-          </a:xfrm>
-          <a:prstGeom prst="rect">
-            <a:avLst/>
-          </a:prstGeom>
-          <a:noFill/>
-        </p:spPr>
-        <p:txBody>
-          <a:bodyPr wrap="square" anchor="t" lIns="18288" rIns="18288" tIns="9144" bIns="9144">
-            <a:spAutoFit/>
-          </a:bodyPr>
-          <a:lstStyle/>
-          <a:p>
-            <a:pPr algn="ctr">
-              <a:defRPr sz="1100" b="1">
-                <a:solidFill>
-                  <a:srgbClr val="37CD85"/>
-                </a:solidFill>
-                <a:latin typeface="Malgun Gothic"/>
-              </a:defRPr>
-            </a:pPr>
-            <a:r>
-              <a:t>RETIRE</a:t>
-            </a:r>
-          </a:p>
-        </p:txBody>
-      </p:sp>
-      <p:sp>
-        <p:nvSpPr>
-          <p:cNvPr id="31" name="TextBox 30"/>
-          <p:cNvSpPr txBox="1"/>
-          <p:nvPr/>
-        </p:nvSpPr>
-        <p:spPr>
-          <a:xfrm>
-            <a:off x="7498079" y="3355848"/>
-            <a:ext cx="1463040" cy="512064"/>
-          </a:xfrm>
-          <a:prstGeom prst="rect">
-            <a:avLst/>
-          </a:prstGeom>
-          <a:noFill/>
-        </p:spPr>
-        <p:txBody>
-          <a:bodyPr wrap="square" anchor="t" lIns="18288" rIns="18288" tIns="9144" bIns="9144">
-            <a:spAutoFit/>
-          </a:bodyPr>
-          <a:lstStyle/>
-          <a:p>
-            <a:pPr algn="ctr">
-              <a:defRPr sz="1200" b="1">
-                <a:solidFill>
-                  <a:srgbClr val="F6F9FC"/>
-                </a:solidFill>
-                <a:latin typeface="Malgun Gothic"/>
-              </a:defRPr>
-            </a:pPr>
-            <a:r>
-              <a:t>row + col_mask</a:t>
-            </a:r>
-            <a:br/>
-            <a:r>
-              <a:t>+ pol_mask</a:t>
-            </a:r>
-          </a:p>
-        </p:txBody>
-      </p:sp>
-      <p:sp>
-        <p:nvSpPr>
-          <p:cNvPr id="32" name="TextBox 31"/>
-          <p:cNvSpPr txBox="1"/>
-          <p:nvPr/>
-        </p:nvSpPr>
-        <p:spPr>
-          <a:xfrm>
-            <a:off x="9107424" y="3209544"/>
-            <a:ext cx="475488" cy="411480"/>
-          </a:xfrm>
-          <a:prstGeom prst="rect">
-            <a:avLst/>
-          </a:prstGeom>
-          <a:noFill/>
-        </p:spPr>
-        <p:txBody>
-          <a:bodyPr wrap="square" anchor="t" lIns="18288" rIns="18288" tIns="9144" bIns="9144">
-            <a:spAutoFit/>
-          </a:bodyPr>
-          <a:lstStyle/>
-          <a:p>
-            <a:pPr algn="ctr">
-              <a:defRPr sz="2200" b="1">
-                <a:solidFill>
-                  <a:srgbClr val="2AD3CD"/>
-                </a:solidFill>
-                <a:latin typeface="Malgun Gothic"/>
-              </a:defRPr>
-            </a:pPr>
-            <a:r>
-              <a:t>→</a:t>
-            </a:r>
-          </a:p>
-        </p:txBody>
-      </p:sp>
-      <p:sp>
-        <p:nvSpPr>
-          <p:cNvPr id="33" name="Rounded Rectangle 32"/>
-          <p:cNvSpPr/>
-          <p:nvPr/>
-        </p:nvSpPr>
-        <p:spPr>
-          <a:xfrm>
-            <a:off x="9582912" y="2743200"/>
-            <a:ext cx="1755648" cy="1444752"/>
-          </a:xfrm>
-          <a:prstGeom prst="roundRect">
-            <a:avLst/>
-          </a:prstGeom>
-          <a:solidFill>
-            <a:srgbClr val="12304C"/>
-          </a:solidFill>
-          <a:ln w="19050">
-            <a:solidFill>
-              <a:srgbClr val="FFB746"/>
-            </a:solidFill>
-          </a:ln>
-        </p:spPr>
-        <p:style>
-          <a:lnRef idx="1">
-            <a:schemeClr val="accent1"/>
-          </a:lnRef>
-          <a:fillRef idx="3">
-            <a:schemeClr val="accent1"/>
-          </a:fillRef>
-          <a:effectRef idx="2">
-            <a:schemeClr val="accent1"/>
-          </a:effectRef>
-          <a:fontRef idx="minor">
-            <a:schemeClr val="lt1"/>
-          </a:fontRef>
-        </p:style>
-        <p:txBody>
-          <a:bodyPr rtlCol="0" anchor="ctr"/>
-          <a:lstStyle/>
-          <a:p>
-            <a:pPr algn="ctr"/>
-          </a:p>
-        </p:txBody>
-      </p:sp>
-      <p:sp>
-        <p:nvSpPr>
-          <p:cNvPr id="34" name="TextBox 33"/>
-          <p:cNvSpPr txBox="1"/>
-          <p:nvPr/>
-        </p:nvSpPr>
-        <p:spPr>
-          <a:xfrm>
-            <a:off x="9729216" y="2926080"/>
-            <a:ext cx="1463040" cy="219456"/>
-          </a:xfrm>
-          <a:prstGeom prst="rect">
-            <a:avLst/>
-          </a:prstGeom>
-          <a:noFill/>
-        </p:spPr>
-        <p:txBody>
-          <a:bodyPr wrap="square" anchor="t" lIns="18288" rIns="18288" tIns="9144" bIns="9144">
-            <a:spAutoFit/>
-          </a:bodyPr>
-          <a:lstStyle/>
-          <a:p>
-            <a:pPr algn="ctr">
-              <a:defRPr sz="1100" b="1">
-                <a:solidFill>
-                  <a:srgbClr val="FFB746"/>
-                </a:solidFill>
-                <a:latin typeface="Malgun Gothic"/>
-              </a:defRPr>
-            </a:pPr>
-            <a:r>
-              <a:t>LEDGER</a:t>
-            </a:r>
-          </a:p>
-        </p:txBody>
-      </p:sp>
-      <p:sp>
-        <p:nvSpPr>
-          <p:cNvPr id="35" name="TextBox 34"/>
-          <p:cNvSpPr txBox="1"/>
-          <p:nvPr/>
-        </p:nvSpPr>
-        <p:spPr>
-          <a:xfrm>
-            <a:off x="9729216" y="3355848"/>
-            <a:ext cx="1463040" cy="512064"/>
-          </a:xfrm>
-          <a:prstGeom prst="rect">
-            <a:avLst/>
-          </a:prstGeom>
-          <a:noFill/>
-        </p:spPr>
-        <p:txBody>
-          <a:bodyPr wrap="square" anchor="t" lIns="18288" rIns="18288" tIns="9144" bIns="9144">
-            <a:spAutoFit/>
-          </a:bodyPr>
-          <a:lstStyle/>
-          <a:p>
-            <a:pPr algn="ctr">
-              <a:defRPr sz="1200" b="1">
-                <a:solidFill>
-                  <a:srgbClr val="F6F9FC"/>
-                </a:solidFill>
-                <a:latin typeface="Malgun Gothic"/>
-              </a:defRPr>
-            </a:pPr>
-            <a:r>
-              <a:t>cycle별 원시값</a:t>
-            </a:r>
-            <a:br/>
-            <a:r>
-              <a:t>독립 재계산</a:t>
-            </a:r>
-          </a:p>
-        </p:txBody>
-      </p:sp>
-      <p:sp>
-        <p:nvSpPr>
-          <p:cNvPr id="36" name="Rounded Rectangle 35"/>
-          <p:cNvSpPr/>
-          <p:nvPr/>
-        </p:nvSpPr>
-        <p:spPr>
-          <a:xfrm>
-            <a:off x="1188720" y="4590288"/>
-            <a:ext cx="9784080" cy="658368"/>
+            <a:off x="713232" y="5669280"/>
+            <a:ext cx="10771632" cy="566928"/>
           </a:xfrm>
           <a:prstGeom prst="roundRect">
             <a:avLst/>
@@ -14466,86 +14873,7 @@
       </p:sp>
       <p:sp>
         <p:nvSpPr>
-          <p:cNvPr id="37" name="TextBox 36"/>
-          <p:cNvSpPr txBox="1"/>
-          <p:nvPr/>
-        </p:nvSpPr>
-        <p:spPr>
-          <a:xfrm>
-            <a:off x="1408176" y="4782312"/>
-            <a:ext cx="9345168" cy="246888"/>
-          </a:xfrm>
-          <a:prstGeom prst="rect">
-            <a:avLst/>
-          </a:prstGeom>
-          <a:noFill/>
-        </p:spPr>
-        <p:txBody>
-          <a:bodyPr wrap="square" anchor="t" lIns="18288" rIns="18288" tIns="9144" bIns="9144">
-            <a:spAutoFit/>
-          </a:bodyPr>
-          <a:lstStyle/>
-          <a:p>
-            <a:pPr algn="ctr">
-              <a:defRPr sz="1200" b="1">
-                <a:solidFill>
-                  <a:srgbClr val="F6F9FC"/>
-                </a:solidFill>
-                <a:latin typeface="Malgun Gothic"/>
-              </a:defRPr>
-            </a:pPr>
-            <a:r>
-              <a:t>실제 CYCLE 4162  |  lane0: row2 col=0x6 pol=0x0  ·  lane1: row0 col=0x1 pol=0x1  →  4 events 동시 retire</a:t>
-            </a:r>
-          </a:p>
-        </p:txBody>
-      </p:sp>
-      <p:sp>
-        <p:nvSpPr>
-          <p:cNvPr id="38" name="Rounded Rectangle 37"/>
-          <p:cNvSpPr/>
-          <p:nvPr/>
-        </p:nvSpPr>
-        <p:spPr>
-          <a:xfrm>
-            <a:off x="713232" y="5669280"/>
-            <a:ext cx="10771632" cy="566928"/>
-          </a:xfrm>
-          <a:prstGeom prst="roundRect">
-            <a:avLst/>
-          </a:prstGeom>
-          <a:solidFill>
-            <a:srgbClr val="12304C"/>
-          </a:solidFill>
-          <a:ln>
-            <a:noFill/>
-          </a:ln>
-        </p:spPr>
-        <p:style>
-          <a:lnRef idx="1">
-            <a:schemeClr val="accent1"/>
-          </a:lnRef>
-          <a:fillRef idx="3">
-            <a:schemeClr val="accent1"/>
-          </a:fillRef>
-          <a:effectRef idx="2">
-            <a:schemeClr val="accent1"/>
-          </a:effectRef>
-          <a:fontRef idx="minor">
-            <a:schemeClr val="lt1"/>
-          </a:fontRef>
-        </p:style>
-        <p:txBody>
-          <a:bodyPr rtlCol="0" anchor="ctr"/>
-          <a:lstStyle/>
-          <a:p>
-            <a:pPr algn="ctr"/>
-          </a:p>
-        </p:txBody>
-      </p:sp>
-      <p:sp>
-        <p:nvSpPr>
-          <p:cNvPr id="39" name="TextBox 38"/>
+          <p:cNvPr id="30" name="TextBox 29"/>
           <p:cNvSpPr txBox="1"/>
           <p:nvPr/>
         </p:nvSpPr>
@@ -14574,14 +14902,14 @@
               </a:defRPr>
             </a:pPr>
             <a:r>
-              <a:t>8,503 = 8,503 + overrun 0 · mismatch/phantom/duplicate 0 · drain empty · Python 독립검증</a:t>
-            </a:r>
-          </a:p>
-        </p:txBody>
-      </p:sp>
-      <p:sp>
-        <p:nvSpPr>
-          <p:cNvPr id="40" name="Rectangle 39"/>
+              <a:t>generated = delivered + overrun · phantom 0 · duplicate 0</a:t>
+            </a:r>
+          </a:p>
+        </p:txBody>
+      </p:sp>
+      <p:sp>
+        <p:nvSpPr>
+          <p:cNvPr id="31" name="Rectangle 30"/>
           <p:cNvSpPr/>
           <p:nvPr/>
         </p:nvSpPr>
@@ -14624,7 +14952,7 @@
       </p:sp>
       <p:sp>
         <p:nvSpPr>
-          <p:cNvPr id="41" name="Rounded Rectangle 40"/>
+          <p:cNvPr id="32" name="Rounded Rectangle 31"/>
           <p:cNvSpPr/>
           <p:nvPr/>
         </p:nvSpPr>
@@ -14667,7 +14995,7 @@
       </p:sp>
       <p:sp>
         <p:nvSpPr>
-          <p:cNvPr id="42" name="TextBox 41"/>
+          <p:cNvPr id="33" name="TextBox 32"/>
           <p:cNvSpPr txBox="1"/>
           <p:nvPr/>
         </p:nvSpPr>
@@ -14696,14 +15024,14 @@
               </a:defRPr>
             </a:pPr>
             <a:r>
-              <a:t>03  검증</a:t>
-            </a:r>
-          </a:p>
-        </p:txBody>
-      </p:sp>
-      <p:sp>
-        <p:nvSpPr>
-          <p:cNvPr id="43" name="TextBox 42"/>
+              <a:t>03  결과</a:t>
+            </a:r>
+          </a:p>
+        </p:txBody>
+      </p:sp>
+      <p:sp>
+        <p:nvSpPr>
+          <p:cNvPr id="34" name="TextBox 33"/>
           <p:cNvSpPr txBox="1"/>
           <p:nvPr/>
         </p:nvSpPr>
@@ -14732,14 +15060,14 @@
               </a:defRPr>
             </a:pPr>
             <a:r>
-              <a:t>두 실제 TB가 비교 성능과 최종 polarity를 분리 검증</a:t>
-            </a:r>
-          </a:p>
-        </p:txBody>
-      </p:sp>
-      <p:sp>
-        <p:nvSpPr>
-          <p:cNvPr id="44" name="Rectangle 43"/>
+              <a:t>최종 trace에서 buffer·polarity 오류 0</a:t>
+            </a:r>
+          </a:p>
+        </p:txBody>
+      </p:sp>
+      <p:sp>
+        <p:nvSpPr>
+          <p:cNvPr id="35" name="Rectangle 34"/>
           <p:cNvSpPr/>
           <p:nvPr/>
         </p:nvSpPr>

--- a/submission/cluster2_digital_first_round_20260828/presentation/cluster2_digital_first_round_20260828.pptx
+++ b/submission/cluster2_digital_first_round_20260828/presentation/cluster2_digital_first_round_20260828.pptx
@@ -4611,7 +4611,7 @@
           <a:lstStyle/>
           <a:p>
             <a:pPr algn="ctr">
-              <a:defRPr sz="1800" b="1">
+              <a:defRPr sz="1700" b="1">
                 <a:solidFill>
                   <a:srgbClr val="F6F9FC"/>
                 </a:solidFill>
@@ -4619,14 +4619,50 @@
               </a:defRPr>
             </a:pPr>
             <a:r>
-              <a:t>final-trace 직접 비교  ·  CAV RTL  ·  activity power  ·  signoff</a:t>
-            </a:r>
-          </a:p>
-        </p:txBody>
-      </p:sp>
-      <p:sp>
-        <p:nvSpPr>
-          <p:cNvPr id="24" name="Rounded Rectangle 23"/>
+              <a:t>repeat-flag  ·  polarity→CAV full replay/RTL  ·  activity power  ·  exact Fmax</a:t>
+            </a:r>
+          </a:p>
+        </p:txBody>
+      </p:sp>
+      <p:sp>
+        <p:nvSpPr>
+          <p:cNvPr id="24" name="TextBox 23"/>
+          <p:cNvSpPr txBox="1"/>
+          <p:nvPr/>
+        </p:nvSpPr>
+        <p:spPr>
+          <a:xfrm>
+            <a:off x="1965960" y="4553712"/>
+            <a:ext cx="8732520" cy="182880"/>
+          </a:xfrm>
+          <a:prstGeom prst="rect">
+            <a:avLst/>
+          </a:prstGeom>
+          <a:noFill/>
+        </p:spPr>
+        <p:txBody>
+          <a:bodyPr wrap="square" anchor="t" lIns="18288" rIns="18288" tIns="9144" bIns="9144">
+            <a:spAutoFit/>
+          </a:bodyPr>
+          <a:lstStyle/>
+          <a:p>
+            <a:pPr algn="ctr">
+              <a:defRPr sz="900" b="1">
+                <a:solidFill>
+                  <a:srgbClr val="FFB746"/>
+                </a:solidFill>
+                <a:latin typeface="Malgun Gothic"/>
+              </a:defRPr>
+            </a:pPr>
+            <a:r>
+              <a:t>row-trim −14.29%는 기본 Cluster2 전용 · steal_buf에는 적용 불가</a:t>
+            </a:r>
+          </a:p>
+        </p:txBody>
+      </p:sp>
+      <p:sp>
+        <p:nvSpPr>
+          <p:cNvPr id="25" name="Rounded Rectangle 24"/>
           <p:cNvSpPr/>
           <p:nvPr/>
         </p:nvSpPr>
@@ -4669,7 +4705,7 @@
       </p:sp>
       <p:sp>
         <p:nvSpPr>
-          <p:cNvPr id="25" name="TextBox 24"/>
+          <p:cNvPr id="26" name="TextBox 25"/>
           <p:cNvSpPr txBox="1"/>
           <p:nvPr/>
         </p:nvSpPr>
@@ -4705,7 +4741,7 @@
       </p:sp>
       <p:sp>
         <p:nvSpPr>
-          <p:cNvPr id="26" name="Rectangle 25"/>
+          <p:cNvPr id="27" name="Rectangle 26"/>
           <p:cNvSpPr/>
           <p:nvPr/>
         </p:nvSpPr>
@@ -4748,7 +4784,7 @@
       </p:sp>
       <p:sp>
         <p:nvSpPr>
-          <p:cNvPr id="27" name="Rounded Rectangle 26"/>
+          <p:cNvPr id="28" name="Rounded Rectangle 27"/>
           <p:cNvSpPr/>
           <p:nvPr/>
         </p:nvSpPr>
@@ -4791,7 +4827,7 @@
       </p:sp>
       <p:sp>
         <p:nvSpPr>
-          <p:cNvPr id="28" name="TextBox 27"/>
+          <p:cNvPr id="29" name="TextBox 28"/>
           <p:cNvSpPr txBox="1"/>
           <p:nvPr/>
         </p:nvSpPr>
@@ -4827,7 +4863,7 @@
       </p:sp>
       <p:sp>
         <p:nvSpPr>
-          <p:cNvPr id="29" name="TextBox 28"/>
+          <p:cNvPr id="30" name="TextBox 29"/>
           <p:cNvSpPr txBox="1"/>
           <p:nvPr/>
         </p:nvSpPr>
@@ -4863,7 +4899,7 @@
       </p:sp>
       <p:sp>
         <p:nvSpPr>
-          <p:cNvPr id="30" name="Rectangle 29"/>
+          <p:cNvPr id="31" name="Rectangle 30"/>
           <p:cNvSpPr/>
           <p:nvPr/>
         </p:nvSpPr>
@@ -5083,7 +5119,7 @@
               </a:defRPr>
             </a:pPr>
             <a:r>
-              <a:t>우리 AER이 겨냥한 병목은 네 가지다</a:t>
+              <a:t>Ryu의 6문제에서 우리가 구체화한 네 RTL 병목</a:t>
             </a:r>
           </a:p>
         </p:txBody>
@@ -5162,7 +5198,7 @@
               </a:defRPr>
             </a:pPr>
             <a:r>
-              <a:t>Source: final polarity RTL contract and bottleneck audit</a:t>
+              <a:t>Source: Ryu CVPRW 2019 · final polarity RTL contract · bottleneck audit</a:t>
             </a:r>
           </a:p>
         </p:txBody>
@@ -5205,7 +5241,43 @@
       </p:sp>
       <p:sp>
         <p:nvSpPr>
-          <p:cNvPr id="9" name="Rounded Rectangle 8"/>
+          <p:cNvPr id="9" name="TextBox 8"/>
+          <p:cNvSpPr txBox="1"/>
+          <p:nvPr/>
+        </p:nvSpPr>
+        <p:spPr>
+          <a:xfrm>
+            <a:off x="841248" y="905256"/>
+            <a:ext cx="10515600" cy="182880"/>
+          </a:xfrm>
+          <a:prstGeom prst="rect">
+            <a:avLst/>
+          </a:prstGeom>
+          <a:noFill/>
+        </p:spPr>
+        <p:txBody>
+          <a:bodyPr wrap="square" anchor="t" lIns="18288" rIns="18288" tIns="9144" bIns="9144">
+            <a:spAutoFit/>
+          </a:bodyPr>
+          <a:lstStyle/>
+          <a:p>
+            <a:pPr algn="ctr">
+              <a:defRPr sz="900" b="1">
+                <a:solidFill>
+                  <a:srgbClr val="ACC2D6"/>
+                </a:solidFill>
+                <a:latin typeface="Malgun Gothic"/>
+              </a:defRPr>
+            </a:pPr>
+            <a:r>
+              <a:t>Ryu: ① 주소 overhead  ② bandwidth  ③ arbitration latency  ④ unfairness  ⑤ timestamp  ⑥ motion artifact</a:t>
+            </a:r>
+          </a:p>
+        </p:txBody>
+      </p:sp>
+      <p:sp>
+        <p:nvSpPr>
+          <p:cNvPr id="10" name="Rounded Rectangle 9"/>
           <p:cNvSpPr/>
           <p:nvPr/>
         </p:nvSpPr>
@@ -5250,7 +5322,7 @@
       </p:sp>
       <p:sp>
         <p:nvSpPr>
-          <p:cNvPr id="10" name="TextBox 9"/>
+          <p:cNvPr id="11" name="TextBox 10"/>
           <p:cNvSpPr txBox="1"/>
           <p:nvPr/>
         </p:nvSpPr>
@@ -5286,7 +5358,7 @@
       </p:sp>
       <p:sp>
         <p:nvSpPr>
-          <p:cNvPr id="11" name="TextBox 10"/>
+          <p:cNvPr id="12" name="TextBox 11"/>
           <p:cNvSpPr txBox="1"/>
           <p:nvPr/>
         </p:nvSpPr>
@@ -5322,7 +5394,7 @@
       </p:sp>
       <p:sp>
         <p:nvSpPr>
-          <p:cNvPr id="12" name="TextBox 11"/>
+          <p:cNvPr id="13" name="TextBox 12"/>
           <p:cNvSpPr txBox="1"/>
           <p:nvPr/>
         </p:nvSpPr>
@@ -5358,7 +5430,7 @@
       </p:sp>
       <p:sp>
         <p:nvSpPr>
-          <p:cNvPr id="13" name="Rounded Rectangle 12"/>
+          <p:cNvPr id="14" name="Rounded Rectangle 13"/>
           <p:cNvSpPr/>
           <p:nvPr/>
         </p:nvSpPr>
@@ -5403,7 +5475,7 @@
       </p:sp>
       <p:sp>
         <p:nvSpPr>
-          <p:cNvPr id="14" name="TextBox 13"/>
+          <p:cNvPr id="15" name="TextBox 14"/>
           <p:cNvSpPr txBox="1"/>
           <p:nvPr/>
         </p:nvSpPr>
@@ -5439,7 +5511,7 @@
       </p:sp>
       <p:sp>
         <p:nvSpPr>
-          <p:cNvPr id="15" name="TextBox 14"/>
+          <p:cNvPr id="16" name="TextBox 15"/>
           <p:cNvSpPr txBox="1"/>
           <p:nvPr/>
         </p:nvSpPr>
@@ -5475,7 +5547,7 @@
       </p:sp>
       <p:sp>
         <p:nvSpPr>
-          <p:cNvPr id="16" name="TextBox 15"/>
+          <p:cNvPr id="17" name="TextBox 16"/>
           <p:cNvSpPr txBox="1"/>
           <p:nvPr/>
         </p:nvSpPr>
@@ -5511,7 +5583,7 @@
       </p:sp>
       <p:sp>
         <p:nvSpPr>
-          <p:cNvPr id="17" name="Rounded Rectangle 16"/>
+          <p:cNvPr id="18" name="Rounded Rectangle 17"/>
           <p:cNvSpPr/>
           <p:nvPr/>
         </p:nvSpPr>
@@ -5556,7 +5628,7 @@
       </p:sp>
       <p:sp>
         <p:nvSpPr>
-          <p:cNvPr id="18" name="TextBox 17"/>
+          <p:cNvPr id="19" name="TextBox 18"/>
           <p:cNvSpPr txBox="1"/>
           <p:nvPr/>
         </p:nvSpPr>
@@ -5592,7 +5664,7 @@
       </p:sp>
       <p:sp>
         <p:nvSpPr>
-          <p:cNvPr id="19" name="TextBox 18"/>
+          <p:cNvPr id="20" name="TextBox 19"/>
           <p:cNvSpPr txBox="1"/>
           <p:nvPr/>
         </p:nvSpPr>
@@ -5628,7 +5700,7 @@
       </p:sp>
       <p:sp>
         <p:nvSpPr>
-          <p:cNvPr id="20" name="TextBox 19"/>
+          <p:cNvPr id="21" name="TextBox 20"/>
           <p:cNvSpPr txBox="1"/>
           <p:nvPr/>
         </p:nvSpPr>
@@ -5664,7 +5736,7 @@
       </p:sp>
       <p:sp>
         <p:nvSpPr>
-          <p:cNvPr id="21" name="Rounded Rectangle 20"/>
+          <p:cNvPr id="22" name="Rounded Rectangle 21"/>
           <p:cNvSpPr/>
           <p:nvPr/>
         </p:nvSpPr>
@@ -5709,7 +5781,7 @@
       </p:sp>
       <p:sp>
         <p:nvSpPr>
-          <p:cNvPr id="22" name="TextBox 21"/>
+          <p:cNvPr id="23" name="TextBox 22"/>
           <p:cNvSpPr txBox="1"/>
           <p:nvPr/>
         </p:nvSpPr>
@@ -5745,7 +5817,7 @@
       </p:sp>
       <p:sp>
         <p:nvSpPr>
-          <p:cNvPr id="23" name="TextBox 22"/>
+          <p:cNvPr id="24" name="TextBox 23"/>
           <p:cNvSpPr txBox="1"/>
           <p:nvPr/>
         </p:nvSpPr>
@@ -5781,7 +5853,7 @@
       </p:sp>
       <p:sp>
         <p:nvSpPr>
-          <p:cNvPr id="24" name="TextBox 23"/>
+          <p:cNvPr id="25" name="TextBox 24"/>
           <p:cNvSpPr txBox="1"/>
           <p:nvPr/>
         </p:nvSpPr>
@@ -5817,7 +5889,7 @@
       </p:sp>
       <p:sp>
         <p:nvSpPr>
-          <p:cNvPr id="25" name="Rounded Rectangle 24"/>
+          <p:cNvPr id="26" name="Rounded Rectangle 25"/>
           <p:cNvSpPr/>
           <p:nvPr/>
         </p:nvSpPr>
@@ -5860,7 +5932,7 @@
       </p:sp>
       <p:sp>
         <p:nvSpPr>
-          <p:cNvPr id="26" name="TextBox 25"/>
+          <p:cNvPr id="27" name="TextBox 26"/>
           <p:cNvSpPr txBox="1"/>
           <p:nvPr/>
         </p:nvSpPr>
@@ -5889,14 +5961,14 @@
               </a:defRPr>
             </a:pPr>
             <a:r>
-              <a:t>대역폭 · buffer · 자원 활용 · metadata 정렬이 서로 다른 병목으로 연결된다</a:t>
-            </a:r>
-          </a:p>
-        </p:txBody>
-      </p:sp>
-      <p:sp>
-        <p:nvSpPr>
-          <p:cNvPr id="27" name="Rectangle 26"/>
+              <a:t>직접 개선 ②③④ · 부분 대응 ①⑥ · HOLD ⑤ — 이를 네 RTL 병목으로 구체화</a:t>
+            </a:r>
+          </a:p>
+        </p:txBody>
+      </p:sp>
+      <p:sp>
+        <p:nvSpPr>
+          <p:cNvPr id="28" name="Rectangle 27"/>
           <p:cNvSpPr/>
           <p:nvPr/>
         </p:nvSpPr>
@@ -5939,7 +6011,7 @@
       </p:sp>
       <p:sp>
         <p:nvSpPr>
-          <p:cNvPr id="28" name="Rounded Rectangle 27"/>
+          <p:cNvPr id="29" name="Rounded Rectangle 28"/>
           <p:cNvSpPr/>
           <p:nvPr/>
         </p:nvSpPr>
@@ -5982,7 +6054,7 @@
       </p:sp>
       <p:sp>
         <p:nvSpPr>
-          <p:cNvPr id="29" name="TextBox 28"/>
+          <p:cNvPr id="30" name="TextBox 29"/>
           <p:cNvSpPr txBox="1"/>
           <p:nvPr/>
         </p:nvSpPr>
@@ -6018,7 +6090,7 @@
       </p:sp>
       <p:sp>
         <p:nvSpPr>
-          <p:cNvPr id="30" name="TextBox 29"/>
+          <p:cNvPr id="31" name="TextBox 30"/>
           <p:cNvSpPr txBox="1"/>
           <p:nvPr/>
         </p:nvSpPr>
@@ -6047,14 +6119,14 @@
               </a:defRPr>
             </a:pPr>
             <a:r>
-              <a:t>우리 AER이 겨냥한 병목은 네 가지다</a:t>
-            </a:r>
-          </a:p>
-        </p:txBody>
-      </p:sp>
-      <p:sp>
-        <p:nvSpPr>
-          <p:cNvPr id="31" name="Rectangle 30"/>
+              <a:t>Ryu의 6문제에서 우리가 구체화한 네 RTL 병목</a:t>
+            </a:r>
+          </a:p>
+        </p:txBody>
+      </p:sp>
+      <p:sp>
+        <p:nvSpPr>
+          <p:cNvPr id="32" name="Rectangle 31"/>
           <p:cNvSpPr/>
           <p:nvPr/>
         </p:nvSpPr>
@@ -11740,7 +11812,43 @@
       </p:sp>
       <p:sp>
         <p:nvSpPr>
-          <p:cNvPr id="44" name="Rounded Rectangle 43"/>
+          <p:cNvPr id="44" name="TextBox 43"/>
+          <p:cNvSpPr txBox="1"/>
+          <p:nvPr/>
+        </p:nvSpPr>
+        <p:spPr>
+          <a:xfrm>
+            <a:off x="1024128" y="5285232"/>
+            <a:ext cx="10149840" cy="182880"/>
+          </a:xfrm>
+          <a:prstGeom prst="rect">
+            <a:avLst/>
+          </a:prstGeom>
+          <a:noFill/>
+        </p:spPr>
+        <p:txBody>
+          <a:bodyPr wrap="square" anchor="t" lIns="18288" rIns="18288" tIns="9144" bIns="9144">
+            <a:spAutoFit/>
+          </a:bodyPr>
+          <a:lstStyle/>
+          <a:p>
+            <a:pPr algn="ctr">
+              <a:defRPr sz="900" b="1">
+                <a:solidFill>
+                  <a:srgbClr val="FFB746"/>
+                </a:solidFill>
+                <a:latin typeface="Malgun Gothic"/>
+              </a:defRPr>
+            </a:pPr>
+            <a:r>
+              <a:t>주소 overhead 후속: row-trim −14.29%(기본 Cluster2 전용)  |  repeat-flag −15.61%(steal_buf 적용 가능)</a:t>
+            </a:r>
+          </a:p>
+        </p:txBody>
+      </p:sp>
+      <p:sp>
+        <p:nvSpPr>
+          <p:cNvPr id="45" name="Rounded Rectangle 44"/>
           <p:cNvSpPr/>
           <p:nvPr/>
         </p:nvSpPr>
@@ -11783,7 +11891,7 @@
       </p:sp>
       <p:sp>
         <p:nvSpPr>
-          <p:cNvPr id="45" name="TextBox 44"/>
+          <p:cNvPr id="46" name="TextBox 45"/>
           <p:cNvSpPr txBox="1"/>
           <p:nvPr/>
         </p:nvSpPr>
@@ -11819,7 +11927,7 @@
       </p:sp>
       <p:sp>
         <p:nvSpPr>
-          <p:cNvPr id="46" name="Rectangle 45"/>
+          <p:cNvPr id="47" name="Rectangle 46"/>
           <p:cNvSpPr/>
           <p:nvPr/>
         </p:nvSpPr>
@@ -11862,7 +11970,7 @@
       </p:sp>
       <p:sp>
         <p:nvSpPr>
-          <p:cNvPr id="47" name="Rounded Rectangle 46"/>
+          <p:cNvPr id="48" name="Rounded Rectangle 47"/>
           <p:cNvSpPr/>
           <p:nvPr/>
         </p:nvSpPr>
@@ -11905,7 +12013,7 @@
       </p:sp>
       <p:sp>
         <p:nvSpPr>
-          <p:cNvPr id="48" name="TextBox 47"/>
+          <p:cNvPr id="49" name="TextBox 48"/>
           <p:cNvSpPr txBox="1"/>
           <p:nvPr/>
         </p:nvSpPr>
@@ -11941,7 +12049,7 @@
       </p:sp>
       <p:sp>
         <p:nvSpPr>
-          <p:cNvPr id="49" name="TextBox 48"/>
+          <p:cNvPr id="50" name="TextBox 49"/>
           <p:cNvSpPr txBox="1"/>
           <p:nvPr/>
         </p:nvSpPr>
@@ -11977,7 +12085,7 @@
       </p:sp>
       <p:sp>
         <p:nvSpPr>
-          <p:cNvPr id="50" name="Rectangle 49"/>
+          <p:cNvPr id="51" name="Rectangle 50"/>
           <p:cNvSpPr/>
           <p:nvPr/>
         </p:nvSpPr>
@@ -13474,6 +13582,87 @@
         </p:nvSpPr>
         <p:spPr>
           <a:xfrm>
+            <a:off x="1874519" y="4965192"/>
+            <a:ext cx="8458200" cy="502920"/>
+          </a:xfrm>
+          <a:prstGeom prst="roundRect">
+            <a:avLst/>
+          </a:prstGeom>
+          <a:solidFill>
+            <a:srgbClr val="12304C"/>
+          </a:solidFill>
+          <a:ln w="19050">
+            <a:solidFill>
+              <a:srgbClr val="37CD85"/>
+            </a:solidFill>
+          </a:ln>
+        </p:spPr>
+        <p:style>
+          <a:lnRef idx="1">
+            <a:schemeClr val="accent1"/>
+          </a:lnRef>
+          <a:fillRef idx="3">
+            <a:schemeClr val="accent1"/>
+          </a:fillRef>
+          <a:effectRef idx="2">
+            <a:schemeClr val="accent1"/>
+          </a:effectRef>
+          <a:fontRef idx="minor">
+            <a:schemeClr val="lt1"/>
+          </a:fontRef>
+        </p:style>
+        <p:txBody>
+          <a:bodyPr rtlCol="0" anchor="ctr"/>
+          <a:lstStyle/>
+          <a:p>
+            <a:pPr algn="ctr"/>
+          </a:p>
+        </p:txBody>
+      </p:sp>
+      <p:sp>
+        <p:nvSpPr>
+          <p:cNvPr id="40" name="TextBox 39"/>
+          <p:cNvSpPr txBox="1"/>
+          <p:nvPr/>
+        </p:nvSpPr>
+        <p:spPr>
+          <a:xfrm>
+            <a:off x="2084831" y="5102352"/>
+            <a:ext cx="8037575" cy="219456"/>
+          </a:xfrm>
+          <a:prstGeom prst="rect">
+            <a:avLst/>
+          </a:prstGeom>
+          <a:noFill/>
+        </p:spPr>
+        <p:txBody>
+          <a:bodyPr wrap="square" anchor="t" lIns="18288" rIns="18288" tIns="9144" bIns="9144">
+            <a:spAutoFit/>
+          </a:bodyPr>
+          <a:lstStyle/>
+          <a:p>
+            <a:pPr algn="ctr">
+              <a:defRPr sz="1300" b="1">
+                <a:solidFill>
+                  <a:srgbClr val="37CD85"/>
+                </a:solidFill>
+                <a:latin typeface="Malgun Gothic"/>
+              </a:defRPr>
+            </a:pPr>
+            <a:r>
+              <a:t>추가 핵심: 기본 Cluster2 11.52% → steal_buf 0.47%  ·  loss 12,259 → 502  ·  24.42배 감소</a:t>
+            </a:r>
+          </a:p>
+        </p:txBody>
+      </p:sp>
+      <p:sp>
+        <p:nvSpPr>
+          <p:cNvPr id="41" name="Rounded Rectangle 40"/>
+          <p:cNvSpPr/>
+          <p:nvPr/>
+        </p:nvSpPr>
+        <p:spPr>
+          <a:xfrm>
             <a:off x="713232" y="5669280"/>
             <a:ext cx="10771632" cy="566928"/>
           </a:xfrm>
@@ -13511,7 +13700,7 @@
       </p:sp>
       <p:sp>
         <p:nvSpPr>
-          <p:cNvPr id="40" name="TextBox 39"/>
+          <p:cNvPr id="42" name="TextBox 41"/>
           <p:cNvSpPr txBox="1"/>
           <p:nvPr/>
         </p:nvSpPr>
@@ -13540,21 +13729,21 @@
               </a:defRPr>
             </a:pPr>
             <a:r>
-              <a:t>구조군 비교 결과: accepted +15,928 events  =  overrun 15,928건 감소</a:t>
-            </a:r>
-          </a:p>
-        </p:txBody>
-      </p:sp>
-      <p:sp>
-        <p:nvSpPr>
-          <p:cNvPr id="41" name="TextBox 40"/>
-          <p:cNvSpPr txBox="1"/>
-          <p:nvPr/>
-        </p:nvSpPr>
-        <p:spPr>
-          <a:xfrm>
-            <a:off x="1097280" y="6318504"/>
-            <a:ext cx="10012680" cy="155448"/>
+              <a:t>기본 구조의 대역폭 개선 위에 depth-2·steal이 재발화/불균형 손실을 더 줄였다</a:t>
+            </a:r>
+          </a:p>
+        </p:txBody>
+      </p:sp>
+      <p:sp>
+        <p:nvSpPr>
+          <p:cNvPr id="43" name="TextBox 42"/>
+          <p:cNvSpPr txBox="1"/>
+          <p:nvPr/>
+        </p:nvSpPr>
+        <p:spPr>
+          <a:xfrm>
+            <a:off x="1097280" y="5486400"/>
+            <a:ext cx="10012680" cy="137160"/>
           </a:xfrm>
           <a:prstGeom prst="rect">
             <a:avLst/>
@@ -13583,7 +13772,7 @@
       </p:sp>
       <p:sp>
         <p:nvSpPr>
-          <p:cNvPr id="42" name="Rectangle 41"/>
+          <p:cNvPr id="44" name="Rectangle 43"/>
           <p:cNvSpPr/>
           <p:nvPr/>
         </p:nvSpPr>
@@ -13626,7 +13815,7 @@
       </p:sp>
       <p:sp>
         <p:nvSpPr>
-          <p:cNvPr id="43" name="Rounded Rectangle 42"/>
+          <p:cNvPr id="45" name="Rounded Rectangle 44"/>
           <p:cNvSpPr/>
           <p:nvPr/>
         </p:nvSpPr>
@@ -13669,7 +13858,7 @@
       </p:sp>
       <p:sp>
         <p:nvSpPr>
-          <p:cNvPr id="44" name="TextBox 43"/>
+          <p:cNvPr id="46" name="TextBox 45"/>
           <p:cNvSpPr txBox="1"/>
           <p:nvPr/>
         </p:nvSpPr>
@@ -13705,7 +13894,7 @@
       </p:sp>
       <p:sp>
         <p:nvSpPr>
-          <p:cNvPr id="45" name="TextBox 44"/>
+          <p:cNvPr id="47" name="TextBox 46"/>
           <p:cNvSpPr txBox="1"/>
           <p:nvPr/>
         </p:nvSpPr>
@@ -13741,7 +13930,7 @@
       </p:sp>
       <p:sp>
         <p:nvSpPr>
-          <p:cNvPr id="46" name="Rectangle 45"/>
+          <p:cNvPr id="48" name="Rectangle 47"/>
           <p:cNvSpPr/>
           <p:nvPr/>
         </p:nvSpPr>
@@ -14836,8 +15025,8 @@
         </p:nvSpPr>
         <p:spPr>
           <a:xfrm>
-            <a:off x="713232" y="5669280"/>
-            <a:ext cx="10771632" cy="566928"/>
+            <a:off x="932688" y="4553712"/>
+            <a:ext cx="10314432" cy="822960"/>
           </a:xfrm>
           <a:prstGeom prst="roundRect">
             <a:avLst/>
@@ -14879,6 +15068,121 @@
         </p:nvSpPr>
         <p:spPr>
           <a:xfrm>
+            <a:off x="1143000" y="4663440"/>
+            <a:ext cx="9893808" cy="182880"/>
+          </a:xfrm>
+          <a:prstGeom prst="rect">
+            <a:avLst/>
+          </a:prstGeom>
+          <a:noFill/>
+        </p:spPr>
+        <p:txBody>
+          <a:bodyPr wrap="square" anchor="t" lIns="18288" rIns="18288" tIns="9144" bIns="9144">
+            <a:spAutoFit/>
+          </a:bodyPr>
+          <a:lstStyle/>
+          <a:p>
+            <a:pPr algn="ctr">
+              <a:defRPr sz="900" b="1">
+                <a:solidFill>
+                  <a:srgbClr val="ACC2D6"/>
+                </a:solidFill>
+                <a:latin typeface="Malgun Gothic"/>
+              </a:defRPr>
+            </a:pPr>
+            <a:r>
+              <a:t>Xcelium 23.09  |  TB: redred_cluster2_polarity_v1_native_observational_tb.sv</a:t>
+            </a:r>
+          </a:p>
+        </p:txBody>
+      </p:sp>
+      <p:sp>
+        <p:nvSpPr>
+          <p:cNvPr id="31" name="TextBox 30"/>
+          <p:cNvSpPr txBox="1"/>
+          <p:nvPr/>
+        </p:nvSpPr>
+        <p:spPr>
+          <a:xfrm>
+            <a:off x="1143000" y="4965192"/>
+            <a:ext cx="9893808" cy="228600"/>
+          </a:xfrm>
+          <a:prstGeom prst="rect">
+            <a:avLst/>
+          </a:prstGeom>
+          <a:noFill/>
+        </p:spPr>
+        <p:txBody>
+          <a:bodyPr wrap="square" anchor="t" lIns="18288" rIns="18288" tIns="9144" bIns="9144">
+            <a:spAutoFit/>
+          </a:bodyPr>
+          <a:lstStyle/>
+          <a:p>
+            <a:pPr algn="ctr">
+              <a:defRPr sz="1200" b="1">
+                <a:solidFill>
+                  <a:srgbClr val="F6F9FC"/>
+                </a:solidFill>
+                <a:latin typeface="Malgun Gothic"/>
+              </a:defRPr>
+            </a:pPr>
+            <a:r>
+              <a:t>CYCLE 4162  |  lane0 row2 col=0x6 pol=0x0  |  lane1 row0 col=0x1 pol=0x1  →  4 events retire</a:t>
+            </a:r>
+          </a:p>
+        </p:txBody>
+      </p:sp>
+      <p:sp>
+        <p:nvSpPr>
+          <p:cNvPr id="32" name="Rounded Rectangle 31"/>
+          <p:cNvSpPr/>
+          <p:nvPr/>
+        </p:nvSpPr>
+        <p:spPr>
+          <a:xfrm>
+            <a:off x="713232" y="5669280"/>
+            <a:ext cx="10771632" cy="566928"/>
+          </a:xfrm>
+          <a:prstGeom prst="roundRect">
+            <a:avLst/>
+          </a:prstGeom>
+          <a:solidFill>
+            <a:srgbClr val="12304C"/>
+          </a:solidFill>
+          <a:ln>
+            <a:noFill/>
+          </a:ln>
+        </p:spPr>
+        <p:style>
+          <a:lnRef idx="1">
+            <a:schemeClr val="accent1"/>
+          </a:lnRef>
+          <a:fillRef idx="3">
+            <a:schemeClr val="accent1"/>
+          </a:fillRef>
+          <a:effectRef idx="2">
+            <a:schemeClr val="accent1"/>
+          </a:effectRef>
+          <a:fontRef idx="minor">
+            <a:schemeClr val="lt1"/>
+          </a:fontRef>
+        </p:style>
+        <p:txBody>
+          <a:bodyPr rtlCol="0" anchor="ctr"/>
+          <a:lstStyle/>
+          <a:p>
+            <a:pPr algn="ctr"/>
+          </a:p>
+        </p:txBody>
+      </p:sp>
+      <p:sp>
+        <p:nvSpPr>
+          <p:cNvPr id="33" name="TextBox 32"/>
+          <p:cNvSpPr txBox="1"/>
+          <p:nvPr/>
+        </p:nvSpPr>
+        <p:spPr>
+          <a:xfrm>
             <a:off x="932688" y="5806440"/>
             <a:ext cx="10332720" cy="256032"/>
           </a:xfrm>
@@ -14909,7 +15213,7 @@
       </p:sp>
       <p:sp>
         <p:nvSpPr>
-          <p:cNvPr id="31" name="Rectangle 30"/>
+          <p:cNvPr id="34" name="Rectangle 33"/>
           <p:cNvSpPr/>
           <p:nvPr/>
         </p:nvSpPr>
@@ -14952,7 +15256,7 @@
       </p:sp>
       <p:sp>
         <p:nvSpPr>
-          <p:cNvPr id="32" name="Rounded Rectangle 31"/>
+          <p:cNvPr id="35" name="Rounded Rectangle 34"/>
           <p:cNvSpPr/>
           <p:nvPr/>
         </p:nvSpPr>
@@ -14995,7 +15299,7 @@
       </p:sp>
       <p:sp>
         <p:nvSpPr>
-          <p:cNvPr id="33" name="TextBox 32"/>
+          <p:cNvPr id="36" name="TextBox 35"/>
           <p:cNvSpPr txBox="1"/>
           <p:nvPr/>
         </p:nvSpPr>
@@ -15031,7 +15335,7 @@
       </p:sp>
       <p:sp>
         <p:nvSpPr>
-          <p:cNvPr id="34" name="TextBox 33"/>
+          <p:cNvPr id="37" name="TextBox 36"/>
           <p:cNvSpPr txBox="1"/>
           <p:nvPr/>
         </p:nvSpPr>
@@ -15067,7 +15371,7 @@
       </p:sp>
       <p:sp>
         <p:nvSpPr>
-          <p:cNvPr id="35" name="Rectangle 34"/>
+          <p:cNvPr id="38" name="Rectangle 37"/>
           <p:cNvSpPr/>
           <p:nvPr/>
         </p:nvSpPr>

--- a/submission/cluster2_digital_first_round_20260828/presentation/cluster2_digital_first_round_20260828.pptx
+++ b/submission/cluster2_digital_first_round_20260828/presentation/cluster2_digital_first_round_20260828.pptx
@@ -18581,7 +18581,7 @@
               </a:defRPr>
             </a:pPr>
             <a:r>
-              <a:t>Source: same 50 traces · 106,416 offered events/design · family diagnostic</a:t>
+              <a:t>Scope: 106,416 events/design · separate campaigns · 502 = address-only steal_buf, not final polarity-v1</a:t>
             </a:r>
           </a:p>
         </p:txBody>

--- a/submission/cluster2_digital_first_round_20260828/presentation/cluster2_digital_first_round_20260828.pptx
+++ b/submission/cluster2_digital_first_round_20260828/presentation/cluster2_digital_first_round_20260828.pptx
@@ -6095,7 +6095,7 @@
               </a:defRPr>
             </a:pPr>
             <a:r>
-              <a:t>CAV 확장 경로: 8,503 events 전수 분기</a:t>
+              <a:t>World 좌표계 방향 ray 확장: 8,503 events</a:t>
             </a:r>
           </a:p>
         </p:txBody>
@@ -6169,7 +6169,7 @@
               </a:defRPr>
             </a:pPr>
             <a:r>
-              <a:t>Source: sealed legacy address-only CAV software path · separate from final polarity RTL/PPA</a:t>
+              <a:t>Source: team-defined software projection path · separate from final polarity RTL/PPA</a:t>
             </a:r>
           </a:p>
         </p:txBody>
@@ -6624,7 +6624,7 @@
               </a:defRPr>
             </a:pPr>
             <a:r>
-              <a:t>CAUSAL-CAV</a:t>
+              <a:t>WORLD-FRAME RAY</a:t>
             </a:r>
           </a:p>
         </p:txBody>
@@ -6663,7 +6663,7 @@
               </a:defRPr>
             </a:pPr>
             <a:r>
-              <a:t>occurrence-time geometry</a:t>
+              <a:t>occurrence-time pose</a:t>
             </a:r>
           </a:p>
         </p:txBody>
@@ -6963,7 +6963,7 @@
               </a:defRPr>
             </a:pPr>
             <a:r>
-              <a:t>polarity→CAV RTL/PPA는 HOLD</a:t>
+              <a:t>변환기 RTL/PPA는 HOLD</a:t>
             </a:r>
           </a:p>
         </p:txBody>
@@ -7373,7 +7373,7 @@
               </a:defRPr>
             </a:pPr>
             <a:r>
-              <a:t>확장 경로는 확인했지만 final polarity proof chain과 섞지 않았다</a:t>
+              <a:t>event + timestamp + pose의 world-frame 방향 ray 투영을 software로 확인했다</a:t>
             </a:r>
           </a:p>
         </p:txBody>
@@ -8654,7 +8654,7 @@
               </a:defRPr>
             </a:pPr>
             <a:r>
-              <a:t>CAV</a:t>
+              <a:t>WORLD</a:t>
             </a:r>
           </a:p>
         </p:txBody>
@@ -8693,7 +8693,7 @@
               </a:defRPr>
             </a:pPr>
             <a:r>
-              <a:t>source timestamp + full replay</a:t>
+              <a:t>timestamp + pose full replay</a:t>
             </a:r>
           </a:p>
         </p:txBody>

--- a/submission/cluster2_digital_first_round_20260828/presentation/cluster2_digital_first_round_20260828.pptx
+++ b/submission/cluster2_digital_first_round_20260828/presentation/cluster2_digital_first_round_20260828.pptx
@@ -14647,21 +14647,21 @@
         </p:nvSpPr>
         <p:spPr>
           <a:xfrm>
-            <a:off x="987552" y="2103120"/>
-            <a:ext cx="1005840" cy="219456"/>
-          </a:xfrm>
-          <a:prstGeom prst="rect">
-            <a:avLst/>
-          </a:prstGeom>
-          <a:noFill/>
-        </p:spPr>
-        <p:txBody>
-          <a:bodyPr wrap="square" anchor="t" lIns="27432" rIns="27432" tIns="13716" bIns="13716">
-            <a:noAutofit/>
-          </a:bodyPr>
-          <a:lstStyle/>
-          <a:p>
-            <a:pPr algn="l">
+            <a:off x="987552" y="2029968"/>
+            <a:ext cx="4645152" cy="237744"/>
+          </a:xfrm>
+          <a:prstGeom prst="rect">
+            <a:avLst/>
+          </a:prstGeom>
+          <a:noFill/>
+        </p:spPr>
+        <p:txBody>
+          <a:bodyPr wrap="square" anchor="t" lIns="27432" rIns="27432" tIns="13716" bIns="13716">
+            <a:noAutofit/>
+          </a:bodyPr>
+          <a:lstStyle/>
+          <a:p>
+            <a:pPr algn="ctr">
               <a:spcAft>
                 <a:spcPts val="0"/>
               </a:spcAft>
@@ -14673,7 +14673,7 @@
               </a:defRPr>
             </a:pPr>
             <a:r>
-              <a:t>row 2</a:t>
+              <a:t>한 row에 column 4개</a:t>
             </a:r>
           </a:p>
         </p:txBody>
@@ -14686,8 +14686,8 @@
         </p:nvSpPr>
         <p:spPr>
           <a:xfrm>
-            <a:off x="2029968" y="1984248"/>
-            <a:ext cx="512064" cy="512064"/>
+            <a:off x="1728216" y="2432304"/>
+            <a:ext cx="640080" cy="585216"/>
           </a:xfrm>
           <a:prstGeom prst="roundRect">
             <a:avLst/>
@@ -14731,8 +14731,8 @@
         </p:nvSpPr>
         <p:spPr>
           <a:xfrm>
-            <a:off x="2029968" y="2139696"/>
-            <a:ext cx="512064" cy="182880"/>
+            <a:off x="1728216" y="2542032"/>
+            <a:ext cx="640080" cy="164592"/>
           </a:xfrm>
           <a:prstGeom prst="rect">
             <a:avLst/>
@@ -14749,7 +14749,7 @@
               <a:spcAft>
                 <a:spcPts val="0"/>
               </a:spcAft>
-              <a:defRPr sz="1600" b="1">
+              <a:defRPr sz="1200" b="1">
                 <a:solidFill>
                   <a:srgbClr val="2563EB"/>
                 </a:solidFill>
@@ -14757,6 +14757,45 @@
               </a:defRPr>
             </a:pPr>
             <a:r>
+              <a:t>col0</a:t>
+            </a:r>
+          </a:p>
+        </p:txBody>
+      </p:sp>
+      <p:sp>
+        <p:nvSpPr>
+          <p:cNvPr id="14" name="TextBox 13"/>
+          <p:cNvSpPr txBox="1"/>
+          <p:nvPr/>
+        </p:nvSpPr>
+        <p:spPr>
+          <a:xfrm>
+            <a:off x="1728216" y="2761488"/>
+            <a:ext cx="640080" cy="164592"/>
+          </a:xfrm>
+          <a:prstGeom prst="rect">
+            <a:avLst/>
+          </a:prstGeom>
+          <a:noFill/>
+        </p:spPr>
+        <p:txBody>
+          <a:bodyPr wrap="square" anchor="t" lIns="27432" rIns="27432" tIns="13716" bIns="13716">
+            <a:noAutofit/>
+          </a:bodyPr>
+          <a:lstStyle/>
+          <a:p>
+            <a:pPr algn="ctr">
+              <a:spcAft>
+                <a:spcPts val="0"/>
+              </a:spcAft>
+              <a:defRPr sz="1400" b="1">
+                <a:solidFill>
+                  <a:srgbClr val="2563EB"/>
+                </a:solidFill>
+                <a:latin typeface="Malgun Gothic"/>
+              </a:defRPr>
+            </a:pPr>
+            <a:r>
               <a:t>1</a:t>
             </a:r>
           </a:p>
@@ -14764,14 +14803,14 @@
       </p:sp>
       <p:sp>
         <p:nvSpPr>
-          <p:cNvPr id="14" name="Rounded Rectangle 13"/>
+          <p:cNvPr id="15" name="Rounded Rectangle 14"/>
           <p:cNvSpPr/>
           <p:nvPr/>
         </p:nvSpPr>
         <p:spPr>
           <a:xfrm>
-            <a:off x="2724912" y="1984248"/>
-            <a:ext cx="512064" cy="512064"/>
+            <a:off x="2569464" y="2432304"/>
+            <a:ext cx="640080" cy="585216"/>
           </a:xfrm>
           <a:prstGeom prst="roundRect">
             <a:avLst/>
@@ -14809,14 +14848,14 @@
       </p:sp>
       <p:sp>
         <p:nvSpPr>
-          <p:cNvPr id="15" name="TextBox 14"/>
-          <p:cNvSpPr txBox="1"/>
-          <p:nvPr/>
-        </p:nvSpPr>
-        <p:spPr>
-          <a:xfrm>
-            <a:off x="2724912" y="2139696"/>
-            <a:ext cx="512064" cy="182880"/>
+          <p:cNvPr id="16" name="TextBox 15"/>
+          <p:cNvSpPr txBox="1"/>
+          <p:nvPr/>
+        </p:nvSpPr>
+        <p:spPr>
+          <a:xfrm>
+            <a:off x="2569464" y="2542032"/>
+            <a:ext cx="640080" cy="164592"/>
           </a:xfrm>
           <a:prstGeom prst="rect">
             <a:avLst/>
@@ -14833,7 +14872,7 @@
               <a:spcAft>
                 <a:spcPts val="0"/>
               </a:spcAft>
-              <a:defRPr sz="1600" b="1">
+              <a:defRPr sz="1200" b="1">
                 <a:solidFill>
                   <a:srgbClr val="2563EB"/>
                 </a:solidFill>
@@ -14841,6 +14880,45 @@
               </a:defRPr>
             </a:pPr>
             <a:r>
+              <a:t>col1</a:t>
+            </a:r>
+          </a:p>
+        </p:txBody>
+      </p:sp>
+      <p:sp>
+        <p:nvSpPr>
+          <p:cNvPr id="17" name="TextBox 16"/>
+          <p:cNvSpPr txBox="1"/>
+          <p:nvPr/>
+        </p:nvSpPr>
+        <p:spPr>
+          <a:xfrm>
+            <a:off x="2569464" y="2761488"/>
+            <a:ext cx="640080" cy="164592"/>
+          </a:xfrm>
+          <a:prstGeom prst="rect">
+            <a:avLst/>
+          </a:prstGeom>
+          <a:noFill/>
+        </p:spPr>
+        <p:txBody>
+          <a:bodyPr wrap="square" anchor="t" lIns="27432" rIns="27432" tIns="13716" bIns="13716">
+            <a:noAutofit/>
+          </a:bodyPr>
+          <a:lstStyle/>
+          <a:p>
+            <a:pPr algn="ctr">
+              <a:spcAft>
+                <a:spcPts val="0"/>
+              </a:spcAft>
+              <a:defRPr sz="1400" b="1">
+                <a:solidFill>
+                  <a:srgbClr val="2563EB"/>
+                </a:solidFill>
+                <a:latin typeface="Malgun Gothic"/>
+              </a:defRPr>
+            </a:pPr>
+            <a:r>
               <a:t>1</a:t>
             </a:r>
           </a:p>
@@ -14848,14 +14926,14 @@
       </p:sp>
       <p:sp>
         <p:nvSpPr>
-          <p:cNvPr id="16" name="Rounded Rectangle 15"/>
+          <p:cNvPr id="18" name="Rounded Rectangle 17"/>
           <p:cNvSpPr/>
           <p:nvPr/>
         </p:nvSpPr>
         <p:spPr>
           <a:xfrm>
-            <a:off x="3419856" y="1984248"/>
-            <a:ext cx="512064" cy="512064"/>
+            <a:off x="3410712" y="2432304"/>
+            <a:ext cx="640080" cy="585216"/>
           </a:xfrm>
           <a:prstGeom prst="roundRect">
             <a:avLst/>
@@ -14893,14 +14971,14 @@
       </p:sp>
       <p:sp>
         <p:nvSpPr>
-          <p:cNvPr id="17" name="TextBox 16"/>
-          <p:cNvSpPr txBox="1"/>
-          <p:nvPr/>
-        </p:nvSpPr>
-        <p:spPr>
-          <a:xfrm>
-            <a:off x="3419856" y="2139696"/>
-            <a:ext cx="512064" cy="182880"/>
+          <p:cNvPr id="19" name="TextBox 18"/>
+          <p:cNvSpPr txBox="1"/>
+          <p:nvPr/>
+        </p:nvSpPr>
+        <p:spPr>
+          <a:xfrm>
+            <a:off x="3410712" y="2542032"/>
+            <a:ext cx="640080" cy="164592"/>
           </a:xfrm>
           <a:prstGeom prst="rect">
             <a:avLst/>
@@ -14917,7 +14995,7 @@
               <a:spcAft>
                 <a:spcPts val="0"/>
               </a:spcAft>
-              <a:defRPr sz="1600" b="1">
+              <a:defRPr sz="1200" b="1">
                 <a:solidFill>
                   <a:srgbClr val="2563EB"/>
                 </a:solidFill>
@@ -14925,6 +15003,45 @@
               </a:defRPr>
             </a:pPr>
             <a:r>
+              <a:t>col2</a:t>
+            </a:r>
+          </a:p>
+        </p:txBody>
+      </p:sp>
+      <p:sp>
+        <p:nvSpPr>
+          <p:cNvPr id="20" name="TextBox 19"/>
+          <p:cNvSpPr txBox="1"/>
+          <p:nvPr/>
+        </p:nvSpPr>
+        <p:spPr>
+          <a:xfrm>
+            <a:off x="3410712" y="2761488"/>
+            <a:ext cx="640080" cy="164592"/>
+          </a:xfrm>
+          <a:prstGeom prst="rect">
+            <a:avLst/>
+          </a:prstGeom>
+          <a:noFill/>
+        </p:spPr>
+        <p:txBody>
+          <a:bodyPr wrap="square" anchor="t" lIns="27432" rIns="27432" tIns="13716" bIns="13716">
+            <a:noAutofit/>
+          </a:bodyPr>
+          <a:lstStyle/>
+          <a:p>
+            <a:pPr algn="ctr">
+              <a:spcAft>
+                <a:spcPts val="0"/>
+              </a:spcAft>
+              <a:defRPr sz="1400" b="1">
+                <a:solidFill>
+                  <a:srgbClr val="2563EB"/>
+                </a:solidFill>
+                <a:latin typeface="Malgun Gothic"/>
+              </a:defRPr>
+            </a:pPr>
+            <a:r>
               <a:t>1</a:t>
             </a:r>
           </a:p>
@@ -14932,14 +15049,14 @@
       </p:sp>
       <p:sp>
         <p:nvSpPr>
-          <p:cNvPr id="18" name="Rounded Rectangle 17"/>
+          <p:cNvPr id="21" name="Rounded Rectangle 20"/>
           <p:cNvSpPr/>
           <p:nvPr/>
         </p:nvSpPr>
         <p:spPr>
           <a:xfrm>
-            <a:off x="4114800" y="1984248"/>
-            <a:ext cx="512064" cy="512064"/>
+            <a:off x="4251960" y="2432304"/>
+            <a:ext cx="640080" cy="585216"/>
           </a:xfrm>
           <a:prstGeom prst="roundRect">
             <a:avLst/>
@@ -14977,14 +15094,14 @@
       </p:sp>
       <p:sp>
         <p:nvSpPr>
-          <p:cNvPr id="19" name="TextBox 18"/>
-          <p:cNvSpPr txBox="1"/>
-          <p:nvPr/>
-        </p:nvSpPr>
-        <p:spPr>
-          <a:xfrm>
-            <a:off x="4114800" y="2139696"/>
-            <a:ext cx="512064" cy="182880"/>
+          <p:cNvPr id="22" name="TextBox 21"/>
+          <p:cNvSpPr txBox="1"/>
+          <p:nvPr/>
+        </p:nvSpPr>
+        <p:spPr>
+          <a:xfrm>
+            <a:off x="4251960" y="2542032"/>
+            <a:ext cx="640080" cy="164592"/>
           </a:xfrm>
           <a:prstGeom prst="rect">
             <a:avLst/>
@@ -15001,7 +15118,7 @@
               <a:spcAft>
                 <a:spcPts val="0"/>
               </a:spcAft>
-              <a:defRPr sz="1600" b="1">
+              <a:defRPr sz="1200" b="1">
                 <a:solidFill>
                   <a:srgbClr val="2563EB"/>
                 </a:solidFill>
@@ -15009,6 +15126,45 @@
               </a:defRPr>
             </a:pPr>
             <a:r>
+              <a:t>col3</a:t>
+            </a:r>
+          </a:p>
+        </p:txBody>
+      </p:sp>
+      <p:sp>
+        <p:nvSpPr>
+          <p:cNvPr id="23" name="TextBox 22"/>
+          <p:cNvSpPr txBox="1"/>
+          <p:nvPr/>
+        </p:nvSpPr>
+        <p:spPr>
+          <a:xfrm>
+            <a:off x="4251960" y="2761488"/>
+            <a:ext cx="640080" cy="164592"/>
+          </a:xfrm>
+          <a:prstGeom prst="rect">
+            <a:avLst/>
+          </a:prstGeom>
+          <a:noFill/>
+        </p:spPr>
+        <p:txBody>
+          <a:bodyPr wrap="square" anchor="t" lIns="27432" rIns="27432" tIns="13716" bIns="13716">
+            <a:noAutofit/>
+          </a:bodyPr>
+          <a:lstStyle/>
+          <a:p>
+            <a:pPr algn="ctr">
+              <a:spcAft>
+                <a:spcPts val="0"/>
+              </a:spcAft>
+              <a:defRPr sz="1400" b="1">
+                <a:solidFill>
+                  <a:srgbClr val="2563EB"/>
+                </a:solidFill>
+                <a:latin typeface="Malgun Gothic"/>
+              </a:defRPr>
+            </a:pPr>
+            <a:r>
               <a:t>1</a:t>
             </a:r>
           </a:p>
@@ -15016,55 +15172,16 @@
       </p:sp>
       <p:sp>
         <p:nvSpPr>
-          <p:cNvPr id="20" name="TextBox 19"/>
-          <p:cNvSpPr txBox="1"/>
-          <p:nvPr/>
-        </p:nvSpPr>
-        <p:spPr>
-          <a:xfrm>
-            <a:off x="987552" y="2926080"/>
-            <a:ext cx="1481328" cy="256032"/>
-          </a:xfrm>
-          <a:prstGeom prst="rect">
-            <a:avLst/>
-          </a:prstGeom>
-          <a:noFill/>
-        </p:spPr>
-        <p:txBody>
-          <a:bodyPr wrap="square" anchor="t" lIns="27432" rIns="27432" tIns="13716" bIns="13716">
-            <a:noAutofit/>
-          </a:bodyPr>
-          <a:lstStyle/>
-          <a:p>
-            <a:pPr algn="l">
-              <a:spcAft>
-                <a:spcPts val="0"/>
-              </a:spcAft>
-              <a:defRPr sz="1600" b="1">
-                <a:solidFill>
-                  <a:srgbClr val="0F2234"/>
-                </a:solidFill>
-                <a:latin typeface="Malgun Gothic"/>
-              </a:defRPr>
-            </a:pPr>
-            <a:r>
-              <a:t>네 scalar 주소</a:t>
-            </a:r>
-          </a:p>
-        </p:txBody>
-      </p:sp>
-      <p:sp>
-        <p:nvSpPr>
-          <p:cNvPr id="21" name="Right Arrow 20"/>
+          <p:cNvPr id="24" name="Down Arrow 23"/>
           <p:cNvSpPr/>
           <p:nvPr/>
         </p:nvSpPr>
         <p:spPr>
           <a:xfrm>
-            <a:off x="2651760" y="2926080"/>
-            <a:ext cx="475488" cy="256032"/>
-          </a:xfrm>
-          <a:prstGeom prst="rightArrow">
+            <a:off x="3182112" y="3072384"/>
+            <a:ext cx="256032" cy="237744"/>
+          </a:xfrm>
+          <a:prstGeom prst="downArrow">
             <a:avLst/>
           </a:prstGeom>
           <a:solidFill>
@@ -15098,14 +15215,14 @@
       </p:sp>
       <p:sp>
         <p:nvSpPr>
-          <p:cNvPr id="22" name="Rounded Rectangle 21"/>
+          <p:cNvPr id="25" name="Rounded Rectangle 24"/>
           <p:cNvSpPr/>
           <p:nvPr/>
         </p:nvSpPr>
         <p:spPr>
           <a:xfrm>
-            <a:off x="3383280" y="2770632"/>
-            <a:ext cx="1993392" cy="640080"/>
+            <a:off x="1335024" y="3401568"/>
+            <a:ext cx="3950208" cy="676656"/>
           </a:xfrm>
           <a:prstGeom prst="roundRect">
             <a:avLst/>
@@ -15141,14 +15258,14 @@
       </p:sp>
       <p:sp>
         <p:nvSpPr>
-          <p:cNvPr id="23" name="TextBox 22"/>
-          <p:cNvSpPr txBox="1"/>
-          <p:nvPr/>
-        </p:nvSpPr>
-        <p:spPr>
-          <a:xfrm>
-            <a:off x="3566160" y="2980944"/>
-            <a:ext cx="1627632" cy="219456"/>
+          <p:cNvPr id="26" name="TextBox 25"/>
+          <p:cNvSpPr txBox="1"/>
+          <p:nvPr/>
+        </p:nvSpPr>
+        <p:spPr>
+          <a:xfrm>
+            <a:off x="1554480" y="3611880"/>
+            <a:ext cx="3511296" cy="219456"/>
           </a:xfrm>
           <a:prstGeom prst="rect">
             <a:avLst/>
@@ -15173,53 +15290,96 @@
               </a:defRPr>
             </a:pPr>
             <a:r>
-              <a:t>row + 1111</a:t>
-            </a:r>
-          </a:p>
-        </p:txBody>
-      </p:sp>
-      <p:sp>
-        <p:nvSpPr>
-          <p:cNvPr id="24" name="TextBox 23"/>
-          <p:cNvSpPr txBox="1"/>
-          <p:nvPr/>
-        </p:nvSpPr>
-        <p:spPr>
-          <a:xfrm>
-            <a:off x="987552" y="3931920"/>
-            <a:ext cx="4526280" cy="274320"/>
-          </a:xfrm>
-          <a:prstGeom prst="rect">
-            <a:avLst/>
-          </a:prstGeom>
-          <a:noFill/>
-        </p:spPr>
-        <p:txBody>
-          <a:bodyPr wrap="square" anchor="t" lIns="27432" rIns="27432" tIns="13716" bIns="13716">
-            <a:noAutofit/>
-          </a:bodyPr>
-          <a:lstStyle/>
-          <a:p>
-            <a:pPr algn="l">
-              <a:spcAft>
-                <a:spcPts val="0"/>
-              </a:spcAft>
-              <a:defRPr sz="1600" b="0">
-                <a:solidFill>
-                  <a:srgbClr val="4C6073"/>
-                </a:solidFill>
-                <a:latin typeface="Malgun Gothic"/>
-              </a:defRPr>
-            </a:pPr>
-            <a:r>
-              <a:t>한 lane transaction = 최대 4 events</a:t>
-            </a:r>
-          </a:p>
-        </p:txBody>
-      </p:sp>
-      <p:sp>
-        <p:nvSpPr>
-          <p:cNvPr id="25" name="Rounded Rectangle 24"/>
+              <a:t>row 2  +  col_mask 1111</a:t>
+            </a:r>
+          </a:p>
+        </p:txBody>
+      </p:sp>
+      <p:sp>
+        <p:nvSpPr>
+          <p:cNvPr id="27" name="Rounded Rectangle 26"/>
+          <p:cNvSpPr/>
+          <p:nvPr/>
+        </p:nvSpPr>
+        <p:spPr>
+          <a:xfrm>
+            <a:off x="1170432" y="4407408"/>
+            <a:ext cx="4279392" cy="493776"/>
+          </a:xfrm>
+          <a:prstGeom prst="roundRect">
+            <a:avLst/>
+          </a:prstGeom>
+          <a:solidFill>
+            <a:srgbClr val="EBF1F6"/>
+          </a:solidFill>
+          <a:ln>
+            <a:noFill/>
+          </a:ln>
+        </p:spPr>
+        <p:style>
+          <a:lnRef idx="1">
+            <a:schemeClr val="accent1"/>
+          </a:lnRef>
+          <a:fillRef idx="3">
+            <a:schemeClr val="accent1"/>
+          </a:fillRef>
+          <a:effectRef idx="2">
+            <a:schemeClr val="accent1"/>
+          </a:effectRef>
+          <a:fontRef idx="minor">
+            <a:schemeClr val="lt1"/>
+          </a:fontRef>
+        </p:style>
+        <p:txBody>
+          <a:bodyPr rtlCol="0" anchor="ctr"/>
+          <a:lstStyle/>
+          <a:p>
+            <a:pPr algn="ctr"/>
+          </a:p>
+        </p:txBody>
+      </p:sp>
+      <p:sp>
+        <p:nvSpPr>
+          <p:cNvPr id="28" name="TextBox 27"/>
+          <p:cNvSpPr txBox="1"/>
+          <p:nvPr/>
+        </p:nvSpPr>
+        <p:spPr>
+          <a:xfrm>
+            <a:off x="1389888" y="4553712"/>
+            <a:ext cx="3840480" cy="201168"/>
+          </a:xfrm>
+          <a:prstGeom prst="rect">
+            <a:avLst/>
+          </a:prstGeom>
+          <a:noFill/>
+        </p:spPr>
+        <p:txBody>
+          <a:bodyPr wrap="square" anchor="t" lIns="27432" rIns="27432" tIns="13716" bIns="13716">
+            <a:noAutofit/>
+          </a:bodyPr>
+          <a:lstStyle/>
+          <a:p>
+            <a:pPr algn="ctr">
+              <a:spcAft>
+                <a:spcPts val="0"/>
+              </a:spcAft>
+              <a:defRPr sz="1400" b="1">
+                <a:solidFill>
+                  <a:srgbClr val="13344F"/>
+                </a:solidFill>
+                <a:latin typeface="Malgun Gothic"/>
+              </a:defRPr>
+            </a:pPr>
+            <a:r>
+              <a:t>lane transaction 1회 · event 최대 4개</a:t>
+            </a:r>
+          </a:p>
+        </p:txBody>
+      </p:sp>
+      <p:sp>
+        <p:nvSpPr>
+          <p:cNvPr id="29" name="Rounded Rectangle 28"/>
           <p:cNvSpPr/>
           <p:nvPr/>
         </p:nvSpPr>
@@ -15264,7 +15424,7 @@
       </p:sp>
       <p:sp>
         <p:nvSpPr>
-          <p:cNvPr id="26" name="TextBox 25"/>
+          <p:cNvPr id="30" name="TextBox 29"/>
           <p:cNvSpPr txBox="1"/>
           <p:nvPr/>
         </p:nvSpPr>
@@ -15303,7 +15463,7 @@
       </p:sp>
       <p:sp>
         <p:nvSpPr>
-          <p:cNvPr id="27" name="TextBox 26"/>
+          <p:cNvPr id="31" name="TextBox 30"/>
           <p:cNvSpPr txBox="1"/>
           <p:nvPr/>
         </p:nvSpPr>
@@ -15342,27 +15502,27 @@
       </p:sp>
       <p:sp>
         <p:nvSpPr>
-          <p:cNvPr id="28" name="TextBox 27"/>
-          <p:cNvSpPr txBox="1"/>
-          <p:nvPr/>
-        </p:nvSpPr>
-        <p:spPr>
-          <a:xfrm>
-            <a:off x="6565392" y="2103120"/>
-            <a:ext cx="1298448" cy="219456"/>
-          </a:xfrm>
-          <a:prstGeom prst="rect">
-            <a:avLst/>
-          </a:prstGeom>
-          <a:noFill/>
-        </p:spPr>
-        <p:txBody>
-          <a:bodyPr wrap="square" anchor="t" lIns="27432" rIns="27432" tIns="13716" bIns="13716">
-            <a:noAutofit/>
-          </a:bodyPr>
-          <a:lstStyle/>
-          <a:p>
-            <a:pPr algn="l">
+          <p:cNvPr id="32" name="TextBox 31"/>
+          <p:cNvSpPr txBox="1"/>
+          <p:nvPr/>
+        </p:nvSpPr>
+        <p:spPr>
+          <a:xfrm>
+            <a:off x="6565392" y="2029968"/>
+            <a:ext cx="4645152" cy="237744"/>
+          </a:xfrm>
+          <a:prstGeom prst="rect">
+            <a:avLst/>
+          </a:prstGeom>
+          <a:noFill/>
+        </p:spPr>
+        <p:txBody>
+          <a:bodyPr wrap="square" anchor="t" lIns="27432" rIns="27432" tIns="13716" bIns="13716">
+            <a:noAutofit/>
+          </a:bodyPr>
+          <a:lstStyle/>
+          <a:p>
+            <a:pPr algn="ctr">
               <a:spcAft>
                 <a:spcPts val="0"/>
               </a:spcAft>
@@ -15374,21 +15534,21 @@
               </a:defRPr>
             </a:pPr>
             <a:r>
-              <a:t>같은 source</a:t>
-            </a:r>
-          </a:p>
-        </p:txBody>
-      </p:sp>
-      <p:sp>
-        <p:nvSpPr>
-          <p:cNvPr id="29" name="Rounded Rectangle 28"/>
+              <a:t>같은 source에서 연속 발생</a:t>
+            </a:r>
+          </a:p>
+        </p:txBody>
+      </p:sp>
+      <p:sp>
+        <p:nvSpPr>
+          <p:cNvPr id="33" name="Rounded Rectangle 32"/>
           <p:cNvSpPr/>
           <p:nvPr/>
         </p:nvSpPr>
         <p:spPr>
           <a:xfrm>
-            <a:off x="8065008" y="1901952"/>
-            <a:ext cx="1188720" cy="749808"/>
+            <a:off x="6839712" y="2432304"/>
+            <a:ext cx="1865376" cy="841248"/>
           </a:xfrm>
           <a:prstGeom prst="roundRect">
             <a:avLst/>
@@ -15426,14 +15586,14 @@
       </p:sp>
       <p:sp>
         <p:nvSpPr>
-          <p:cNvPr id="30" name="TextBox 29"/>
-          <p:cNvSpPr txBox="1"/>
-          <p:nvPr/>
-        </p:nvSpPr>
-        <p:spPr>
-          <a:xfrm>
-            <a:off x="8065008" y="2057400"/>
-            <a:ext cx="1188720" cy="402336"/>
+          <p:cNvPr id="34" name="TextBox 33"/>
+          <p:cNvSpPr txBox="1"/>
+          <p:nvPr/>
+        </p:nvSpPr>
+        <p:spPr>
+          <a:xfrm>
+            <a:off x="6839712" y="2578608"/>
+            <a:ext cx="1865376" cy="182880"/>
           </a:xfrm>
           <a:prstGeom prst="rect">
             <a:avLst/>
@@ -15450,33 +15610,68 @@
               <a:spcAft>
                 <a:spcPts val="0"/>
               </a:spcAft>
+              <a:defRPr sz="1200" b="1">
+                <a:solidFill>
+                  <a:srgbClr val="E68414"/>
+                </a:solidFill>
+                <a:latin typeface="Malgun Gothic"/>
+              </a:defRPr>
+            </a:pPr>
+            <a:r>
+              <a:t>SLOT 0</a:t>
+            </a:r>
+          </a:p>
+        </p:txBody>
+      </p:sp>
+      <p:sp>
+        <p:nvSpPr>
+          <p:cNvPr id="35" name="TextBox 34"/>
+          <p:cNvSpPr txBox="1"/>
+          <p:nvPr/>
+        </p:nvSpPr>
+        <p:spPr>
+          <a:xfrm>
+            <a:off x="6839712" y="2871216"/>
+            <a:ext cx="1865376" cy="201168"/>
+          </a:xfrm>
+          <a:prstGeom prst="rect">
+            <a:avLst/>
+          </a:prstGeom>
+          <a:noFill/>
+        </p:spPr>
+        <p:txBody>
+          <a:bodyPr wrap="square" anchor="t" lIns="27432" rIns="27432" tIns="13716" bIns="13716">
+            <a:noAutofit/>
+          </a:bodyPr>
+          <a:lstStyle/>
+          <a:p>
+            <a:pPr algn="ctr">
+              <a:spcAft>
+                <a:spcPts val="0"/>
+              </a:spcAft>
               <a:defRPr sz="1500" b="1">
                 <a:solidFill>
-                  <a:srgbClr val="E68414"/>
-                </a:solidFill>
-                <a:latin typeface="Malgun Gothic"/>
-              </a:defRPr>
-            </a:pPr>
-            <a:r>
-              <a:t>slot 0</a:t>
-            </a:r>
-            <a:br/>
-            <a:r>
-              <a:t>A</a:t>
-            </a:r>
-          </a:p>
-        </p:txBody>
-      </p:sp>
-      <p:sp>
-        <p:nvSpPr>
-          <p:cNvPr id="31" name="Rounded Rectangle 30"/>
+                  <a:srgbClr val="0F2234"/>
+                </a:solidFill>
+                <a:latin typeface="Malgun Gothic"/>
+              </a:defRPr>
+            </a:pPr>
+            <a:r>
+              <a:t>A · 대기</a:t>
+            </a:r>
+          </a:p>
+        </p:txBody>
+      </p:sp>
+      <p:sp>
+        <p:nvSpPr>
+          <p:cNvPr id="36" name="Rounded Rectangle 35"/>
           <p:cNvSpPr/>
           <p:nvPr/>
         </p:nvSpPr>
         <p:spPr>
           <a:xfrm>
-            <a:off x="9454896" y="1901952"/>
-            <a:ext cx="1188720" cy="749808"/>
+            <a:off x="9070848" y="2432304"/>
+            <a:ext cx="1865376" cy="841248"/>
           </a:xfrm>
           <a:prstGeom prst="roundRect">
             <a:avLst/>
@@ -15514,14 +15709,14 @@
       </p:sp>
       <p:sp>
         <p:nvSpPr>
-          <p:cNvPr id="32" name="TextBox 31"/>
-          <p:cNvSpPr txBox="1"/>
-          <p:nvPr/>
-        </p:nvSpPr>
-        <p:spPr>
-          <a:xfrm>
-            <a:off x="9454896" y="2057400"/>
-            <a:ext cx="1188720" cy="402336"/>
+          <p:cNvPr id="37" name="TextBox 36"/>
+          <p:cNvSpPr txBox="1"/>
+          <p:nvPr/>
+        </p:nvSpPr>
+        <p:spPr>
+          <a:xfrm>
+            <a:off x="9070848" y="2578608"/>
+            <a:ext cx="1865376" cy="182880"/>
           </a:xfrm>
           <a:prstGeom prst="rect">
             <a:avLst/>
@@ -15538,111 +15733,236 @@
               <a:spcAft>
                 <a:spcPts val="0"/>
               </a:spcAft>
+              <a:defRPr sz="1200" b="1">
+                <a:solidFill>
+                  <a:srgbClr val="E68414"/>
+                </a:solidFill>
+                <a:latin typeface="Malgun Gothic"/>
+              </a:defRPr>
+            </a:pPr>
+            <a:r>
+              <a:t>SLOT 1</a:t>
+            </a:r>
+          </a:p>
+        </p:txBody>
+      </p:sp>
+      <p:sp>
+        <p:nvSpPr>
+          <p:cNvPr id="38" name="TextBox 37"/>
+          <p:cNvSpPr txBox="1"/>
+          <p:nvPr/>
+        </p:nvSpPr>
+        <p:spPr>
+          <a:xfrm>
+            <a:off x="9070848" y="2871216"/>
+            <a:ext cx="1865376" cy="201168"/>
+          </a:xfrm>
+          <a:prstGeom prst="rect">
+            <a:avLst/>
+          </a:prstGeom>
+          <a:noFill/>
+        </p:spPr>
+        <p:txBody>
+          <a:bodyPr wrap="square" anchor="t" lIns="27432" rIns="27432" tIns="13716" bIns="13716">
+            <a:noAutofit/>
+          </a:bodyPr>
+          <a:lstStyle/>
+          <a:p>
+            <a:pPr algn="ctr">
+              <a:spcAft>
+                <a:spcPts val="0"/>
+              </a:spcAft>
               <a:defRPr sz="1500" b="1">
                 <a:solidFill>
+                  <a:srgbClr val="0F2234"/>
+                </a:solidFill>
+                <a:latin typeface="Malgun Gothic"/>
+              </a:defRPr>
+            </a:pPr>
+            <a:r>
+              <a:t>B · 재발생</a:t>
+            </a:r>
+          </a:p>
+        </p:txBody>
+      </p:sp>
+      <p:sp>
+        <p:nvSpPr>
+          <p:cNvPr id="39" name="Right Arrow 38"/>
+          <p:cNvSpPr/>
+          <p:nvPr/>
+        </p:nvSpPr>
+        <p:spPr>
+          <a:xfrm>
+            <a:off x="8778240" y="2724912"/>
+            <a:ext cx="219456" cy="201168"/>
+          </a:xfrm>
+          <a:prstGeom prst="rightArrow">
+            <a:avLst/>
+          </a:prstGeom>
+          <a:solidFill>
+            <a:srgbClr val="E68414"/>
+          </a:solidFill>
+          <a:ln>
+            <a:noFill/>
+          </a:ln>
+        </p:spPr>
+        <p:style>
+          <a:lnRef idx="1">
+            <a:schemeClr val="accent1"/>
+          </a:lnRef>
+          <a:fillRef idx="3">
+            <a:schemeClr val="accent1"/>
+          </a:fillRef>
+          <a:effectRef idx="2">
+            <a:schemeClr val="accent1"/>
+          </a:effectRef>
+          <a:fontRef idx="minor">
+            <a:schemeClr val="lt1"/>
+          </a:fontRef>
+        </p:style>
+        <p:txBody>
+          <a:bodyPr rtlCol="0" anchor="ctr"/>
+          <a:lstStyle/>
+          <a:p>
+            <a:pPr algn="ctr"/>
+          </a:p>
+        </p:txBody>
+      </p:sp>
+      <p:sp>
+        <p:nvSpPr>
+          <p:cNvPr id="40" name="Down Arrow 39"/>
+          <p:cNvSpPr/>
+          <p:nvPr/>
+        </p:nvSpPr>
+        <p:spPr>
+          <a:xfrm>
+            <a:off x="8759952" y="3328416"/>
+            <a:ext cx="256032" cy="219456"/>
+          </a:xfrm>
+          <a:prstGeom prst="downArrow">
+            <a:avLst/>
+          </a:prstGeom>
+          <a:solidFill>
+            <a:srgbClr val="E68414"/>
+          </a:solidFill>
+          <a:ln>
+            <a:noFill/>
+          </a:ln>
+        </p:spPr>
+        <p:style>
+          <a:lnRef idx="1">
+            <a:schemeClr val="accent1"/>
+          </a:lnRef>
+          <a:fillRef idx="3">
+            <a:schemeClr val="accent1"/>
+          </a:fillRef>
+          <a:effectRef idx="2">
+            <a:schemeClr val="accent1"/>
+          </a:effectRef>
+          <a:fontRef idx="minor">
+            <a:schemeClr val="lt1"/>
+          </a:fontRef>
+        </p:style>
+        <p:txBody>
+          <a:bodyPr rtlCol="0" anchor="ctr"/>
+          <a:lstStyle/>
+          <a:p>
+            <a:pPr algn="ctr"/>
+          </a:p>
+        </p:txBody>
+      </p:sp>
+      <p:sp>
+        <p:nvSpPr>
+          <p:cNvPr id="41" name="Rounded Rectangle 40"/>
+          <p:cNvSpPr/>
+          <p:nvPr/>
+        </p:nvSpPr>
+        <p:spPr>
+          <a:xfrm>
+            <a:off x="6821424" y="3621024"/>
+            <a:ext cx="4133087" cy="621792"/>
+          </a:xfrm>
+          <a:prstGeom prst="roundRect">
+            <a:avLst/>
+          </a:prstGeom>
+          <a:solidFill>
+            <a:srgbClr val="FFF2DC"/>
+          </a:solidFill>
+          <a:ln>
+            <a:noFill/>
+          </a:ln>
+        </p:spPr>
+        <p:style>
+          <a:lnRef idx="1">
+            <a:schemeClr val="accent1"/>
+          </a:lnRef>
+          <a:fillRef idx="3">
+            <a:schemeClr val="accent1"/>
+          </a:fillRef>
+          <a:effectRef idx="2">
+            <a:schemeClr val="accent1"/>
+          </a:effectRef>
+          <a:fontRef idx="minor">
+            <a:schemeClr val="lt1"/>
+          </a:fontRef>
+        </p:style>
+        <p:txBody>
+          <a:bodyPr rtlCol="0" anchor="ctr"/>
+          <a:lstStyle/>
+          <a:p>
+            <a:pPr algn="ctr"/>
+          </a:p>
+        </p:txBody>
+      </p:sp>
+      <p:sp>
+        <p:nvSpPr>
+          <p:cNvPr id="42" name="TextBox 41"/>
+          <p:cNvSpPr txBox="1"/>
+          <p:nvPr/>
+        </p:nvSpPr>
+        <p:spPr>
+          <a:xfrm>
+            <a:off x="7040880" y="3822191"/>
+            <a:ext cx="3694176" cy="219456"/>
+          </a:xfrm>
+          <a:prstGeom prst="rect">
+            <a:avLst/>
+          </a:prstGeom>
+          <a:noFill/>
+        </p:spPr>
+        <p:txBody>
+          <a:bodyPr wrap="square" anchor="t" lIns="27432" rIns="27432" tIns="13716" bIns="13716">
+            <a:noAutofit/>
+          </a:bodyPr>
+          <a:lstStyle/>
+          <a:p>
+            <a:pPr algn="ctr">
+              <a:spcAft>
+                <a:spcPts val="0"/>
+              </a:spcAft>
+              <a:defRPr sz="1700" b="1">
+                <a:solidFill>
                   <a:srgbClr val="E68414"/>
                 </a:solidFill>
                 <a:latin typeface="Malgun Gothic"/>
               </a:defRPr>
             </a:pPr>
             <a:r>
-              <a:t>slot 1</a:t>
-            </a:r>
-            <a:br/>
-            <a:r>
-              <a:t>B</a:t>
-            </a:r>
-          </a:p>
-        </p:txBody>
-      </p:sp>
-      <p:sp>
-        <p:nvSpPr>
-          <p:cNvPr id="33" name="TextBox 32"/>
-          <p:cNvSpPr txBox="1"/>
-          <p:nvPr/>
-        </p:nvSpPr>
-        <p:spPr>
-          <a:xfrm>
-            <a:off x="6565392" y="3063240"/>
-            <a:ext cx="4526280" cy="274320"/>
-          </a:xfrm>
-          <a:prstGeom prst="rect">
-            <a:avLst/>
-          </a:prstGeom>
-          <a:noFill/>
-        </p:spPr>
-        <p:txBody>
-          <a:bodyPr wrap="square" anchor="t" lIns="27432" rIns="27432" tIns="13716" bIns="13716">
-            <a:noAutofit/>
-          </a:bodyPr>
-          <a:lstStyle/>
-          <a:p>
-            <a:pPr algn="l">
-              <a:spcAft>
-                <a:spcPts val="0"/>
-              </a:spcAft>
-              <a:defRPr sz="1600" b="1">
-                <a:solidFill>
-                  <a:srgbClr val="0F2234"/>
-                </a:solidFill>
-                <a:latin typeface="Malgun Gothic"/>
-              </a:defRPr>
-            </a:pPr>
-            <a:r>
-              <a:t>A가 grant를 기다리는 동안 B 재발생</a:t>
-            </a:r>
-          </a:p>
-        </p:txBody>
-      </p:sp>
-      <p:sp>
-        <p:nvSpPr>
-          <p:cNvPr id="34" name="TextBox 33"/>
-          <p:cNvSpPr txBox="1"/>
-          <p:nvPr/>
-        </p:nvSpPr>
-        <p:spPr>
-          <a:xfrm>
-            <a:off x="6565392" y="3913632"/>
-            <a:ext cx="4526280" cy="274320"/>
-          </a:xfrm>
-          <a:prstGeom prst="rect">
-            <a:avLst/>
-          </a:prstGeom>
-          <a:noFill/>
-        </p:spPr>
-        <p:txBody>
-          <a:bodyPr wrap="square" anchor="t" lIns="27432" rIns="27432" tIns="13716" bIns="13716">
-            <a:noAutofit/>
-          </a:bodyPr>
-          <a:lstStyle/>
-          <a:p>
-            <a:pPr algn="l">
-              <a:spcAft>
-                <a:spcPts val="0"/>
-              </a:spcAft>
-              <a:defRPr sz="1600" b="0">
-                <a:solidFill>
-                  <a:srgbClr val="4C6073"/>
-                </a:solidFill>
-                <a:latin typeface="Malgun Gothic"/>
-              </a:defRPr>
-            </a:pPr>
-            <a:r>
-              <a:t>두 번째 occurrence를 overrun 대신 저장</a:t>
-            </a:r>
-          </a:p>
-        </p:txBody>
-      </p:sp>
-      <p:sp>
-        <p:nvSpPr>
-          <p:cNvPr id="35" name="Rounded Rectangle 34"/>
+              <a:t>B를 slot 1에 저장</a:t>
+            </a:r>
+          </a:p>
+        </p:txBody>
+      </p:sp>
+      <p:sp>
+        <p:nvSpPr>
+          <p:cNvPr id="43" name="Rounded Rectangle 42"/>
           <p:cNvSpPr/>
           <p:nvPr/>
         </p:nvSpPr>
         <p:spPr>
           <a:xfrm>
-            <a:off x="658368" y="5742432"/>
-            <a:ext cx="10881360" cy="566928"/>
+            <a:off x="6656832" y="4407408"/>
+            <a:ext cx="4462272" cy="493776"/>
           </a:xfrm>
           <a:prstGeom prst="roundRect">
             <a:avLst/>
@@ -15678,7 +15998,89 @@
       </p:sp>
       <p:sp>
         <p:nvSpPr>
-          <p:cNvPr id="36" name="Rectangle 35"/>
+          <p:cNvPr id="44" name="TextBox 43"/>
+          <p:cNvSpPr txBox="1"/>
+          <p:nvPr/>
+        </p:nvSpPr>
+        <p:spPr>
+          <a:xfrm>
+            <a:off x="6876288" y="4553712"/>
+            <a:ext cx="4023360" cy="201168"/>
+          </a:xfrm>
+          <a:prstGeom prst="rect">
+            <a:avLst/>
+          </a:prstGeom>
+          <a:noFill/>
+        </p:spPr>
+        <p:txBody>
+          <a:bodyPr wrap="square" anchor="t" lIns="27432" rIns="27432" tIns="13716" bIns="13716">
+            <a:noAutofit/>
+          </a:bodyPr>
+          <a:lstStyle/>
+          <a:p>
+            <a:pPr algn="ctr">
+              <a:spcAft>
+                <a:spcPts val="0"/>
+              </a:spcAft>
+              <a:defRPr sz="1400" b="1">
+                <a:solidFill>
+                  <a:srgbClr val="13344F"/>
+                </a:solidFill>
+                <a:latin typeface="Malgun Gothic"/>
+              </a:defRPr>
+            </a:pPr>
+            <a:r>
+              <a:t>grant 대기 중 재발생 → overrun 완화</a:t>
+            </a:r>
+          </a:p>
+        </p:txBody>
+      </p:sp>
+      <p:sp>
+        <p:nvSpPr>
+          <p:cNvPr id="45" name="Rounded Rectangle 44"/>
+          <p:cNvSpPr/>
+          <p:nvPr/>
+        </p:nvSpPr>
+        <p:spPr>
+          <a:xfrm>
+            <a:off x="658368" y="5742432"/>
+            <a:ext cx="10881360" cy="566928"/>
+          </a:xfrm>
+          <a:prstGeom prst="roundRect">
+            <a:avLst/>
+          </a:prstGeom>
+          <a:solidFill>
+            <a:srgbClr val="EBF1F6"/>
+          </a:solidFill>
+          <a:ln>
+            <a:noFill/>
+          </a:ln>
+        </p:spPr>
+        <p:style>
+          <a:lnRef idx="1">
+            <a:schemeClr val="accent1"/>
+          </a:lnRef>
+          <a:fillRef idx="3">
+            <a:schemeClr val="accent1"/>
+          </a:fillRef>
+          <a:effectRef idx="2">
+            <a:schemeClr val="accent1"/>
+          </a:effectRef>
+          <a:fontRef idx="minor">
+            <a:schemeClr val="lt1"/>
+          </a:fontRef>
+        </p:style>
+        <p:txBody>
+          <a:bodyPr rtlCol="0" anchor="ctr"/>
+          <a:lstStyle/>
+          <a:p>
+            <a:pPr algn="ctr"/>
+          </a:p>
+        </p:txBody>
+      </p:sp>
+      <p:sp>
+        <p:nvSpPr>
+          <p:cNvPr id="46" name="Rectangle 45"/>
           <p:cNvSpPr/>
           <p:nvPr/>
         </p:nvSpPr>
@@ -15721,7 +16123,7 @@
       </p:sp>
       <p:sp>
         <p:nvSpPr>
-          <p:cNvPr id="37" name="TextBox 36"/>
+          <p:cNvPr id="47" name="TextBox 46"/>
           <p:cNvSpPr txBox="1"/>
           <p:nvPr/>
         </p:nvSpPr>
@@ -15753,7 +16155,7 @@
               </a:defRPr>
             </a:pPr>
             <a:r>
-              <a:t>bitmap은 serialization을, depth-2는 same-source recurrence를 줄인다</a:t>
+              <a:t>bitmap은 직렬화를, depth-2는 같은 source의 재발생을 줄인다</a:t>
             </a:r>
           </a:p>
         </p:txBody>
@@ -16136,21 +16538,60 @@
               </a:defRPr>
             </a:pPr>
             <a:r>
-              <a:t>CONDITIONAL LANE STEAL</a:t>
-            </a:r>
-          </a:p>
-        </p:txBody>
-      </p:sp>
-      <p:sp>
-        <p:nvSpPr>
-          <p:cNvPr id="11" name="Rounded Rectangle 10"/>
+              <a:t>IDLE-LANE STEAL</a:t>
+            </a:r>
+          </a:p>
+        </p:txBody>
+      </p:sp>
+      <p:sp>
+        <p:nvSpPr>
+          <p:cNvPr id="11" name="TextBox 10"/>
+          <p:cNvSpPr txBox="1"/>
+          <p:nvPr/>
+        </p:nvSpPr>
+        <p:spPr>
+          <a:xfrm>
+            <a:off x="987552" y="2029968"/>
+            <a:ext cx="4645152" cy="237744"/>
+          </a:xfrm>
+          <a:prstGeom prst="rect">
+            <a:avLst/>
+          </a:prstGeom>
+          <a:noFill/>
+        </p:spPr>
+        <p:txBody>
+          <a:bodyPr wrap="square" anchor="t" lIns="27432" rIns="27432" tIns="13716" bIns="13716">
+            <a:noAutofit/>
+          </a:bodyPr>
+          <a:lstStyle/>
+          <a:p>
+            <a:pPr algn="ctr">
+              <a:spcAft>
+                <a:spcPts val="0"/>
+              </a:spcAft>
+              <a:defRPr sz="1500" b="1">
+                <a:solidFill>
+                  <a:srgbClr val="4C6073"/>
+                </a:solidFill>
+                <a:latin typeface="Malgun Gothic"/>
+              </a:defRPr>
+            </a:pPr>
+            <a:r>
+              <a:t>한 class는 busy, 반대 class는 idle</a:t>
+            </a:r>
+          </a:p>
+        </p:txBody>
+      </p:sp>
+      <p:sp>
+        <p:nvSpPr>
+          <p:cNvPr id="12" name="Rounded Rectangle 11"/>
           <p:cNvSpPr/>
           <p:nvPr/>
         </p:nvSpPr>
         <p:spPr>
           <a:xfrm>
-            <a:off x="1005840" y="2057400"/>
-            <a:ext cx="1609344" cy="1051560"/>
+            <a:off x="1124712" y="2468880"/>
+            <a:ext cx="1719072" cy="950976"/>
           </a:xfrm>
           <a:prstGeom prst="roundRect">
             <a:avLst/>
@@ -16188,14 +16629,14 @@
       </p:sp>
       <p:sp>
         <p:nvSpPr>
-          <p:cNvPr id="12" name="TextBox 11"/>
-          <p:cNvSpPr txBox="1"/>
-          <p:nvPr/>
-        </p:nvSpPr>
-        <p:spPr>
-          <a:xfrm>
-            <a:off x="1005840" y="2267712"/>
-            <a:ext cx="1609344" cy="201168"/>
+          <p:cNvPr id="13" name="TextBox 12"/>
+          <p:cNvSpPr txBox="1"/>
+          <p:nvPr/>
+        </p:nvSpPr>
+        <p:spPr>
+          <a:xfrm>
+            <a:off x="1124712" y="2660904"/>
+            <a:ext cx="1719072" cy="182880"/>
           </a:xfrm>
           <a:prstGeom prst="rect">
             <a:avLst/>
@@ -16227,14 +16668,14 @@
       </p:sp>
       <p:sp>
         <p:nvSpPr>
-          <p:cNvPr id="13" name="TextBox 12"/>
-          <p:cNvSpPr txBox="1"/>
-          <p:nvPr/>
-        </p:nvSpPr>
-        <p:spPr>
-          <a:xfrm>
-            <a:off x="1005840" y="2615184"/>
-            <a:ext cx="1609344" cy="256032"/>
+          <p:cNvPr id="14" name="TextBox 13"/>
+          <p:cNvSpPr txBox="1"/>
+          <p:nvPr/>
+        </p:nvSpPr>
+        <p:spPr>
+          <a:xfrm>
+            <a:off x="1124712" y="2971800"/>
+            <a:ext cx="1719072" cy="237744"/>
           </a:xfrm>
           <a:prstGeom prst="rect">
             <a:avLst/>
@@ -16266,14 +16707,14 @@
       </p:sp>
       <p:sp>
         <p:nvSpPr>
-          <p:cNvPr id="14" name="Rounded Rectangle 13"/>
+          <p:cNvPr id="15" name="Rounded Rectangle 14"/>
           <p:cNvSpPr/>
           <p:nvPr/>
         </p:nvSpPr>
         <p:spPr>
           <a:xfrm>
-            <a:off x="3840480" y="2057400"/>
-            <a:ext cx="1609344" cy="1051560"/>
+            <a:off x="3776472" y="2468880"/>
+            <a:ext cx="1719072" cy="950976"/>
           </a:xfrm>
           <a:prstGeom prst="roundRect">
             <a:avLst/>
@@ -16311,14 +16752,14 @@
       </p:sp>
       <p:sp>
         <p:nvSpPr>
-          <p:cNvPr id="15" name="TextBox 14"/>
-          <p:cNvSpPr txBox="1"/>
-          <p:nvPr/>
-        </p:nvSpPr>
-        <p:spPr>
-          <a:xfrm>
-            <a:off x="3840480" y="2267712"/>
-            <a:ext cx="1609344" cy="201168"/>
+          <p:cNvPr id="16" name="TextBox 15"/>
+          <p:cNvSpPr txBox="1"/>
+          <p:nvPr/>
+        </p:nvSpPr>
+        <p:spPr>
+          <a:xfrm>
+            <a:off x="3776472" y="2660904"/>
+            <a:ext cx="1719072" cy="182880"/>
           </a:xfrm>
           <a:prstGeom prst="rect">
             <a:avLst/>
@@ -16343,21 +16784,21 @@
               </a:defRPr>
             </a:pPr>
             <a:r>
-              <a:t>PERIPH.</a:t>
-            </a:r>
-          </a:p>
-        </p:txBody>
-      </p:sp>
-      <p:sp>
-        <p:nvSpPr>
-          <p:cNvPr id="16" name="TextBox 15"/>
-          <p:cNvSpPr txBox="1"/>
-          <p:nvPr/>
-        </p:nvSpPr>
-        <p:spPr>
-          <a:xfrm>
-            <a:off x="3840480" y="2615184"/>
-            <a:ext cx="1609344" cy="256032"/>
+              <a:t>PERIPHERAL</a:t>
+            </a:r>
+          </a:p>
+        </p:txBody>
+      </p:sp>
+      <p:sp>
+        <p:nvSpPr>
+          <p:cNvPr id="17" name="TextBox 16"/>
+          <p:cNvSpPr txBox="1"/>
+          <p:nvPr/>
+        </p:nvSpPr>
+        <p:spPr>
+          <a:xfrm>
+            <a:off x="3776472" y="2971800"/>
+            <a:ext cx="1719072" cy="237744"/>
           </a:xfrm>
           <a:prstGeom prst="rect">
             <a:avLst/>
@@ -16389,16 +16830,16 @@
       </p:sp>
       <p:sp>
         <p:nvSpPr>
-          <p:cNvPr id="17" name="Right Arrow 16"/>
+          <p:cNvPr id="18" name="Left Arrow 17"/>
           <p:cNvSpPr/>
           <p:nvPr/>
         </p:nvSpPr>
         <p:spPr>
           <a:xfrm>
-            <a:off x="3346704" y="2450592"/>
-            <a:ext cx="329184" cy="219456"/>
-          </a:xfrm>
-          <a:prstGeom prst="rightArrow">
+            <a:off x="3136392" y="2834640"/>
+            <a:ext cx="384048" cy="219456"/>
+          </a:xfrm>
+          <a:prstGeom prst="leftArrow">
             <a:avLst/>
           </a:prstGeom>
           <a:solidFill>
@@ -16432,14 +16873,57 @@
       </p:sp>
       <p:sp>
         <p:nvSpPr>
-          <p:cNvPr id="18" name="TextBox 17"/>
-          <p:cNvSpPr txBox="1"/>
-          <p:nvPr/>
-        </p:nvSpPr>
-        <p:spPr>
-          <a:xfrm>
-            <a:off x="987552" y="3730752"/>
-            <a:ext cx="4663440" cy="274320"/>
+          <p:cNvPr id="19" name="Rounded Rectangle 18"/>
+          <p:cNvSpPr/>
+          <p:nvPr/>
+        </p:nvSpPr>
+        <p:spPr>
+          <a:xfrm>
+            <a:off x="1124712" y="3803904"/>
+            <a:ext cx="4370832" cy="621792"/>
+          </a:xfrm>
+          <a:prstGeom prst="roundRect">
+            <a:avLst/>
+          </a:prstGeom>
+          <a:solidFill>
+            <a:srgbClr val="7C4AB8"/>
+          </a:solidFill>
+          <a:ln>
+            <a:noFill/>
+          </a:ln>
+        </p:spPr>
+        <p:style>
+          <a:lnRef idx="1">
+            <a:schemeClr val="accent1"/>
+          </a:lnRef>
+          <a:fillRef idx="3">
+            <a:schemeClr val="accent1"/>
+          </a:fillRef>
+          <a:effectRef idx="2">
+            <a:schemeClr val="accent1"/>
+          </a:effectRef>
+          <a:fontRef idx="minor">
+            <a:schemeClr val="lt1"/>
+          </a:fontRef>
+        </p:style>
+        <p:txBody>
+          <a:bodyPr rtlCol="0" anchor="ctr"/>
+          <a:lstStyle/>
+          <a:p>
+            <a:pPr algn="ctr"/>
+          </a:p>
+        </p:txBody>
+      </p:sp>
+      <p:sp>
+        <p:nvSpPr>
+          <p:cNvPr id="20" name="TextBox 19"/>
+          <p:cNvSpPr txBox="1"/>
+          <p:nvPr/>
+        </p:nvSpPr>
+        <p:spPr>
+          <a:xfrm>
+            <a:off x="1344168" y="4005072"/>
+            <a:ext cx="3931920" cy="219456"/>
           </a:xfrm>
           <a:prstGeom prst="rect">
             <a:avLst/>
@@ -16458,27 +16942,27 @@
               </a:spcAft>
               <a:defRPr sz="1600" b="1">
                 <a:solidFill>
-                  <a:srgbClr val="7C4AB8"/>
-                </a:solidFill>
-                <a:latin typeface="Malgun Gothic"/>
-              </a:defRPr>
-            </a:pPr>
-            <a:r>
-              <a:t>idle lane capacity를 반대 class가 재사용</a:t>
-            </a:r>
-          </a:p>
-        </p:txBody>
-      </p:sp>
-      <p:sp>
-        <p:nvSpPr>
-          <p:cNvPr id="19" name="TextBox 18"/>
-          <p:cNvSpPr txBox="1"/>
-          <p:nvPr/>
-        </p:nvSpPr>
-        <p:spPr>
-          <a:xfrm>
-            <a:off x="987552" y="4224528"/>
-            <a:ext cx="4663440" cy="219456"/>
+                  <a:srgbClr val="FFFFFF"/>
+                </a:solidFill>
+                <a:latin typeface="Malgun Gothic"/>
+              </a:defRPr>
+            </a:pPr>
+            <a:r>
+              <a:t>busy class가 idle lane을 재사용</a:t>
+            </a:r>
+          </a:p>
+        </p:txBody>
+      </p:sp>
+      <p:sp>
+        <p:nvSpPr>
+          <p:cNvPr id="21" name="TextBox 20"/>
+          <p:cNvSpPr txBox="1"/>
+          <p:nvPr/>
+        </p:nvSpPr>
+        <p:spPr>
+          <a:xfrm>
+            <a:off x="987552" y="4645152"/>
+            <a:ext cx="4663440" cy="201168"/>
           </a:xfrm>
           <a:prstGeom prst="rect">
             <a:avLst/>
@@ -16503,14 +16987,14 @@
               </a:defRPr>
             </a:pPr>
             <a:r>
-              <a:t>global fairness 수치는 별도</a:t>
-            </a:r>
-          </a:p>
-        </p:txBody>
-      </p:sp>
-      <p:sp>
-        <p:nvSpPr>
-          <p:cNvPr id="20" name="Rounded Rectangle 19"/>
+              <a:t>capacity 활용도 향상 · fairness 정량 평가는 별도</a:t>
+            </a:r>
+          </a:p>
+        </p:txBody>
+      </p:sp>
+      <p:sp>
+        <p:nvSpPr>
+          <p:cNvPr id="22" name="Rounded Rectangle 21"/>
           <p:cNvSpPr/>
           <p:nvPr/>
         </p:nvSpPr>
@@ -16555,7 +17039,7 @@
       </p:sp>
       <p:sp>
         <p:nvSpPr>
-          <p:cNvPr id="21" name="TextBox 20"/>
+          <p:cNvPr id="23" name="TextBox 22"/>
           <p:cNvSpPr txBox="1"/>
           <p:nvPr/>
         </p:nvSpPr>
@@ -16594,7 +17078,7 @@
       </p:sp>
       <p:sp>
         <p:nvSpPr>
-          <p:cNvPr id="22" name="TextBox 21"/>
+          <p:cNvPr id="24" name="TextBox 23"/>
           <p:cNvSpPr txBox="1"/>
           <p:nvPr/>
         </p:nvSpPr>
@@ -16633,14 +17117,53 @@
       </p:sp>
       <p:sp>
         <p:nvSpPr>
-          <p:cNvPr id="23" name="Rounded Rectangle 22"/>
+          <p:cNvPr id="25" name="TextBox 24"/>
+          <p:cNvSpPr txBox="1"/>
+          <p:nvPr/>
+        </p:nvSpPr>
+        <p:spPr>
+          <a:xfrm>
+            <a:off x="6565392" y="2029968"/>
+            <a:ext cx="4645152" cy="237744"/>
+          </a:xfrm>
+          <a:prstGeom prst="rect">
+            <a:avLst/>
+          </a:prstGeom>
+          <a:noFill/>
+        </p:spPr>
+        <p:txBody>
+          <a:bodyPr wrap="square" anchor="t" lIns="27432" rIns="27432" tIns="13716" bIns="13716">
+            <a:noAutofit/>
+          </a:bodyPr>
+          <a:lstStyle/>
+          <a:p>
+            <a:pPr algn="ctr">
+              <a:spcAft>
+                <a:spcPts val="0"/>
+              </a:spcAft>
+              <a:defRPr sz="1500" b="1">
+                <a:solidFill>
+                  <a:srgbClr val="4C6073"/>
+                </a:solidFill>
+                <a:latin typeface="Malgun Gothic"/>
+              </a:defRPr>
+            </a:pPr>
+            <a:r>
+              <a:t>address·polarity를 같은 source slot에서 처리</a:t>
+            </a:r>
+          </a:p>
+        </p:txBody>
+      </p:sp>
+      <p:sp>
+        <p:nvSpPr>
+          <p:cNvPr id="26" name="Rounded Rectangle 25"/>
           <p:cNvSpPr/>
           <p:nvPr/>
         </p:nvSpPr>
         <p:spPr>
           <a:xfrm>
-            <a:off x="6601968" y="1956816"/>
-            <a:ext cx="4572000" cy="713232"/>
+            <a:off x="6601968" y="2468880"/>
+            <a:ext cx="4572000" cy="676656"/>
           </a:xfrm>
           <a:prstGeom prst="roundRect">
             <a:avLst/>
@@ -16678,13 +17201,13 @@
       </p:sp>
       <p:sp>
         <p:nvSpPr>
-          <p:cNvPr id="24" name="TextBox 23"/>
-          <p:cNvSpPr txBox="1"/>
-          <p:nvPr/>
-        </p:nvSpPr>
-        <p:spPr>
-          <a:xfrm>
-            <a:off x="6821424" y="2176272"/>
+          <p:cNvPr id="27" name="TextBox 26"/>
+          <p:cNvSpPr txBox="1"/>
+          <p:nvPr/>
+        </p:nvSpPr>
+        <p:spPr>
+          <a:xfrm>
+            <a:off x="6821424" y="2706624"/>
             <a:ext cx="347472" cy="201168"/>
           </a:xfrm>
           <a:prstGeom prst="rect">
@@ -16717,13 +17240,13 @@
       </p:sp>
       <p:sp>
         <p:nvSpPr>
-          <p:cNvPr id="25" name="TextBox 24"/>
-          <p:cNvSpPr txBox="1"/>
-          <p:nvPr/>
-        </p:nvSpPr>
-        <p:spPr>
-          <a:xfrm>
-            <a:off x="7370064" y="2176272"/>
+          <p:cNvPr id="28" name="TextBox 27"/>
+          <p:cNvSpPr txBox="1"/>
+          <p:nvPr/>
+        </p:nvSpPr>
+        <p:spPr>
+          <a:xfrm>
+            <a:off x="7370064" y="2706624"/>
             <a:ext cx="1901952" cy="201168"/>
           </a:xfrm>
           <a:prstGeom prst="rect">
@@ -16756,13 +17279,13 @@
       </p:sp>
       <p:sp>
         <p:nvSpPr>
-          <p:cNvPr id="26" name="TextBox 25"/>
-          <p:cNvSpPr txBox="1"/>
-          <p:nvPr/>
-        </p:nvSpPr>
-        <p:spPr>
-          <a:xfrm>
-            <a:off x="9656064" y="2176272"/>
+          <p:cNvPr id="29" name="TextBox 28"/>
+          <p:cNvSpPr txBox="1"/>
+          <p:nvPr/>
+        </p:nvSpPr>
+        <p:spPr>
+          <a:xfrm>
+            <a:off x="9656064" y="2706624"/>
             <a:ext cx="1188720" cy="201168"/>
           </a:xfrm>
           <a:prstGeom prst="rect">
@@ -16795,14 +17318,14 @@
       </p:sp>
       <p:sp>
         <p:nvSpPr>
-          <p:cNvPr id="27" name="Rounded Rectangle 26"/>
+          <p:cNvPr id="30" name="Rounded Rectangle 29"/>
           <p:cNvSpPr/>
           <p:nvPr/>
         </p:nvSpPr>
         <p:spPr>
           <a:xfrm>
-            <a:off x="6601968" y="2916936"/>
-            <a:ext cx="4572000" cy="713232"/>
+            <a:off x="6601968" y="3401568"/>
+            <a:ext cx="4572000" cy="676656"/>
           </a:xfrm>
           <a:prstGeom prst="roundRect">
             <a:avLst/>
@@ -16840,13 +17363,13 @@
       </p:sp>
       <p:sp>
         <p:nvSpPr>
-          <p:cNvPr id="28" name="TextBox 27"/>
-          <p:cNvSpPr txBox="1"/>
-          <p:nvPr/>
-        </p:nvSpPr>
-        <p:spPr>
-          <a:xfrm>
-            <a:off x="6821424" y="3136392"/>
+          <p:cNvPr id="31" name="TextBox 30"/>
+          <p:cNvSpPr txBox="1"/>
+          <p:nvPr/>
+        </p:nvSpPr>
+        <p:spPr>
+          <a:xfrm>
+            <a:off x="6821424" y="3639312"/>
             <a:ext cx="347472" cy="201168"/>
           </a:xfrm>
           <a:prstGeom prst="rect">
@@ -16879,13 +17402,13 @@
       </p:sp>
       <p:sp>
         <p:nvSpPr>
-          <p:cNvPr id="29" name="TextBox 28"/>
-          <p:cNvSpPr txBox="1"/>
-          <p:nvPr/>
-        </p:nvSpPr>
-        <p:spPr>
-          <a:xfrm>
-            <a:off x="7370064" y="3136392"/>
+          <p:cNvPr id="32" name="TextBox 31"/>
+          <p:cNvSpPr txBox="1"/>
+          <p:nvPr/>
+        </p:nvSpPr>
+        <p:spPr>
+          <a:xfrm>
+            <a:off x="7370064" y="3639312"/>
             <a:ext cx="1901952" cy="201168"/>
           </a:xfrm>
           <a:prstGeom prst="rect">
@@ -16918,13 +17441,13 @@
       </p:sp>
       <p:sp>
         <p:nvSpPr>
-          <p:cNvPr id="30" name="TextBox 29"/>
-          <p:cNvSpPr txBox="1"/>
-          <p:nvPr/>
-        </p:nvSpPr>
-        <p:spPr>
-          <a:xfrm>
-            <a:off x="9656064" y="3136392"/>
+          <p:cNvPr id="33" name="TextBox 32"/>
+          <p:cNvSpPr txBox="1"/>
+          <p:nvPr/>
+        </p:nvSpPr>
+        <p:spPr>
+          <a:xfrm>
+            <a:off x="9656064" y="3639312"/>
             <a:ext cx="1188720" cy="201168"/>
           </a:xfrm>
           <a:prstGeom prst="rect">
@@ -16957,14 +17480,57 @@
       </p:sp>
       <p:sp>
         <p:nvSpPr>
-          <p:cNvPr id="31" name="TextBox 30"/>
-          <p:cNvSpPr txBox="1"/>
-          <p:nvPr/>
-        </p:nvSpPr>
-        <p:spPr>
-          <a:xfrm>
-            <a:off x="6583680" y="4242816"/>
-            <a:ext cx="4608576" cy="237744"/>
+          <p:cNvPr id="34" name="Rounded Rectangle 33"/>
+          <p:cNvSpPr/>
+          <p:nvPr/>
+        </p:nvSpPr>
+        <p:spPr>
+          <a:xfrm>
+            <a:off x="6601968" y="4443984"/>
+            <a:ext cx="4572000" cy="438912"/>
+          </a:xfrm>
+          <a:prstGeom prst="roundRect">
+            <a:avLst/>
+          </a:prstGeom>
+          <a:solidFill>
+            <a:srgbClr val="2563EB"/>
+          </a:solidFill>
+          <a:ln>
+            <a:noFill/>
+          </a:ln>
+        </p:spPr>
+        <p:style>
+          <a:lnRef idx="1">
+            <a:schemeClr val="accent1"/>
+          </a:lnRef>
+          <a:fillRef idx="3">
+            <a:schemeClr val="accent1"/>
+          </a:fillRef>
+          <a:effectRef idx="2">
+            <a:schemeClr val="accent1"/>
+          </a:effectRef>
+          <a:fontRef idx="minor">
+            <a:schemeClr val="lt1"/>
+          </a:fontRef>
+        </p:style>
+        <p:txBody>
+          <a:bodyPr rtlCol="0" anchor="ctr"/>
+          <a:lstStyle/>
+          <a:p>
+            <a:pPr algn="ctr"/>
+          </a:p>
+        </p:txBody>
+      </p:sp>
+      <p:sp>
+        <p:nvSpPr>
+          <p:cNvPr id="35" name="TextBox 34"/>
+          <p:cNvSpPr txBox="1"/>
+          <p:nvPr/>
+        </p:nvSpPr>
+        <p:spPr>
+          <a:xfrm>
+            <a:off x="6821424" y="4572000"/>
+            <a:ext cx="4133087" cy="182880"/>
           </a:xfrm>
           <a:prstGeom prst="rect">
             <a:avLst/>
@@ -16981,22 +17547,22 @@
               <a:spcAft>
                 <a:spcPts val="0"/>
               </a:spcAft>
-              <a:defRPr sz="1500" b="1">
-                <a:solidFill>
-                  <a:srgbClr val="2563EB"/>
-                </a:solidFill>
-                <a:latin typeface="Malgun Gothic"/>
-              </a:defRPr>
-            </a:pPr>
-            <a:r>
-              <a:t>address와 polarity를 같은 slot에서 push / pop</a:t>
-            </a:r>
-          </a:p>
-        </p:txBody>
-      </p:sp>
-      <p:sp>
-        <p:nvSpPr>
-          <p:cNvPr id="32" name="Rounded Rectangle 31"/>
+              <a:defRPr sz="1400" b="1">
+                <a:solidFill>
+                  <a:srgbClr val="FFFFFF"/>
+                </a:solidFill>
+                <a:latin typeface="Malgun Gothic"/>
+              </a:defRPr>
+            </a:pPr>
+            <a:r>
+              <a:t>동시 push · 동시 pop · 의미 보존</a:t>
+            </a:r>
+          </a:p>
+        </p:txBody>
+      </p:sp>
+      <p:sp>
+        <p:nvSpPr>
+          <p:cNvPr id="36" name="Rounded Rectangle 35"/>
           <p:cNvSpPr/>
           <p:nvPr/>
         </p:nvSpPr>
@@ -17039,7 +17605,7 @@
       </p:sp>
       <p:sp>
         <p:nvSpPr>
-          <p:cNvPr id="33" name="Rectangle 32"/>
+          <p:cNvPr id="37" name="Rectangle 36"/>
           <p:cNvSpPr/>
           <p:nvPr/>
         </p:nvSpPr>
@@ -17082,7 +17648,7 @@
       </p:sp>
       <p:sp>
         <p:nvSpPr>
-          <p:cNvPr id="34" name="TextBox 33"/>
+          <p:cNvPr id="38" name="TextBox 37"/>
           <p:cNvSpPr txBox="1"/>
           <p:nvPr/>
         </p:nvSpPr>
@@ -17114,7 +17680,7 @@
               </a:defRPr>
             </a:pPr>
             <a:r>
-              <a:t>steal은 capacity 낭비를 줄이고, lockstep은 selected-event 의미를 보존한다</a:t>
+              <a:t>steal은 capacity 낭비를 줄이고, lockstep은 selected event의 의미를 보존한다</a:t>
             </a:r>
           </a:p>
         </p:txBody>
